--- a/docs/Goflix-presentasi.pptx
+++ b/docs/Goflix-presentasi.pptx
@@ -121,25 +121,25 @@
   <p:extLst>
     <p:ext uri="{521415D9-36F7-43E2-AB2F-B90AF26B5E84}">
       <p14:sectionLst xmlns:p14="http://schemas.microsoft.com/office/powerpoint/2010/main">
-        <p14:section name="Pembuka" id="{9a21b18b-8169-a086-8a53-ca3f0301aecc}">
+        <p14:section name="Pembuka" id="{a652c4d5-4a4a-f64b-ee93-3294f07b7679}">
           <p14:sldIdLst>
             <p14:sldId id="256"/>
           </p14:sldIdLst>
         </p14:section>
-        <p14:section name="Produk" id="{5aee3eee-bbf8-3b87-532f-0092ef907bc8}">
+        <p14:section name="Produk" id="{6e25a1dc-a541-f8bf-8f24-015ff25aa4ac}">
           <p14:sldIdLst>
             <p14:sldId id="257"/>
             <p14:sldId id="258"/>
           </p14:sldIdLst>
         </p14:section>
-        <p14:section name="Desain sistem" id="{e29724dc-af3c-0286-116f-8a9d0edc51bc}">
+        <p14:section name="Desain sistem" id="{191ef0a7-d827-75e9-c5a9-d246db1685aa}">
           <p14:sldIdLst>
             <p14:sldId id="259"/>
             <p14:sldId id="260"/>
             <p14:sldId id="261"/>
           </p14:sldIdLst>
         </p14:section>
-        <p14:section name="Aturan bisnis" id="{7b2fe5df-cdef-0faa-28c9-9284dc927eed}">
+        <p14:section name="Aturan bisnis" id="{800dba55-9687-91ce-aa14-48b2b7feef58}">
           <p14:sldIdLst>
             <p14:sldId id="262"/>
             <p14:sldId id="263"/>
@@ -147,14 +147,14 @@
             <p14:sldId id="265"/>
           </p14:sldIdLst>
         </p14:section>
-        <p14:section name="Kode" id="{deb52c0d-0b8e-e1aa-c5d8-c6153332a833}">
+        <p14:section name="Kode" id="{e1e529da-cdf9-b09e-0c42-947900e101b0}">
           <p14:sldIdLst>
             <p14:sldId id="266"/>
             <p14:sldId id="267"/>
             <p14:sldId id="268"/>
           </p14:sldIdLst>
         </p14:section>
-        <p14:section name="Penutup" id="{be00b0d7-c982-0aeb-4c7c-43fcfbbe50eb}">
+        <p14:section name="Penutup" id="{42c3c3e2-6d0f-a137-b893-b71cb6326369}">
           <p14:sldIdLst>
             <p14:sldId id="269"/>
             <p14:sldId id="270"/>
@@ -3916,7 +3916,7 @@
                   <a:schemeClr val="accent4"/>
                 </a:solidFill>
               </a:rPr>
-              <a:t>Demo: Laravel 10, Blade, Tailwind, Chart.js, dan PostgreSQL seperti produksi. Hijau dan hitam adalah bagian yang saya kerjakan.</a:t>
+              <a:t>Demo: Laravel 10, Blade, Tailwind, Chart.js, dan PostgreSQL seperti produksi. Yang hijau adalah bagian saya.</a:t>
             </a:r>
             <a:endParaRPr lang="en-US" sz="1500" dirty="0"/>
           </a:p>
@@ -4078,11 +4078,11 @@
         <p:spPr>
           <a:xfrm>
             <a:off x="548640" y="1600200"/>
-            <a:ext cx="6949440" cy="4526280"/>
+            <a:ext cx="6949440" cy="3931920"/>
           </a:xfrm>
           <a:prstGeom prst="roundRect">
             <a:avLst>
-              <a:gd name="adj" fmla="val 2424"/>
+              <a:gd name="adj" fmla="val 2791"/>
             </a:avLst>
           </a:prstGeom>
           <a:solidFill>

--- a/docs/Goflix-presentasi.pptx
+++ b/docs/Goflix-presentasi.pptx
@@ -121,25 +121,25 @@
   <p:extLst>
     <p:ext uri="{521415D9-36F7-43E2-AB2F-B90AF26B5E84}">
       <p14:sectionLst xmlns:p14="http://schemas.microsoft.com/office/powerpoint/2010/main">
-        <p14:section name="Pembuka" id="{a652c4d5-4a4a-f64b-ee93-3294f07b7679}">
+        <p14:section name="Pembuka" id="{5ad140c1-490e-e761-18a6-5408947110eb}">
           <p14:sldIdLst>
             <p14:sldId id="256"/>
           </p14:sldIdLst>
         </p14:section>
-        <p14:section name="Produk" id="{6e25a1dc-a541-f8bf-8f24-015ff25aa4ac}">
+        <p14:section name="Produk" id="{3494c66b-83a1-8934-8db7-b773023c0b9e}">
           <p14:sldIdLst>
             <p14:sldId id="257"/>
             <p14:sldId id="258"/>
           </p14:sldIdLst>
         </p14:section>
-        <p14:section name="Desain sistem" id="{191ef0a7-d827-75e9-c5a9-d246db1685aa}">
+        <p14:section name="Desain sistem" id="{7683d168-5db7-9467-d6c1-51e32a9cfc4c}">
           <p14:sldIdLst>
             <p14:sldId id="259"/>
             <p14:sldId id="260"/>
             <p14:sldId id="261"/>
           </p14:sldIdLst>
         </p14:section>
-        <p14:section name="Aturan bisnis" id="{800dba55-9687-91ce-aa14-48b2b7feef58}">
+        <p14:section name="Aturan bisnis" id="{5c72ec1a-b064-818a-d84c-1a856e2ee4f1}">
           <p14:sldIdLst>
             <p14:sldId id="262"/>
             <p14:sldId id="263"/>
@@ -147,14 +147,14 @@
             <p14:sldId id="265"/>
           </p14:sldIdLst>
         </p14:section>
-        <p14:section name="Kode" id="{e1e529da-cdf9-b09e-0c42-947900e101b0}">
+        <p14:section name="Kode" id="{013de41e-a481-b0db-384c-c2bf6ea8627c}">
           <p14:sldIdLst>
             <p14:sldId id="266"/>
             <p14:sldId id="267"/>
             <p14:sldId id="268"/>
           </p14:sldIdLst>
         </p14:section>
-        <p14:section name="Penutup" id="{42c3c3e2-6d0f-a137-b893-b71cb6326369}">
+        <p14:section name="Penutup" id="{5c216958-66d1-7a55-2149-922c0ceae678}">
           <p14:sldIdLst>
             <p14:sldId id="269"/>
             <p14:sldId id="270"/>
@@ -652,7 +652,7 @@
           <a:p>
             <a:r>
               <a:rPr lang="en-US" dirty="0"/>
-              <a:t>Siapkan alasan dan risiko masing-masing. Contoh: data ganda di users berisiko tidak sinkron, jadi hanya satu service yang boleh mengubahnya.</a:t>
+              <a:t>Untuk setiap keputusan, sebutkan juga harganya. Pewawancara biasanya paling tertarik pada kolom terakhir.</a:t>
             </a:r>
             <a:endParaRPr lang="en-US" dirty="0"/>
           </a:p>
@@ -740,7 +740,7 @@
           <a:p>
             <a:r>
               <a:rPr lang="en-US" dirty="0"/>
-              <a:t>Demo juga memakai Blade, Tailwind, dan Chart.js, dan berjalan di PostgreSQL seperti produksi.</a:t>
+              <a:t>Kolom alternatif menunjukkan bahwa pilihannya disengaja. Siapkan satu contoh untuk tiap baris.</a:t>
             </a:r>
             <a:endParaRPr lang="en-US" dirty="0"/>
           </a:p>
@@ -1004,7 +1004,7 @@
           <a:p>
             <a:r>
               <a:rPr lang="en-US" dirty="0"/>
-              <a:t>Pilih satu atau dua yang paling siap dibahas.</a:t>
+              <a:t>Menyebutkan yang belum selesai sendiri menunjukkan saya tahu di mana sistemnya tipis. Pilih satu untuk dibahas.</a:t>
             </a:r>
             <a:endParaRPr lang="en-US" dirty="0"/>
           </a:p>
@@ -2761,576 +2761,932 @@
                   <a:schemeClr val="tx1"/>
                 </a:solidFill>
               </a:rPr>
-              <a:t>Keputusan yang layak dibahas</a:t>
+              <a:t>Trade-off yang saya pilih</a:t>
             </a:r>
             <a:endParaRPr lang="en-US" sz="3200" dirty="0"/>
           </a:p>
         </p:txBody>
       </p:sp>
-      <p:sp>
-        <p:nvSpPr>
-          <p:cNvPr id="5" name="card"/>
-          <p:cNvSpPr/>
-          <p:nvPr/>
-        </p:nvSpPr>
-        <p:spPr>
-          <a:xfrm>
-            <a:off x="548640" y="1691640"/>
-            <a:ext cx="5440680" cy="1920240"/>
-          </a:xfrm>
-          <a:prstGeom prst="roundRect">
-            <a:avLst>
-              <a:gd name="adj" fmla="val 5714"/>
-            </a:avLst>
-          </a:prstGeom>
-          <a:solidFill>
-            <a:schemeClr val="bg2"/>
-          </a:solidFill>
-          <a:ln w="12700">
-            <a:solidFill>
-              <a:schemeClr val="bg2"/>
-            </a:solidFill>
-            <a:prstDash val="solid"/>
-          </a:ln>
-        </p:spPr>
-      </p:sp>
-      <p:sp>
-        <p:nvSpPr>
-          <p:cNvPr id="6" name="Text 3"/>
-          <p:cNvSpPr txBox="1"/>
-          <p:nvPr/>
-        </p:nvSpPr>
-        <p:spPr>
-          <a:xfrm>
-            <a:off x="822960" y="1920240"/>
-            <a:ext cx="548640" cy="640080"/>
-          </a:xfrm>
-          <a:prstGeom prst="rect">
-            <a:avLst/>
-          </a:prstGeom>
-          <a:noFill/>
-          <a:ln/>
-        </p:spPr>
-        <p:txBody>
-          <a:bodyPr wrap="square" lIns="0" tIns="0" rIns="0" bIns="0" rtlCol="0" anchor="ctr"/>
-          <a:lstStyle/>
-          <a:p>
-            <a:pPr indent="0" marL="0">
-              <a:buNone/>
-            </a:pPr>
-            <a:r>
-              <a:rPr lang="en-US" sz="3000" b="1" dirty="0">
-                <a:solidFill>
-                  <a:schemeClr val="accent1"/>
-                </a:solidFill>
-                <a:latin typeface="+mj-lt" pitchFamily="34" charset="0"/>
-                <a:ea typeface="+mj-lt" pitchFamily="34" charset="-122"/>
-                <a:cs typeface="+mj-lt" pitchFamily="34" charset="-120"/>
-              </a:rPr>
-              <a:t>1</a:t>
-            </a:r>
-            <a:endParaRPr lang="en-US" sz="3000" dirty="0"/>
-          </a:p>
-        </p:txBody>
-      </p:sp>
-      <p:sp>
-        <p:nvSpPr>
-          <p:cNvPr id="7" name="Text 4"/>
-          <p:cNvSpPr txBox="1"/>
-          <p:nvPr/>
-        </p:nvSpPr>
-        <p:spPr>
-          <a:xfrm>
-            <a:off x="1463040" y="1965960"/>
-            <a:ext cx="4297680" cy="457200"/>
-          </a:xfrm>
-          <a:prstGeom prst="rect">
-            <a:avLst/>
-          </a:prstGeom>
-          <a:noFill/>
-          <a:ln/>
-        </p:spPr>
-        <p:txBody>
-          <a:bodyPr wrap="square" lIns="0" tIns="0" rIns="0" bIns="0" rtlCol="0" anchor="ctr"/>
-          <a:lstStyle/>
-          <a:p>
-            <a:pPr indent="0" marL="0">
-              <a:buNone/>
-            </a:pPr>
-            <a:r>
-              <a:rPr lang="en-US" sz="1800" b="1" dirty="0">
-                <a:solidFill>
-                  <a:schemeClr val="tx1"/>
-                </a:solidFill>
-                <a:latin typeface="+mj-lt" pitchFamily="34" charset="0"/>
-                <a:ea typeface="+mj-lt" pitchFamily="34" charset="-122"/>
-                <a:cs typeface="+mj-lt" pitchFamily="34" charset="-120"/>
-              </a:rPr>
-              <a:t>Tanggal berakhir di users</a:t>
-            </a:r>
-            <a:endParaRPr lang="en-US" sz="1800" dirty="0"/>
-          </a:p>
-        </p:txBody>
-      </p:sp>
-      <p:sp>
-        <p:nvSpPr>
-          <p:cNvPr id="8" name="Text 5"/>
-          <p:cNvSpPr txBox="1"/>
-          <p:nvPr/>
-        </p:nvSpPr>
-        <p:spPr>
-          <a:xfrm>
-            <a:off x="1463040" y="2514600"/>
-            <a:ext cx="4297680" cy="1097280"/>
-          </a:xfrm>
-          <a:prstGeom prst="rect">
-            <a:avLst/>
-          </a:prstGeom>
-          <a:noFill/>
-          <a:ln/>
-        </p:spPr>
-        <p:txBody>
-          <a:bodyPr wrap="square" lIns="0" tIns="0" rIns="0" bIns="0" rtlCol="0" anchor="t"/>
-          <a:lstStyle/>
-          <a:p>
-            <a:pPr indent="0" marL="0">
-              <a:buNone/>
-            </a:pPr>
-            <a:r>
-              <a:rPr lang="en-US" sz="1500" dirty="0">
-                <a:solidFill>
-                  <a:schemeClr val="accent4"/>
-                </a:solidFill>
-              </a:rPr>
-              <a:t>Data ganda yang disengaja: satu kolom ter-index lebih cepat untuk cek akses di setiap pemutaran.</a:t>
-            </a:r>
-            <a:endParaRPr lang="en-US" sz="1500" dirty="0"/>
-          </a:p>
-        </p:txBody>
-      </p:sp>
-      <p:sp>
-        <p:nvSpPr>
-          <p:cNvPr id="9" name="card"/>
-          <p:cNvSpPr/>
-          <p:nvPr/>
-        </p:nvSpPr>
-        <p:spPr>
-          <a:xfrm>
-            <a:off x="6172200" y="1691640"/>
-            <a:ext cx="5440680" cy="1920240"/>
-          </a:xfrm>
-          <a:prstGeom prst="roundRect">
-            <a:avLst>
-              <a:gd name="adj" fmla="val 5714"/>
-            </a:avLst>
-          </a:prstGeom>
-          <a:solidFill>
-            <a:schemeClr val="bg2"/>
-          </a:solidFill>
-          <a:ln w="12700">
-            <a:solidFill>
-              <a:schemeClr val="bg2"/>
-            </a:solidFill>
-            <a:prstDash val="solid"/>
-          </a:ln>
-        </p:spPr>
-      </p:sp>
-      <p:sp>
-        <p:nvSpPr>
-          <p:cNvPr id="10" name="Text 7"/>
-          <p:cNvSpPr txBox="1"/>
-          <p:nvPr/>
-        </p:nvSpPr>
-        <p:spPr>
-          <a:xfrm>
-            <a:off x="6446520" y="1920240"/>
-            <a:ext cx="548640" cy="640080"/>
-          </a:xfrm>
-          <a:prstGeom prst="rect">
-            <a:avLst/>
-          </a:prstGeom>
-          <a:noFill/>
-          <a:ln/>
-        </p:spPr>
-        <p:txBody>
-          <a:bodyPr wrap="square" lIns="0" tIns="0" rIns="0" bIns="0" rtlCol="0" anchor="ctr"/>
-          <a:lstStyle/>
-          <a:p>
-            <a:pPr indent="0" marL="0">
-              <a:buNone/>
-            </a:pPr>
-            <a:r>
-              <a:rPr lang="en-US" sz="3000" b="1" dirty="0">
-                <a:solidFill>
-                  <a:schemeClr val="accent1"/>
-                </a:solidFill>
-                <a:latin typeface="+mj-lt" pitchFamily="34" charset="0"/>
-                <a:ea typeface="+mj-lt" pitchFamily="34" charset="-122"/>
-                <a:cs typeface="+mj-lt" pitchFamily="34" charset="-120"/>
-              </a:rPr>
-              <a:t>2</a:t>
-            </a:r>
-            <a:endParaRPr lang="en-US" sz="3000" dirty="0"/>
-          </a:p>
-        </p:txBody>
-      </p:sp>
-      <p:sp>
-        <p:nvSpPr>
-          <p:cNvPr id="11" name="Text 8"/>
-          <p:cNvSpPr txBox="1"/>
-          <p:nvPr/>
-        </p:nvSpPr>
-        <p:spPr>
-          <a:xfrm>
-            <a:off x="7086600" y="1965960"/>
-            <a:ext cx="4297680" cy="457200"/>
-          </a:xfrm>
-          <a:prstGeom prst="rect">
-            <a:avLst/>
-          </a:prstGeom>
-          <a:noFill/>
-          <a:ln/>
-        </p:spPr>
-        <p:txBody>
-          <a:bodyPr wrap="square" lIns="0" tIns="0" rIns="0" bIns="0" rtlCol="0" anchor="ctr"/>
-          <a:lstStyle/>
-          <a:p>
-            <a:pPr indent="0" marL="0">
-              <a:buNone/>
-            </a:pPr>
-            <a:r>
-              <a:rPr lang="en-US" sz="1800" b="1" dirty="0">
-                <a:solidFill>
-                  <a:schemeClr val="tx1"/>
-                </a:solidFill>
-                <a:latin typeface="+mj-lt" pitchFamily="34" charset="0"/>
-                <a:ea typeface="+mj-lt" pitchFamily="34" charset="-122"/>
-                <a:cs typeface="+mj-lt" pitchFamily="34" charset="-120"/>
-              </a:rPr>
-              <a:t>Pembayaran tidak bisa diedit</a:t>
-            </a:r>
-            <a:endParaRPr lang="en-US" sz="1800" dirty="0"/>
-          </a:p>
-        </p:txBody>
-      </p:sp>
-      <p:sp>
-        <p:nvSpPr>
-          <p:cNvPr id="12" name="Text 9"/>
-          <p:cNvSpPr txBox="1"/>
-          <p:nvPr/>
-        </p:nvSpPr>
-        <p:spPr>
-          <a:xfrm>
-            <a:off x="7086600" y="2514600"/>
-            <a:ext cx="4297680" cy="1097280"/>
-          </a:xfrm>
-          <a:prstGeom prst="rect">
-            <a:avLst/>
-          </a:prstGeom>
-          <a:noFill/>
-          <a:ln/>
-        </p:spPr>
-        <p:txBody>
-          <a:bodyPr wrap="square" lIns="0" tIns="0" rIns="0" bIns="0" rtlCol="0" anchor="t"/>
-          <a:lstStyle/>
-          <a:p>
-            <a:pPr indent="0" marL="0">
-              <a:buNone/>
-            </a:pPr>
-            <a:r>
-              <a:rPr lang="en-US" sz="1500" dirty="0">
-                <a:solidFill>
-                  <a:schemeClr val="accent4"/>
-                </a:solidFill>
-              </a:rPr>
-              <a:t>Langganan dan sewa adalah catatan keuangan. Koreksi adalah entri baru.</a:t>
-            </a:r>
-            <a:endParaRPr lang="en-US" sz="1500" dirty="0"/>
-          </a:p>
-        </p:txBody>
-      </p:sp>
-      <p:sp>
-        <p:nvSpPr>
-          <p:cNvPr id="13" name="card"/>
-          <p:cNvSpPr/>
-          <p:nvPr/>
-        </p:nvSpPr>
-        <p:spPr>
-          <a:xfrm>
-            <a:off x="548640" y="3886200"/>
-            <a:ext cx="5440680" cy="1920240"/>
-          </a:xfrm>
-          <a:prstGeom prst="roundRect">
-            <a:avLst>
-              <a:gd name="adj" fmla="val 5714"/>
-            </a:avLst>
-          </a:prstGeom>
-          <a:solidFill>
-            <a:schemeClr val="bg2"/>
-          </a:solidFill>
-          <a:ln w="12700">
-            <a:solidFill>
-              <a:schemeClr val="bg2"/>
-            </a:solidFill>
-            <a:prstDash val="solid"/>
-          </a:ln>
-        </p:spPr>
-      </p:sp>
-      <p:sp>
-        <p:nvSpPr>
-          <p:cNvPr id="14" name="Text 11"/>
-          <p:cNvSpPr txBox="1"/>
-          <p:nvPr/>
-        </p:nvSpPr>
-        <p:spPr>
-          <a:xfrm>
-            <a:off x="822960" y="4114800"/>
-            <a:ext cx="548640" cy="640080"/>
-          </a:xfrm>
-          <a:prstGeom prst="rect">
-            <a:avLst/>
-          </a:prstGeom>
-          <a:noFill/>
-          <a:ln/>
-        </p:spPr>
-        <p:txBody>
-          <a:bodyPr wrap="square" lIns="0" tIns="0" rIns="0" bIns="0" rtlCol="0" anchor="ctr"/>
-          <a:lstStyle/>
-          <a:p>
-            <a:pPr indent="0" marL="0">
-              <a:buNone/>
-            </a:pPr>
-            <a:r>
-              <a:rPr lang="en-US" sz="3000" b="1" dirty="0">
-                <a:solidFill>
-                  <a:schemeClr val="accent1"/>
-                </a:solidFill>
-                <a:latin typeface="+mj-lt" pitchFamily="34" charset="0"/>
-                <a:ea typeface="+mj-lt" pitchFamily="34" charset="-122"/>
-                <a:cs typeface="+mj-lt" pitchFamily="34" charset="-120"/>
-              </a:rPr>
-              <a:t>3</a:t>
-            </a:r>
-            <a:endParaRPr lang="en-US" sz="3000" dirty="0"/>
-          </a:p>
-        </p:txBody>
-      </p:sp>
-      <p:sp>
-        <p:nvSpPr>
-          <p:cNvPr id="15" name="Text 12"/>
-          <p:cNvSpPr txBox="1"/>
-          <p:nvPr/>
-        </p:nvSpPr>
-        <p:spPr>
-          <a:xfrm>
-            <a:off x="1463040" y="4160520"/>
-            <a:ext cx="4297680" cy="457200"/>
-          </a:xfrm>
-          <a:prstGeom prst="rect">
-            <a:avLst/>
-          </a:prstGeom>
-          <a:noFill/>
-          <a:ln/>
-        </p:spPr>
-        <p:txBody>
-          <a:bodyPr wrap="square" lIns="0" tIns="0" rIns="0" bIns="0" rtlCol="0" anchor="ctr"/>
-          <a:lstStyle/>
-          <a:p>
-            <a:pPr indent="0" marL="0">
-              <a:buNone/>
-            </a:pPr>
-            <a:r>
-              <a:rPr lang="en-US" sz="1800" b="1" dirty="0">
-                <a:solidFill>
-                  <a:schemeClr val="tx1"/>
-                </a:solidFill>
-                <a:latin typeface="+mj-lt" pitchFamily="34" charset="0"/>
-                <a:ea typeface="+mj-lt" pitchFamily="34" charset="-122"/>
-                <a:cs typeface="+mj-lt" pitchFamily="34" charset="-120"/>
-              </a:rPr>
-              <a:t>Nonaktifkan, bukan hapus</a:t>
-            </a:r>
-            <a:endParaRPr lang="en-US" sz="1800" dirty="0"/>
-          </a:p>
-        </p:txBody>
-      </p:sp>
-      <p:sp>
-        <p:nvSpPr>
-          <p:cNvPr id="16" name="Text 13"/>
-          <p:cNvSpPr txBox="1"/>
-          <p:nvPr/>
-        </p:nvSpPr>
-        <p:spPr>
-          <a:xfrm>
-            <a:off x="1463040" y="4709160"/>
-            <a:ext cx="4297680" cy="1097280"/>
-          </a:xfrm>
-          <a:prstGeom prst="rect">
-            <a:avLst/>
-          </a:prstGeom>
-          <a:noFill/>
-          <a:ln/>
-        </p:spPr>
-        <p:txBody>
-          <a:bodyPr wrap="square" lIns="0" tIns="0" rIns="0" bIns="0" rtlCol="0" anchor="t"/>
-          <a:lstStyle/>
-          <a:p>
-            <a:pPr indent="0" marL="0">
-              <a:buNone/>
-            </a:pPr>
-            <a:r>
-              <a:rPr lang="en-US" sz="1500" dirty="0">
-                <a:solidFill>
-                  <a:schemeClr val="accent4"/>
-                </a:solidFill>
-              </a:rPr>
-              <a:t>Genre, paket, kupon, atau pengguna yang sudah dipakai hanya bisa dinonaktifkan.</a:t>
-            </a:r>
-            <a:endParaRPr lang="en-US" sz="1500" dirty="0"/>
-          </a:p>
-        </p:txBody>
-      </p:sp>
-      <p:sp>
-        <p:nvSpPr>
-          <p:cNvPr id="17" name="card"/>
-          <p:cNvSpPr/>
-          <p:nvPr/>
-        </p:nvSpPr>
-        <p:spPr>
-          <a:xfrm>
-            <a:off x="6172200" y="3886200"/>
-            <a:ext cx="5440680" cy="1920240"/>
-          </a:xfrm>
-          <a:prstGeom prst="roundRect">
-            <a:avLst>
-              <a:gd name="adj" fmla="val 5714"/>
-            </a:avLst>
-          </a:prstGeom>
-          <a:solidFill>
-            <a:schemeClr val="bg2"/>
-          </a:solidFill>
-          <a:ln w="12700">
-            <a:solidFill>
-              <a:schemeClr val="bg2"/>
-            </a:solidFill>
-            <a:prstDash val="solid"/>
-          </a:ln>
-        </p:spPr>
-      </p:sp>
-      <p:sp>
-        <p:nvSpPr>
-          <p:cNvPr id="18" name="Text 15"/>
-          <p:cNvSpPr txBox="1"/>
-          <p:nvPr/>
-        </p:nvSpPr>
-        <p:spPr>
-          <a:xfrm>
-            <a:off x="6446520" y="4114800"/>
-            <a:ext cx="548640" cy="640080"/>
-          </a:xfrm>
-          <a:prstGeom prst="rect">
-            <a:avLst/>
-          </a:prstGeom>
-          <a:noFill/>
-          <a:ln/>
-        </p:spPr>
-        <p:txBody>
-          <a:bodyPr wrap="square" lIns="0" tIns="0" rIns="0" bIns="0" rtlCol="0" anchor="ctr"/>
-          <a:lstStyle/>
-          <a:p>
-            <a:pPr indent="0" marL="0">
-              <a:buNone/>
-            </a:pPr>
-            <a:r>
-              <a:rPr lang="en-US" sz="3000" b="1" dirty="0">
-                <a:solidFill>
-                  <a:schemeClr val="accent1"/>
-                </a:solidFill>
-                <a:latin typeface="+mj-lt" pitchFamily="34" charset="0"/>
-                <a:ea typeface="+mj-lt" pitchFamily="34" charset="-122"/>
-                <a:cs typeface="+mj-lt" pitchFamily="34" charset="-120"/>
-              </a:rPr>
-              <a:t>4</a:t>
-            </a:r>
-            <a:endParaRPr lang="en-US" sz="3000" dirty="0"/>
-          </a:p>
-        </p:txBody>
-      </p:sp>
-      <p:sp>
-        <p:nvSpPr>
-          <p:cNvPr id="19" name="Text 16"/>
-          <p:cNvSpPr txBox="1"/>
-          <p:nvPr/>
-        </p:nvSpPr>
-        <p:spPr>
-          <a:xfrm>
-            <a:off x="7086600" y="4160520"/>
-            <a:ext cx="4297680" cy="457200"/>
-          </a:xfrm>
-          <a:prstGeom prst="rect">
-            <a:avLst/>
-          </a:prstGeom>
-          <a:noFill/>
-          <a:ln/>
-        </p:spPr>
-        <p:txBody>
-          <a:bodyPr wrap="square" lIns="0" tIns="0" rIns="0" bIns="0" rtlCol="0" anchor="ctr"/>
-          <a:lstStyle/>
-          <a:p>
-            <a:pPr indent="0" marL="0">
-              <a:buNone/>
-            </a:pPr>
-            <a:r>
-              <a:rPr lang="en-US" sz="1800" b="1" dirty="0">
-                <a:solidFill>
-                  <a:schemeClr val="tx1"/>
-                </a:solidFill>
-                <a:latin typeface="+mj-lt" pitchFamily="34" charset="0"/>
-                <a:ea typeface="+mj-lt" pitchFamily="34" charset="-122"/>
-                <a:cs typeface="+mj-lt" pitchFamily="34" charset="-120"/>
-              </a:rPr>
-              <a:t>Episode diperbarui di tempat</a:t>
-            </a:r>
-            <a:endParaRPr lang="en-US" sz="1800" dirty="0"/>
-          </a:p>
-        </p:txBody>
-      </p:sp>
-      <p:sp>
-        <p:nvSpPr>
-          <p:cNvPr id="20" name="Text 17"/>
-          <p:cNvSpPr txBox="1"/>
-          <p:nvPr/>
-        </p:nvSpPr>
-        <p:spPr>
-          <a:xfrm>
-            <a:off x="7086600" y="4709160"/>
-            <a:ext cx="4297680" cy="1097280"/>
-          </a:xfrm>
-          <a:prstGeom prst="rect">
-            <a:avLst/>
-          </a:prstGeom>
-          <a:noFill/>
-          <a:ln/>
-        </p:spPr>
-        <p:txBody>
-          <a:bodyPr wrap="square" lIns="0" tIns="0" rIns="0" bIns="0" rtlCol="0" anchor="t"/>
-          <a:lstStyle/>
-          <a:p>
-            <a:pPr indent="0" marL="0">
-              <a:buNone/>
-            </a:pPr>
-            <a:r>
-              <a:rPr lang="en-US" sz="1500" dirty="0">
-                <a:solidFill>
-                  <a:schemeClr val="accent4"/>
-                </a:solidFill>
-              </a:rPr>
-              <a:t>Baris yang sama dipertahankan, jadi riwayat tontonan tidak terputus.</a:t>
-            </a:r>
-            <a:endParaRPr lang="en-US" sz="1500" dirty="0"/>
-          </a:p>
-        </p:txBody>
-      </p:sp>
+      <p:graphicFrame>
+        <p:nvGraphicFramePr>
+          <p:cNvPr id="11" name="Table 0"/>
+          <p:cNvGraphicFramePr>
+            <a:graphicFrameLocks noGrp="1"/>
+          </p:cNvGraphicFramePr>
+          <p:nvPr>
+            <p:extLst>
+              <p:ext uri="{D42A27DB-BD31-4B8C-83A1-F6EECF244321}">
+                <p14:modId xmlns:p14="http://schemas.microsoft.com/office/powerpoint/2010/main" val="1579011935"/>
+              </p:ext>
+            </p:extLst>
+          </p:nvPr>
+        </p:nvGraphicFramePr>
+        <p:xfrm>
+          <a:off x="548640" y="1508760"/>
+          <a:ext cx="11064240" cy="914400"/>
+        </p:xfrm>
+        <a:graphic>
+          <a:graphicData uri="http://schemas.openxmlformats.org/drawingml/2006/table">
+            <a:tbl>
+              <a:tblPr/>
+              <a:tblGrid>
+                <a:gridCol w="3291840"/>
+                <a:gridCol w="4114800"/>
+                <a:gridCol w="3657600"/>
+              </a:tblGrid>
+              <a:tr h="0">
+                <a:tc>
+                  <a:txBody>
+                    <a:bodyPr/>
+                    <a:lstStyle/>
+                    <a:p>
+                      <a:pPr indent="0" marL="0">
+                        <a:buNone/>
+                      </a:pPr>
+                      <a:r>
+                        <a:rPr lang="en-US" sz="1500" b="1" dirty="0">
+                          <a:solidFill>
+                            <a:srgbClr val="1E9E57"/>
+                          </a:solidFill>
+                        </a:rPr>
+                        <a:t>Keputusan</a:t>
+                      </a:r>
+                      <a:endParaRPr lang="en-US" sz="1500" dirty="0"/>
+                    </a:p>
+                  </a:txBody>
+                  <a:tcPr marL="164592" marR="164592" marT="182880" marB="182880" anchor="t">
+                    <a:lnL w="9525" cap="flat" cmpd="sng" algn="ctr">
+                      <a:solidFill>
+                        <a:srgbClr val="D6E2DA"/>
+                      </a:solidFill>
+                      <a:prstDash val="solid"/>
+                      <a:round/>
+                      <a:headEnd type="none" w="med" len="med"/>
+                      <a:tailEnd type="none" w="med" len="med"/>
+                    </a:lnL>
+                    <a:lnR w="9525" cap="flat" cmpd="sng" algn="ctr">
+                      <a:solidFill>
+                        <a:srgbClr val="D6E2DA"/>
+                      </a:solidFill>
+                      <a:prstDash val="solid"/>
+                      <a:round/>
+                      <a:headEnd type="none" w="med" len="med"/>
+                      <a:tailEnd type="none" w="med" len="med"/>
+                    </a:lnR>
+                    <a:lnT w="9525" cap="flat" cmpd="sng" algn="ctr">
+                      <a:solidFill>
+                        <a:srgbClr val="D6E2DA"/>
+                      </a:solidFill>
+                      <a:prstDash val="solid"/>
+                      <a:round/>
+                      <a:headEnd type="none" w="med" len="med"/>
+                      <a:tailEnd type="none" w="med" len="med"/>
+                    </a:lnT>
+                    <a:lnB w="9525" cap="flat" cmpd="sng" algn="ctr">
+                      <a:solidFill>
+                        <a:srgbClr val="D6E2DA"/>
+                      </a:solidFill>
+                      <a:prstDash val="solid"/>
+                      <a:round/>
+                      <a:headEnd type="none" w="med" len="med"/>
+                      <a:tailEnd type="none" w="med" len="med"/>
+                    </a:lnB>
+                    <a:solidFill>
+                      <a:srgbClr val="EEF3EF"/>
+                    </a:solidFill>
+                  </a:tcPr>
+                </a:tc>
+                <a:tc>
+                  <a:txBody>
+                    <a:bodyPr/>
+                    <a:lstStyle/>
+                    <a:p>
+                      <a:pPr indent="0" marL="0">
+                        <a:buNone/>
+                      </a:pPr>
+                      <a:r>
+                        <a:rPr lang="en-US" sz="1500" b="1" dirty="0">
+                          <a:solidFill>
+                            <a:srgbClr val="1E9E57"/>
+                          </a:solidFill>
+                        </a:rPr>
+                        <a:t>Kenapa</a:t>
+                      </a:r>
+                      <a:endParaRPr lang="en-US" sz="1500" dirty="0"/>
+                    </a:p>
+                  </a:txBody>
+                  <a:tcPr marL="164592" marR="164592" marT="182880" marB="182880" anchor="t">
+                    <a:lnL w="9525" cap="flat" cmpd="sng" algn="ctr">
+                      <a:solidFill>
+                        <a:srgbClr val="D6E2DA"/>
+                      </a:solidFill>
+                      <a:prstDash val="solid"/>
+                      <a:round/>
+                      <a:headEnd type="none" w="med" len="med"/>
+                      <a:tailEnd type="none" w="med" len="med"/>
+                    </a:lnL>
+                    <a:lnR w="9525" cap="flat" cmpd="sng" algn="ctr">
+                      <a:solidFill>
+                        <a:srgbClr val="D6E2DA"/>
+                      </a:solidFill>
+                      <a:prstDash val="solid"/>
+                      <a:round/>
+                      <a:headEnd type="none" w="med" len="med"/>
+                      <a:tailEnd type="none" w="med" len="med"/>
+                    </a:lnR>
+                    <a:lnT w="9525" cap="flat" cmpd="sng" algn="ctr">
+                      <a:solidFill>
+                        <a:srgbClr val="D6E2DA"/>
+                      </a:solidFill>
+                      <a:prstDash val="solid"/>
+                      <a:round/>
+                      <a:headEnd type="none" w="med" len="med"/>
+                      <a:tailEnd type="none" w="med" len="med"/>
+                    </a:lnT>
+                    <a:lnB w="9525" cap="flat" cmpd="sng" algn="ctr">
+                      <a:solidFill>
+                        <a:srgbClr val="D6E2DA"/>
+                      </a:solidFill>
+                      <a:prstDash val="solid"/>
+                      <a:round/>
+                      <a:headEnd type="none" w="med" len="med"/>
+                      <a:tailEnd type="none" w="med" len="med"/>
+                    </a:lnB>
+                    <a:solidFill>
+                      <a:srgbClr val="EEF3EF"/>
+                    </a:solidFill>
+                  </a:tcPr>
+                </a:tc>
+                <a:tc>
+                  <a:txBody>
+                    <a:bodyPr/>
+                    <a:lstStyle/>
+                    <a:p>
+                      <a:pPr indent="0" marL="0">
+                        <a:buNone/>
+                      </a:pPr>
+                      <a:r>
+                        <a:rPr lang="en-US" sz="1500" b="1" dirty="0">
+                          <a:solidFill>
+                            <a:srgbClr val="1E9E57"/>
+                          </a:solidFill>
+                        </a:rPr>
+                        <a:t>Harganya</a:t>
+                      </a:r>
+                      <a:endParaRPr lang="en-US" sz="1500" dirty="0"/>
+                    </a:p>
+                  </a:txBody>
+                  <a:tcPr marL="164592" marR="164592" marT="182880" marB="182880" anchor="t">
+                    <a:lnL w="9525" cap="flat" cmpd="sng" algn="ctr">
+                      <a:solidFill>
+                        <a:srgbClr val="D6E2DA"/>
+                      </a:solidFill>
+                      <a:prstDash val="solid"/>
+                      <a:round/>
+                      <a:headEnd type="none" w="med" len="med"/>
+                      <a:tailEnd type="none" w="med" len="med"/>
+                    </a:lnL>
+                    <a:lnR w="9525" cap="flat" cmpd="sng" algn="ctr">
+                      <a:solidFill>
+                        <a:srgbClr val="D6E2DA"/>
+                      </a:solidFill>
+                      <a:prstDash val="solid"/>
+                      <a:round/>
+                      <a:headEnd type="none" w="med" len="med"/>
+                      <a:tailEnd type="none" w="med" len="med"/>
+                    </a:lnR>
+                    <a:lnT w="9525" cap="flat" cmpd="sng" algn="ctr">
+                      <a:solidFill>
+                        <a:srgbClr val="D6E2DA"/>
+                      </a:solidFill>
+                      <a:prstDash val="solid"/>
+                      <a:round/>
+                      <a:headEnd type="none" w="med" len="med"/>
+                      <a:tailEnd type="none" w="med" len="med"/>
+                    </a:lnT>
+                    <a:lnB w="9525" cap="flat" cmpd="sng" algn="ctr">
+                      <a:solidFill>
+                        <a:srgbClr val="D6E2DA"/>
+                      </a:solidFill>
+                      <a:prstDash val="solid"/>
+                      <a:round/>
+                      <a:headEnd type="none" w="med" len="med"/>
+                      <a:tailEnd type="none" w="med" len="med"/>
+                    </a:lnB>
+                    <a:solidFill>
+                      <a:srgbClr val="EEF3EF"/>
+                    </a:solidFill>
+                  </a:tcPr>
+                </a:tc>
+              </a:tr>
+              <a:tr h="0">
+                <a:tc>
+                  <a:txBody>
+                    <a:bodyPr/>
+                    <a:lstStyle/>
+                    <a:p>
+                      <a:pPr indent="0" marL="0">
+                        <a:buNone/>
+                      </a:pPr>
+                      <a:r>
+                        <a:rPr lang="en-US" sz="1700" b="1" dirty="0">
+                          <a:solidFill>
+                            <a:srgbClr val="15211B"/>
+                          </a:solidFill>
+                        </a:rPr>
+                        <a:t>subscription_ends_on disimpan di users</a:t>
+                      </a:r>
+                      <a:endParaRPr lang="en-US" sz="1700" dirty="0"/>
+                    </a:p>
+                  </a:txBody>
+                  <a:tcPr marL="164592" marR="164592" marT="182880" marB="182880" anchor="t">
+                    <a:lnL w="9525" cap="flat" cmpd="sng" algn="ctr">
+                      <a:solidFill>
+                        <a:srgbClr val="D6E2DA"/>
+                      </a:solidFill>
+                      <a:prstDash val="solid"/>
+                      <a:round/>
+                      <a:headEnd type="none" w="med" len="med"/>
+                      <a:tailEnd type="none" w="med" len="med"/>
+                    </a:lnL>
+                    <a:lnR w="9525" cap="flat" cmpd="sng" algn="ctr">
+                      <a:solidFill>
+                        <a:srgbClr val="D6E2DA"/>
+                      </a:solidFill>
+                      <a:prstDash val="solid"/>
+                      <a:round/>
+                      <a:headEnd type="none" w="med" len="med"/>
+                      <a:tailEnd type="none" w="med" len="med"/>
+                    </a:lnR>
+                    <a:lnT w="9525" cap="flat" cmpd="sng" algn="ctr">
+                      <a:solidFill>
+                        <a:srgbClr val="D6E2DA"/>
+                      </a:solidFill>
+                      <a:prstDash val="solid"/>
+                      <a:round/>
+                      <a:headEnd type="none" w="med" len="med"/>
+                      <a:tailEnd type="none" w="med" len="med"/>
+                    </a:lnT>
+                    <a:lnB w="9525" cap="flat" cmpd="sng" algn="ctr">
+                      <a:solidFill>
+                        <a:srgbClr val="D6E2DA"/>
+                      </a:solidFill>
+                      <a:prstDash val="solid"/>
+                      <a:round/>
+                      <a:headEnd type="none" w="med" len="med"/>
+                      <a:tailEnd type="none" w="med" len="med"/>
+                    </a:lnB>
+                  </a:tcPr>
+                </a:tc>
+                <a:tc>
+                  <a:txBody>
+                    <a:bodyPr/>
+                    <a:lstStyle/>
+                    <a:p>
+                      <a:pPr indent="0" marL="0">
+                        <a:buNone/>
+                      </a:pPr>
+                      <a:r>
+                        <a:rPr lang="en-US" sz="1700" dirty="0">
+                          <a:solidFill>
+                            <a:srgbClr val="15211B"/>
+                          </a:solidFill>
+                        </a:rPr>
+                        <a:t>API mengecek akses di setiap pemutaran; satu kolom ber-index cukup</a:t>
+                      </a:r>
+                      <a:endParaRPr lang="en-US" sz="1700" dirty="0"/>
+                    </a:p>
+                  </a:txBody>
+                  <a:tcPr marL="164592" marR="164592" marT="182880" marB="182880" anchor="t">
+                    <a:lnL w="9525" cap="flat" cmpd="sng" algn="ctr">
+                      <a:solidFill>
+                        <a:srgbClr val="D6E2DA"/>
+                      </a:solidFill>
+                      <a:prstDash val="solid"/>
+                      <a:round/>
+                      <a:headEnd type="none" w="med" len="med"/>
+                      <a:tailEnd type="none" w="med" len="med"/>
+                    </a:lnL>
+                    <a:lnR w="9525" cap="flat" cmpd="sng" algn="ctr">
+                      <a:solidFill>
+                        <a:srgbClr val="D6E2DA"/>
+                      </a:solidFill>
+                      <a:prstDash val="solid"/>
+                      <a:round/>
+                      <a:headEnd type="none" w="med" len="med"/>
+                      <a:tailEnd type="none" w="med" len="med"/>
+                    </a:lnR>
+                    <a:lnT w="9525" cap="flat" cmpd="sng" algn="ctr">
+                      <a:solidFill>
+                        <a:srgbClr val="D6E2DA"/>
+                      </a:solidFill>
+                      <a:prstDash val="solid"/>
+                      <a:round/>
+                      <a:headEnd type="none" w="med" len="med"/>
+                      <a:tailEnd type="none" w="med" len="med"/>
+                    </a:lnT>
+                    <a:lnB w="9525" cap="flat" cmpd="sng" algn="ctr">
+                      <a:solidFill>
+                        <a:srgbClr val="D6E2DA"/>
+                      </a:solidFill>
+                      <a:prstDash val="solid"/>
+                      <a:round/>
+                      <a:headEnd type="none" w="med" len="med"/>
+                      <a:tailEnd type="none" w="med" len="med"/>
+                    </a:lnB>
+                  </a:tcPr>
+                </a:tc>
+                <a:tc>
+                  <a:txBody>
+                    <a:bodyPr/>
+                    <a:lstStyle/>
+                    <a:p>
+                      <a:pPr indent="0" marL="0">
+                        <a:buNone/>
+                      </a:pPr>
+                      <a:r>
+                        <a:rPr lang="en-US" sz="1700" dirty="0">
+                          <a:solidFill>
+                            <a:srgbClr val="15211B"/>
+                          </a:solidFill>
+                        </a:rPr>
+                        <a:t>Data ganda; hanya SubscriptionService yang boleh mengubahnya</a:t>
+                      </a:r>
+                      <a:endParaRPr lang="en-US" sz="1700" dirty="0"/>
+                    </a:p>
+                  </a:txBody>
+                  <a:tcPr marL="164592" marR="164592" marT="182880" marB="182880" anchor="t">
+                    <a:lnL w="9525" cap="flat" cmpd="sng" algn="ctr">
+                      <a:solidFill>
+                        <a:srgbClr val="D6E2DA"/>
+                      </a:solidFill>
+                      <a:prstDash val="solid"/>
+                      <a:round/>
+                      <a:headEnd type="none" w="med" len="med"/>
+                      <a:tailEnd type="none" w="med" len="med"/>
+                    </a:lnL>
+                    <a:lnR w="9525" cap="flat" cmpd="sng" algn="ctr">
+                      <a:solidFill>
+                        <a:srgbClr val="D6E2DA"/>
+                      </a:solidFill>
+                      <a:prstDash val="solid"/>
+                      <a:round/>
+                      <a:headEnd type="none" w="med" len="med"/>
+                      <a:tailEnd type="none" w="med" len="med"/>
+                    </a:lnR>
+                    <a:lnT w="9525" cap="flat" cmpd="sng" algn="ctr">
+                      <a:solidFill>
+                        <a:srgbClr val="D6E2DA"/>
+                      </a:solidFill>
+                      <a:prstDash val="solid"/>
+                      <a:round/>
+                      <a:headEnd type="none" w="med" len="med"/>
+                      <a:tailEnd type="none" w="med" len="med"/>
+                    </a:lnT>
+                    <a:lnB w="9525" cap="flat" cmpd="sng" algn="ctr">
+                      <a:solidFill>
+                        <a:srgbClr val="D6E2DA"/>
+                      </a:solidFill>
+                      <a:prstDash val="solid"/>
+                      <a:round/>
+                      <a:headEnd type="none" w="med" len="med"/>
+                      <a:tailEnd type="none" w="med" len="med"/>
+                    </a:lnB>
+                  </a:tcPr>
+                </a:tc>
+              </a:tr>
+              <a:tr h="0">
+                <a:tc>
+                  <a:txBody>
+                    <a:bodyPr/>
+                    <a:lstStyle/>
+                    <a:p>
+                      <a:pPr indent="0" marL="0">
+                        <a:buNone/>
+                      </a:pPr>
+                      <a:r>
+                        <a:rPr lang="en-US" sz="1700" b="1" dirty="0">
+                          <a:solidFill>
+                            <a:srgbClr val="15211B"/>
+                          </a:solidFill>
+                        </a:rPr>
+                        <a:t>Pembayaran tidak bisa diedit</a:t>
+                      </a:r>
+                      <a:endParaRPr lang="en-US" sz="1700" dirty="0"/>
+                    </a:p>
+                  </a:txBody>
+                  <a:tcPr marL="164592" marR="164592" marT="182880" marB="182880" anchor="t">
+                    <a:lnL w="9525" cap="flat" cmpd="sng" algn="ctr">
+                      <a:solidFill>
+                        <a:srgbClr val="D6E2DA"/>
+                      </a:solidFill>
+                      <a:prstDash val="solid"/>
+                      <a:round/>
+                      <a:headEnd type="none" w="med" len="med"/>
+                      <a:tailEnd type="none" w="med" len="med"/>
+                    </a:lnL>
+                    <a:lnR w="9525" cap="flat" cmpd="sng" algn="ctr">
+                      <a:solidFill>
+                        <a:srgbClr val="D6E2DA"/>
+                      </a:solidFill>
+                      <a:prstDash val="solid"/>
+                      <a:round/>
+                      <a:headEnd type="none" w="med" len="med"/>
+                      <a:tailEnd type="none" w="med" len="med"/>
+                    </a:lnR>
+                    <a:lnT w="9525" cap="flat" cmpd="sng" algn="ctr">
+                      <a:solidFill>
+                        <a:srgbClr val="D6E2DA"/>
+                      </a:solidFill>
+                      <a:prstDash val="solid"/>
+                      <a:round/>
+                      <a:headEnd type="none" w="med" len="med"/>
+                      <a:tailEnd type="none" w="med" len="med"/>
+                    </a:lnT>
+                    <a:lnB w="9525" cap="flat" cmpd="sng" algn="ctr">
+                      <a:solidFill>
+                        <a:srgbClr val="D6E2DA"/>
+                      </a:solidFill>
+                      <a:prstDash val="solid"/>
+                      <a:round/>
+                      <a:headEnd type="none" w="med" len="med"/>
+                      <a:tailEnd type="none" w="med" len="med"/>
+                    </a:lnB>
+                  </a:tcPr>
+                </a:tc>
+                <a:tc>
+                  <a:txBody>
+                    <a:bodyPr/>
+                    <a:lstStyle/>
+                    <a:p>
+                      <a:pPr indent="0" marL="0">
+                        <a:buNone/>
+                      </a:pPr>
+                      <a:r>
+                        <a:rPr lang="en-US" sz="1700" dirty="0">
+                          <a:solidFill>
+                            <a:srgbClr val="15211B"/>
+                          </a:solidFill>
+                        </a:rPr>
+                        <a:t>Langganan dan sewa adalah catatan keuangan</a:t>
+                      </a:r>
+                      <a:endParaRPr lang="en-US" sz="1700" dirty="0"/>
+                    </a:p>
+                  </a:txBody>
+                  <a:tcPr marL="164592" marR="164592" marT="182880" marB="182880" anchor="t">
+                    <a:lnL w="9525" cap="flat" cmpd="sng" algn="ctr">
+                      <a:solidFill>
+                        <a:srgbClr val="D6E2DA"/>
+                      </a:solidFill>
+                      <a:prstDash val="solid"/>
+                      <a:round/>
+                      <a:headEnd type="none" w="med" len="med"/>
+                      <a:tailEnd type="none" w="med" len="med"/>
+                    </a:lnL>
+                    <a:lnR w="9525" cap="flat" cmpd="sng" algn="ctr">
+                      <a:solidFill>
+                        <a:srgbClr val="D6E2DA"/>
+                      </a:solidFill>
+                      <a:prstDash val="solid"/>
+                      <a:round/>
+                      <a:headEnd type="none" w="med" len="med"/>
+                      <a:tailEnd type="none" w="med" len="med"/>
+                    </a:lnR>
+                    <a:lnT w="9525" cap="flat" cmpd="sng" algn="ctr">
+                      <a:solidFill>
+                        <a:srgbClr val="D6E2DA"/>
+                      </a:solidFill>
+                      <a:prstDash val="solid"/>
+                      <a:round/>
+                      <a:headEnd type="none" w="med" len="med"/>
+                      <a:tailEnd type="none" w="med" len="med"/>
+                    </a:lnT>
+                    <a:lnB w="9525" cap="flat" cmpd="sng" algn="ctr">
+                      <a:solidFill>
+                        <a:srgbClr val="D6E2DA"/>
+                      </a:solidFill>
+                      <a:prstDash val="solid"/>
+                      <a:round/>
+                      <a:headEnd type="none" w="med" len="med"/>
+                      <a:tailEnd type="none" w="med" len="med"/>
+                    </a:lnB>
+                  </a:tcPr>
+                </a:tc>
+                <a:tc>
+                  <a:txBody>
+                    <a:bodyPr/>
+                    <a:lstStyle/>
+                    <a:p>
+                      <a:pPr indent="0" marL="0">
+                        <a:buNone/>
+                      </a:pPr>
+                      <a:r>
+                        <a:rPr lang="en-US" sz="1700" dirty="0">
+                          <a:solidFill>
+                            <a:srgbClr val="15211B"/>
+                          </a:solidFill>
+                        </a:rPr>
+                        <a:t>Koreksi harus berupa entri baru</a:t>
+                      </a:r>
+                      <a:endParaRPr lang="en-US" sz="1700" dirty="0"/>
+                    </a:p>
+                  </a:txBody>
+                  <a:tcPr marL="164592" marR="164592" marT="182880" marB="182880" anchor="t">
+                    <a:lnL w="9525" cap="flat" cmpd="sng" algn="ctr">
+                      <a:solidFill>
+                        <a:srgbClr val="D6E2DA"/>
+                      </a:solidFill>
+                      <a:prstDash val="solid"/>
+                      <a:round/>
+                      <a:headEnd type="none" w="med" len="med"/>
+                      <a:tailEnd type="none" w="med" len="med"/>
+                    </a:lnL>
+                    <a:lnR w="9525" cap="flat" cmpd="sng" algn="ctr">
+                      <a:solidFill>
+                        <a:srgbClr val="D6E2DA"/>
+                      </a:solidFill>
+                      <a:prstDash val="solid"/>
+                      <a:round/>
+                      <a:headEnd type="none" w="med" len="med"/>
+                      <a:tailEnd type="none" w="med" len="med"/>
+                    </a:lnR>
+                    <a:lnT w="9525" cap="flat" cmpd="sng" algn="ctr">
+                      <a:solidFill>
+                        <a:srgbClr val="D6E2DA"/>
+                      </a:solidFill>
+                      <a:prstDash val="solid"/>
+                      <a:round/>
+                      <a:headEnd type="none" w="med" len="med"/>
+                      <a:tailEnd type="none" w="med" len="med"/>
+                    </a:lnT>
+                    <a:lnB w="9525" cap="flat" cmpd="sng" algn="ctr">
+                      <a:solidFill>
+                        <a:srgbClr val="D6E2DA"/>
+                      </a:solidFill>
+                      <a:prstDash val="solid"/>
+                      <a:round/>
+                      <a:headEnd type="none" w="med" len="med"/>
+                      <a:tailEnd type="none" w="med" len="med"/>
+                    </a:lnB>
+                  </a:tcPr>
+                </a:tc>
+              </a:tr>
+              <a:tr h="0">
+                <a:tc>
+                  <a:txBody>
+                    <a:bodyPr/>
+                    <a:lstStyle/>
+                    <a:p>
+                      <a:pPr indent="0" marL="0">
+                        <a:buNone/>
+                      </a:pPr>
+                      <a:r>
+                        <a:rPr lang="en-US" sz="1700" b="1" dirty="0">
+                          <a:solidFill>
+                            <a:srgbClr val="15211B"/>
+                          </a:solidFill>
+                        </a:rPr>
+                        <a:t>Nonaktifkan, bukan hapus</a:t>
+                      </a:r>
+                      <a:endParaRPr lang="en-US" sz="1700" dirty="0"/>
+                    </a:p>
+                  </a:txBody>
+                  <a:tcPr marL="164592" marR="164592" marT="182880" marB="182880" anchor="t">
+                    <a:lnL w="9525" cap="flat" cmpd="sng" algn="ctr">
+                      <a:solidFill>
+                        <a:srgbClr val="D6E2DA"/>
+                      </a:solidFill>
+                      <a:prstDash val="solid"/>
+                      <a:round/>
+                      <a:headEnd type="none" w="med" len="med"/>
+                      <a:tailEnd type="none" w="med" len="med"/>
+                    </a:lnL>
+                    <a:lnR w="9525" cap="flat" cmpd="sng" algn="ctr">
+                      <a:solidFill>
+                        <a:srgbClr val="D6E2DA"/>
+                      </a:solidFill>
+                      <a:prstDash val="solid"/>
+                      <a:round/>
+                      <a:headEnd type="none" w="med" len="med"/>
+                      <a:tailEnd type="none" w="med" len="med"/>
+                    </a:lnR>
+                    <a:lnT w="9525" cap="flat" cmpd="sng" algn="ctr">
+                      <a:solidFill>
+                        <a:srgbClr val="D6E2DA"/>
+                      </a:solidFill>
+                      <a:prstDash val="solid"/>
+                      <a:round/>
+                      <a:headEnd type="none" w="med" len="med"/>
+                      <a:tailEnd type="none" w="med" len="med"/>
+                    </a:lnT>
+                    <a:lnB w="9525" cap="flat" cmpd="sng" algn="ctr">
+                      <a:solidFill>
+                        <a:srgbClr val="D6E2DA"/>
+                      </a:solidFill>
+                      <a:prstDash val="solid"/>
+                      <a:round/>
+                      <a:headEnd type="none" w="med" len="med"/>
+                      <a:tailEnd type="none" w="med" len="med"/>
+                    </a:lnB>
+                  </a:tcPr>
+                </a:tc>
+                <a:tc>
+                  <a:txBody>
+                    <a:bodyPr/>
+                    <a:lstStyle/>
+                    <a:p>
+                      <a:pPr indent="0" marL="0">
+                        <a:buNone/>
+                      </a:pPr>
+                      <a:r>
+                        <a:rPr lang="en-US" sz="1700" dirty="0">
+                          <a:solidFill>
+                            <a:srgbClr val="15211B"/>
+                          </a:solidFill>
+                        </a:rPr>
+                        <a:t>Genre, paket, atau pengguna yang dipakai tetap punya riwayat</a:t>
+                      </a:r>
+                      <a:endParaRPr lang="en-US" sz="1700" dirty="0"/>
+                    </a:p>
+                  </a:txBody>
+                  <a:tcPr marL="164592" marR="164592" marT="182880" marB="182880" anchor="t">
+                    <a:lnL w="9525" cap="flat" cmpd="sng" algn="ctr">
+                      <a:solidFill>
+                        <a:srgbClr val="D6E2DA"/>
+                      </a:solidFill>
+                      <a:prstDash val="solid"/>
+                      <a:round/>
+                      <a:headEnd type="none" w="med" len="med"/>
+                      <a:tailEnd type="none" w="med" len="med"/>
+                    </a:lnL>
+                    <a:lnR w="9525" cap="flat" cmpd="sng" algn="ctr">
+                      <a:solidFill>
+                        <a:srgbClr val="D6E2DA"/>
+                      </a:solidFill>
+                      <a:prstDash val="solid"/>
+                      <a:round/>
+                      <a:headEnd type="none" w="med" len="med"/>
+                      <a:tailEnd type="none" w="med" len="med"/>
+                    </a:lnR>
+                    <a:lnT w="9525" cap="flat" cmpd="sng" algn="ctr">
+                      <a:solidFill>
+                        <a:srgbClr val="D6E2DA"/>
+                      </a:solidFill>
+                      <a:prstDash val="solid"/>
+                      <a:round/>
+                      <a:headEnd type="none" w="med" len="med"/>
+                      <a:tailEnd type="none" w="med" len="med"/>
+                    </a:lnT>
+                    <a:lnB w="9525" cap="flat" cmpd="sng" algn="ctr">
+                      <a:solidFill>
+                        <a:srgbClr val="D6E2DA"/>
+                      </a:solidFill>
+                      <a:prstDash val="solid"/>
+                      <a:round/>
+                      <a:headEnd type="none" w="med" len="med"/>
+                      <a:tailEnd type="none" w="med" len="med"/>
+                    </a:lnB>
+                  </a:tcPr>
+                </a:tc>
+                <a:tc>
+                  <a:txBody>
+                    <a:bodyPr/>
+                    <a:lstStyle/>
+                    <a:p>
+                      <a:pPr indent="0" marL="0">
+                        <a:buNone/>
+                      </a:pPr>
+                      <a:r>
+                        <a:rPr lang="en-US" sz="1700" dirty="0">
+                          <a:solidFill>
+                            <a:srgbClr val="15211B"/>
+                          </a:solidFill>
+                        </a:rPr>
+                        <a:t>Daftar perlu filter aktif</a:t>
+                      </a:r>
+                      <a:endParaRPr lang="en-US" sz="1700" dirty="0"/>
+                    </a:p>
+                  </a:txBody>
+                  <a:tcPr marL="164592" marR="164592" marT="182880" marB="182880" anchor="t">
+                    <a:lnL w="9525" cap="flat" cmpd="sng" algn="ctr">
+                      <a:solidFill>
+                        <a:srgbClr val="D6E2DA"/>
+                      </a:solidFill>
+                      <a:prstDash val="solid"/>
+                      <a:round/>
+                      <a:headEnd type="none" w="med" len="med"/>
+                      <a:tailEnd type="none" w="med" len="med"/>
+                    </a:lnL>
+                    <a:lnR w="9525" cap="flat" cmpd="sng" algn="ctr">
+                      <a:solidFill>
+                        <a:srgbClr val="D6E2DA"/>
+                      </a:solidFill>
+                      <a:prstDash val="solid"/>
+                      <a:round/>
+                      <a:headEnd type="none" w="med" len="med"/>
+                      <a:tailEnd type="none" w="med" len="med"/>
+                    </a:lnR>
+                    <a:lnT w="9525" cap="flat" cmpd="sng" algn="ctr">
+                      <a:solidFill>
+                        <a:srgbClr val="D6E2DA"/>
+                      </a:solidFill>
+                      <a:prstDash val="solid"/>
+                      <a:round/>
+                      <a:headEnd type="none" w="med" len="med"/>
+                      <a:tailEnd type="none" w="med" len="med"/>
+                    </a:lnT>
+                    <a:lnB w="9525" cap="flat" cmpd="sng" algn="ctr">
+                      <a:solidFill>
+                        <a:srgbClr val="D6E2DA"/>
+                      </a:solidFill>
+                      <a:prstDash val="solid"/>
+                      <a:round/>
+                      <a:headEnd type="none" w="med" len="med"/>
+                      <a:tailEnd type="none" w="med" len="med"/>
+                    </a:lnB>
+                  </a:tcPr>
+                </a:tc>
+              </a:tr>
+              <a:tr h="0">
+                <a:tc>
+                  <a:txBody>
+                    <a:bodyPr/>
+                    <a:lstStyle/>
+                    <a:p>
+                      <a:pPr indent="0" marL="0">
+                        <a:buNone/>
+                      </a:pPr>
+                      <a:r>
+                        <a:rPr lang="en-US" sz="1700" b="1" dirty="0">
+                          <a:solidFill>
+                            <a:srgbClr val="15211B"/>
+                          </a:solidFill>
+                        </a:rPr>
+                        <a:t>Episode diperbarui di tempat</a:t>
+                      </a:r>
+                      <a:endParaRPr lang="en-US" sz="1700" dirty="0"/>
+                    </a:p>
+                  </a:txBody>
+                  <a:tcPr marL="164592" marR="164592" marT="182880" marB="182880" anchor="t">
+                    <a:lnL w="9525" cap="flat" cmpd="sng" algn="ctr">
+                      <a:solidFill>
+                        <a:srgbClr val="D6E2DA"/>
+                      </a:solidFill>
+                      <a:prstDash val="solid"/>
+                      <a:round/>
+                      <a:headEnd type="none" w="med" len="med"/>
+                      <a:tailEnd type="none" w="med" len="med"/>
+                    </a:lnL>
+                    <a:lnR w="9525" cap="flat" cmpd="sng" algn="ctr">
+                      <a:solidFill>
+                        <a:srgbClr val="D6E2DA"/>
+                      </a:solidFill>
+                      <a:prstDash val="solid"/>
+                      <a:round/>
+                      <a:headEnd type="none" w="med" len="med"/>
+                      <a:tailEnd type="none" w="med" len="med"/>
+                    </a:lnR>
+                    <a:lnT w="9525" cap="flat" cmpd="sng" algn="ctr">
+                      <a:solidFill>
+                        <a:srgbClr val="D6E2DA"/>
+                      </a:solidFill>
+                      <a:prstDash val="solid"/>
+                      <a:round/>
+                      <a:headEnd type="none" w="med" len="med"/>
+                      <a:tailEnd type="none" w="med" len="med"/>
+                    </a:lnT>
+                    <a:lnB w="9525" cap="flat" cmpd="sng" algn="ctr">
+                      <a:solidFill>
+                        <a:srgbClr val="D6E2DA"/>
+                      </a:solidFill>
+                      <a:prstDash val="solid"/>
+                      <a:round/>
+                      <a:headEnd type="none" w="med" len="med"/>
+                      <a:tailEnd type="none" w="med" len="med"/>
+                    </a:lnB>
+                  </a:tcPr>
+                </a:tc>
+                <a:tc>
+                  <a:txBody>
+                    <a:bodyPr/>
+                    <a:lstStyle/>
+                    <a:p>
+                      <a:pPr indent="0" marL="0">
+                        <a:buNone/>
+                      </a:pPr>
+                      <a:r>
+                        <a:rPr lang="en-US" sz="1700" dirty="0">
+                          <a:solidFill>
+                            <a:srgbClr val="15211B"/>
+                          </a:solidFill>
+                        </a:rPr>
+                        <a:t>Riwayat tontonan tetap menempel ke baris yang sama</a:t>
+                      </a:r>
+                      <a:endParaRPr lang="en-US" sz="1700" dirty="0"/>
+                    </a:p>
+                  </a:txBody>
+                  <a:tcPr marL="164592" marR="164592" marT="182880" marB="182880" anchor="t">
+                    <a:lnL w="9525" cap="flat" cmpd="sng" algn="ctr">
+                      <a:solidFill>
+                        <a:srgbClr val="D6E2DA"/>
+                      </a:solidFill>
+                      <a:prstDash val="solid"/>
+                      <a:round/>
+                      <a:headEnd type="none" w="med" len="med"/>
+                      <a:tailEnd type="none" w="med" len="med"/>
+                    </a:lnL>
+                    <a:lnR w="9525" cap="flat" cmpd="sng" algn="ctr">
+                      <a:solidFill>
+                        <a:srgbClr val="D6E2DA"/>
+                      </a:solidFill>
+                      <a:prstDash val="solid"/>
+                      <a:round/>
+                      <a:headEnd type="none" w="med" len="med"/>
+                      <a:tailEnd type="none" w="med" len="med"/>
+                    </a:lnR>
+                    <a:lnT w="9525" cap="flat" cmpd="sng" algn="ctr">
+                      <a:solidFill>
+                        <a:srgbClr val="D6E2DA"/>
+                      </a:solidFill>
+                      <a:prstDash val="solid"/>
+                      <a:round/>
+                      <a:headEnd type="none" w="med" len="med"/>
+                      <a:tailEnd type="none" w="med" len="med"/>
+                    </a:lnT>
+                    <a:lnB w="9525" cap="flat" cmpd="sng" algn="ctr">
+                      <a:solidFill>
+                        <a:srgbClr val="D6E2DA"/>
+                      </a:solidFill>
+                      <a:prstDash val="solid"/>
+                      <a:round/>
+                      <a:headEnd type="none" w="med" len="med"/>
+                      <a:tailEnd type="none" w="med" len="med"/>
+                    </a:lnB>
+                  </a:tcPr>
+                </a:tc>
+                <a:tc>
+                  <a:txBody>
+                    <a:bodyPr/>
+                    <a:lstStyle/>
+                    <a:p>
+                      <a:pPr indent="0" marL="0">
+                        <a:buNone/>
+                      </a:pPr>
+                      <a:r>
+                        <a:rPr lang="en-US" sz="1700" dirty="0">
+                          <a:solidFill>
+                            <a:srgbClr val="15211B"/>
+                          </a:solidFill>
+                        </a:rPr>
+                        <a:t>Kode simpan lebih rumit daripada hapus lalu buat ulang</a:t>
+                      </a:r>
+                      <a:endParaRPr lang="en-US" sz="1700" dirty="0"/>
+                    </a:p>
+                  </a:txBody>
+                  <a:tcPr marL="164592" marR="164592" marT="182880" marB="182880" anchor="t">
+                    <a:lnL w="9525" cap="flat" cmpd="sng" algn="ctr">
+                      <a:solidFill>
+                        <a:srgbClr val="D6E2DA"/>
+                      </a:solidFill>
+                      <a:prstDash val="solid"/>
+                      <a:round/>
+                      <a:headEnd type="none" w="med" len="med"/>
+                      <a:tailEnd type="none" w="med" len="med"/>
+                    </a:lnL>
+                    <a:lnR w="9525" cap="flat" cmpd="sng" algn="ctr">
+                      <a:solidFill>
+                        <a:srgbClr val="D6E2DA"/>
+                      </a:solidFill>
+                      <a:prstDash val="solid"/>
+                      <a:round/>
+                      <a:headEnd type="none" w="med" len="med"/>
+                      <a:tailEnd type="none" w="med" len="med"/>
+                    </a:lnR>
+                    <a:lnT w="9525" cap="flat" cmpd="sng" algn="ctr">
+                      <a:solidFill>
+                        <a:srgbClr val="D6E2DA"/>
+                      </a:solidFill>
+                      <a:prstDash val="solid"/>
+                      <a:round/>
+                      <a:headEnd type="none" w="med" len="med"/>
+                      <a:tailEnd type="none" w="med" len="med"/>
+                    </a:lnT>
+                    <a:lnB w="9525" cap="flat" cmpd="sng" algn="ctr">
+                      <a:solidFill>
+                        <a:srgbClr val="D6E2DA"/>
+                      </a:solidFill>
+                      <a:prstDash val="solid"/>
+                      <a:round/>
+                      <a:headEnd type="none" w="med" len="med"/>
+                      <a:tailEnd type="none" w="med" len="med"/>
+                    </a:lnB>
+                  </a:tcPr>
+                </a:tc>
+              </a:tr>
+            </a:tbl>
+          </a:graphicData>
+        </a:graphic>
+      </p:graphicFrame>
       <p:sp>
         <p:nvSpPr>
           <p:cNvPr id="25" name="Slide Number Placeholder 0"/>
@@ -3472,456 +3828,932 @@
                   <a:schemeClr val="tx1"/>
                 </a:solidFill>
               </a:rPr>
-              <a:t>Tech stack dan alasannya</a:t>
+              <a:t>Kenapa stack ini, dan apa alternatifnya</a:t>
             </a:r>
             <a:endParaRPr lang="en-US" sz="3200" dirty="0"/>
           </a:p>
         </p:txBody>
       </p:sp>
-      <p:sp>
-        <p:nvSpPr>
-          <p:cNvPr id="5" name="card"/>
-          <p:cNvSpPr/>
-          <p:nvPr/>
-        </p:nvSpPr>
-        <p:spPr>
-          <a:xfrm>
-            <a:off x="548640" y="1691640"/>
-            <a:ext cx="2606040" cy="2926080"/>
-          </a:xfrm>
-          <a:prstGeom prst="roundRect">
-            <a:avLst>
-              <a:gd name="adj" fmla="val 4211"/>
-            </a:avLst>
-          </a:prstGeom>
-          <a:solidFill>
-            <a:schemeClr val="accent1"/>
-          </a:solidFill>
-          <a:ln w="12700">
-            <a:solidFill>
-              <a:schemeClr val="accent1"/>
-            </a:solidFill>
-            <a:prstDash val="solid"/>
-          </a:ln>
-        </p:spPr>
-      </p:sp>
-      <p:sp>
-        <p:nvSpPr>
-          <p:cNvPr id="6" name="Text 3"/>
-          <p:cNvSpPr txBox="1"/>
-          <p:nvPr/>
-        </p:nvSpPr>
-        <p:spPr>
-          <a:xfrm>
-            <a:off x="822960" y="1965960"/>
-            <a:ext cx="2103120" cy="548640"/>
-          </a:xfrm>
-          <a:prstGeom prst="rect">
-            <a:avLst/>
-          </a:prstGeom>
-          <a:noFill/>
-          <a:ln/>
-        </p:spPr>
-        <p:txBody>
-          <a:bodyPr wrap="square" lIns="0" tIns="0" rIns="0" bIns="0" rtlCol="0" anchor="ctr"/>
-          <a:lstStyle/>
-          <a:p>
-            <a:pPr indent="0" marL="0">
-              <a:buNone/>
-            </a:pPr>
-            <a:r>
-              <a:rPr lang="en-US" sz="2200" b="1" dirty="0">
-                <a:solidFill>
-                  <a:schemeClr val="bg1"/>
-                </a:solidFill>
-                <a:latin typeface="+mj-lt" pitchFamily="34" charset="0"/>
-                <a:ea typeface="+mj-lt" pitchFamily="34" charset="-122"/>
-                <a:cs typeface="+mj-lt" pitchFamily="34" charset="-120"/>
-              </a:rPr>
-              <a:t>Laravel 10</a:t>
-            </a:r>
-            <a:endParaRPr lang="en-US" sz="2200" dirty="0"/>
-          </a:p>
-        </p:txBody>
-      </p:sp>
-      <p:sp>
-        <p:nvSpPr>
-          <p:cNvPr id="7" name="Text 4"/>
-          <p:cNvSpPr txBox="1"/>
-          <p:nvPr/>
-        </p:nvSpPr>
-        <p:spPr>
-          <a:xfrm>
-            <a:off x="822960" y="2697480"/>
-            <a:ext cx="2103120" cy="1737360"/>
-          </a:xfrm>
-          <a:prstGeom prst="rect">
-            <a:avLst/>
-          </a:prstGeom>
-          <a:noFill/>
-          <a:ln/>
-        </p:spPr>
-        <p:txBody>
-          <a:bodyPr wrap="square" lIns="0" tIns="0" rIns="0" bIns="0" rtlCol="0" anchor="t"/>
-          <a:lstStyle/>
-          <a:p>
-            <a:pPr indent="0" marL="0">
-              <a:buNone/>
-            </a:pPr>
-            <a:r>
-              <a:rPr lang="en-US" sz="1500" dirty="0">
-                <a:solidFill>
-                  <a:schemeClr val="bg1"/>
-                </a:solidFill>
-              </a:rPr>
-              <a:t>Dashboard admin: form, validasi, CRUD. Bagian yang saya kerjakan.</a:t>
-            </a:r>
-            <a:endParaRPr lang="en-US" sz="1500" dirty="0"/>
-          </a:p>
-        </p:txBody>
-      </p:sp>
-      <p:sp>
-        <p:nvSpPr>
-          <p:cNvPr id="8" name="card"/>
-          <p:cNvSpPr/>
-          <p:nvPr/>
-        </p:nvSpPr>
-        <p:spPr>
-          <a:xfrm>
-            <a:off x="3383280" y="1691640"/>
-            <a:ext cx="2606040" cy="2926080"/>
-          </a:xfrm>
-          <a:prstGeom prst="roundRect">
-            <a:avLst>
-              <a:gd name="adj" fmla="val 4211"/>
-            </a:avLst>
-          </a:prstGeom>
-          <a:solidFill>
-            <a:schemeClr val="tx2"/>
-          </a:solidFill>
-          <a:ln w="12700">
-            <a:solidFill>
-              <a:schemeClr val="tx2"/>
-            </a:solidFill>
-            <a:prstDash val="solid"/>
-          </a:ln>
-        </p:spPr>
-      </p:sp>
-      <p:sp>
-        <p:nvSpPr>
-          <p:cNvPr id="9" name="Text 6"/>
-          <p:cNvSpPr txBox="1"/>
-          <p:nvPr/>
-        </p:nvSpPr>
-        <p:spPr>
-          <a:xfrm>
-            <a:off x="3657600" y="1965960"/>
-            <a:ext cx="2103120" cy="548640"/>
-          </a:xfrm>
-          <a:prstGeom prst="rect">
-            <a:avLst/>
-          </a:prstGeom>
-          <a:noFill/>
-          <a:ln/>
-        </p:spPr>
-        <p:txBody>
-          <a:bodyPr wrap="square" lIns="0" tIns="0" rIns="0" bIns="0" rtlCol="0" anchor="ctr"/>
-          <a:lstStyle/>
-          <a:p>
-            <a:pPr indent="0" marL="0">
-              <a:buNone/>
-            </a:pPr>
-            <a:r>
-              <a:rPr lang="en-US" sz="2200" b="1" dirty="0">
-                <a:solidFill>
-                  <a:schemeClr val="bg1"/>
-                </a:solidFill>
-                <a:latin typeface="+mj-lt" pitchFamily="34" charset="0"/>
-                <a:ea typeface="+mj-lt" pitchFamily="34" charset="-122"/>
-                <a:cs typeface="+mj-lt" pitchFamily="34" charset="-120"/>
-              </a:rPr>
-              <a:t>PostgreSQL</a:t>
-            </a:r>
-            <a:endParaRPr lang="en-US" sz="2200" dirty="0"/>
-          </a:p>
-        </p:txBody>
-      </p:sp>
-      <p:sp>
-        <p:nvSpPr>
-          <p:cNvPr id="10" name="Text 7"/>
-          <p:cNvSpPr txBox="1"/>
-          <p:nvPr/>
-        </p:nvSpPr>
-        <p:spPr>
-          <a:xfrm>
-            <a:off x="3657600" y="2697480"/>
-            <a:ext cx="2103120" cy="1737360"/>
-          </a:xfrm>
-          <a:prstGeom prst="rect">
-            <a:avLst/>
-          </a:prstGeom>
-          <a:noFill/>
-          <a:ln/>
-        </p:spPr>
-        <p:txBody>
-          <a:bodyPr wrap="square" lIns="0" tIns="0" rIns="0" bIns="0" rtlCol="0" anchor="t"/>
-          <a:lstStyle/>
-          <a:p>
-            <a:pPr indent="0" marL="0">
-              <a:buNone/>
-            </a:pPr>
-            <a:r>
-              <a:rPr lang="en-US" sz="1500" dirty="0">
-                <a:solidFill>
-                  <a:schemeClr val="bg1"/>
-                </a:solidFill>
-              </a:rPr>
-              <a:t>Satu database untuk API dan dashboard, dengan transaksi dan kunci baris.</a:t>
-            </a:r>
-            <a:endParaRPr lang="en-US" sz="1500" dirty="0"/>
-          </a:p>
-        </p:txBody>
-      </p:sp>
-      <p:sp>
-        <p:nvSpPr>
-          <p:cNvPr id="11" name="card"/>
-          <p:cNvSpPr/>
-          <p:nvPr/>
-        </p:nvSpPr>
-        <p:spPr>
-          <a:xfrm>
-            <a:off x="6217920" y="1691640"/>
-            <a:ext cx="2606040" cy="2926080"/>
-          </a:xfrm>
-          <a:prstGeom prst="roundRect">
-            <a:avLst>
-              <a:gd name="adj" fmla="val 4211"/>
-            </a:avLst>
-          </a:prstGeom>
-          <a:solidFill>
-            <a:schemeClr val="bg2"/>
-          </a:solidFill>
-          <a:ln w="12700">
-            <a:solidFill>
-              <a:schemeClr val="bg2"/>
-            </a:solidFill>
-            <a:prstDash val="solid"/>
-          </a:ln>
-        </p:spPr>
-      </p:sp>
-      <p:sp>
-        <p:nvSpPr>
-          <p:cNvPr id="12" name="Text 9"/>
-          <p:cNvSpPr txBox="1"/>
-          <p:nvPr/>
-        </p:nvSpPr>
-        <p:spPr>
-          <a:xfrm>
-            <a:off x="6492240" y="1965960"/>
-            <a:ext cx="2103120" cy="548640"/>
-          </a:xfrm>
-          <a:prstGeom prst="rect">
-            <a:avLst/>
-          </a:prstGeom>
-          <a:noFill/>
-          <a:ln/>
-        </p:spPr>
-        <p:txBody>
-          <a:bodyPr wrap="square" lIns="0" tIns="0" rIns="0" bIns="0" rtlCol="0" anchor="ctr"/>
-          <a:lstStyle/>
-          <a:p>
-            <a:pPr indent="0" marL="0">
-              <a:buNone/>
-            </a:pPr>
-            <a:r>
-              <a:rPr lang="en-US" sz="2200" b="1" dirty="0">
-                <a:solidFill>
-                  <a:schemeClr val="tx1"/>
-                </a:solidFill>
-                <a:latin typeface="+mj-lt" pitchFamily="34" charset="0"/>
-                <a:ea typeface="+mj-lt" pitchFamily="34" charset="-122"/>
-                <a:cs typeface="+mj-lt" pitchFamily="34" charset="-120"/>
-              </a:rPr>
-              <a:t>Go</a:t>
-            </a:r>
-            <a:endParaRPr lang="en-US" sz="2200" dirty="0"/>
-          </a:p>
-        </p:txBody>
-      </p:sp>
-      <p:sp>
-        <p:nvSpPr>
-          <p:cNvPr id="13" name="Text 10"/>
-          <p:cNvSpPr txBox="1"/>
-          <p:nvPr/>
-        </p:nvSpPr>
-        <p:spPr>
-          <a:xfrm>
-            <a:off x="6492240" y="2697480"/>
-            <a:ext cx="2103120" cy="1737360"/>
-          </a:xfrm>
-          <a:prstGeom prst="rect">
-            <a:avLst/>
-          </a:prstGeom>
-          <a:noFill/>
-          <a:ln/>
-        </p:spPr>
-        <p:txBody>
-          <a:bodyPr wrap="square" lIns="0" tIns="0" rIns="0" bIns="0" rtlCol="0" anchor="t"/>
-          <a:lstStyle/>
-          <a:p>
-            <a:pPr indent="0" marL="0">
-              <a:buNone/>
-            </a:pPr>
-            <a:r>
-              <a:rPr lang="en-US" sz="1500" dirty="0">
-                <a:solidFill>
-                  <a:schemeClr val="tx1"/>
-                </a:solidFill>
-              </a:rPr>
-              <a:t>API aplikasi: trafik pemutaran tinggi, latensi rendah.</a:t>
-            </a:r>
-            <a:endParaRPr lang="en-US" sz="1500" dirty="0"/>
-          </a:p>
-        </p:txBody>
-      </p:sp>
-      <p:sp>
-        <p:nvSpPr>
-          <p:cNvPr id="14" name="card"/>
-          <p:cNvSpPr/>
-          <p:nvPr/>
-        </p:nvSpPr>
-        <p:spPr>
-          <a:xfrm>
-            <a:off x="9052560" y="1691640"/>
-            <a:ext cx="2606040" cy="2926080"/>
-          </a:xfrm>
-          <a:prstGeom prst="roundRect">
-            <a:avLst>
-              <a:gd name="adj" fmla="val 4211"/>
-            </a:avLst>
-          </a:prstGeom>
-          <a:solidFill>
-            <a:schemeClr val="bg2"/>
-          </a:solidFill>
-          <a:ln w="12700">
-            <a:solidFill>
-              <a:schemeClr val="bg2"/>
-            </a:solidFill>
-            <a:prstDash val="solid"/>
-          </a:ln>
-        </p:spPr>
-      </p:sp>
-      <p:sp>
-        <p:nvSpPr>
-          <p:cNvPr id="15" name="Text 12"/>
-          <p:cNvSpPr txBox="1"/>
-          <p:nvPr/>
-        </p:nvSpPr>
-        <p:spPr>
-          <a:xfrm>
-            <a:off x="9326880" y="1965960"/>
-            <a:ext cx="2103120" cy="548640"/>
-          </a:xfrm>
-          <a:prstGeom prst="rect">
-            <a:avLst/>
-          </a:prstGeom>
-          <a:noFill/>
-          <a:ln/>
-        </p:spPr>
-        <p:txBody>
-          <a:bodyPr wrap="square" lIns="0" tIns="0" rIns="0" bIns="0" rtlCol="0" anchor="ctr"/>
-          <a:lstStyle/>
-          <a:p>
-            <a:pPr indent="0" marL="0">
-              <a:buNone/>
-            </a:pPr>
-            <a:r>
-              <a:rPr lang="en-US" sz="2200" b="1" dirty="0">
-                <a:solidFill>
-                  <a:schemeClr val="tx1"/>
-                </a:solidFill>
-                <a:latin typeface="+mj-lt" pitchFamily="34" charset="0"/>
-                <a:ea typeface="+mj-lt" pitchFamily="34" charset="-122"/>
-                <a:cs typeface="+mj-lt" pitchFamily="34" charset="-120"/>
-              </a:rPr>
-              <a:t>Vue.js</a:t>
-            </a:r>
-            <a:endParaRPr lang="en-US" sz="2200" dirty="0"/>
-          </a:p>
-        </p:txBody>
-      </p:sp>
-      <p:sp>
-        <p:nvSpPr>
-          <p:cNvPr id="16" name="Text 13"/>
-          <p:cNvSpPr txBox="1"/>
-          <p:nvPr/>
-        </p:nvSpPr>
-        <p:spPr>
-          <a:xfrm>
-            <a:off x="9326880" y="2697480"/>
-            <a:ext cx="2103120" cy="1737360"/>
-          </a:xfrm>
-          <a:prstGeom prst="rect">
-            <a:avLst/>
-          </a:prstGeom>
-          <a:noFill/>
-          <a:ln/>
-        </p:spPr>
-        <p:txBody>
-          <a:bodyPr wrap="square" lIns="0" tIns="0" rIns="0" bIns="0" rtlCol="0" anchor="t"/>
-          <a:lstStyle/>
-          <a:p>
-            <a:pPr indent="0" marL="0">
-              <a:buNone/>
-            </a:pPr>
-            <a:r>
-              <a:rPr lang="en-US" sz="1500" dirty="0">
-                <a:solidFill>
-                  <a:schemeClr val="tx1"/>
-                </a:solidFill>
-              </a:rPr>
-              <a:t>Aplikasi web penonton.</a:t>
-            </a:r>
-            <a:endParaRPr lang="en-US" sz="1500" dirty="0"/>
-          </a:p>
-        </p:txBody>
-      </p:sp>
-      <p:sp>
-        <p:nvSpPr>
-          <p:cNvPr id="17" name="Text 14"/>
-          <p:cNvSpPr txBox="1"/>
-          <p:nvPr/>
-        </p:nvSpPr>
-        <p:spPr>
-          <a:xfrm>
-            <a:off x="548640" y="4983480"/>
-            <a:ext cx="11064240" cy="731520"/>
-          </a:xfrm>
-          <a:prstGeom prst="rect">
-            <a:avLst/>
-          </a:prstGeom>
-          <a:noFill/>
-          <a:ln/>
-        </p:spPr>
-        <p:txBody>
-          <a:bodyPr wrap="square" lIns="0" tIns="0" rIns="0" bIns="0" rtlCol="0" anchor="t"/>
-          <a:lstStyle/>
-          <a:p>
-            <a:pPr indent="0" marL="0">
-              <a:buNone/>
-            </a:pPr>
-            <a:r>
-              <a:rPr lang="en-US" sz="1500" dirty="0">
-                <a:solidFill>
-                  <a:schemeClr val="accent4"/>
-                </a:solidFill>
-              </a:rPr>
-              <a:t>Demo: Laravel 10, Blade, Tailwind, Chart.js, dan PostgreSQL seperti produksi. Yang hijau adalah bagian saya.</a:t>
-            </a:r>
-            <a:endParaRPr lang="en-US" sz="1500" dirty="0"/>
-          </a:p>
-        </p:txBody>
-      </p:sp>
+      <p:graphicFrame>
+        <p:nvGraphicFramePr>
+          <p:cNvPr id="12" name="Table 0"/>
+          <p:cNvGraphicFramePr>
+            <a:graphicFrameLocks noGrp="1"/>
+          </p:cNvGraphicFramePr>
+          <p:nvPr>
+            <p:extLst>
+              <p:ext uri="{D42A27DB-BD31-4B8C-83A1-F6EECF244321}">
+                <p14:modId xmlns:p14="http://schemas.microsoft.com/office/powerpoint/2010/main" val="1579011935"/>
+              </p:ext>
+            </p:extLst>
+          </p:nvPr>
+        </p:nvGraphicFramePr>
+        <p:xfrm>
+          <a:off x="548640" y="1508760"/>
+          <a:ext cx="11064240" cy="914400"/>
+        </p:xfrm>
+        <a:graphic>
+          <a:graphicData uri="http://schemas.openxmlformats.org/drawingml/2006/table">
+            <a:tbl>
+              <a:tblPr/>
+              <a:tblGrid>
+                <a:gridCol w="2194560"/>
+                <a:gridCol w="4114800"/>
+                <a:gridCol w="4754880"/>
+              </a:tblGrid>
+              <a:tr h="0">
+                <a:tc>
+                  <a:txBody>
+                    <a:bodyPr/>
+                    <a:lstStyle/>
+                    <a:p>
+                      <a:pPr indent="0" marL="0">
+                        <a:buNone/>
+                      </a:pPr>
+                      <a:r>
+                        <a:rPr lang="en-US" sz="1500" b="1" dirty="0">
+                          <a:solidFill>
+                            <a:srgbClr val="1E9E57"/>
+                          </a:solidFill>
+                        </a:rPr>
+                        <a:t>Pilihan</a:t>
+                      </a:r>
+                      <a:endParaRPr lang="en-US" sz="1500" dirty="0"/>
+                    </a:p>
+                  </a:txBody>
+                  <a:tcPr marL="164592" marR="164592" marT="182880" marB="182880" anchor="t">
+                    <a:lnL w="9525" cap="flat" cmpd="sng" algn="ctr">
+                      <a:solidFill>
+                        <a:srgbClr val="D6E2DA"/>
+                      </a:solidFill>
+                      <a:prstDash val="solid"/>
+                      <a:round/>
+                      <a:headEnd type="none" w="med" len="med"/>
+                      <a:tailEnd type="none" w="med" len="med"/>
+                    </a:lnL>
+                    <a:lnR w="9525" cap="flat" cmpd="sng" algn="ctr">
+                      <a:solidFill>
+                        <a:srgbClr val="D6E2DA"/>
+                      </a:solidFill>
+                      <a:prstDash val="solid"/>
+                      <a:round/>
+                      <a:headEnd type="none" w="med" len="med"/>
+                      <a:tailEnd type="none" w="med" len="med"/>
+                    </a:lnR>
+                    <a:lnT w="9525" cap="flat" cmpd="sng" algn="ctr">
+                      <a:solidFill>
+                        <a:srgbClr val="D6E2DA"/>
+                      </a:solidFill>
+                      <a:prstDash val="solid"/>
+                      <a:round/>
+                      <a:headEnd type="none" w="med" len="med"/>
+                      <a:tailEnd type="none" w="med" len="med"/>
+                    </a:lnT>
+                    <a:lnB w="9525" cap="flat" cmpd="sng" algn="ctr">
+                      <a:solidFill>
+                        <a:srgbClr val="D6E2DA"/>
+                      </a:solidFill>
+                      <a:prstDash val="solid"/>
+                      <a:round/>
+                      <a:headEnd type="none" w="med" len="med"/>
+                      <a:tailEnd type="none" w="med" len="med"/>
+                    </a:lnB>
+                    <a:solidFill>
+                      <a:srgbClr val="EEF3EF"/>
+                    </a:solidFill>
+                  </a:tcPr>
+                </a:tc>
+                <a:tc>
+                  <a:txBody>
+                    <a:bodyPr/>
+                    <a:lstStyle/>
+                    <a:p>
+                      <a:pPr indent="0" marL="0">
+                        <a:buNone/>
+                      </a:pPr>
+                      <a:r>
+                        <a:rPr lang="en-US" sz="1500" b="1" dirty="0">
+                          <a:solidFill>
+                            <a:srgbClr val="1E9E57"/>
+                          </a:solidFill>
+                        </a:rPr>
+                        <a:t>Kenapa</a:t>
+                      </a:r>
+                      <a:endParaRPr lang="en-US" sz="1500" dirty="0"/>
+                    </a:p>
+                  </a:txBody>
+                  <a:tcPr marL="164592" marR="164592" marT="182880" marB="182880" anchor="t">
+                    <a:lnL w="9525" cap="flat" cmpd="sng" algn="ctr">
+                      <a:solidFill>
+                        <a:srgbClr val="D6E2DA"/>
+                      </a:solidFill>
+                      <a:prstDash val="solid"/>
+                      <a:round/>
+                      <a:headEnd type="none" w="med" len="med"/>
+                      <a:tailEnd type="none" w="med" len="med"/>
+                    </a:lnL>
+                    <a:lnR w="9525" cap="flat" cmpd="sng" algn="ctr">
+                      <a:solidFill>
+                        <a:srgbClr val="D6E2DA"/>
+                      </a:solidFill>
+                      <a:prstDash val="solid"/>
+                      <a:round/>
+                      <a:headEnd type="none" w="med" len="med"/>
+                      <a:tailEnd type="none" w="med" len="med"/>
+                    </a:lnR>
+                    <a:lnT w="9525" cap="flat" cmpd="sng" algn="ctr">
+                      <a:solidFill>
+                        <a:srgbClr val="D6E2DA"/>
+                      </a:solidFill>
+                      <a:prstDash val="solid"/>
+                      <a:round/>
+                      <a:headEnd type="none" w="med" len="med"/>
+                      <a:tailEnd type="none" w="med" len="med"/>
+                    </a:lnT>
+                    <a:lnB w="9525" cap="flat" cmpd="sng" algn="ctr">
+                      <a:solidFill>
+                        <a:srgbClr val="D6E2DA"/>
+                      </a:solidFill>
+                      <a:prstDash val="solid"/>
+                      <a:round/>
+                      <a:headEnd type="none" w="med" len="med"/>
+                      <a:tailEnd type="none" w="med" len="med"/>
+                    </a:lnB>
+                    <a:solidFill>
+                      <a:srgbClr val="EEF3EF"/>
+                    </a:solidFill>
+                  </a:tcPr>
+                </a:tc>
+                <a:tc>
+                  <a:txBody>
+                    <a:bodyPr/>
+                    <a:lstStyle/>
+                    <a:p>
+                      <a:pPr indent="0" marL="0">
+                        <a:buNone/>
+                      </a:pPr>
+                      <a:r>
+                        <a:rPr lang="en-US" sz="1500" b="1" dirty="0">
+                          <a:solidFill>
+                            <a:srgbClr val="1E9E57"/>
+                          </a:solidFill>
+                        </a:rPr>
+                        <a:t>Alternatif yang saya pertimbangkan</a:t>
+                      </a:r>
+                      <a:endParaRPr lang="en-US" sz="1500" dirty="0"/>
+                    </a:p>
+                  </a:txBody>
+                  <a:tcPr marL="164592" marR="164592" marT="182880" marB="182880" anchor="t">
+                    <a:lnL w="9525" cap="flat" cmpd="sng" algn="ctr">
+                      <a:solidFill>
+                        <a:srgbClr val="D6E2DA"/>
+                      </a:solidFill>
+                      <a:prstDash val="solid"/>
+                      <a:round/>
+                      <a:headEnd type="none" w="med" len="med"/>
+                      <a:tailEnd type="none" w="med" len="med"/>
+                    </a:lnL>
+                    <a:lnR w="9525" cap="flat" cmpd="sng" algn="ctr">
+                      <a:solidFill>
+                        <a:srgbClr val="D6E2DA"/>
+                      </a:solidFill>
+                      <a:prstDash val="solid"/>
+                      <a:round/>
+                      <a:headEnd type="none" w="med" len="med"/>
+                      <a:tailEnd type="none" w="med" len="med"/>
+                    </a:lnR>
+                    <a:lnT w="9525" cap="flat" cmpd="sng" algn="ctr">
+                      <a:solidFill>
+                        <a:srgbClr val="D6E2DA"/>
+                      </a:solidFill>
+                      <a:prstDash val="solid"/>
+                      <a:round/>
+                      <a:headEnd type="none" w="med" len="med"/>
+                      <a:tailEnd type="none" w="med" len="med"/>
+                    </a:lnT>
+                    <a:lnB w="9525" cap="flat" cmpd="sng" algn="ctr">
+                      <a:solidFill>
+                        <a:srgbClr val="D6E2DA"/>
+                      </a:solidFill>
+                      <a:prstDash val="solid"/>
+                      <a:round/>
+                      <a:headEnd type="none" w="med" len="med"/>
+                      <a:tailEnd type="none" w="med" len="med"/>
+                    </a:lnB>
+                    <a:solidFill>
+                      <a:srgbClr val="EEF3EF"/>
+                    </a:solidFill>
+                  </a:tcPr>
+                </a:tc>
+              </a:tr>
+              <a:tr h="0">
+                <a:tc>
+                  <a:txBody>
+                    <a:bodyPr/>
+                    <a:lstStyle/>
+                    <a:p>
+                      <a:pPr indent="0" marL="0">
+                        <a:buNone/>
+                      </a:pPr>
+                      <a:r>
+                        <a:rPr lang="en-US" sz="1700" b="1" dirty="0">
+                          <a:solidFill>
+                            <a:srgbClr val="15211B"/>
+                          </a:solidFill>
+                        </a:rPr>
+                        <a:t>Laravel 10</a:t>
+                      </a:r>
+                      <a:endParaRPr lang="en-US" sz="1700" dirty="0"/>
+                    </a:p>
+                  </a:txBody>
+                  <a:tcPr marL="164592" marR="164592" marT="182880" marB="182880" anchor="t">
+                    <a:lnL w="9525" cap="flat" cmpd="sng" algn="ctr">
+                      <a:solidFill>
+                        <a:srgbClr val="D6E2DA"/>
+                      </a:solidFill>
+                      <a:prstDash val="solid"/>
+                      <a:round/>
+                      <a:headEnd type="none" w="med" len="med"/>
+                      <a:tailEnd type="none" w="med" len="med"/>
+                    </a:lnL>
+                    <a:lnR w="9525" cap="flat" cmpd="sng" algn="ctr">
+                      <a:solidFill>
+                        <a:srgbClr val="D6E2DA"/>
+                      </a:solidFill>
+                      <a:prstDash val="solid"/>
+                      <a:round/>
+                      <a:headEnd type="none" w="med" len="med"/>
+                      <a:tailEnd type="none" w="med" len="med"/>
+                    </a:lnR>
+                    <a:lnT w="9525" cap="flat" cmpd="sng" algn="ctr">
+                      <a:solidFill>
+                        <a:srgbClr val="D6E2DA"/>
+                      </a:solidFill>
+                      <a:prstDash val="solid"/>
+                      <a:round/>
+                      <a:headEnd type="none" w="med" len="med"/>
+                      <a:tailEnd type="none" w="med" len="med"/>
+                    </a:lnT>
+                    <a:lnB w="9525" cap="flat" cmpd="sng" algn="ctr">
+                      <a:solidFill>
+                        <a:srgbClr val="D6E2DA"/>
+                      </a:solidFill>
+                      <a:prstDash val="solid"/>
+                      <a:round/>
+                      <a:headEnd type="none" w="med" len="med"/>
+                      <a:tailEnd type="none" w="med" len="med"/>
+                    </a:lnB>
+                  </a:tcPr>
+                </a:tc>
+                <a:tc>
+                  <a:txBody>
+                    <a:bodyPr/>
+                    <a:lstStyle/>
+                    <a:p>
+                      <a:pPr indent="0" marL="0">
+                        <a:buNone/>
+                      </a:pPr>
+                      <a:r>
+                        <a:rPr lang="en-US" sz="1700" dirty="0">
+                          <a:solidFill>
+                            <a:srgbClr val="15211B"/>
+                          </a:solidFill>
+                        </a:rPr>
+                        <a:t>Dashboard: form, validasi, CRUD. Bagian saya</a:t>
+                      </a:r>
+                      <a:endParaRPr lang="en-US" sz="1700" dirty="0"/>
+                    </a:p>
+                  </a:txBody>
+                  <a:tcPr marL="164592" marR="164592" marT="182880" marB="182880" anchor="t">
+                    <a:lnL w="9525" cap="flat" cmpd="sng" algn="ctr">
+                      <a:solidFill>
+                        <a:srgbClr val="D6E2DA"/>
+                      </a:solidFill>
+                      <a:prstDash val="solid"/>
+                      <a:round/>
+                      <a:headEnd type="none" w="med" len="med"/>
+                      <a:tailEnd type="none" w="med" len="med"/>
+                    </a:lnL>
+                    <a:lnR w="9525" cap="flat" cmpd="sng" algn="ctr">
+                      <a:solidFill>
+                        <a:srgbClr val="D6E2DA"/>
+                      </a:solidFill>
+                      <a:prstDash val="solid"/>
+                      <a:round/>
+                      <a:headEnd type="none" w="med" len="med"/>
+                      <a:tailEnd type="none" w="med" len="med"/>
+                    </a:lnR>
+                    <a:lnT w="9525" cap="flat" cmpd="sng" algn="ctr">
+                      <a:solidFill>
+                        <a:srgbClr val="D6E2DA"/>
+                      </a:solidFill>
+                      <a:prstDash val="solid"/>
+                      <a:round/>
+                      <a:headEnd type="none" w="med" len="med"/>
+                      <a:tailEnd type="none" w="med" len="med"/>
+                    </a:lnT>
+                    <a:lnB w="9525" cap="flat" cmpd="sng" algn="ctr">
+                      <a:solidFill>
+                        <a:srgbClr val="D6E2DA"/>
+                      </a:solidFill>
+                      <a:prstDash val="solid"/>
+                      <a:round/>
+                      <a:headEnd type="none" w="med" len="med"/>
+                      <a:tailEnd type="none" w="med" len="med"/>
+                    </a:lnB>
+                  </a:tcPr>
+                </a:tc>
+                <a:tc>
+                  <a:txBody>
+                    <a:bodyPr/>
+                    <a:lstStyle/>
+                    <a:p>
+                      <a:pPr indent="0" marL="0">
+                        <a:buNone/>
+                      </a:pPr>
+                      <a:r>
+                        <a:rPr lang="en-US" sz="1700" dirty="0">
+                          <a:solidFill>
+                            <a:srgbClr val="15211B"/>
+                          </a:solidFill>
+                        </a:rPr>
+                        <a:t>Go juga untuk dashboard: satu bahasa, tapi CRUD admin jauh lebih lama dibuat</a:t>
+                      </a:r>
+                      <a:endParaRPr lang="en-US" sz="1700" dirty="0"/>
+                    </a:p>
+                  </a:txBody>
+                  <a:tcPr marL="164592" marR="164592" marT="182880" marB="182880" anchor="t">
+                    <a:lnL w="9525" cap="flat" cmpd="sng" algn="ctr">
+                      <a:solidFill>
+                        <a:srgbClr val="D6E2DA"/>
+                      </a:solidFill>
+                      <a:prstDash val="solid"/>
+                      <a:round/>
+                      <a:headEnd type="none" w="med" len="med"/>
+                      <a:tailEnd type="none" w="med" len="med"/>
+                    </a:lnL>
+                    <a:lnR w="9525" cap="flat" cmpd="sng" algn="ctr">
+                      <a:solidFill>
+                        <a:srgbClr val="D6E2DA"/>
+                      </a:solidFill>
+                      <a:prstDash val="solid"/>
+                      <a:round/>
+                      <a:headEnd type="none" w="med" len="med"/>
+                      <a:tailEnd type="none" w="med" len="med"/>
+                    </a:lnR>
+                    <a:lnT w="9525" cap="flat" cmpd="sng" algn="ctr">
+                      <a:solidFill>
+                        <a:srgbClr val="D6E2DA"/>
+                      </a:solidFill>
+                      <a:prstDash val="solid"/>
+                      <a:round/>
+                      <a:headEnd type="none" w="med" len="med"/>
+                      <a:tailEnd type="none" w="med" len="med"/>
+                    </a:lnT>
+                    <a:lnB w="9525" cap="flat" cmpd="sng" algn="ctr">
+                      <a:solidFill>
+                        <a:srgbClr val="D6E2DA"/>
+                      </a:solidFill>
+                      <a:prstDash val="solid"/>
+                      <a:round/>
+                      <a:headEnd type="none" w="med" len="med"/>
+                      <a:tailEnd type="none" w="med" len="med"/>
+                    </a:lnB>
+                  </a:tcPr>
+                </a:tc>
+              </a:tr>
+              <a:tr h="0">
+                <a:tc>
+                  <a:txBody>
+                    <a:bodyPr/>
+                    <a:lstStyle/>
+                    <a:p>
+                      <a:pPr indent="0" marL="0">
+                        <a:buNone/>
+                      </a:pPr>
+                      <a:r>
+                        <a:rPr lang="en-US" sz="1700" b="1" dirty="0">
+                          <a:solidFill>
+                            <a:srgbClr val="15211B"/>
+                          </a:solidFill>
+                        </a:rPr>
+                        <a:t>PostgreSQL</a:t>
+                      </a:r>
+                      <a:endParaRPr lang="en-US" sz="1700" dirty="0"/>
+                    </a:p>
+                  </a:txBody>
+                  <a:tcPr marL="164592" marR="164592" marT="182880" marB="182880" anchor="t">
+                    <a:lnL w="9525" cap="flat" cmpd="sng" algn="ctr">
+                      <a:solidFill>
+                        <a:srgbClr val="D6E2DA"/>
+                      </a:solidFill>
+                      <a:prstDash val="solid"/>
+                      <a:round/>
+                      <a:headEnd type="none" w="med" len="med"/>
+                      <a:tailEnd type="none" w="med" len="med"/>
+                    </a:lnL>
+                    <a:lnR w="9525" cap="flat" cmpd="sng" algn="ctr">
+                      <a:solidFill>
+                        <a:srgbClr val="D6E2DA"/>
+                      </a:solidFill>
+                      <a:prstDash val="solid"/>
+                      <a:round/>
+                      <a:headEnd type="none" w="med" len="med"/>
+                      <a:tailEnd type="none" w="med" len="med"/>
+                    </a:lnR>
+                    <a:lnT w="9525" cap="flat" cmpd="sng" algn="ctr">
+                      <a:solidFill>
+                        <a:srgbClr val="D6E2DA"/>
+                      </a:solidFill>
+                      <a:prstDash val="solid"/>
+                      <a:round/>
+                      <a:headEnd type="none" w="med" len="med"/>
+                      <a:tailEnd type="none" w="med" len="med"/>
+                    </a:lnT>
+                    <a:lnB w="9525" cap="flat" cmpd="sng" algn="ctr">
+                      <a:solidFill>
+                        <a:srgbClr val="D6E2DA"/>
+                      </a:solidFill>
+                      <a:prstDash val="solid"/>
+                      <a:round/>
+                      <a:headEnd type="none" w="med" len="med"/>
+                      <a:tailEnd type="none" w="med" len="med"/>
+                    </a:lnB>
+                  </a:tcPr>
+                </a:tc>
+                <a:tc>
+                  <a:txBody>
+                    <a:bodyPr/>
+                    <a:lstStyle/>
+                    <a:p>
+                      <a:pPr indent="0" marL="0">
+                        <a:buNone/>
+                      </a:pPr>
+                      <a:r>
+                        <a:rPr lang="en-US" sz="1700" dirty="0">
+                          <a:solidFill>
+                            <a:srgbClr val="15211B"/>
+                          </a:solidFill>
+                        </a:rPr>
+                        <a:t>Dipakai bersama API Go; transaksi dan row lock</a:t>
+                      </a:r>
+                      <a:endParaRPr lang="en-US" sz="1700" dirty="0"/>
+                    </a:p>
+                  </a:txBody>
+                  <a:tcPr marL="164592" marR="164592" marT="182880" marB="182880" anchor="t">
+                    <a:lnL w="9525" cap="flat" cmpd="sng" algn="ctr">
+                      <a:solidFill>
+                        <a:srgbClr val="D6E2DA"/>
+                      </a:solidFill>
+                      <a:prstDash val="solid"/>
+                      <a:round/>
+                      <a:headEnd type="none" w="med" len="med"/>
+                      <a:tailEnd type="none" w="med" len="med"/>
+                    </a:lnL>
+                    <a:lnR w="9525" cap="flat" cmpd="sng" algn="ctr">
+                      <a:solidFill>
+                        <a:srgbClr val="D6E2DA"/>
+                      </a:solidFill>
+                      <a:prstDash val="solid"/>
+                      <a:round/>
+                      <a:headEnd type="none" w="med" len="med"/>
+                      <a:tailEnd type="none" w="med" len="med"/>
+                    </a:lnR>
+                    <a:lnT w="9525" cap="flat" cmpd="sng" algn="ctr">
+                      <a:solidFill>
+                        <a:srgbClr val="D6E2DA"/>
+                      </a:solidFill>
+                      <a:prstDash val="solid"/>
+                      <a:round/>
+                      <a:headEnd type="none" w="med" len="med"/>
+                      <a:tailEnd type="none" w="med" len="med"/>
+                    </a:lnT>
+                    <a:lnB w="9525" cap="flat" cmpd="sng" algn="ctr">
+                      <a:solidFill>
+                        <a:srgbClr val="D6E2DA"/>
+                      </a:solidFill>
+                      <a:prstDash val="solid"/>
+                      <a:round/>
+                      <a:headEnd type="none" w="med" len="med"/>
+                      <a:tailEnd type="none" w="med" len="med"/>
+                    </a:lnB>
+                  </a:tcPr>
+                </a:tc>
+                <a:tc>
+                  <a:txBody>
+                    <a:bodyPr/>
+                    <a:lstStyle/>
+                    <a:p>
+                      <a:pPr indent="0" marL="0">
+                        <a:buNone/>
+                      </a:pPr>
+                      <a:r>
+                        <a:rPr lang="en-US" sz="1700" dirty="0">
+                          <a:solidFill>
+                            <a:srgbClr val="15211B"/>
+                          </a:solidFill>
+                        </a:rPr>
+                        <a:t>Database terpisah untuk dashboard: berarti sinkronisasi data dua arah</a:t>
+                      </a:r>
+                      <a:endParaRPr lang="en-US" sz="1700" dirty="0"/>
+                    </a:p>
+                  </a:txBody>
+                  <a:tcPr marL="164592" marR="164592" marT="182880" marB="182880" anchor="t">
+                    <a:lnL w="9525" cap="flat" cmpd="sng" algn="ctr">
+                      <a:solidFill>
+                        <a:srgbClr val="D6E2DA"/>
+                      </a:solidFill>
+                      <a:prstDash val="solid"/>
+                      <a:round/>
+                      <a:headEnd type="none" w="med" len="med"/>
+                      <a:tailEnd type="none" w="med" len="med"/>
+                    </a:lnL>
+                    <a:lnR w="9525" cap="flat" cmpd="sng" algn="ctr">
+                      <a:solidFill>
+                        <a:srgbClr val="D6E2DA"/>
+                      </a:solidFill>
+                      <a:prstDash val="solid"/>
+                      <a:round/>
+                      <a:headEnd type="none" w="med" len="med"/>
+                      <a:tailEnd type="none" w="med" len="med"/>
+                    </a:lnR>
+                    <a:lnT w="9525" cap="flat" cmpd="sng" algn="ctr">
+                      <a:solidFill>
+                        <a:srgbClr val="D6E2DA"/>
+                      </a:solidFill>
+                      <a:prstDash val="solid"/>
+                      <a:round/>
+                      <a:headEnd type="none" w="med" len="med"/>
+                      <a:tailEnd type="none" w="med" len="med"/>
+                    </a:lnT>
+                    <a:lnB w="9525" cap="flat" cmpd="sng" algn="ctr">
+                      <a:solidFill>
+                        <a:srgbClr val="D6E2DA"/>
+                      </a:solidFill>
+                      <a:prstDash val="solid"/>
+                      <a:round/>
+                      <a:headEnd type="none" w="med" len="med"/>
+                      <a:tailEnd type="none" w="med" len="med"/>
+                    </a:lnB>
+                  </a:tcPr>
+                </a:tc>
+              </a:tr>
+              <a:tr h="0">
+                <a:tc>
+                  <a:txBody>
+                    <a:bodyPr/>
+                    <a:lstStyle/>
+                    <a:p>
+                      <a:pPr indent="0" marL="0">
+                        <a:buNone/>
+                      </a:pPr>
+                      <a:r>
+                        <a:rPr lang="en-US" sz="1700" b="1" dirty="0">
+                          <a:solidFill>
+                            <a:srgbClr val="15211B"/>
+                          </a:solidFill>
+                        </a:rPr>
+                        <a:t>Go</a:t>
+                      </a:r>
+                      <a:endParaRPr lang="en-US" sz="1700" dirty="0"/>
+                    </a:p>
+                  </a:txBody>
+                  <a:tcPr marL="164592" marR="164592" marT="182880" marB="182880" anchor="t">
+                    <a:lnL w="9525" cap="flat" cmpd="sng" algn="ctr">
+                      <a:solidFill>
+                        <a:srgbClr val="D6E2DA"/>
+                      </a:solidFill>
+                      <a:prstDash val="solid"/>
+                      <a:round/>
+                      <a:headEnd type="none" w="med" len="med"/>
+                      <a:tailEnd type="none" w="med" len="med"/>
+                    </a:lnL>
+                    <a:lnR w="9525" cap="flat" cmpd="sng" algn="ctr">
+                      <a:solidFill>
+                        <a:srgbClr val="D6E2DA"/>
+                      </a:solidFill>
+                      <a:prstDash val="solid"/>
+                      <a:round/>
+                      <a:headEnd type="none" w="med" len="med"/>
+                      <a:tailEnd type="none" w="med" len="med"/>
+                    </a:lnR>
+                    <a:lnT w="9525" cap="flat" cmpd="sng" algn="ctr">
+                      <a:solidFill>
+                        <a:srgbClr val="D6E2DA"/>
+                      </a:solidFill>
+                      <a:prstDash val="solid"/>
+                      <a:round/>
+                      <a:headEnd type="none" w="med" len="med"/>
+                      <a:tailEnd type="none" w="med" len="med"/>
+                    </a:lnT>
+                    <a:lnB w="9525" cap="flat" cmpd="sng" algn="ctr">
+                      <a:solidFill>
+                        <a:srgbClr val="D6E2DA"/>
+                      </a:solidFill>
+                      <a:prstDash val="solid"/>
+                      <a:round/>
+                      <a:headEnd type="none" w="med" len="med"/>
+                      <a:tailEnd type="none" w="med" len="med"/>
+                    </a:lnB>
+                  </a:tcPr>
+                </a:tc>
+                <a:tc>
+                  <a:txBody>
+                    <a:bodyPr/>
+                    <a:lstStyle/>
+                    <a:p>
+                      <a:pPr indent="0" marL="0">
+                        <a:buNone/>
+                      </a:pPr>
+                      <a:r>
+                        <a:rPr lang="en-US" sz="1700" dirty="0">
+                          <a:solidFill>
+                            <a:srgbClr val="15211B"/>
+                          </a:solidFill>
+                        </a:rPr>
+                        <a:t>API aplikasi: trafik pemutaran tinggi</a:t>
+                      </a:r>
+                      <a:endParaRPr lang="en-US" sz="1700" dirty="0"/>
+                    </a:p>
+                  </a:txBody>
+                  <a:tcPr marL="164592" marR="164592" marT="182880" marB="182880" anchor="t">
+                    <a:lnL w="9525" cap="flat" cmpd="sng" algn="ctr">
+                      <a:solidFill>
+                        <a:srgbClr val="D6E2DA"/>
+                      </a:solidFill>
+                      <a:prstDash val="solid"/>
+                      <a:round/>
+                      <a:headEnd type="none" w="med" len="med"/>
+                      <a:tailEnd type="none" w="med" len="med"/>
+                    </a:lnL>
+                    <a:lnR w="9525" cap="flat" cmpd="sng" algn="ctr">
+                      <a:solidFill>
+                        <a:srgbClr val="D6E2DA"/>
+                      </a:solidFill>
+                      <a:prstDash val="solid"/>
+                      <a:round/>
+                      <a:headEnd type="none" w="med" len="med"/>
+                      <a:tailEnd type="none" w="med" len="med"/>
+                    </a:lnR>
+                    <a:lnT w="9525" cap="flat" cmpd="sng" algn="ctr">
+                      <a:solidFill>
+                        <a:srgbClr val="D6E2DA"/>
+                      </a:solidFill>
+                      <a:prstDash val="solid"/>
+                      <a:round/>
+                      <a:headEnd type="none" w="med" len="med"/>
+                      <a:tailEnd type="none" w="med" len="med"/>
+                    </a:lnT>
+                    <a:lnB w="9525" cap="flat" cmpd="sng" algn="ctr">
+                      <a:solidFill>
+                        <a:srgbClr val="D6E2DA"/>
+                      </a:solidFill>
+                      <a:prstDash val="solid"/>
+                      <a:round/>
+                      <a:headEnd type="none" w="med" len="med"/>
+                      <a:tailEnd type="none" w="med" len="med"/>
+                    </a:lnB>
+                  </a:tcPr>
+                </a:tc>
+                <a:tc>
+                  <a:txBody>
+                    <a:bodyPr/>
+                    <a:lstStyle/>
+                    <a:p>
+                      <a:pPr indent="0" marL="0">
+                        <a:buNone/>
+                      </a:pPr>
+                      <a:r>
+                        <a:rPr lang="en-US" sz="1700" dirty="0">
+                          <a:solidFill>
+                            <a:srgbClr val="15211B"/>
+                          </a:solidFill>
+                        </a:rPr>
+                        <a:t>Bukan bagian saya; sudah ada sebelum dashboard</a:t>
+                      </a:r>
+                      <a:endParaRPr lang="en-US" sz="1700" dirty="0"/>
+                    </a:p>
+                  </a:txBody>
+                  <a:tcPr marL="164592" marR="164592" marT="182880" marB="182880" anchor="t">
+                    <a:lnL w="9525" cap="flat" cmpd="sng" algn="ctr">
+                      <a:solidFill>
+                        <a:srgbClr val="D6E2DA"/>
+                      </a:solidFill>
+                      <a:prstDash val="solid"/>
+                      <a:round/>
+                      <a:headEnd type="none" w="med" len="med"/>
+                      <a:tailEnd type="none" w="med" len="med"/>
+                    </a:lnL>
+                    <a:lnR w="9525" cap="flat" cmpd="sng" algn="ctr">
+                      <a:solidFill>
+                        <a:srgbClr val="D6E2DA"/>
+                      </a:solidFill>
+                      <a:prstDash val="solid"/>
+                      <a:round/>
+                      <a:headEnd type="none" w="med" len="med"/>
+                      <a:tailEnd type="none" w="med" len="med"/>
+                    </a:lnR>
+                    <a:lnT w="9525" cap="flat" cmpd="sng" algn="ctr">
+                      <a:solidFill>
+                        <a:srgbClr val="D6E2DA"/>
+                      </a:solidFill>
+                      <a:prstDash val="solid"/>
+                      <a:round/>
+                      <a:headEnd type="none" w="med" len="med"/>
+                      <a:tailEnd type="none" w="med" len="med"/>
+                    </a:lnT>
+                    <a:lnB w="9525" cap="flat" cmpd="sng" algn="ctr">
+                      <a:solidFill>
+                        <a:srgbClr val="D6E2DA"/>
+                      </a:solidFill>
+                      <a:prstDash val="solid"/>
+                      <a:round/>
+                      <a:headEnd type="none" w="med" len="med"/>
+                      <a:tailEnd type="none" w="med" len="med"/>
+                    </a:lnB>
+                  </a:tcPr>
+                </a:tc>
+              </a:tr>
+              <a:tr h="0">
+                <a:tc>
+                  <a:txBody>
+                    <a:bodyPr/>
+                    <a:lstStyle/>
+                    <a:p>
+                      <a:pPr indent="0" marL="0">
+                        <a:buNone/>
+                      </a:pPr>
+                      <a:r>
+                        <a:rPr lang="en-US" sz="1700" b="1" dirty="0">
+                          <a:solidFill>
+                            <a:srgbClr val="15211B"/>
+                          </a:solidFill>
+                        </a:rPr>
+                        <a:t>Blade + Chart.js</a:t>
+                      </a:r>
+                      <a:endParaRPr lang="en-US" sz="1700" dirty="0"/>
+                    </a:p>
+                  </a:txBody>
+                  <a:tcPr marL="164592" marR="164592" marT="182880" marB="182880" anchor="t">
+                    <a:lnL w="9525" cap="flat" cmpd="sng" algn="ctr">
+                      <a:solidFill>
+                        <a:srgbClr val="D6E2DA"/>
+                      </a:solidFill>
+                      <a:prstDash val="solid"/>
+                      <a:round/>
+                      <a:headEnd type="none" w="med" len="med"/>
+                      <a:tailEnd type="none" w="med" len="med"/>
+                    </a:lnL>
+                    <a:lnR w="9525" cap="flat" cmpd="sng" algn="ctr">
+                      <a:solidFill>
+                        <a:srgbClr val="D6E2DA"/>
+                      </a:solidFill>
+                      <a:prstDash val="solid"/>
+                      <a:round/>
+                      <a:headEnd type="none" w="med" len="med"/>
+                      <a:tailEnd type="none" w="med" len="med"/>
+                    </a:lnR>
+                    <a:lnT w="9525" cap="flat" cmpd="sng" algn="ctr">
+                      <a:solidFill>
+                        <a:srgbClr val="D6E2DA"/>
+                      </a:solidFill>
+                      <a:prstDash val="solid"/>
+                      <a:round/>
+                      <a:headEnd type="none" w="med" len="med"/>
+                      <a:tailEnd type="none" w="med" len="med"/>
+                    </a:lnT>
+                    <a:lnB w="9525" cap="flat" cmpd="sng" algn="ctr">
+                      <a:solidFill>
+                        <a:srgbClr val="D6E2DA"/>
+                      </a:solidFill>
+                      <a:prstDash val="solid"/>
+                      <a:round/>
+                      <a:headEnd type="none" w="med" len="med"/>
+                      <a:tailEnd type="none" w="med" len="med"/>
+                    </a:lnB>
+                  </a:tcPr>
+                </a:tc>
+                <a:tc>
+                  <a:txBody>
+                    <a:bodyPr/>
+                    <a:lstStyle/>
+                    <a:p>
+                      <a:pPr indent="0" marL="0">
+                        <a:buNone/>
+                      </a:pPr>
+                      <a:r>
+                        <a:rPr lang="en-US" sz="1700" dirty="0">
+                          <a:solidFill>
+                            <a:srgbClr val="15211B"/>
+                          </a:solidFill>
+                        </a:rPr>
+                        <a:t>Admin internal tidak perlu SPA; satu grafik cukup Chart.js</a:t>
+                      </a:r>
+                      <a:endParaRPr lang="en-US" sz="1700" dirty="0"/>
+                    </a:p>
+                  </a:txBody>
+                  <a:tcPr marL="164592" marR="164592" marT="182880" marB="182880" anchor="t">
+                    <a:lnL w="9525" cap="flat" cmpd="sng" algn="ctr">
+                      <a:solidFill>
+                        <a:srgbClr val="D6E2DA"/>
+                      </a:solidFill>
+                      <a:prstDash val="solid"/>
+                      <a:round/>
+                      <a:headEnd type="none" w="med" len="med"/>
+                      <a:tailEnd type="none" w="med" len="med"/>
+                    </a:lnL>
+                    <a:lnR w="9525" cap="flat" cmpd="sng" algn="ctr">
+                      <a:solidFill>
+                        <a:srgbClr val="D6E2DA"/>
+                      </a:solidFill>
+                      <a:prstDash val="solid"/>
+                      <a:round/>
+                      <a:headEnd type="none" w="med" len="med"/>
+                      <a:tailEnd type="none" w="med" len="med"/>
+                    </a:lnR>
+                    <a:lnT w="9525" cap="flat" cmpd="sng" algn="ctr">
+                      <a:solidFill>
+                        <a:srgbClr val="D6E2DA"/>
+                      </a:solidFill>
+                      <a:prstDash val="solid"/>
+                      <a:round/>
+                      <a:headEnd type="none" w="med" len="med"/>
+                      <a:tailEnd type="none" w="med" len="med"/>
+                    </a:lnT>
+                    <a:lnB w="9525" cap="flat" cmpd="sng" algn="ctr">
+                      <a:solidFill>
+                        <a:srgbClr val="D6E2DA"/>
+                      </a:solidFill>
+                      <a:prstDash val="solid"/>
+                      <a:round/>
+                      <a:headEnd type="none" w="med" len="med"/>
+                      <a:tailEnd type="none" w="med" len="med"/>
+                    </a:lnB>
+                  </a:tcPr>
+                </a:tc>
+                <a:tc>
+                  <a:txBody>
+                    <a:bodyPr/>
+                    <a:lstStyle/>
+                    <a:p>
+                      <a:pPr indent="0" marL="0">
+                        <a:buNone/>
+                      </a:pPr>
+                      <a:r>
+                        <a:rPr lang="en-US" sz="1700" dirty="0">
+                          <a:solidFill>
+                            <a:srgbClr val="15211B"/>
+                          </a:solidFill>
+                        </a:rPr>
+                        <a:t>Vue seperti web penonton: build dan state terpisah untuk halaman form</a:t>
+                      </a:r>
+                      <a:endParaRPr lang="en-US" sz="1700" dirty="0"/>
+                    </a:p>
+                  </a:txBody>
+                  <a:tcPr marL="164592" marR="164592" marT="182880" marB="182880" anchor="t">
+                    <a:lnL w="9525" cap="flat" cmpd="sng" algn="ctr">
+                      <a:solidFill>
+                        <a:srgbClr val="D6E2DA"/>
+                      </a:solidFill>
+                      <a:prstDash val="solid"/>
+                      <a:round/>
+                      <a:headEnd type="none" w="med" len="med"/>
+                      <a:tailEnd type="none" w="med" len="med"/>
+                    </a:lnL>
+                    <a:lnR w="9525" cap="flat" cmpd="sng" algn="ctr">
+                      <a:solidFill>
+                        <a:srgbClr val="D6E2DA"/>
+                      </a:solidFill>
+                      <a:prstDash val="solid"/>
+                      <a:round/>
+                      <a:headEnd type="none" w="med" len="med"/>
+                      <a:tailEnd type="none" w="med" len="med"/>
+                    </a:lnR>
+                    <a:lnT w="9525" cap="flat" cmpd="sng" algn="ctr">
+                      <a:solidFill>
+                        <a:srgbClr val="D6E2DA"/>
+                      </a:solidFill>
+                      <a:prstDash val="solid"/>
+                      <a:round/>
+                      <a:headEnd type="none" w="med" len="med"/>
+                      <a:tailEnd type="none" w="med" len="med"/>
+                    </a:lnT>
+                    <a:lnB w="9525" cap="flat" cmpd="sng" algn="ctr">
+                      <a:solidFill>
+                        <a:srgbClr val="D6E2DA"/>
+                      </a:solidFill>
+                      <a:prstDash val="solid"/>
+                      <a:round/>
+                      <a:headEnd type="none" w="med" len="med"/>
+                      <a:tailEnd type="none" w="med" len="med"/>
+                    </a:lnB>
+                  </a:tcPr>
+                </a:tc>
+              </a:tr>
+            </a:tbl>
+          </a:graphicData>
+        </a:graphic>
+      </p:graphicFrame>
       <p:sp>
         <p:nvSpPr>
           <p:cNvPr id="25" name="Slide Number Placeholder 0"/>
@@ -4063,7 +4895,7 @@
                   <a:schemeClr val="tx1"/>
                 </a:solidFill>
               </a:rPr>
-              <a:t>Menjaga kode tetap mudah dibaca</a:t>
+              <a:t>Perpanjangan dalam satu transaksi</a:t>
             </a:r>
             <a:endParaRPr lang="en-US" sz="3200" dirty="0"/>
           </a:p>
@@ -4688,7 +5520,7 @@
                   <a:schemeClr val="tx1"/>
                 </a:solidFill>
               </a:rPr>
-              <a:t>Aplikasi demo</a:t>
+              <a:t>Demo: pendapatan, lalu cek akses pengguna</a:t>
             </a:r>
             <a:endParaRPr lang="en-US" sz="3200" dirty="0"/>
           </a:p>
@@ -4969,477 +5801,638 @@
                   <a:schemeClr val="tx1"/>
                 </a:solidFill>
               </a:rPr>
-              <a:t>Yang akan saya perbaiki</a:t>
+              <a:t>Yang belum selesai</a:t>
             </a:r>
             <a:endParaRPr lang="en-US" sz="3200" dirty="0"/>
           </a:p>
         </p:txBody>
       </p:sp>
-      <p:pic>
-        <p:nvPicPr>
-          <p:cNvPr id="5" name="Image 0" descr="preencoded.png">    </p:cNvPr>
-          <p:cNvPicPr>
-            <a:picLocks noChangeAspect="1"/>
-          </p:cNvPicPr>
-          <p:nvPr/>
-        </p:nvPicPr>
-        <p:blipFill>
-          <a:blip r:embed="rId1"/>
-          <a:stretch>
-            <a:fillRect/>
-          </a:stretch>
-        </p:blipFill>
-        <p:spPr>
-          <a:xfrm>
-            <a:off x="548640" y="1801368"/>
-            <a:ext cx="411480" cy="411480"/>
-          </a:xfrm>
-          <a:prstGeom prst="rect">
-            <a:avLst/>
-          </a:prstGeom>
-        </p:spPr>
-      </p:pic>
-      <p:sp>
-        <p:nvSpPr>
-          <p:cNvPr id="6" name="Text 2"/>
-          <p:cNvSpPr txBox="1"/>
-          <p:nvPr/>
-        </p:nvSpPr>
-        <p:spPr>
-          <a:xfrm>
-            <a:off x="1234440" y="1645920"/>
-            <a:ext cx="3840480" cy="731520"/>
-          </a:xfrm>
-          <a:prstGeom prst="rect">
-            <a:avLst/>
-          </a:prstGeom>
-          <a:noFill/>
-          <a:ln/>
-        </p:spPr>
-        <p:txBody>
-          <a:bodyPr wrap="square" lIns="0" tIns="0" rIns="0" bIns="0" rtlCol="0" anchor="ctr"/>
-          <a:lstStyle/>
-          <a:p>
-            <a:pPr indent="0" marL="0">
-              <a:buNone/>
-            </a:pPr>
-            <a:r>
-              <a:rPr lang="en-US" sz="1800" b="1" dirty="0">
-                <a:solidFill>
-                  <a:schemeClr val="tx1"/>
-                </a:solidFill>
-                <a:latin typeface="+mj-lt" pitchFamily="34" charset="0"/>
-                <a:ea typeface="+mj-lt" pitchFamily="34" charset="-122"/>
-                <a:cs typeface="+mj-lt" pitchFamily="34" charset="-120"/>
-              </a:rPr>
-              <a:t>Pindah ke tabel pivot</a:t>
-            </a:r>
-            <a:endParaRPr lang="en-US" sz="1800" dirty="0"/>
-          </a:p>
-        </p:txBody>
-      </p:sp>
-      <p:sp>
-        <p:nvSpPr>
-          <p:cNvPr id="7" name="Text 3"/>
-          <p:cNvSpPr txBox="1"/>
-          <p:nvPr/>
-        </p:nvSpPr>
-        <p:spPr>
-          <a:xfrm>
-            <a:off x="5212080" y="1645920"/>
-            <a:ext cx="6400800" cy="731520"/>
-          </a:xfrm>
-          <a:prstGeom prst="rect">
-            <a:avLst/>
-          </a:prstGeom>
-          <a:noFill/>
-          <a:ln/>
-        </p:spPr>
-        <p:txBody>
-          <a:bodyPr wrap="square" lIns="0" tIns="0" rIns="0" bIns="0" rtlCol="0" anchor="ctr"/>
-          <a:lstStyle/>
-          <a:p>
-            <a:pPr indent="0" marL="0">
-              <a:buNone/>
-            </a:pPr>
-            <a:r>
-              <a:rPr lang="en-US" sz="1500" dirty="0">
-                <a:solidFill>
-                  <a:schemeClr val="accent4"/>
-                </a:solidFill>
-              </a:rPr>
-              <a:t>Ganti ID dipisah koma secara bertahap, tanpa downtime.</a:t>
-            </a:r>
-            <a:endParaRPr lang="en-US" sz="1500" dirty="0"/>
-          </a:p>
-        </p:txBody>
-      </p:sp>
-      <p:sp>
-        <p:nvSpPr>
-          <p:cNvPr id="8" name="Shape 4"/>
-          <p:cNvSpPr/>
-          <p:nvPr/>
-        </p:nvSpPr>
-        <p:spPr>
-          <a:xfrm>
-            <a:off x="548640" y="2560320"/>
-            <a:ext cx="11064240" cy="914"/>
-          </a:xfrm>
-          <a:prstGeom prst="line">
-            <a:avLst/>
-          </a:prstGeom>
-          <a:noFill/>
-          <a:ln w="9525">
-            <a:solidFill>
-              <a:schemeClr val="accent6"/>
-            </a:solidFill>
-            <a:prstDash val="solid"/>
-          </a:ln>
-        </p:spPr>
-      </p:sp>
-      <p:pic>
-        <p:nvPicPr>
-          <p:cNvPr id="9" name="Image 1" descr="preencoded.png">    </p:cNvPr>
-          <p:cNvPicPr>
-            <a:picLocks noChangeAspect="1"/>
-          </p:cNvPicPr>
-          <p:nvPr/>
-        </p:nvPicPr>
-        <p:blipFill>
-          <a:blip r:embed="rId2"/>
-          <a:stretch>
-            <a:fillRect/>
-          </a:stretch>
-        </p:blipFill>
-        <p:spPr>
-          <a:xfrm>
-            <a:off x="548640" y="2898648"/>
-            <a:ext cx="411480" cy="411480"/>
-          </a:xfrm>
-          <a:prstGeom prst="rect">
-            <a:avLst/>
-          </a:prstGeom>
-        </p:spPr>
-      </p:pic>
-      <p:sp>
-        <p:nvSpPr>
-          <p:cNvPr id="10" name="Text 5"/>
-          <p:cNvSpPr txBox="1"/>
-          <p:nvPr/>
-        </p:nvSpPr>
-        <p:spPr>
-          <a:xfrm>
-            <a:off x="1234440" y="2743200"/>
-            <a:ext cx="3840480" cy="731520"/>
-          </a:xfrm>
-          <a:prstGeom prst="rect">
-            <a:avLst/>
-          </a:prstGeom>
-          <a:noFill/>
-          <a:ln/>
-        </p:spPr>
-        <p:txBody>
-          <a:bodyPr wrap="square" lIns="0" tIns="0" rIns="0" bIns="0" rtlCol="0" anchor="ctr"/>
-          <a:lstStyle/>
-          <a:p>
-            <a:pPr indent="0" marL="0">
-              <a:buNone/>
-            </a:pPr>
-            <a:r>
-              <a:rPr lang="en-US" sz="1800" b="1" dirty="0">
-                <a:solidFill>
-                  <a:schemeClr val="tx1"/>
-                </a:solidFill>
-                <a:latin typeface="+mj-lt" pitchFamily="34" charset="0"/>
-                <a:ea typeface="+mj-lt" pitchFamily="34" charset="-122"/>
-                <a:cs typeface="+mj-lt" pitchFamily="34" charset="-120"/>
-              </a:rPr>
-              <a:t>Satu kontrak aturan</a:t>
-            </a:r>
-            <a:endParaRPr lang="en-US" sz="1800" dirty="0"/>
-          </a:p>
-        </p:txBody>
-      </p:sp>
-      <p:sp>
-        <p:nvSpPr>
-          <p:cNvPr id="11" name="Text 6"/>
-          <p:cNvSpPr txBox="1"/>
-          <p:nvPr/>
-        </p:nvSpPr>
-        <p:spPr>
-          <a:xfrm>
-            <a:off x="5212080" y="2743200"/>
-            <a:ext cx="6400800" cy="731520"/>
-          </a:xfrm>
-          <a:prstGeom prst="rect">
-            <a:avLst/>
-          </a:prstGeom>
-          <a:noFill/>
-          <a:ln/>
-        </p:spPr>
-        <p:txBody>
-          <a:bodyPr wrap="square" lIns="0" tIns="0" rIns="0" bIns="0" rtlCol="0" anchor="ctr"/>
-          <a:lstStyle/>
-          <a:p>
-            <a:pPr indent="0" marL="0">
-              <a:buNone/>
-            </a:pPr>
-            <a:r>
-              <a:rPr lang="en-US" sz="1500" dirty="0">
-                <a:solidFill>
-                  <a:schemeClr val="accent4"/>
-                </a:solidFill>
-              </a:rPr>
-              <a:t>Aturan akses ada di Go dan Laravel; satu set kasus uji bersama menjaga keduanya sama.</a:t>
-            </a:r>
-            <a:endParaRPr lang="en-US" sz="1500" dirty="0"/>
-          </a:p>
-        </p:txBody>
-      </p:sp>
-      <p:sp>
-        <p:nvSpPr>
-          <p:cNvPr id="12" name="Shape 7"/>
-          <p:cNvSpPr/>
-          <p:nvPr/>
-        </p:nvSpPr>
-        <p:spPr>
-          <a:xfrm>
-            <a:off x="548640" y="3657600"/>
-            <a:ext cx="11064240" cy="914"/>
-          </a:xfrm>
-          <a:prstGeom prst="line">
-            <a:avLst/>
-          </a:prstGeom>
-          <a:noFill/>
-          <a:ln w="9525">
-            <a:solidFill>
-              <a:schemeClr val="accent6"/>
-            </a:solidFill>
-            <a:prstDash val="solid"/>
-          </a:ln>
-        </p:spPr>
-      </p:sp>
-      <p:pic>
-        <p:nvPicPr>
-          <p:cNvPr id="13" name="Image 2" descr="preencoded.png">    </p:cNvPr>
-          <p:cNvPicPr>
-            <a:picLocks noChangeAspect="1"/>
-          </p:cNvPicPr>
-          <p:nvPr/>
-        </p:nvPicPr>
-        <p:blipFill>
-          <a:blip r:embed="rId3"/>
-          <a:stretch>
-            <a:fillRect/>
-          </a:stretch>
-        </p:blipFill>
-        <p:spPr>
-          <a:xfrm>
-            <a:off x="548640" y="3995928"/>
-            <a:ext cx="411480" cy="411480"/>
-          </a:xfrm>
-          <a:prstGeom prst="rect">
-            <a:avLst/>
-          </a:prstGeom>
-        </p:spPr>
-      </p:pic>
-      <p:sp>
-        <p:nvSpPr>
-          <p:cNvPr id="14" name="Text 8"/>
-          <p:cNvSpPr txBox="1"/>
-          <p:nvPr/>
-        </p:nvSpPr>
-        <p:spPr>
-          <a:xfrm>
-            <a:off x="1234440" y="3840480"/>
-            <a:ext cx="3840480" cy="731520"/>
-          </a:xfrm>
-          <a:prstGeom prst="rect">
-            <a:avLst/>
-          </a:prstGeom>
-          <a:noFill/>
-          <a:ln/>
-        </p:spPr>
-        <p:txBody>
-          <a:bodyPr wrap="square" lIns="0" tIns="0" rIns="0" bIns="0" rtlCol="0" anchor="ctr"/>
-          <a:lstStyle/>
-          <a:p>
-            <a:pPr indent="0" marL="0">
-              <a:buNone/>
-            </a:pPr>
-            <a:r>
-              <a:rPr lang="en-US" sz="1800" b="1" dirty="0">
-                <a:solidFill>
-                  <a:schemeClr val="tx1"/>
-                </a:solidFill>
-                <a:latin typeface="+mj-lt" pitchFamily="34" charset="0"/>
-                <a:ea typeface="+mj-lt" pitchFamily="34" charset="-122"/>
-                <a:cs typeface="+mj-lt" pitchFamily="34" charset="-120"/>
-              </a:rPr>
-              <a:t>Riwayat tontonan besar</a:t>
-            </a:r>
-            <a:endParaRPr lang="en-US" sz="1800" dirty="0"/>
-          </a:p>
-        </p:txBody>
-      </p:sp>
-      <p:sp>
-        <p:nvSpPr>
-          <p:cNvPr id="15" name="Text 9"/>
-          <p:cNvSpPr txBox="1"/>
-          <p:nvPr/>
-        </p:nvSpPr>
-        <p:spPr>
-          <a:xfrm>
-            <a:off x="5212080" y="3840480"/>
-            <a:ext cx="6400800" cy="731520"/>
-          </a:xfrm>
-          <a:prstGeom prst="rect">
-            <a:avLst/>
-          </a:prstGeom>
-          <a:noFill/>
-          <a:ln/>
-        </p:spPr>
-        <p:txBody>
-          <a:bodyPr wrap="square" lIns="0" tIns="0" rIns="0" bIns="0" rtlCol="0" anchor="ctr"/>
-          <a:lstStyle/>
-          <a:p>
-            <a:pPr indent="0" marL="0">
-              <a:buNone/>
-            </a:pPr>
-            <a:r>
-              <a:rPr lang="en-US" sz="1500" dirty="0">
-                <a:solidFill>
-                  <a:schemeClr val="accent4"/>
-                </a:solidFill>
-              </a:rPr>
-              <a:t>Partisi watch_history per bulan, laporan dari tabel ringkasan harian.</a:t>
-            </a:r>
-            <a:endParaRPr lang="en-US" sz="1500" dirty="0"/>
-          </a:p>
-        </p:txBody>
-      </p:sp>
-      <p:sp>
-        <p:nvSpPr>
-          <p:cNvPr id="16" name="Shape 10"/>
-          <p:cNvSpPr/>
-          <p:nvPr/>
-        </p:nvSpPr>
-        <p:spPr>
-          <a:xfrm>
-            <a:off x="548640" y="4754880"/>
-            <a:ext cx="11064240" cy="914"/>
-          </a:xfrm>
-          <a:prstGeom prst="line">
-            <a:avLst/>
-          </a:prstGeom>
-          <a:noFill/>
-          <a:ln w="9525">
-            <a:solidFill>
-              <a:schemeClr val="accent6"/>
-            </a:solidFill>
-            <a:prstDash val="solid"/>
-          </a:ln>
-        </p:spPr>
-      </p:sp>
-      <p:pic>
-        <p:nvPicPr>
-          <p:cNvPr id="17" name="Image 3" descr="preencoded.png">    </p:cNvPr>
-          <p:cNvPicPr>
-            <a:picLocks noChangeAspect="1"/>
-          </p:cNvPicPr>
-          <p:nvPr/>
-        </p:nvPicPr>
-        <p:blipFill>
-          <a:blip r:embed="rId4"/>
-          <a:stretch>
-            <a:fillRect/>
-          </a:stretch>
-        </p:blipFill>
-        <p:spPr>
-          <a:xfrm>
-            <a:off x="548640" y="5093208"/>
-            <a:ext cx="411480" cy="411480"/>
-          </a:xfrm>
-          <a:prstGeom prst="rect">
-            <a:avLst/>
-          </a:prstGeom>
-        </p:spPr>
-      </p:pic>
-      <p:sp>
-        <p:nvSpPr>
-          <p:cNvPr id="18" name="Text 11"/>
-          <p:cNvSpPr txBox="1"/>
-          <p:nvPr/>
-        </p:nvSpPr>
-        <p:spPr>
-          <a:xfrm>
-            <a:off x="1234440" y="4937760"/>
-            <a:ext cx="3840480" cy="731520"/>
-          </a:xfrm>
-          <a:prstGeom prst="rect">
-            <a:avLst/>
-          </a:prstGeom>
-          <a:noFill/>
-          <a:ln/>
-        </p:spPr>
-        <p:txBody>
-          <a:bodyPr wrap="square" lIns="0" tIns="0" rIns="0" bIns="0" rtlCol="0" anchor="ctr"/>
-          <a:lstStyle/>
-          <a:p>
-            <a:pPr indent="0" marL="0">
-              <a:buNone/>
-            </a:pPr>
-            <a:r>
-              <a:rPr lang="en-US" sz="1800" b="1" dirty="0">
-                <a:solidFill>
-                  <a:schemeClr val="tx1"/>
-                </a:solidFill>
-                <a:latin typeface="+mj-lt" pitchFamily="34" charset="0"/>
-                <a:ea typeface="+mj-lt" pitchFamily="34" charset="-122"/>
-                <a:cs typeface="+mj-lt" pitchFamily="34" charset="-120"/>
-              </a:rPr>
-              <a:t>Constraint dan index</a:t>
-            </a:r>
-            <a:endParaRPr lang="en-US" sz="1800" dirty="0"/>
-          </a:p>
-        </p:txBody>
-      </p:sp>
-      <p:sp>
-        <p:nvSpPr>
-          <p:cNvPr id="19" name="Text 12"/>
-          <p:cNvSpPr txBox="1"/>
-          <p:nvPr/>
-        </p:nvSpPr>
-        <p:spPr>
-          <a:xfrm>
-            <a:off x="5212080" y="4937760"/>
-            <a:ext cx="6400800" cy="731520"/>
-          </a:xfrm>
-          <a:prstGeom prst="rect">
-            <a:avLst/>
-          </a:prstGeom>
-          <a:noFill/>
-          <a:ln/>
-        </p:spPr>
-        <p:txBody>
-          <a:bodyPr wrap="square" lIns="0" tIns="0" rIns="0" bIns="0" rtlCol="0" anchor="ctr"/>
-          <a:lstStyle/>
-          <a:p>
-            <a:pPr indent="0" marL="0">
-              <a:buNone/>
-            </a:pPr>
-            <a:r>
-              <a:rPr lang="en-US" sz="1500" dirty="0">
-                <a:solidFill>
-                  <a:schemeClr val="accent4"/>
-                </a:solidFill>
-              </a:rPr>
-              <a:t>Foreign key dan index di kolom cek akses dan laporan.</a:t>
-            </a:r>
-            <a:endParaRPr lang="en-US" sz="1500" dirty="0"/>
-          </a:p>
-        </p:txBody>
-      </p:sp>
+      <p:graphicFrame>
+        <p:nvGraphicFramePr>
+          <p:cNvPr id="15" name="Table 0"/>
+          <p:cNvGraphicFramePr>
+            <a:graphicFrameLocks noGrp="1"/>
+          </p:cNvGraphicFramePr>
+          <p:nvPr>
+            <p:extLst>
+              <p:ext uri="{D42A27DB-BD31-4B8C-83A1-F6EECF244321}">
+                <p14:modId xmlns:p14="http://schemas.microsoft.com/office/powerpoint/2010/main" val="1579011935"/>
+              </p:ext>
+            </p:extLst>
+          </p:nvPr>
+        </p:nvGraphicFramePr>
+        <p:xfrm>
+          <a:off x="548640" y="1508760"/>
+          <a:ext cx="11064240" cy="914400"/>
+        </p:xfrm>
+        <a:graphic>
+          <a:graphicData uri="http://schemas.openxmlformats.org/drawingml/2006/table">
+            <a:tbl>
+              <a:tblPr/>
+              <a:tblGrid>
+                <a:gridCol w="4023360"/>
+                <a:gridCol w="7040880"/>
+              </a:tblGrid>
+              <a:tr h="0">
+                <a:tc>
+                  <a:txBody>
+                    <a:bodyPr/>
+                    <a:lstStyle/>
+                    <a:p>
+                      <a:pPr indent="0" marL="0">
+                        <a:buNone/>
+                      </a:pPr>
+                      <a:r>
+                        <a:rPr lang="en-US" sz="1500" b="1" dirty="0">
+                          <a:solidFill>
+                            <a:srgbClr val="1E9E57"/>
+                          </a:solidFill>
+                        </a:rPr>
+                        <a:t>Yang belum</a:t>
+                      </a:r>
+                      <a:endParaRPr lang="en-US" sz="1500" dirty="0"/>
+                    </a:p>
+                  </a:txBody>
+                  <a:tcPr marL="164592" marR="164592" marT="182880" marB="182880" anchor="t">
+                    <a:lnL w="9525" cap="flat" cmpd="sng" algn="ctr">
+                      <a:solidFill>
+                        <a:srgbClr val="D6E2DA"/>
+                      </a:solidFill>
+                      <a:prstDash val="solid"/>
+                      <a:round/>
+                      <a:headEnd type="none" w="med" len="med"/>
+                      <a:tailEnd type="none" w="med" len="med"/>
+                    </a:lnL>
+                    <a:lnR w="9525" cap="flat" cmpd="sng" algn="ctr">
+                      <a:solidFill>
+                        <a:srgbClr val="D6E2DA"/>
+                      </a:solidFill>
+                      <a:prstDash val="solid"/>
+                      <a:round/>
+                      <a:headEnd type="none" w="med" len="med"/>
+                      <a:tailEnd type="none" w="med" len="med"/>
+                    </a:lnR>
+                    <a:lnT w="9525" cap="flat" cmpd="sng" algn="ctr">
+                      <a:solidFill>
+                        <a:srgbClr val="D6E2DA"/>
+                      </a:solidFill>
+                      <a:prstDash val="solid"/>
+                      <a:round/>
+                      <a:headEnd type="none" w="med" len="med"/>
+                      <a:tailEnd type="none" w="med" len="med"/>
+                    </a:lnT>
+                    <a:lnB w="9525" cap="flat" cmpd="sng" algn="ctr">
+                      <a:solidFill>
+                        <a:srgbClr val="D6E2DA"/>
+                      </a:solidFill>
+                      <a:prstDash val="solid"/>
+                      <a:round/>
+                      <a:headEnd type="none" w="med" len="med"/>
+                      <a:tailEnd type="none" w="med" len="med"/>
+                    </a:lnB>
+                    <a:solidFill>
+                      <a:srgbClr val="EEF3EF"/>
+                    </a:solidFill>
+                  </a:tcPr>
+                </a:tc>
+                <a:tc>
+                  <a:txBody>
+                    <a:bodyPr/>
+                    <a:lstStyle/>
+                    <a:p>
+                      <a:pPr indent="0" marL="0">
+                        <a:buNone/>
+                      </a:pPr>
+                      <a:r>
+                        <a:rPr lang="en-US" sz="1500" b="1" dirty="0">
+                          <a:solidFill>
+                            <a:srgbClr val="1E9E57"/>
+                          </a:solidFill>
+                        </a:rPr>
+                        <a:t>Langkah pertama</a:t>
+                      </a:r>
+                      <a:endParaRPr lang="en-US" sz="1500" dirty="0"/>
+                    </a:p>
+                  </a:txBody>
+                  <a:tcPr marL="164592" marR="164592" marT="182880" marB="182880" anchor="t">
+                    <a:lnL w="9525" cap="flat" cmpd="sng" algn="ctr">
+                      <a:solidFill>
+                        <a:srgbClr val="D6E2DA"/>
+                      </a:solidFill>
+                      <a:prstDash val="solid"/>
+                      <a:round/>
+                      <a:headEnd type="none" w="med" len="med"/>
+                      <a:tailEnd type="none" w="med" len="med"/>
+                    </a:lnL>
+                    <a:lnR w="9525" cap="flat" cmpd="sng" algn="ctr">
+                      <a:solidFill>
+                        <a:srgbClr val="D6E2DA"/>
+                      </a:solidFill>
+                      <a:prstDash val="solid"/>
+                      <a:round/>
+                      <a:headEnd type="none" w="med" len="med"/>
+                      <a:tailEnd type="none" w="med" len="med"/>
+                    </a:lnR>
+                    <a:lnT w="9525" cap="flat" cmpd="sng" algn="ctr">
+                      <a:solidFill>
+                        <a:srgbClr val="D6E2DA"/>
+                      </a:solidFill>
+                      <a:prstDash val="solid"/>
+                      <a:round/>
+                      <a:headEnd type="none" w="med" len="med"/>
+                      <a:tailEnd type="none" w="med" len="med"/>
+                    </a:lnT>
+                    <a:lnB w="9525" cap="flat" cmpd="sng" algn="ctr">
+                      <a:solidFill>
+                        <a:srgbClr val="D6E2DA"/>
+                      </a:solidFill>
+                      <a:prstDash val="solid"/>
+                      <a:round/>
+                      <a:headEnd type="none" w="med" len="med"/>
+                      <a:tailEnd type="none" w="med" len="med"/>
+                    </a:lnB>
+                    <a:solidFill>
+                      <a:srgbClr val="EEF3EF"/>
+                    </a:solidFill>
+                  </a:tcPr>
+                </a:tc>
+              </a:tr>
+              <a:tr h="0">
+                <a:tc>
+                  <a:txBody>
+                    <a:bodyPr/>
+                    <a:lstStyle/>
+                    <a:p>
+                      <a:pPr indent="0" marL="0">
+                        <a:buNone/>
+                      </a:pPr>
+                      <a:r>
+                        <a:rPr lang="en-US" sz="1700" b="1" dirty="0">
+                          <a:solidFill>
+                            <a:srgbClr val="15211B"/>
+                          </a:solidFill>
+                        </a:rPr>
+                        <a:t>Produksi masih menyimpan ID dipisah koma</a:t>
+                      </a:r>
+                      <a:endParaRPr lang="en-US" sz="1700" dirty="0"/>
+                    </a:p>
+                  </a:txBody>
+                  <a:tcPr marL="164592" marR="164592" marT="182880" marB="182880" anchor="t">
+                    <a:lnL w="9525" cap="flat" cmpd="sng" algn="ctr">
+                      <a:solidFill>
+                        <a:srgbClr val="D6E2DA"/>
+                      </a:solidFill>
+                      <a:prstDash val="solid"/>
+                      <a:round/>
+                      <a:headEnd type="none" w="med" len="med"/>
+                      <a:tailEnd type="none" w="med" len="med"/>
+                    </a:lnL>
+                    <a:lnR w="9525" cap="flat" cmpd="sng" algn="ctr">
+                      <a:solidFill>
+                        <a:srgbClr val="D6E2DA"/>
+                      </a:solidFill>
+                      <a:prstDash val="solid"/>
+                      <a:round/>
+                      <a:headEnd type="none" w="med" len="med"/>
+                      <a:tailEnd type="none" w="med" len="med"/>
+                    </a:lnR>
+                    <a:lnT w="9525" cap="flat" cmpd="sng" algn="ctr">
+                      <a:solidFill>
+                        <a:srgbClr val="D6E2DA"/>
+                      </a:solidFill>
+                      <a:prstDash val="solid"/>
+                      <a:round/>
+                      <a:headEnd type="none" w="med" len="med"/>
+                      <a:tailEnd type="none" w="med" len="med"/>
+                    </a:lnT>
+                    <a:lnB w="9525" cap="flat" cmpd="sng" algn="ctr">
+                      <a:solidFill>
+                        <a:srgbClr val="D6E2DA"/>
+                      </a:solidFill>
+                      <a:prstDash val="solid"/>
+                      <a:round/>
+                      <a:headEnd type="none" w="med" len="med"/>
+                      <a:tailEnd type="none" w="med" len="med"/>
+                    </a:lnB>
+                  </a:tcPr>
+                </a:tc>
+                <a:tc>
+                  <a:txBody>
+                    <a:bodyPr/>
+                    <a:lstStyle/>
+                    <a:p>
+                      <a:pPr indent="0" marL="0">
+                        <a:buNone/>
+                      </a:pPr>
+                      <a:r>
+                        <a:rPr lang="en-US" sz="1700" dirty="0">
+                          <a:solidFill>
+                            <a:srgbClr val="15211B"/>
+                          </a:solidFill>
+                        </a:rPr>
+                        <a:t>Buat tabel pivot, isi dari kolom lama, pindahkan pembaca satu per satu</a:t>
+                      </a:r>
+                      <a:endParaRPr lang="en-US" sz="1700" dirty="0"/>
+                    </a:p>
+                  </a:txBody>
+                  <a:tcPr marL="164592" marR="164592" marT="182880" marB="182880" anchor="t">
+                    <a:lnL w="9525" cap="flat" cmpd="sng" algn="ctr">
+                      <a:solidFill>
+                        <a:srgbClr val="D6E2DA"/>
+                      </a:solidFill>
+                      <a:prstDash val="solid"/>
+                      <a:round/>
+                      <a:headEnd type="none" w="med" len="med"/>
+                      <a:tailEnd type="none" w="med" len="med"/>
+                    </a:lnL>
+                    <a:lnR w="9525" cap="flat" cmpd="sng" algn="ctr">
+                      <a:solidFill>
+                        <a:srgbClr val="D6E2DA"/>
+                      </a:solidFill>
+                      <a:prstDash val="solid"/>
+                      <a:round/>
+                      <a:headEnd type="none" w="med" len="med"/>
+                      <a:tailEnd type="none" w="med" len="med"/>
+                    </a:lnR>
+                    <a:lnT w="9525" cap="flat" cmpd="sng" algn="ctr">
+                      <a:solidFill>
+                        <a:srgbClr val="D6E2DA"/>
+                      </a:solidFill>
+                      <a:prstDash val="solid"/>
+                      <a:round/>
+                      <a:headEnd type="none" w="med" len="med"/>
+                      <a:tailEnd type="none" w="med" len="med"/>
+                    </a:lnT>
+                    <a:lnB w="9525" cap="flat" cmpd="sng" algn="ctr">
+                      <a:solidFill>
+                        <a:srgbClr val="D6E2DA"/>
+                      </a:solidFill>
+                      <a:prstDash val="solid"/>
+                      <a:round/>
+                      <a:headEnd type="none" w="med" len="med"/>
+                      <a:tailEnd type="none" w="med" len="med"/>
+                    </a:lnB>
+                  </a:tcPr>
+                </a:tc>
+              </a:tr>
+              <a:tr h="0">
+                <a:tc>
+                  <a:txBody>
+                    <a:bodyPr/>
+                    <a:lstStyle/>
+                    <a:p>
+                      <a:pPr indent="0" marL="0">
+                        <a:buNone/>
+                      </a:pPr>
+                      <a:r>
+                        <a:rPr lang="en-US" sz="1700" b="1" dirty="0">
+                          <a:solidFill>
+                            <a:srgbClr val="15211B"/>
+                          </a:solidFill>
+                        </a:rPr>
+                        <a:t>Aturan akses ada di Go dan Laravel</a:t>
+                      </a:r>
+                      <a:endParaRPr lang="en-US" sz="1700" dirty="0"/>
+                    </a:p>
+                  </a:txBody>
+                  <a:tcPr marL="164592" marR="164592" marT="182880" marB="182880" anchor="t">
+                    <a:lnL w="9525" cap="flat" cmpd="sng" algn="ctr">
+                      <a:solidFill>
+                        <a:srgbClr val="D6E2DA"/>
+                      </a:solidFill>
+                      <a:prstDash val="solid"/>
+                      <a:round/>
+                      <a:headEnd type="none" w="med" len="med"/>
+                      <a:tailEnd type="none" w="med" len="med"/>
+                    </a:lnL>
+                    <a:lnR w="9525" cap="flat" cmpd="sng" algn="ctr">
+                      <a:solidFill>
+                        <a:srgbClr val="D6E2DA"/>
+                      </a:solidFill>
+                      <a:prstDash val="solid"/>
+                      <a:round/>
+                      <a:headEnd type="none" w="med" len="med"/>
+                      <a:tailEnd type="none" w="med" len="med"/>
+                    </a:lnR>
+                    <a:lnT w="9525" cap="flat" cmpd="sng" algn="ctr">
+                      <a:solidFill>
+                        <a:srgbClr val="D6E2DA"/>
+                      </a:solidFill>
+                      <a:prstDash val="solid"/>
+                      <a:round/>
+                      <a:headEnd type="none" w="med" len="med"/>
+                      <a:tailEnd type="none" w="med" len="med"/>
+                    </a:lnT>
+                    <a:lnB w="9525" cap="flat" cmpd="sng" algn="ctr">
+                      <a:solidFill>
+                        <a:srgbClr val="D6E2DA"/>
+                      </a:solidFill>
+                      <a:prstDash val="solid"/>
+                      <a:round/>
+                      <a:headEnd type="none" w="med" len="med"/>
+                      <a:tailEnd type="none" w="med" len="med"/>
+                    </a:lnB>
+                  </a:tcPr>
+                </a:tc>
+                <a:tc>
+                  <a:txBody>
+                    <a:bodyPr/>
+                    <a:lstStyle/>
+                    <a:p>
+                      <a:pPr indent="0" marL="0">
+                        <a:buNone/>
+                      </a:pPr>
+                      <a:r>
+                        <a:rPr lang="en-US" sz="1700" dirty="0">
+                          <a:solidFill>
+                            <a:srgbClr val="15211B"/>
+                          </a:solidFill>
+                        </a:rPr>
+                        <a:t>Satu set kasus uji bersama yang dijalankan kedua sisi</a:t>
+                      </a:r>
+                      <a:endParaRPr lang="en-US" sz="1700" dirty="0"/>
+                    </a:p>
+                  </a:txBody>
+                  <a:tcPr marL="164592" marR="164592" marT="182880" marB="182880" anchor="t">
+                    <a:lnL w="9525" cap="flat" cmpd="sng" algn="ctr">
+                      <a:solidFill>
+                        <a:srgbClr val="D6E2DA"/>
+                      </a:solidFill>
+                      <a:prstDash val="solid"/>
+                      <a:round/>
+                      <a:headEnd type="none" w="med" len="med"/>
+                      <a:tailEnd type="none" w="med" len="med"/>
+                    </a:lnL>
+                    <a:lnR w="9525" cap="flat" cmpd="sng" algn="ctr">
+                      <a:solidFill>
+                        <a:srgbClr val="D6E2DA"/>
+                      </a:solidFill>
+                      <a:prstDash val="solid"/>
+                      <a:round/>
+                      <a:headEnd type="none" w="med" len="med"/>
+                      <a:tailEnd type="none" w="med" len="med"/>
+                    </a:lnR>
+                    <a:lnT w="9525" cap="flat" cmpd="sng" algn="ctr">
+                      <a:solidFill>
+                        <a:srgbClr val="D6E2DA"/>
+                      </a:solidFill>
+                      <a:prstDash val="solid"/>
+                      <a:round/>
+                      <a:headEnd type="none" w="med" len="med"/>
+                      <a:tailEnd type="none" w="med" len="med"/>
+                    </a:lnT>
+                    <a:lnB w="9525" cap="flat" cmpd="sng" algn="ctr">
+                      <a:solidFill>
+                        <a:srgbClr val="D6E2DA"/>
+                      </a:solidFill>
+                      <a:prstDash val="solid"/>
+                      <a:round/>
+                      <a:headEnd type="none" w="med" len="med"/>
+                      <a:tailEnd type="none" w="med" len="med"/>
+                    </a:lnB>
+                  </a:tcPr>
+                </a:tc>
+              </a:tr>
+              <a:tr h="0">
+                <a:tc>
+                  <a:txBody>
+                    <a:bodyPr/>
+                    <a:lstStyle/>
+                    <a:p>
+                      <a:pPr indent="0" marL="0">
+                        <a:buNone/>
+                      </a:pPr>
+                      <a:r>
+                        <a:rPr lang="en-US" sz="1700" b="1" dirty="0">
+                          <a:solidFill>
+                            <a:srgbClr val="15211B"/>
+                          </a:solidFill>
+                        </a:rPr>
+                        <a:t>watch_history terus membesar</a:t>
+                      </a:r>
+                      <a:endParaRPr lang="en-US" sz="1700" dirty="0"/>
+                    </a:p>
+                  </a:txBody>
+                  <a:tcPr marL="164592" marR="164592" marT="182880" marB="182880" anchor="t">
+                    <a:lnL w="9525" cap="flat" cmpd="sng" algn="ctr">
+                      <a:solidFill>
+                        <a:srgbClr val="D6E2DA"/>
+                      </a:solidFill>
+                      <a:prstDash val="solid"/>
+                      <a:round/>
+                      <a:headEnd type="none" w="med" len="med"/>
+                      <a:tailEnd type="none" w="med" len="med"/>
+                    </a:lnL>
+                    <a:lnR w="9525" cap="flat" cmpd="sng" algn="ctr">
+                      <a:solidFill>
+                        <a:srgbClr val="D6E2DA"/>
+                      </a:solidFill>
+                      <a:prstDash val="solid"/>
+                      <a:round/>
+                      <a:headEnd type="none" w="med" len="med"/>
+                      <a:tailEnd type="none" w="med" len="med"/>
+                    </a:lnR>
+                    <a:lnT w="9525" cap="flat" cmpd="sng" algn="ctr">
+                      <a:solidFill>
+                        <a:srgbClr val="D6E2DA"/>
+                      </a:solidFill>
+                      <a:prstDash val="solid"/>
+                      <a:round/>
+                      <a:headEnd type="none" w="med" len="med"/>
+                      <a:tailEnd type="none" w="med" len="med"/>
+                    </a:lnT>
+                    <a:lnB w="9525" cap="flat" cmpd="sng" algn="ctr">
+                      <a:solidFill>
+                        <a:srgbClr val="D6E2DA"/>
+                      </a:solidFill>
+                      <a:prstDash val="solid"/>
+                      <a:round/>
+                      <a:headEnd type="none" w="med" len="med"/>
+                      <a:tailEnd type="none" w="med" len="med"/>
+                    </a:lnB>
+                  </a:tcPr>
+                </a:tc>
+                <a:tc>
+                  <a:txBody>
+                    <a:bodyPr/>
+                    <a:lstStyle/>
+                    <a:p>
+                      <a:pPr indent="0" marL="0">
+                        <a:buNone/>
+                      </a:pPr>
+                      <a:r>
+                        <a:rPr lang="en-US" sz="1700" dirty="0">
+                          <a:solidFill>
+                            <a:srgbClr val="15211B"/>
+                          </a:solidFill>
+                        </a:rPr>
+                        <a:t>Partisi per bulan; laporan dari tabel ringkasan harian</a:t>
+                      </a:r>
+                      <a:endParaRPr lang="en-US" sz="1700" dirty="0"/>
+                    </a:p>
+                  </a:txBody>
+                  <a:tcPr marL="164592" marR="164592" marT="182880" marB="182880" anchor="t">
+                    <a:lnL w="9525" cap="flat" cmpd="sng" algn="ctr">
+                      <a:solidFill>
+                        <a:srgbClr val="D6E2DA"/>
+                      </a:solidFill>
+                      <a:prstDash val="solid"/>
+                      <a:round/>
+                      <a:headEnd type="none" w="med" len="med"/>
+                      <a:tailEnd type="none" w="med" len="med"/>
+                    </a:lnL>
+                    <a:lnR w="9525" cap="flat" cmpd="sng" algn="ctr">
+                      <a:solidFill>
+                        <a:srgbClr val="D6E2DA"/>
+                      </a:solidFill>
+                      <a:prstDash val="solid"/>
+                      <a:round/>
+                      <a:headEnd type="none" w="med" len="med"/>
+                      <a:tailEnd type="none" w="med" len="med"/>
+                    </a:lnR>
+                    <a:lnT w="9525" cap="flat" cmpd="sng" algn="ctr">
+                      <a:solidFill>
+                        <a:srgbClr val="D6E2DA"/>
+                      </a:solidFill>
+                      <a:prstDash val="solid"/>
+                      <a:round/>
+                      <a:headEnd type="none" w="med" len="med"/>
+                      <a:tailEnd type="none" w="med" len="med"/>
+                    </a:lnT>
+                    <a:lnB w="9525" cap="flat" cmpd="sng" algn="ctr">
+                      <a:solidFill>
+                        <a:srgbClr val="D6E2DA"/>
+                      </a:solidFill>
+                      <a:prstDash val="solid"/>
+                      <a:round/>
+                      <a:headEnd type="none" w="med" len="med"/>
+                      <a:tailEnd type="none" w="med" len="med"/>
+                    </a:lnB>
+                  </a:tcPr>
+                </a:tc>
+              </a:tr>
+              <a:tr h="0">
+                <a:tc>
+                  <a:txBody>
+                    <a:bodyPr/>
+                    <a:lstStyle/>
+                    <a:p>
+                      <a:pPr indent="0" marL="0">
+                        <a:buNone/>
+                      </a:pPr>
+                      <a:r>
+                        <a:rPr lang="en-US" sz="1700" b="1" dirty="0">
+                          <a:solidFill>
+                            <a:srgbClr val="15211B"/>
+                          </a:solidFill>
+                        </a:rPr>
+                        <a:t>Produksi tanpa foreign key</a:t>
+                      </a:r>
+                      <a:endParaRPr lang="en-US" sz="1700" dirty="0"/>
+                    </a:p>
+                  </a:txBody>
+                  <a:tcPr marL="164592" marR="164592" marT="182880" marB="182880" anchor="t">
+                    <a:lnL w="9525" cap="flat" cmpd="sng" algn="ctr">
+                      <a:solidFill>
+                        <a:srgbClr val="D6E2DA"/>
+                      </a:solidFill>
+                      <a:prstDash val="solid"/>
+                      <a:round/>
+                      <a:headEnd type="none" w="med" len="med"/>
+                      <a:tailEnd type="none" w="med" len="med"/>
+                    </a:lnL>
+                    <a:lnR w="9525" cap="flat" cmpd="sng" algn="ctr">
+                      <a:solidFill>
+                        <a:srgbClr val="D6E2DA"/>
+                      </a:solidFill>
+                      <a:prstDash val="solid"/>
+                      <a:round/>
+                      <a:headEnd type="none" w="med" len="med"/>
+                      <a:tailEnd type="none" w="med" len="med"/>
+                    </a:lnR>
+                    <a:lnT w="9525" cap="flat" cmpd="sng" algn="ctr">
+                      <a:solidFill>
+                        <a:srgbClr val="D6E2DA"/>
+                      </a:solidFill>
+                      <a:prstDash val="solid"/>
+                      <a:round/>
+                      <a:headEnd type="none" w="med" len="med"/>
+                      <a:tailEnd type="none" w="med" len="med"/>
+                    </a:lnT>
+                    <a:lnB w="9525" cap="flat" cmpd="sng" algn="ctr">
+                      <a:solidFill>
+                        <a:srgbClr val="D6E2DA"/>
+                      </a:solidFill>
+                      <a:prstDash val="solid"/>
+                      <a:round/>
+                      <a:headEnd type="none" w="med" len="med"/>
+                      <a:tailEnd type="none" w="med" len="med"/>
+                    </a:lnB>
+                  </a:tcPr>
+                </a:tc>
+                <a:tc>
+                  <a:txBody>
+                    <a:bodyPr/>
+                    <a:lstStyle/>
+                    <a:p>
+                      <a:pPr indent="0" marL="0">
+                        <a:buNone/>
+                      </a:pPr>
+                      <a:r>
+                        <a:rPr lang="en-US" sz="1700" dirty="0">
+                          <a:solidFill>
+                            <a:srgbClr val="15211B"/>
+                          </a:solidFill>
+                        </a:rPr>
+                        <a:t>Foreign key dan index di kolom cek akses dan laporan</a:t>
+                      </a:r>
+                      <a:endParaRPr lang="en-US" sz="1700" dirty="0"/>
+                    </a:p>
+                  </a:txBody>
+                  <a:tcPr marL="164592" marR="164592" marT="182880" marB="182880" anchor="t">
+                    <a:lnL w="9525" cap="flat" cmpd="sng" algn="ctr">
+                      <a:solidFill>
+                        <a:srgbClr val="D6E2DA"/>
+                      </a:solidFill>
+                      <a:prstDash val="solid"/>
+                      <a:round/>
+                      <a:headEnd type="none" w="med" len="med"/>
+                      <a:tailEnd type="none" w="med" len="med"/>
+                    </a:lnL>
+                    <a:lnR w="9525" cap="flat" cmpd="sng" algn="ctr">
+                      <a:solidFill>
+                        <a:srgbClr val="D6E2DA"/>
+                      </a:solidFill>
+                      <a:prstDash val="solid"/>
+                      <a:round/>
+                      <a:headEnd type="none" w="med" len="med"/>
+                      <a:tailEnd type="none" w="med" len="med"/>
+                    </a:lnR>
+                    <a:lnT w="9525" cap="flat" cmpd="sng" algn="ctr">
+                      <a:solidFill>
+                        <a:srgbClr val="D6E2DA"/>
+                      </a:solidFill>
+                      <a:prstDash val="solid"/>
+                      <a:round/>
+                      <a:headEnd type="none" w="med" len="med"/>
+                      <a:tailEnd type="none" w="med" len="med"/>
+                    </a:lnT>
+                    <a:lnB w="9525" cap="flat" cmpd="sng" algn="ctr">
+                      <a:solidFill>
+                        <a:srgbClr val="D6E2DA"/>
+                      </a:solidFill>
+                      <a:prstDash val="solid"/>
+                      <a:round/>
+                      <a:headEnd type="none" w="med" len="med"/>
+                      <a:tailEnd type="none" w="med" len="med"/>
+                    </a:lnB>
+                  </a:tcPr>
+                </a:tc>
+              </a:tr>
+            </a:tbl>
+          </a:graphicData>
+        </a:graphic>
+      </p:graphicFrame>
       <p:sp>
         <p:nvSpPr>
           <p:cNvPr id="25" name="Slide Number Placeholder 0"/>
@@ -5542,7 +6535,7 @@
                   <a:schemeClr val="bg1"/>
                 </a:solidFill>
               </a:rPr>
-              <a:t>Coba sendiri</a:t>
+              <a:t>Link demo dan slide</a:t>
             </a:r>
             <a:endParaRPr lang="en-US" sz="6000" dirty="0"/>
           </a:p>

--- a/docs/Goflix-presentasi.pptx
+++ b/docs/Goflix-presentasi.pptx
@@ -121,40 +121,40 @@
   <p:extLst>
     <p:ext uri="{521415D9-36F7-43E2-AB2F-B90AF26B5E84}">
       <p14:sectionLst xmlns:p14="http://schemas.microsoft.com/office/powerpoint/2010/main">
-        <p14:section name="Pembuka" id="{5ad140c1-490e-e761-18a6-5408947110eb}">
+        <p14:section name="Pembuka" id="{c120b066-e2d0-d885-9566-9652f5fac1b6}">
           <p14:sldIdLst>
             <p14:sldId id="256"/>
           </p14:sldIdLst>
         </p14:section>
-        <p14:section name="Produk" id="{3494c66b-83a1-8934-8db7-b773023c0b9e}">
+        <p14:section name="Produk" id="{0c1b174c-8971-458f-26e1-153a299af93a}">
           <p14:sldIdLst>
             <p14:sldId id="257"/>
             <p14:sldId id="258"/>
           </p14:sldIdLst>
         </p14:section>
-        <p14:section name="Desain sistem" id="{7683d168-5db7-9467-d6c1-51e32a9cfc4c}">
+        <p14:section name="Desain sistem" id="{77d2042c-5983-cf5d-30d5-ffb25a552e13}">
           <p14:sldIdLst>
             <p14:sldId id="259"/>
             <p14:sldId id="260"/>
             <p14:sldId id="261"/>
+            <p14:sldId id="262"/>
           </p14:sldIdLst>
         </p14:section>
-        <p14:section name="Aturan bisnis" id="{5c72ec1a-b064-818a-d84c-1a856e2ee4f1}">
+        <p14:section name="Aturan bisnis" id="{028d5efb-b486-ecea-1b76-c145611a6a08}">
           <p14:sldIdLst>
-            <p14:sldId id="262"/>
             <p14:sldId id="263"/>
             <p14:sldId id="264"/>
             <p14:sldId id="265"/>
           </p14:sldIdLst>
         </p14:section>
-        <p14:section name="Kode" id="{013de41e-a481-b0db-384c-c2bf6ea8627c}">
+        <p14:section name="Kode" id="{972b52da-e013-afc6-4c0f-1bcba4c2295b}">
           <p14:sldIdLst>
             <p14:sldId id="266"/>
             <p14:sldId id="267"/>
             <p14:sldId id="268"/>
           </p14:sldIdLst>
         </p14:section>
-        <p14:section name="Penutup" id="{5c216958-66d1-7a55-2149-922c0ceae678}">
+        <p14:section name="Penutup" id="{85a796cf-53cd-3e13-30f7-29334eb86f25}">
           <p14:sldIdLst>
             <p14:sldId id="269"/>
             <p14:sldId id="270"/>
@@ -652,7 +652,7 @@
           <a:p>
             <a:r>
               <a:rPr lang="en-US" dirty="0"/>
-              <a:t>Untuk setiap keputusan, sebutkan juga harganya. Pewawancara biasanya paling tertarik pada kolom terakhir.</a:t>
+              <a:t>Aturan pelanggan tidak bisa menyewa mencegah pengguna membayar dua kali dan mengurangi permintaan refund.</a:t>
             </a:r>
             <a:endParaRPr lang="en-US" dirty="0"/>
           </a:p>
@@ -740,7 +740,7 @@
           <a:p>
             <a:r>
               <a:rPr lang="en-US" dirty="0"/>
-              <a:t>Kolom alternatif menunjukkan bahwa pilihannya disengaja. Siapkan satu contoh untuk tiap baris.</a:t>
+              <a:t>Untuk tiap baris, siapkan satu contoh dari proyek ini.</a:t>
             </a:r>
             <a:endParaRPr lang="en-US" dirty="0"/>
           </a:p>
@@ -1532,7 +1532,7 @@
           <a:p>
             <a:r>
               <a:rPr lang="en-US" dirty="0"/>
-              <a:t>Ini poin desain paling kuat untuk dibahas: kenapa pola lama bermasalah dan bagaimana memperbaikinya tanpa downtime.</a:t>
+              <a:t>Tunjukkan alur dari kiri ke kanan: master data, lalu dokumen, lalu catatan.</a:t>
             </a:r>
             <a:endParaRPr lang="en-US" dirty="0"/>
           </a:p>
@@ -1620,7 +1620,7 @@
           <a:p>
             <a:r>
               <a:rPr lang="en-US" dirty="0"/>
-              <a:t>Tunjukkan di demo: tambah langganan untuk pengguna yang masih aktif dan lihat tanggal berakhirnya bertambah.</a:t>
+              <a:t>Ini poin desain paling kuat untuk dibahas: kenapa pola lama bermasalah dan bagaimana memperbaikinya tanpa downtime.</a:t>
             </a:r>
             <a:endParaRPr lang="en-US" dirty="0"/>
           </a:p>
@@ -1708,7 +1708,7 @@
           <a:p>
             <a:r>
               <a:rPr lang="en-US" dirty="0"/>
-              <a:t>Ini aturan yang dijalankan API Go sebelum memutar video. Di dashboard ada tombol Cek di halaman pengguna.</a:t>
+              <a:t>Tunjukkan di demo: tambah langganan untuk pengguna yang masih aktif dan lihat tanggal berakhirnya bertambah.</a:t>
             </a:r>
             <a:endParaRPr lang="en-US" dirty="0"/>
           </a:p>
@@ -1796,7 +1796,7 @@
           <a:p>
             <a:r>
               <a:rPr lang="en-US" dirty="0"/>
-              <a:t>Aturan pelanggan tidak bisa menyewa mencegah pengguna membayar dua kali dan mengurangi permintaan refund.</a:t>
+              <a:t>Ini aturan yang dijalankan API Go sebelum memutar video. Di dashboard ada tombol Cek di halaman pengguna.</a:t>
             </a:r>
             <a:endParaRPr lang="en-US" dirty="0"/>
           </a:p>
@@ -2761,932 +2761,412 @@
                   <a:schemeClr val="tx1"/>
                 </a:solidFill>
               </a:rPr>
-              <a:t>Trade-off yang saya pilih</a:t>
+              <a:t>Sewa dan kupon</a:t>
             </a:r>
             <a:endParaRPr lang="en-US" sz="3200" dirty="0"/>
           </a:p>
         </p:txBody>
       </p:sp>
-      <p:graphicFrame>
-        <p:nvGraphicFramePr>
-          <p:cNvPr id="11" name="Table 0"/>
-          <p:cNvGraphicFramePr>
-            <a:graphicFrameLocks noGrp="1"/>
-          </p:cNvGraphicFramePr>
-          <p:nvPr>
-            <p:extLst>
-              <p:ext uri="{D42A27DB-BD31-4B8C-83A1-F6EECF244321}">
-                <p14:modId xmlns:p14="http://schemas.microsoft.com/office/powerpoint/2010/main" val="1579011935"/>
-              </p:ext>
-            </p:extLst>
-          </p:nvPr>
-        </p:nvGraphicFramePr>
-        <p:xfrm>
-          <a:off x="548640" y="1508760"/>
-          <a:ext cx="11064240" cy="914400"/>
-        </p:xfrm>
-        <a:graphic>
-          <a:graphicData uri="http://schemas.openxmlformats.org/drawingml/2006/table">
-            <a:tbl>
-              <a:tblPr/>
-              <a:tblGrid>
-                <a:gridCol w="3291840"/>
-                <a:gridCol w="4114800"/>
-                <a:gridCol w="3657600"/>
-              </a:tblGrid>
-              <a:tr h="0">
-                <a:tc>
-                  <a:txBody>
-                    <a:bodyPr/>
-                    <a:lstStyle/>
-                    <a:p>
-                      <a:pPr indent="0" marL="0">
-                        <a:buNone/>
-                      </a:pPr>
-                      <a:r>
-                        <a:rPr lang="en-US" sz="1500" b="1" dirty="0">
-                          <a:solidFill>
-                            <a:srgbClr val="1E9E57"/>
-                          </a:solidFill>
-                        </a:rPr>
-                        <a:t>Keputusan</a:t>
-                      </a:r>
-                      <a:endParaRPr lang="en-US" sz="1500" dirty="0"/>
-                    </a:p>
-                  </a:txBody>
-                  <a:tcPr marL="164592" marR="164592" marT="182880" marB="182880" anchor="t">
-                    <a:lnL w="9525" cap="flat" cmpd="sng" algn="ctr">
-                      <a:solidFill>
-                        <a:srgbClr val="D6E2DA"/>
-                      </a:solidFill>
-                      <a:prstDash val="solid"/>
-                      <a:round/>
-                      <a:headEnd type="none" w="med" len="med"/>
-                      <a:tailEnd type="none" w="med" len="med"/>
-                    </a:lnL>
-                    <a:lnR w="9525" cap="flat" cmpd="sng" algn="ctr">
-                      <a:solidFill>
-                        <a:srgbClr val="D6E2DA"/>
-                      </a:solidFill>
-                      <a:prstDash val="solid"/>
-                      <a:round/>
-                      <a:headEnd type="none" w="med" len="med"/>
-                      <a:tailEnd type="none" w="med" len="med"/>
-                    </a:lnR>
-                    <a:lnT w="9525" cap="flat" cmpd="sng" algn="ctr">
-                      <a:solidFill>
-                        <a:srgbClr val="D6E2DA"/>
-                      </a:solidFill>
-                      <a:prstDash val="solid"/>
-                      <a:round/>
-                      <a:headEnd type="none" w="med" len="med"/>
-                      <a:tailEnd type="none" w="med" len="med"/>
-                    </a:lnT>
-                    <a:lnB w="9525" cap="flat" cmpd="sng" algn="ctr">
-                      <a:solidFill>
-                        <a:srgbClr val="D6E2DA"/>
-                      </a:solidFill>
-                      <a:prstDash val="solid"/>
-                      <a:round/>
-                      <a:headEnd type="none" w="med" len="med"/>
-                      <a:tailEnd type="none" w="med" len="med"/>
-                    </a:lnB>
-                    <a:solidFill>
-                      <a:srgbClr val="EEF3EF"/>
-                    </a:solidFill>
-                  </a:tcPr>
-                </a:tc>
-                <a:tc>
-                  <a:txBody>
-                    <a:bodyPr/>
-                    <a:lstStyle/>
-                    <a:p>
-                      <a:pPr indent="0" marL="0">
-                        <a:buNone/>
-                      </a:pPr>
-                      <a:r>
-                        <a:rPr lang="en-US" sz="1500" b="1" dirty="0">
-                          <a:solidFill>
-                            <a:srgbClr val="1E9E57"/>
-                          </a:solidFill>
-                        </a:rPr>
-                        <a:t>Kenapa</a:t>
-                      </a:r>
-                      <a:endParaRPr lang="en-US" sz="1500" dirty="0"/>
-                    </a:p>
-                  </a:txBody>
-                  <a:tcPr marL="164592" marR="164592" marT="182880" marB="182880" anchor="t">
-                    <a:lnL w="9525" cap="flat" cmpd="sng" algn="ctr">
-                      <a:solidFill>
-                        <a:srgbClr val="D6E2DA"/>
-                      </a:solidFill>
-                      <a:prstDash val="solid"/>
-                      <a:round/>
-                      <a:headEnd type="none" w="med" len="med"/>
-                      <a:tailEnd type="none" w="med" len="med"/>
-                    </a:lnL>
-                    <a:lnR w="9525" cap="flat" cmpd="sng" algn="ctr">
-                      <a:solidFill>
-                        <a:srgbClr val="D6E2DA"/>
-                      </a:solidFill>
-                      <a:prstDash val="solid"/>
-                      <a:round/>
-                      <a:headEnd type="none" w="med" len="med"/>
-                      <a:tailEnd type="none" w="med" len="med"/>
-                    </a:lnR>
-                    <a:lnT w="9525" cap="flat" cmpd="sng" algn="ctr">
-                      <a:solidFill>
-                        <a:srgbClr val="D6E2DA"/>
-                      </a:solidFill>
-                      <a:prstDash val="solid"/>
-                      <a:round/>
-                      <a:headEnd type="none" w="med" len="med"/>
-                      <a:tailEnd type="none" w="med" len="med"/>
-                    </a:lnT>
-                    <a:lnB w="9525" cap="flat" cmpd="sng" algn="ctr">
-                      <a:solidFill>
-                        <a:srgbClr val="D6E2DA"/>
-                      </a:solidFill>
-                      <a:prstDash val="solid"/>
-                      <a:round/>
-                      <a:headEnd type="none" w="med" len="med"/>
-                      <a:tailEnd type="none" w="med" len="med"/>
-                    </a:lnB>
-                    <a:solidFill>
-                      <a:srgbClr val="EEF3EF"/>
-                    </a:solidFill>
-                  </a:tcPr>
-                </a:tc>
-                <a:tc>
-                  <a:txBody>
-                    <a:bodyPr/>
-                    <a:lstStyle/>
-                    <a:p>
-                      <a:pPr indent="0" marL="0">
-                        <a:buNone/>
-                      </a:pPr>
-                      <a:r>
-                        <a:rPr lang="en-US" sz="1500" b="1" dirty="0">
-                          <a:solidFill>
-                            <a:srgbClr val="1E9E57"/>
-                          </a:solidFill>
-                        </a:rPr>
-                        <a:t>Harganya</a:t>
-                      </a:r>
-                      <a:endParaRPr lang="en-US" sz="1500" dirty="0"/>
-                    </a:p>
-                  </a:txBody>
-                  <a:tcPr marL="164592" marR="164592" marT="182880" marB="182880" anchor="t">
-                    <a:lnL w="9525" cap="flat" cmpd="sng" algn="ctr">
-                      <a:solidFill>
-                        <a:srgbClr val="D6E2DA"/>
-                      </a:solidFill>
-                      <a:prstDash val="solid"/>
-                      <a:round/>
-                      <a:headEnd type="none" w="med" len="med"/>
-                      <a:tailEnd type="none" w="med" len="med"/>
-                    </a:lnL>
-                    <a:lnR w="9525" cap="flat" cmpd="sng" algn="ctr">
-                      <a:solidFill>
-                        <a:srgbClr val="D6E2DA"/>
-                      </a:solidFill>
-                      <a:prstDash val="solid"/>
-                      <a:round/>
-                      <a:headEnd type="none" w="med" len="med"/>
-                      <a:tailEnd type="none" w="med" len="med"/>
-                    </a:lnR>
-                    <a:lnT w="9525" cap="flat" cmpd="sng" algn="ctr">
-                      <a:solidFill>
-                        <a:srgbClr val="D6E2DA"/>
-                      </a:solidFill>
-                      <a:prstDash val="solid"/>
-                      <a:round/>
-                      <a:headEnd type="none" w="med" len="med"/>
-                      <a:tailEnd type="none" w="med" len="med"/>
-                    </a:lnT>
-                    <a:lnB w="9525" cap="flat" cmpd="sng" algn="ctr">
-                      <a:solidFill>
-                        <a:srgbClr val="D6E2DA"/>
-                      </a:solidFill>
-                      <a:prstDash val="solid"/>
-                      <a:round/>
-                      <a:headEnd type="none" w="med" len="med"/>
-                      <a:tailEnd type="none" w="med" len="med"/>
-                    </a:lnB>
-                    <a:solidFill>
-                      <a:srgbClr val="EEF3EF"/>
-                    </a:solidFill>
-                  </a:tcPr>
-                </a:tc>
-              </a:tr>
-              <a:tr h="0">
-                <a:tc>
-                  <a:txBody>
-                    <a:bodyPr/>
-                    <a:lstStyle/>
-                    <a:p>
-                      <a:pPr indent="0" marL="0">
-                        <a:buNone/>
-                      </a:pPr>
-                      <a:r>
-                        <a:rPr lang="en-US" sz="1700" b="1" dirty="0">
-                          <a:solidFill>
-                            <a:srgbClr val="15211B"/>
-                          </a:solidFill>
-                        </a:rPr>
-                        <a:t>subscription_ends_on disimpan di users</a:t>
-                      </a:r>
-                      <a:endParaRPr lang="en-US" sz="1700" dirty="0"/>
-                    </a:p>
-                  </a:txBody>
-                  <a:tcPr marL="164592" marR="164592" marT="182880" marB="182880" anchor="t">
-                    <a:lnL w="9525" cap="flat" cmpd="sng" algn="ctr">
-                      <a:solidFill>
-                        <a:srgbClr val="D6E2DA"/>
-                      </a:solidFill>
-                      <a:prstDash val="solid"/>
-                      <a:round/>
-                      <a:headEnd type="none" w="med" len="med"/>
-                      <a:tailEnd type="none" w="med" len="med"/>
-                    </a:lnL>
-                    <a:lnR w="9525" cap="flat" cmpd="sng" algn="ctr">
-                      <a:solidFill>
-                        <a:srgbClr val="D6E2DA"/>
-                      </a:solidFill>
-                      <a:prstDash val="solid"/>
-                      <a:round/>
-                      <a:headEnd type="none" w="med" len="med"/>
-                      <a:tailEnd type="none" w="med" len="med"/>
-                    </a:lnR>
-                    <a:lnT w="9525" cap="flat" cmpd="sng" algn="ctr">
-                      <a:solidFill>
-                        <a:srgbClr val="D6E2DA"/>
-                      </a:solidFill>
-                      <a:prstDash val="solid"/>
-                      <a:round/>
-                      <a:headEnd type="none" w="med" len="med"/>
-                      <a:tailEnd type="none" w="med" len="med"/>
-                    </a:lnT>
-                    <a:lnB w="9525" cap="flat" cmpd="sng" algn="ctr">
-                      <a:solidFill>
-                        <a:srgbClr val="D6E2DA"/>
-                      </a:solidFill>
-                      <a:prstDash val="solid"/>
-                      <a:round/>
-                      <a:headEnd type="none" w="med" len="med"/>
-                      <a:tailEnd type="none" w="med" len="med"/>
-                    </a:lnB>
-                  </a:tcPr>
-                </a:tc>
-                <a:tc>
-                  <a:txBody>
-                    <a:bodyPr/>
-                    <a:lstStyle/>
-                    <a:p>
-                      <a:pPr indent="0" marL="0">
-                        <a:buNone/>
-                      </a:pPr>
-                      <a:r>
-                        <a:rPr lang="en-US" sz="1700" dirty="0">
-                          <a:solidFill>
-                            <a:srgbClr val="15211B"/>
-                          </a:solidFill>
-                        </a:rPr>
-                        <a:t>API mengecek akses di setiap pemutaran; satu kolom ber-index cukup</a:t>
-                      </a:r>
-                      <a:endParaRPr lang="en-US" sz="1700" dirty="0"/>
-                    </a:p>
-                  </a:txBody>
-                  <a:tcPr marL="164592" marR="164592" marT="182880" marB="182880" anchor="t">
-                    <a:lnL w="9525" cap="flat" cmpd="sng" algn="ctr">
-                      <a:solidFill>
-                        <a:srgbClr val="D6E2DA"/>
-                      </a:solidFill>
-                      <a:prstDash val="solid"/>
-                      <a:round/>
-                      <a:headEnd type="none" w="med" len="med"/>
-                      <a:tailEnd type="none" w="med" len="med"/>
-                    </a:lnL>
-                    <a:lnR w="9525" cap="flat" cmpd="sng" algn="ctr">
-                      <a:solidFill>
-                        <a:srgbClr val="D6E2DA"/>
-                      </a:solidFill>
-                      <a:prstDash val="solid"/>
-                      <a:round/>
-                      <a:headEnd type="none" w="med" len="med"/>
-                      <a:tailEnd type="none" w="med" len="med"/>
-                    </a:lnR>
-                    <a:lnT w="9525" cap="flat" cmpd="sng" algn="ctr">
-                      <a:solidFill>
-                        <a:srgbClr val="D6E2DA"/>
-                      </a:solidFill>
-                      <a:prstDash val="solid"/>
-                      <a:round/>
-                      <a:headEnd type="none" w="med" len="med"/>
-                      <a:tailEnd type="none" w="med" len="med"/>
-                    </a:lnT>
-                    <a:lnB w="9525" cap="flat" cmpd="sng" algn="ctr">
-                      <a:solidFill>
-                        <a:srgbClr val="D6E2DA"/>
-                      </a:solidFill>
-                      <a:prstDash val="solid"/>
-                      <a:round/>
-                      <a:headEnd type="none" w="med" len="med"/>
-                      <a:tailEnd type="none" w="med" len="med"/>
-                    </a:lnB>
-                  </a:tcPr>
-                </a:tc>
-                <a:tc>
-                  <a:txBody>
-                    <a:bodyPr/>
-                    <a:lstStyle/>
-                    <a:p>
-                      <a:pPr indent="0" marL="0">
-                        <a:buNone/>
-                      </a:pPr>
-                      <a:r>
-                        <a:rPr lang="en-US" sz="1700" dirty="0">
-                          <a:solidFill>
-                            <a:srgbClr val="15211B"/>
-                          </a:solidFill>
-                        </a:rPr>
-                        <a:t>Data ganda; hanya SubscriptionService yang boleh mengubahnya</a:t>
-                      </a:r>
-                      <a:endParaRPr lang="en-US" sz="1700" dirty="0"/>
-                    </a:p>
-                  </a:txBody>
-                  <a:tcPr marL="164592" marR="164592" marT="182880" marB="182880" anchor="t">
-                    <a:lnL w="9525" cap="flat" cmpd="sng" algn="ctr">
-                      <a:solidFill>
-                        <a:srgbClr val="D6E2DA"/>
-                      </a:solidFill>
-                      <a:prstDash val="solid"/>
-                      <a:round/>
-                      <a:headEnd type="none" w="med" len="med"/>
-                      <a:tailEnd type="none" w="med" len="med"/>
-                    </a:lnL>
-                    <a:lnR w="9525" cap="flat" cmpd="sng" algn="ctr">
-                      <a:solidFill>
-                        <a:srgbClr val="D6E2DA"/>
-                      </a:solidFill>
-                      <a:prstDash val="solid"/>
-                      <a:round/>
-                      <a:headEnd type="none" w="med" len="med"/>
-                      <a:tailEnd type="none" w="med" len="med"/>
-                    </a:lnR>
-                    <a:lnT w="9525" cap="flat" cmpd="sng" algn="ctr">
-                      <a:solidFill>
-                        <a:srgbClr val="D6E2DA"/>
-                      </a:solidFill>
-                      <a:prstDash val="solid"/>
-                      <a:round/>
-                      <a:headEnd type="none" w="med" len="med"/>
-                      <a:tailEnd type="none" w="med" len="med"/>
-                    </a:lnT>
-                    <a:lnB w="9525" cap="flat" cmpd="sng" algn="ctr">
-                      <a:solidFill>
-                        <a:srgbClr val="D6E2DA"/>
-                      </a:solidFill>
-                      <a:prstDash val="solid"/>
-                      <a:round/>
-                      <a:headEnd type="none" w="med" len="med"/>
-                      <a:tailEnd type="none" w="med" len="med"/>
-                    </a:lnB>
-                  </a:tcPr>
-                </a:tc>
-              </a:tr>
-              <a:tr h="0">
-                <a:tc>
-                  <a:txBody>
-                    <a:bodyPr/>
-                    <a:lstStyle/>
-                    <a:p>
-                      <a:pPr indent="0" marL="0">
-                        <a:buNone/>
-                      </a:pPr>
-                      <a:r>
-                        <a:rPr lang="en-US" sz="1700" b="1" dirty="0">
-                          <a:solidFill>
-                            <a:srgbClr val="15211B"/>
-                          </a:solidFill>
-                        </a:rPr>
-                        <a:t>Pembayaran tidak bisa diedit</a:t>
-                      </a:r>
-                      <a:endParaRPr lang="en-US" sz="1700" dirty="0"/>
-                    </a:p>
-                  </a:txBody>
-                  <a:tcPr marL="164592" marR="164592" marT="182880" marB="182880" anchor="t">
-                    <a:lnL w="9525" cap="flat" cmpd="sng" algn="ctr">
-                      <a:solidFill>
-                        <a:srgbClr val="D6E2DA"/>
-                      </a:solidFill>
-                      <a:prstDash val="solid"/>
-                      <a:round/>
-                      <a:headEnd type="none" w="med" len="med"/>
-                      <a:tailEnd type="none" w="med" len="med"/>
-                    </a:lnL>
-                    <a:lnR w="9525" cap="flat" cmpd="sng" algn="ctr">
-                      <a:solidFill>
-                        <a:srgbClr val="D6E2DA"/>
-                      </a:solidFill>
-                      <a:prstDash val="solid"/>
-                      <a:round/>
-                      <a:headEnd type="none" w="med" len="med"/>
-                      <a:tailEnd type="none" w="med" len="med"/>
-                    </a:lnR>
-                    <a:lnT w="9525" cap="flat" cmpd="sng" algn="ctr">
-                      <a:solidFill>
-                        <a:srgbClr val="D6E2DA"/>
-                      </a:solidFill>
-                      <a:prstDash val="solid"/>
-                      <a:round/>
-                      <a:headEnd type="none" w="med" len="med"/>
-                      <a:tailEnd type="none" w="med" len="med"/>
-                    </a:lnT>
-                    <a:lnB w="9525" cap="flat" cmpd="sng" algn="ctr">
-                      <a:solidFill>
-                        <a:srgbClr val="D6E2DA"/>
-                      </a:solidFill>
-                      <a:prstDash val="solid"/>
-                      <a:round/>
-                      <a:headEnd type="none" w="med" len="med"/>
-                      <a:tailEnd type="none" w="med" len="med"/>
-                    </a:lnB>
-                  </a:tcPr>
-                </a:tc>
-                <a:tc>
-                  <a:txBody>
-                    <a:bodyPr/>
-                    <a:lstStyle/>
-                    <a:p>
-                      <a:pPr indent="0" marL="0">
-                        <a:buNone/>
-                      </a:pPr>
-                      <a:r>
-                        <a:rPr lang="en-US" sz="1700" dirty="0">
-                          <a:solidFill>
-                            <a:srgbClr val="15211B"/>
-                          </a:solidFill>
-                        </a:rPr>
-                        <a:t>Langganan dan sewa adalah catatan keuangan</a:t>
-                      </a:r>
-                      <a:endParaRPr lang="en-US" sz="1700" dirty="0"/>
-                    </a:p>
-                  </a:txBody>
-                  <a:tcPr marL="164592" marR="164592" marT="182880" marB="182880" anchor="t">
-                    <a:lnL w="9525" cap="flat" cmpd="sng" algn="ctr">
-                      <a:solidFill>
-                        <a:srgbClr val="D6E2DA"/>
-                      </a:solidFill>
-                      <a:prstDash val="solid"/>
-                      <a:round/>
-                      <a:headEnd type="none" w="med" len="med"/>
-                      <a:tailEnd type="none" w="med" len="med"/>
-                    </a:lnL>
-                    <a:lnR w="9525" cap="flat" cmpd="sng" algn="ctr">
-                      <a:solidFill>
-                        <a:srgbClr val="D6E2DA"/>
-                      </a:solidFill>
-                      <a:prstDash val="solid"/>
-                      <a:round/>
-                      <a:headEnd type="none" w="med" len="med"/>
-                      <a:tailEnd type="none" w="med" len="med"/>
-                    </a:lnR>
-                    <a:lnT w="9525" cap="flat" cmpd="sng" algn="ctr">
-                      <a:solidFill>
-                        <a:srgbClr val="D6E2DA"/>
-                      </a:solidFill>
-                      <a:prstDash val="solid"/>
-                      <a:round/>
-                      <a:headEnd type="none" w="med" len="med"/>
-                      <a:tailEnd type="none" w="med" len="med"/>
-                    </a:lnT>
-                    <a:lnB w="9525" cap="flat" cmpd="sng" algn="ctr">
-                      <a:solidFill>
-                        <a:srgbClr val="D6E2DA"/>
-                      </a:solidFill>
-                      <a:prstDash val="solid"/>
-                      <a:round/>
-                      <a:headEnd type="none" w="med" len="med"/>
-                      <a:tailEnd type="none" w="med" len="med"/>
-                    </a:lnB>
-                  </a:tcPr>
-                </a:tc>
-                <a:tc>
-                  <a:txBody>
-                    <a:bodyPr/>
-                    <a:lstStyle/>
-                    <a:p>
-                      <a:pPr indent="0" marL="0">
-                        <a:buNone/>
-                      </a:pPr>
-                      <a:r>
-                        <a:rPr lang="en-US" sz="1700" dirty="0">
-                          <a:solidFill>
-                            <a:srgbClr val="15211B"/>
-                          </a:solidFill>
-                        </a:rPr>
-                        <a:t>Koreksi harus berupa entri baru</a:t>
-                      </a:r>
-                      <a:endParaRPr lang="en-US" sz="1700" dirty="0"/>
-                    </a:p>
-                  </a:txBody>
-                  <a:tcPr marL="164592" marR="164592" marT="182880" marB="182880" anchor="t">
-                    <a:lnL w="9525" cap="flat" cmpd="sng" algn="ctr">
-                      <a:solidFill>
-                        <a:srgbClr val="D6E2DA"/>
-                      </a:solidFill>
-                      <a:prstDash val="solid"/>
-                      <a:round/>
-                      <a:headEnd type="none" w="med" len="med"/>
-                      <a:tailEnd type="none" w="med" len="med"/>
-                    </a:lnL>
-                    <a:lnR w="9525" cap="flat" cmpd="sng" algn="ctr">
-                      <a:solidFill>
-                        <a:srgbClr val="D6E2DA"/>
-                      </a:solidFill>
-                      <a:prstDash val="solid"/>
-                      <a:round/>
-                      <a:headEnd type="none" w="med" len="med"/>
-                      <a:tailEnd type="none" w="med" len="med"/>
-                    </a:lnR>
-                    <a:lnT w="9525" cap="flat" cmpd="sng" algn="ctr">
-                      <a:solidFill>
-                        <a:srgbClr val="D6E2DA"/>
-                      </a:solidFill>
-                      <a:prstDash val="solid"/>
-                      <a:round/>
-                      <a:headEnd type="none" w="med" len="med"/>
-                      <a:tailEnd type="none" w="med" len="med"/>
-                    </a:lnT>
-                    <a:lnB w="9525" cap="flat" cmpd="sng" algn="ctr">
-                      <a:solidFill>
-                        <a:srgbClr val="D6E2DA"/>
-                      </a:solidFill>
-                      <a:prstDash val="solid"/>
-                      <a:round/>
-                      <a:headEnd type="none" w="med" len="med"/>
-                      <a:tailEnd type="none" w="med" len="med"/>
-                    </a:lnB>
-                  </a:tcPr>
-                </a:tc>
-              </a:tr>
-              <a:tr h="0">
-                <a:tc>
-                  <a:txBody>
-                    <a:bodyPr/>
-                    <a:lstStyle/>
-                    <a:p>
-                      <a:pPr indent="0" marL="0">
-                        <a:buNone/>
-                      </a:pPr>
-                      <a:r>
-                        <a:rPr lang="en-US" sz="1700" b="1" dirty="0">
-                          <a:solidFill>
-                            <a:srgbClr val="15211B"/>
-                          </a:solidFill>
-                        </a:rPr>
-                        <a:t>Nonaktifkan, bukan hapus</a:t>
-                      </a:r>
-                      <a:endParaRPr lang="en-US" sz="1700" dirty="0"/>
-                    </a:p>
-                  </a:txBody>
-                  <a:tcPr marL="164592" marR="164592" marT="182880" marB="182880" anchor="t">
-                    <a:lnL w="9525" cap="flat" cmpd="sng" algn="ctr">
-                      <a:solidFill>
-                        <a:srgbClr val="D6E2DA"/>
-                      </a:solidFill>
-                      <a:prstDash val="solid"/>
-                      <a:round/>
-                      <a:headEnd type="none" w="med" len="med"/>
-                      <a:tailEnd type="none" w="med" len="med"/>
-                    </a:lnL>
-                    <a:lnR w="9525" cap="flat" cmpd="sng" algn="ctr">
-                      <a:solidFill>
-                        <a:srgbClr val="D6E2DA"/>
-                      </a:solidFill>
-                      <a:prstDash val="solid"/>
-                      <a:round/>
-                      <a:headEnd type="none" w="med" len="med"/>
-                      <a:tailEnd type="none" w="med" len="med"/>
-                    </a:lnR>
-                    <a:lnT w="9525" cap="flat" cmpd="sng" algn="ctr">
-                      <a:solidFill>
-                        <a:srgbClr val="D6E2DA"/>
-                      </a:solidFill>
-                      <a:prstDash val="solid"/>
-                      <a:round/>
-                      <a:headEnd type="none" w="med" len="med"/>
-                      <a:tailEnd type="none" w="med" len="med"/>
-                    </a:lnT>
-                    <a:lnB w="9525" cap="flat" cmpd="sng" algn="ctr">
-                      <a:solidFill>
-                        <a:srgbClr val="D6E2DA"/>
-                      </a:solidFill>
-                      <a:prstDash val="solid"/>
-                      <a:round/>
-                      <a:headEnd type="none" w="med" len="med"/>
-                      <a:tailEnd type="none" w="med" len="med"/>
-                    </a:lnB>
-                  </a:tcPr>
-                </a:tc>
-                <a:tc>
-                  <a:txBody>
-                    <a:bodyPr/>
-                    <a:lstStyle/>
-                    <a:p>
-                      <a:pPr indent="0" marL="0">
-                        <a:buNone/>
-                      </a:pPr>
-                      <a:r>
-                        <a:rPr lang="en-US" sz="1700" dirty="0">
-                          <a:solidFill>
-                            <a:srgbClr val="15211B"/>
-                          </a:solidFill>
-                        </a:rPr>
-                        <a:t>Genre, paket, atau pengguna yang dipakai tetap punya riwayat</a:t>
-                      </a:r>
-                      <a:endParaRPr lang="en-US" sz="1700" dirty="0"/>
-                    </a:p>
-                  </a:txBody>
-                  <a:tcPr marL="164592" marR="164592" marT="182880" marB="182880" anchor="t">
-                    <a:lnL w="9525" cap="flat" cmpd="sng" algn="ctr">
-                      <a:solidFill>
-                        <a:srgbClr val="D6E2DA"/>
-                      </a:solidFill>
-                      <a:prstDash val="solid"/>
-                      <a:round/>
-                      <a:headEnd type="none" w="med" len="med"/>
-                      <a:tailEnd type="none" w="med" len="med"/>
-                    </a:lnL>
-                    <a:lnR w="9525" cap="flat" cmpd="sng" algn="ctr">
-                      <a:solidFill>
-                        <a:srgbClr val="D6E2DA"/>
-                      </a:solidFill>
-                      <a:prstDash val="solid"/>
-                      <a:round/>
-                      <a:headEnd type="none" w="med" len="med"/>
-                      <a:tailEnd type="none" w="med" len="med"/>
-                    </a:lnR>
-                    <a:lnT w="9525" cap="flat" cmpd="sng" algn="ctr">
-                      <a:solidFill>
-                        <a:srgbClr val="D6E2DA"/>
-                      </a:solidFill>
-                      <a:prstDash val="solid"/>
-                      <a:round/>
-                      <a:headEnd type="none" w="med" len="med"/>
-                      <a:tailEnd type="none" w="med" len="med"/>
-                    </a:lnT>
-                    <a:lnB w="9525" cap="flat" cmpd="sng" algn="ctr">
-                      <a:solidFill>
-                        <a:srgbClr val="D6E2DA"/>
-                      </a:solidFill>
-                      <a:prstDash val="solid"/>
-                      <a:round/>
-                      <a:headEnd type="none" w="med" len="med"/>
-                      <a:tailEnd type="none" w="med" len="med"/>
-                    </a:lnB>
-                  </a:tcPr>
-                </a:tc>
-                <a:tc>
-                  <a:txBody>
-                    <a:bodyPr/>
-                    <a:lstStyle/>
-                    <a:p>
-                      <a:pPr indent="0" marL="0">
-                        <a:buNone/>
-                      </a:pPr>
-                      <a:r>
-                        <a:rPr lang="en-US" sz="1700" dirty="0">
-                          <a:solidFill>
-                            <a:srgbClr val="15211B"/>
-                          </a:solidFill>
-                        </a:rPr>
-                        <a:t>Daftar perlu filter aktif</a:t>
-                      </a:r>
-                      <a:endParaRPr lang="en-US" sz="1700" dirty="0"/>
-                    </a:p>
-                  </a:txBody>
-                  <a:tcPr marL="164592" marR="164592" marT="182880" marB="182880" anchor="t">
-                    <a:lnL w="9525" cap="flat" cmpd="sng" algn="ctr">
-                      <a:solidFill>
-                        <a:srgbClr val="D6E2DA"/>
-                      </a:solidFill>
-                      <a:prstDash val="solid"/>
-                      <a:round/>
-                      <a:headEnd type="none" w="med" len="med"/>
-                      <a:tailEnd type="none" w="med" len="med"/>
-                    </a:lnL>
-                    <a:lnR w="9525" cap="flat" cmpd="sng" algn="ctr">
-                      <a:solidFill>
-                        <a:srgbClr val="D6E2DA"/>
-                      </a:solidFill>
-                      <a:prstDash val="solid"/>
-                      <a:round/>
-                      <a:headEnd type="none" w="med" len="med"/>
-                      <a:tailEnd type="none" w="med" len="med"/>
-                    </a:lnR>
-                    <a:lnT w="9525" cap="flat" cmpd="sng" algn="ctr">
-                      <a:solidFill>
-                        <a:srgbClr val="D6E2DA"/>
-                      </a:solidFill>
-                      <a:prstDash val="solid"/>
-                      <a:round/>
-                      <a:headEnd type="none" w="med" len="med"/>
-                      <a:tailEnd type="none" w="med" len="med"/>
-                    </a:lnT>
-                    <a:lnB w="9525" cap="flat" cmpd="sng" algn="ctr">
-                      <a:solidFill>
-                        <a:srgbClr val="D6E2DA"/>
-                      </a:solidFill>
-                      <a:prstDash val="solid"/>
-                      <a:round/>
-                      <a:headEnd type="none" w="med" len="med"/>
-                      <a:tailEnd type="none" w="med" len="med"/>
-                    </a:lnB>
-                  </a:tcPr>
-                </a:tc>
-              </a:tr>
-              <a:tr h="0">
-                <a:tc>
-                  <a:txBody>
-                    <a:bodyPr/>
-                    <a:lstStyle/>
-                    <a:p>
-                      <a:pPr indent="0" marL="0">
-                        <a:buNone/>
-                      </a:pPr>
-                      <a:r>
-                        <a:rPr lang="en-US" sz="1700" b="1" dirty="0">
-                          <a:solidFill>
-                            <a:srgbClr val="15211B"/>
-                          </a:solidFill>
-                        </a:rPr>
-                        <a:t>Episode diperbarui di tempat</a:t>
-                      </a:r>
-                      <a:endParaRPr lang="en-US" sz="1700" dirty="0"/>
-                    </a:p>
-                  </a:txBody>
-                  <a:tcPr marL="164592" marR="164592" marT="182880" marB="182880" anchor="t">
-                    <a:lnL w="9525" cap="flat" cmpd="sng" algn="ctr">
-                      <a:solidFill>
-                        <a:srgbClr val="D6E2DA"/>
-                      </a:solidFill>
-                      <a:prstDash val="solid"/>
-                      <a:round/>
-                      <a:headEnd type="none" w="med" len="med"/>
-                      <a:tailEnd type="none" w="med" len="med"/>
-                    </a:lnL>
-                    <a:lnR w="9525" cap="flat" cmpd="sng" algn="ctr">
-                      <a:solidFill>
-                        <a:srgbClr val="D6E2DA"/>
-                      </a:solidFill>
-                      <a:prstDash val="solid"/>
-                      <a:round/>
-                      <a:headEnd type="none" w="med" len="med"/>
-                      <a:tailEnd type="none" w="med" len="med"/>
-                    </a:lnR>
-                    <a:lnT w="9525" cap="flat" cmpd="sng" algn="ctr">
-                      <a:solidFill>
-                        <a:srgbClr val="D6E2DA"/>
-                      </a:solidFill>
-                      <a:prstDash val="solid"/>
-                      <a:round/>
-                      <a:headEnd type="none" w="med" len="med"/>
-                      <a:tailEnd type="none" w="med" len="med"/>
-                    </a:lnT>
-                    <a:lnB w="9525" cap="flat" cmpd="sng" algn="ctr">
-                      <a:solidFill>
-                        <a:srgbClr val="D6E2DA"/>
-                      </a:solidFill>
-                      <a:prstDash val="solid"/>
-                      <a:round/>
-                      <a:headEnd type="none" w="med" len="med"/>
-                      <a:tailEnd type="none" w="med" len="med"/>
-                    </a:lnB>
-                  </a:tcPr>
-                </a:tc>
-                <a:tc>
-                  <a:txBody>
-                    <a:bodyPr/>
-                    <a:lstStyle/>
-                    <a:p>
-                      <a:pPr indent="0" marL="0">
-                        <a:buNone/>
-                      </a:pPr>
-                      <a:r>
-                        <a:rPr lang="en-US" sz="1700" dirty="0">
-                          <a:solidFill>
-                            <a:srgbClr val="15211B"/>
-                          </a:solidFill>
-                        </a:rPr>
-                        <a:t>Riwayat tontonan tetap menempel ke baris yang sama</a:t>
-                      </a:r>
-                      <a:endParaRPr lang="en-US" sz="1700" dirty="0"/>
-                    </a:p>
-                  </a:txBody>
-                  <a:tcPr marL="164592" marR="164592" marT="182880" marB="182880" anchor="t">
-                    <a:lnL w="9525" cap="flat" cmpd="sng" algn="ctr">
-                      <a:solidFill>
-                        <a:srgbClr val="D6E2DA"/>
-                      </a:solidFill>
-                      <a:prstDash val="solid"/>
-                      <a:round/>
-                      <a:headEnd type="none" w="med" len="med"/>
-                      <a:tailEnd type="none" w="med" len="med"/>
-                    </a:lnL>
-                    <a:lnR w="9525" cap="flat" cmpd="sng" algn="ctr">
-                      <a:solidFill>
-                        <a:srgbClr val="D6E2DA"/>
-                      </a:solidFill>
-                      <a:prstDash val="solid"/>
-                      <a:round/>
-                      <a:headEnd type="none" w="med" len="med"/>
-                      <a:tailEnd type="none" w="med" len="med"/>
-                    </a:lnR>
-                    <a:lnT w="9525" cap="flat" cmpd="sng" algn="ctr">
-                      <a:solidFill>
-                        <a:srgbClr val="D6E2DA"/>
-                      </a:solidFill>
-                      <a:prstDash val="solid"/>
-                      <a:round/>
-                      <a:headEnd type="none" w="med" len="med"/>
-                      <a:tailEnd type="none" w="med" len="med"/>
-                    </a:lnT>
-                    <a:lnB w="9525" cap="flat" cmpd="sng" algn="ctr">
-                      <a:solidFill>
-                        <a:srgbClr val="D6E2DA"/>
-                      </a:solidFill>
-                      <a:prstDash val="solid"/>
-                      <a:round/>
-                      <a:headEnd type="none" w="med" len="med"/>
-                      <a:tailEnd type="none" w="med" len="med"/>
-                    </a:lnB>
-                  </a:tcPr>
-                </a:tc>
-                <a:tc>
-                  <a:txBody>
-                    <a:bodyPr/>
-                    <a:lstStyle/>
-                    <a:p>
-                      <a:pPr indent="0" marL="0">
-                        <a:buNone/>
-                      </a:pPr>
-                      <a:r>
-                        <a:rPr lang="en-US" sz="1700" dirty="0">
-                          <a:solidFill>
-                            <a:srgbClr val="15211B"/>
-                          </a:solidFill>
-                        </a:rPr>
-                        <a:t>Kode simpan lebih rumit daripada hapus lalu buat ulang</a:t>
-                      </a:r>
-                      <a:endParaRPr lang="en-US" sz="1700" dirty="0"/>
-                    </a:p>
-                  </a:txBody>
-                  <a:tcPr marL="164592" marR="164592" marT="182880" marB="182880" anchor="t">
-                    <a:lnL w="9525" cap="flat" cmpd="sng" algn="ctr">
-                      <a:solidFill>
-                        <a:srgbClr val="D6E2DA"/>
-                      </a:solidFill>
-                      <a:prstDash val="solid"/>
-                      <a:round/>
-                      <a:headEnd type="none" w="med" len="med"/>
-                      <a:tailEnd type="none" w="med" len="med"/>
-                    </a:lnL>
-                    <a:lnR w="9525" cap="flat" cmpd="sng" algn="ctr">
-                      <a:solidFill>
-                        <a:srgbClr val="D6E2DA"/>
-                      </a:solidFill>
-                      <a:prstDash val="solid"/>
-                      <a:round/>
-                      <a:headEnd type="none" w="med" len="med"/>
-                      <a:tailEnd type="none" w="med" len="med"/>
-                    </a:lnR>
-                    <a:lnT w="9525" cap="flat" cmpd="sng" algn="ctr">
-                      <a:solidFill>
-                        <a:srgbClr val="D6E2DA"/>
-                      </a:solidFill>
-                      <a:prstDash val="solid"/>
-                      <a:round/>
-                      <a:headEnd type="none" w="med" len="med"/>
-                      <a:tailEnd type="none" w="med" len="med"/>
-                    </a:lnT>
-                    <a:lnB w="9525" cap="flat" cmpd="sng" algn="ctr">
-                      <a:solidFill>
-                        <a:srgbClr val="D6E2DA"/>
-                      </a:solidFill>
-                      <a:prstDash val="solid"/>
-                      <a:round/>
-                      <a:headEnd type="none" w="med" len="med"/>
-                      <a:tailEnd type="none" w="med" len="med"/>
-                    </a:lnB>
-                  </a:tcPr>
-                </a:tc>
-              </a:tr>
-            </a:tbl>
-          </a:graphicData>
-        </a:graphic>
-      </p:graphicFrame>
+      <p:pic>
+        <p:nvPicPr>
+          <p:cNvPr id="5" name="Image 0" descr="preencoded.png">    </p:cNvPr>
+          <p:cNvPicPr>
+            <a:picLocks noChangeAspect="1"/>
+          </p:cNvPicPr>
+          <p:nvPr/>
+        </p:nvPicPr>
+        <p:blipFill>
+          <a:blip r:embed="rId1"/>
+          <a:stretch>
+            <a:fillRect/>
+          </a:stretch>
+        </p:blipFill>
+        <p:spPr>
+          <a:xfrm>
+            <a:off x="548640" y="1691640"/>
+            <a:ext cx="457200" cy="457200"/>
+          </a:xfrm>
+          <a:prstGeom prst="rect">
+            <a:avLst/>
+          </a:prstGeom>
+        </p:spPr>
+      </p:pic>
+      <p:sp>
+        <p:nvSpPr>
+          <p:cNvPr id="6" name="Text 2"/>
+          <p:cNvSpPr txBox="1"/>
+          <p:nvPr/>
+        </p:nvSpPr>
+        <p:spPr>
+          <a:xfrm>
+            <a:off x="1188720" y="1691640"/>
+            <a:ext cx="4389120" cy="457200"/>
+          </a:xfrm>
+          <a:prstGeom prst="rect">
+            <a:avLst/>
+          </a:prstGeom>
+          <a:noFill/>
+          <a:ln/>
+        </p:spPr>
+        <p:txBody>
+          <a:bodyPr wrap="square" lIns="0" tIns="0" rIns="0" bIns="0" rtlCol="0" anchor="ctr"/>
+          <a:lstStyle/>
+          <a:p>
+            <a:pPr indent="0" marL="0">
+              <a:buNone/>
+            </a:pPr>
+            <a:r>
+              <a:rPr lang="en-US" sz="2000" b="1" dirty="0">
+                <a:solidFill>
+                  <a:schemeClr val="tx1"/>
+                </a:solidFill>
+                <a:latin typeface="+mj-lt" pitchFamily="34" charset="0"/>
+                <a:ea typeface="+mj-lt" pitchFamily="34" charset="-122"/>
+                <a:cs typeface="+mj-lt" pitchFamily="34" charset="-120"/>
+              </a:rPr>
+              <a:t>Sewa satu film</a:t>
+            </a:r>
+            <a:endParaRPr lang="en-US" sz="2000" dirty="0"/>
+          </a:p>
+        </p:txBody>
+      </p:sp>
+      <p:sp>
+        <p:nvSpPr>
+          <p:cNvPr id="7" name="Text 3"/>
+          <p:cNvSpPr txBox="1"/>
+          <p:nvPr/>
+        </p:nvSpPr>
+        <p:spPr>
+          <a:xfrm>
+            <a:off x="548640" y="2377440"/>
+            <a:ext cx="5120640" cy="2286000"/>
+          </a:xfrm>
+          <a:prstGeom prst="rect">
+            <a:avLst/>
+          </a:prstGeom>
+          <a:noFill/>
+          <a:ln/>
+        </p:spPr>
+        <p:txBody>
+          <a:bodyPr wrap="square" lIns="0" tIns="0" rIns="0" bIns="0" rtlCol="0" anchor="t"/>
+          <a:lstStyle/>
+          <a:p>
+            <a:pPr marL="342900" indent="-342900">
+              <a:spcAft>
+                <a:spcPts val="1000"/>
+              </a:spcAft>
+              <a:buSzPct val="100000"/>
+              <a:buChar char="•"/>
+            </a:pPr>
+            <a:r>
+              <a:rPr lang="en-US" sz="1700" dirty="0">
+                <a:solidFill>
+                  <a:schemeClr val="tx1"/>
+                </a:solidFill>
+              </a:rPr>
+              <a:t>Hanya film premium yang punya harga sewa</a:t>
+            </a:r>
+            <a:endParaRPr lang="en-US" sz="1700" dirty="0"/>
+          </a:p>
+          <a:p>
+            <a:pPr marL="342900" indent="-342900">
+              <a:spcAft>
+                <a:spcPts val="1000"/>
+              </a:spcAft>
+              <a:buSzPct val="100000"/>
+              <a:buChar char="•"/>
+            </a:pPr>
+            <a:r>
+              <a:rPr lang="en-US" sz="1700" dirty="0">
+                <a:solidFill>
+                  <a:schemeClr val="tx1"/>
+                </a:solidFill>
+              </a:rPr>
+              <a:t>Berlaku rent_days hari sejak dibayar</a:t>
+            </a:r>
+            <a:endParaRPr lang="en-US" sz="1700" dirty="0"/>
+          </a:p>
+          <a:p>
+            <a:pPr marL="342900" indent="-342900">
+              <a:spcAft>
+                <a:spcPts val="1000"/>
+              </a:spcAft>
+              <a:buSzPct val="100000"/>
+              <a:buChar char="•"/>
+            </a:pPr>
+            <a:r>
+              <a:rPr lang="en-US" sz="1700" dirty="0">
+                <a:solidFill>
+                  <a:schemeClr val="tx1"/>
+                </a:solidFill>
+              </a:rPr>
+              <a:t>Pelanggan aktif tidak bisa menyewa: filmnya sudah termasuk</a:t>
+            </a:r>
+            <a:endParaRPr lang="en-US" sz="1700" dirty="0"/>
+          </a:p>
+          <a:p>
+            <a:pPr marL="342900" indent="-342900">
+              <a:spcAft>
+                <a:spcPts val="1000"/>
+              </a:spcAft>
+              <a:buSzPct val="100000"/>
+              <a:buChar char="•"/>
+            </a:pPr>
+            <a:r>
+              <a:rPr lang="en-US" sz="1700" dirty="0">
+                <a:solidFill>
+                  <a:schemeClr val="tx1"/>
+                </a:solidFill>
+              </a:rPr>
+              <a:t>Film yang sama tidak bisa disewa dua kali bersamaan</a:t>
+            </a:r>
+            <a:endParaRPr lang="en-US" sz="1700" dirty="0"/>
+          </a:p>
+        </p:txBody>
+      </p:sp>
+      <p:sp>
+        <p:nvSpPr>
+          <p:cNvPr id="8" name="Shape 4"/>
+          <p:cNvSpPr/>
+          <p:nvPr/>
+        </p:nvSpPr>
+        <p:spPr>
+          <a:xfrm>
+            <a:off x="6080760" y="1737360"/>
+            <a:ext cx="914" cy="2834640"/>
+          </a:xfrm>
+          <a:prstGeom prst="line">
+            <a:avLst/>
+          </a:prstGeom>
+          <a:noFill/>
+          <a:ln w="12700">
+            <a:solidFill>
+              <a:schemeClr val="accent6"/>
+            </a:solidFill>
+            <a:prstDash val="solid"/>
+          </a:ln>
+        </p:spPr>
+      </p:sp>
+      <p:sp>
+        <p:nvSpPr>
+          <p:cNvPr id="9" name="card"/>
+          <p:cNvSpPr/>
+          <p:nvPr/>
+        </p:nvSpPr>
+        <p:spPr>
+          <a:xfrm>
+            <a:off x="548640" y="4892040"/>
+            <a:ext cx="11064240" cy="1143000"/>
+          </a:xfrm>
+          <a:prstGeom prst="roundRect">
+            <a:avLst>
+              <a:gd name="adj" fmla="val 9600"/>
+            </a:avLst>
+          </a:prstGeom>
+          <a:solidFill>
+            <a:schemeClr val="bg2"/>
+          </a:solidFill>
+          <a:ln w="12700">
+            <a:solidFill>
+              <a:schemeClr val="bg2"/>
+            </a:solidFill>
+            <a:prstDash val="solid"/>
+          </a:ln>
+        </p:spPr>
+      </p:sp>
+      <p:sp>
+        <p:nvSpPr>
+          <p:cNvPr id="10" name="Text 6"/>
+          <p:cNvSpPr txBox="1"/>
+          <p:nvPr/>
+        </p:nvSpPr>
+        <p:spPr>
+          <a:xfrm>
+            <a:off x="822960" y="4892040"/>
+            <a:ext cx="10515600" cy="1143000"/>
+          </a:xfrm>
+          <a:prstGeom prst="rect">
+            <a:avLst/>
+          </a:prstGeom>
+          <a:noFill/>
+          <a:ln/>
+        </p:spPr>
+        <p:txBody>
+          <a:bodyPr wrap="square" lIns="0" tIns="0" rIns="0" bIns="0" rtlCol="0" anchor="ctr"/>
+          <a:lstStyle/>
+          <a:p>
+            <a:pPr indent="0" marL="0">
+              <a:buNone/>
+            </a:pPr>
+            <a:r>
+              <a:rPr lang="en-US" sz="1500" dirty="0">
+                <a:solidFill>
+                  <a:schemeClr val="tx1"/>
+                </a:solidFill>
+              </a:rPr>
+              <a:t>Contoh: pelanggan aktif menyewa film premium → ditolak, karena filmnya sudah termasuk langganan. Pengguna tidak membayar dua kali, dan permintaan refund berkurang.</a:t>
+            </a:r>
+            <a:endParaRPr lang="en-US" sz="1500" dirty="0"/>
+          </a:p>
+        </p:txBody>
+      </p:sp>
+      <p:pic>
+        <p:nvPicPr>
+          <p:cNvPr id="11" name="Image 1" descr="preencoded.png">    </p:cNvPr>
+          <p:cNvPicPr>
+            <a:picLocks noChangeAspect="1"/>
+          </p:cNvPicPr>
+          <p:nvPr/>
+        </p:nvPicPr>
+        <p:blipFill>
+          <a:blip r:embed="rId2"/>
+          <a:stretch>
+            <a:fillRect/>
+          </a:stretch>
+        </p:blipFill>
+        <p:spPr>
+          <a:xfrm>
+            <a:off x="6492240" y="1691640"/>
+            <a:ext cx="457200" cy="457200"/>
+          </a:xfrm>
+          <a:prstGeom prst="rect">
+            <a:avLst/>
+          </a:prstGeom>
+        </p:spPr>
+      </p:pic>
+      <p:sp>
+        <p:nvSpPr>
+          <p:cNvPr id="12" name="Text 7"/>
+          <p:cNvSpPr txBox="1"/>
+          <p:nvPr/>
+        </p:nvSpPr>
+        <p:spPr>
+          <a:xfrm>
+            <a:off x="7132320" y="1691640"/>
+            <a:ext cx="4389120" cy="457200"/>
+          </a:xfrm>
+          <a:prstGeom prst="rect">
+            <a:avLst/>
+          </a:prstGeom>
+          <a:noFill/>
+          <a:ln/>
+        </p:spPr>
+        <p:txBody>
+          <a:bodyPr wrap="square" lIns="0" tIns="0" rIns="0" bIns="0" rtlCol="0" anchor="ctr"/>
+          <a:lstStyle/>
+          <a:p>
+            <a:pPr indent="0" marL="0">
+              <a:buNone/>
+            </a:pPr>
+            <a:r>
+              <a:rPr lang="en-US" sz="2000" b="1" dirty="0">
+                <a:solidFill>
+                  <a:schemeClr val="tx1"/>
+                </a:solidFill>
+                <a:latin typeface="+mj-lt" pitchFamily="34" charset="0"/>
+                <a:ea typeface="+mj-lt" pitchFamily="34" charset="-122"/>
+                <a:cs typeface="+mj-lt" pitchFamily="34" charset="-120"/>
+              </a:rPr>
+              <a:t>Kupon</a:t>
+            </a:r>
+            <a:endParaRPr lang="en-US" sz="2000" dirty="0"/>
+          </a:p>
+        </p:txBody>
+      </p:sp>
+      <p:sp>
+        <p:nvSpPr>
+          <p:cNvPr id="13" name="Text 8"/>
+          <p:cNvSpPr txBox="1"/>
+          <p:nvPr/>
+        </p:nvSpPr>
+        <p:spPr>
+          <a:xfrm>
+            <a:off x="6492240" y="2377440"/>
+            <a:ext cx="5120640" cy="2286000"/>
+          </a:xfrm>
+          <a:prstGeom prst="rect">
+            <a:avLst/>
+          </a:prstGeom>
+          <a:noFill/>
+          <a:ln/>
+        </p:spPr>
+        <p:txBody>
+          <a:bodyPr wrap="square" lIns="0" tIns="0" rIns="0" bIns="0" rtlCol="0" anchor="t"/>
+          <a:lstStyle/>
+          <a:p>
+            <a:pPr marL="342900" indent="-342900">
+              <a:spcAft>
+                <a:spcPts val="1000"/>
+              </a:spcAft>
+              <a:buSzPct val="100000"/>
+              <a:buChar char="•"/>
+            </a:pPr>
+            <a:r>
+              <a:rPr lang="en-US" sz="1700" dirty="0">
+                <a:solidFill>
+                  <a:schemeClr val="tx1"/>
+                </a:solidFill>
+              </a:rPr>
+              <a:t>Nominal tetap atau persentase</a:t>
+            </a:r>
+            <a:endParaRPr lang="en-US" sz="1700" dirty="0"/>
+          </a:p>
+          <a:p>
+            <a:pPr marL="342900" indent="-342900">
+              <a:spcAft>
+                <a:spcPts val="1000"/>
+              </a:spcAft>
+              <a:buSzPct val="100000"/>
+              <a:buChar char="•"/>
+            </a:pPr>
+            <a:r>
+              <a:rPr lang="en-US" sz="1700" dirty="0">
+                <a:solidFill>
+                  <a:schemeClr val="tx1"/>
+                </a:solidFill>
+              </a:rPr>
+              <a:t>Hanya berlaku di antara tanggal mulai dan berakhir</a:t>
+            </a:r>
+            <a:endParaRPr lang="en-US" sz="1700" dirty="0"/>
+          </a:p>
+          <a:p>
+            <a:pPr marL="342900" indent="-342900">
+              <a:spcAft>
+                <a:spcPts val="1000"/>
+              </a:spcAft>
+              <a:buSzPct val="100000"/>
+              <a:buChar char="•"/>
+            </a:pPr>
+            <a:r>
+              <a:rPr lang="en-US" sz="1700" dirty="0">
+                <a:solidFill>
+                  <a:schemeClr val="tx1"/>
+                </a:solidFill>
+              </a:rPr>
+              <a:t>Tidak pernah membuat harga di bawah nol</a:t>
+            </a:r>
+            <a:endParaRPr lang="en-US" sz="1700" dirty="0"/>
+          </a:p>
+          <a:p>
+            <a:pPr marL="342900" indent="-342900">
+              <a:spcAft>
+                <a:spcPts val="1000"/>
+              </a:spcAft>
+              <a:buSzPct val="100000"/>
+              <a:buChar char="•"/>
+            </a:pPr>
+            <a:r>
+              <a:rPr lang="en-US" sz="1700" dirty="0">
+                <a:solidFill>
+                  <a:schemeClr val="tx1"/>
+                </a:solidFill>
+              </a:rPr>
+              <a:t>Kupon sekali pakai berlaku sekali per pengguna</a:t>
+            </a:r>
+            <a:endParaRPr lang="en-US" sz="1700" dirty="0"/>
+          </a:p>
+        </p:txBody>
+      </p:sp>
       <p:sp>
         <p:nvSpPr>
           <p:cNvPr id="25" name="Slide Number Placeholder 0"/>
@@ -3828,7 +3308,7 @@
                   <a:schemeClr val="tx1"/>
                 </a:solidFill>
               </a:rPr>
-              <a:t>Kenapa stack ini, dan apa alternatifnya</a:t>
+              <a:t>Kenapa stack ini</a:t>
             </a:r>
             <a:endParaRPr lang="en-US" sz="3200" dirty="0"/>
           </a:p>
@@ -3857,9 +3337,8 @@
             <a:tbl>
               <a:tblPr/>
               <a:tblGrid>
-                <a:gridCol w="2194560"/>
-                <a:gridCol w="4114800"/>
-                <a:gridCol w="4754880"/>
+                <a:gridCol w="3108960"/>
+                <a:gridCol w="7955280"/>
               </a:tblGrid>
               <a:tr h="0">
                 <a:tc>
@@ -3938,67 +3417,6 @@
                           </a:solidFill>
                         </a:rPr>
                         <a:t>Kenapa</a:t>
-                      </a:r>
-                      <a:endParaRPr lang="en-US" sz="1500" dirty="0"/>
-                    </a:p>
-                  </a:txBody>
-                  <a:tcPr marL="164592" marR="164592" marT="182880" marB="182880" anchor="t">
-                    <a:lnL w="9525" cap="flat" cmpd="sng" algn="ctr">
-                      <a:solidFill>
-                        <a:srgbClr val="D6E2DA"/>
-                      </a:solidFill>
-                      <a:prstDash val="solid"/>
-                      <a:round/>
-                      <a:headEnd type="none" w="med" len="med"/>
-                      <a:tailEnd type="none" w="med" len="med"/>
-                    </a:lnL>
-                    <a:lnR w="9525" cap="flat" cmpd="sng" algn="ctr">
-                      <a:solidFill>
-                        <a:srgbClr val="D6E2DA"/>
-                      </a:solidFill>
-                      <a:prstDash val="solid"/>
-                      <a:round/>
-                      <a:headEnd type="none" w="med" len="med"/>
-                      <a:tailEnd type="none" w="med" len="med"/>
-                    </a:lnR>
-                    <a:lnT w="9525" cap="flat" cmpd="sng" algn="ctr">
-                      <a:solidFill>
-                        <a:srgbClr val="D6E2DA"/>
-                      </a:solidFill>
-                      <a:prstDash val="solid"/>
-                      <a:round/>
-                      <a:headEnd type="none" w="med" len="med"/>
-                      <a:tailEnd type="none" w="med" len="med"/>
-                    </a:lnT>
-                    <a:lnB w="9525" cap="flat" cmpd="sng" algn="ctr">
-                      <a:solidFill>
-                        <a:srgbClr val="D6E2DA"/>
-                      </a:solidFill>
-                      <a:prstDash val="solid"/>
-                      <a:round/>
-                      <a:headEnd type="none" w="med" len="med"/>
-                      <a:tailEnd type="none" w="med" len="med"/>
-                    </a:lnB>
-                    <a:solidFill>
-                      <a:srgbClr val="EEF3EF"/>
-                    </a:solidFill>
-                  </a:tcPr>
-                </a:tc>
-                <a:tc>
-                  <a:txBody>
-                    <a:bodyPr/>
-                    <a:lstStyle/>
-                    <a:p>
-                      <a:pPr indent="0" marL="0">
-                        <a:buNone/>
-                      </a:pPr>
-                      <a:r>
-                        <a:rPr lang="en-US" sz="1500" b="1" dirty="0">
-                          <a:solidFill>
-                            <a:srgbClr val="1E9E57"/>
-                          </a:solidFill>
-                        </a:rPr>
-                        <a:t>Alternatif yang saya pertimbangkan</a:t>
                       </a:r>
                       <a:endParaRPr lang="en-US" sz="1500" dirty="0"/>
                     </a:p>
@@ -4163,64 +3581,6 @@
                     </a:lnB>
                   </a:tcPr>
                 </a:tc>
-                <a:tc>
-                  <a:txBody>
-                    <a:bodyPr/>
-                    <a:lstStyle/>
-                    <a:p>
-                      <a:pPr indent="0" marL="0">
-                        <a:buNone/>
-                      </a:pPr>
-                      <a:r>
-                        <a:rPr lang="en-US" sz="1700" dirty="0">
-                          <a:solidFill>
-                            <a:srgbClr val="15211B"/>
-                          </a:solidFill>
-                        </a:rPr>
-                        <a:t>Go juga untuk dashboard: satu bahasa, tapi CRUD admin jauh lebih lama dibuat</a:t>
-                      </a:r>
-                      <a:endParaRPr lang="en-US" sz="1700" dirty="0"/>
-                    </a:p>
-                  </a:txBody>
-                  <a:tcPr marL="164592" marR="164592" marT="182880" marB="182880" anchor="t">
-                    <a:lnL w="9525" cap="flat" cmpd="sng" algn="ctr">
-                      <a:solidFill>
-                        <a:srgbClr val="D6E2DA"/>
-                      </a:solidFill>
-                      <a:prstDash val="solid"/>
-                      <a:round/>
-                      <a:headEnd type="none" w="med" len="med"/>
-                      <a:tailEnd type="none" w="med" len="med"/>
-                    </a:lnL>
-                    <a:lnR w="9525" cap="flat" cmpd="sng" algn="ctr">
-                      <a:solidFill>
-                        <a:srgbClr val="D6E2DA"/>
-                      </a:solidFill>
-                      <a:prstDash val="solid"/>
-                      <a:round/>
-                      <a:headEnd type="none" w="med" len="med"/>
-                      <a:tailEnd type="none" w="med" len="med"/>
-                    </a:lnR>
-                    <a:lnT w="9525" cap="flat" cmpd="sng" algn="ctr">
-                      <a:solidFill>
-                        <a:srgbClr val="D6E2DA"/>
-                      </a:solidFill>
-                      <a:prstDash val="solid"/>
-                      <a:round/>
-                      <a:headEnd type="none" w="med" len="med"/>
-                      <a:tailEnd type="none" w="med" len="med"/>
-                    </a:lnT>
-                    <a:lnB w="9525" cap="flat" cmpd="sng" algn="ctr">
-                      <a:solidFill>
-                        <a:srgbClr val="D6E2DA"/>
-                      </a:solidFill>
-                      <a:prstDash val="solid"/>
-                      <a:round/>
-                      <a:headEnd type="none" w="med" len="med"/>
-                      <a:tailEnd type="none" w="med" len="med"/>
-                    </a:lnB>
-                  </a:tcPr>
-                </a:tc>
               </a:tr>
               <a:tr h="0">
                 <a:tc>
@@ -4296,64 +3656,6 @@
                           </a:solidFill>
                         </a:rPr>
                         <a:t>Dipakai bersama API Go; transaksi dan row lock</a:t>
-                      </a:r>
-                      <a:endParaRPr lang="en-US" sz="1700" dirty="0"/>
-                    </a:p>
-                  </a:txBody>
-                  <a:tcPr marL="164592" marR="164592" marT="182880" marB="182880" anchor="t">
-                    <a:lnL w="9525" cap="flat" cmpd="sng" algn="ctr">
-                      <a:solidFill>
-                        <a:srgbClr val="D6E2DA"/>
-                      </a:solidFill>
-                      <a:prstDash val="solid"/>
-                      <a:round/>
-                      <a:headEnd type="none" w="med" len="med"/>
-                      <a:tailEnd type="none" w="med" len="med"/>
-                    </a:lnL>
-                    <a:lnR w="9525" cap="flat" cmpd="sng" algn="ctr">
-                      <a:solidFill>
-                        <a:srgbClr val="D6E2DA"/>
-                      </a:solidFill>
-                      <a:prstDash val="solid"/>
-                      <a:round/>
-                      <a:headEnd type="none" w="med" len="med"/>
-                      <a:tailEnd type="none" w="med" len="med"/>
-                    </a:lnR>
-                    <a:lnT w="9525" cap="flat" cmpd="sng" algn="ctr">
-                      <a:solidFill>
-                        <a:srgbClr val="D6E2DA"/>
-                      </a:solidFill>
-                      <a:prstDash val="solid"/>
-                      <a:round/>
-                      <a:headEnd type="none" w="med" len="med"/>
-                      <a:tailEnd type="none" w="med" len="med"/>
-                    </a:lnT>
-                    <a:lnB w="9525" cap="flat" cmpd="sng" algn="ctr">
-                      <a:solidFill>
-                        <a:srgbClr val="D6E2DA"/>
-                      </a:solidFill>
-                      <a:prstDash val="solid"/>
-                      <a:round/>
-                      <a:headEnd type="none" w="med" len="med"/>
-                      <a:tailEnd type="none" w="med" len="med"/>
-                    </a:lnB>
-                  </a:tcPr>
-                </a:tc>
-                <a:tc>
-                  <a:txBody>
-                    <a:bodyPr/>
-                    <a:lstStyle/>
-                    <a:p>
-                      <a:pPr indent="0" marL="0">
-                        <a:buNone/>
-                      </a:pPr>
-                      <a:r>
-                        <a:rPr lang="en-US" sz="1700" dirty="0">
-                          <a:solidFill>
-                            <a:srgbClr val="15211B"/>
-                          </a:solidFill>
-                        </a:rPr>
-                        <a:t>Database terpisah untuk dashboard: berarti sinkronisasi data dua arah</a:t>
                       </a:r>
                       <a:endParaRPr lang="en-US" sz="1700" dirty="0"/>
                     </a:p>
@@ -4515,64 +3817,6 @@
                     </a:lnB>
                   </a:tcPr>
                 </a:tc>
-                <a:tc>
-                  <a:txBody>
-                    <a:bodyPr/>
-                    <a:lstStyle/>
-                    <a:p>
-                      <a:pPr indent="0" marL="0">
-                        <a:buNone/>
-                      </a:pPr>
-                      <a:r>
-                        <a:rPr lang="en-US" sz="1700" dirty="0">
-                          <a:solidFill>
-                            <a:srgbClr val="15211B"/>
-                          </a:solidFill>
-                        </a:rPr>
-                        <a:t>Bukan bagian saya; sudah ada sebelum dashboard</a:t>
-                      </a:r>
-                      <a:endParaRPr lang="en-US" sz="1700" dirty="0"/>
-                    </a:p>
-                  </a:txBody>
-                  <a:tcPr marL="164592" marR="164592" marT="182880" marB="182880" anchor="t">
-                    <a:lnL w="9525" cap="flat" cmpd="sng" algn="ctr">
-                      <a:solidFill>
-                        <a:srgbClr val="D6E2DA"/>
-                      </a:solidFill>
-                      <a:prstDash val="solid"/>
-                      <a:round/>
-                      <a:headEnd type="none" w="med" len="med"/>
-                      <a:tailEnd type="none" w="med" len="med"/>
-                    </a:lnL>
-                    <a:lnR w="9525" cap="flat" cmpd="sng" algn="ctr">
-                      <a:solidFill>
-                        <a:srgbClr val="D6E2DA"/>
-                      </a:solidFill>
-                      <a:prstDash val="solid"/>
-                      <a:round/>
-                      <a:headEnd type="none" w="med" len="med"/>
-                      <a:tailEnd type="none" w="med" len="med"/>
-                    </a:lnR>
-                    <a:lnT w="9525" cap="flat" cmpd="sng" algn="ctr">
-                      <a:solidFill>
-                        <a:srgbClr val="D6E2DA"/>
-                      </a:solidFill>
-                      <a:prstDash val="solid"/>
-                      <a:round/>
-                      <a:headEnd type="none" w="med" len="med"/>
-                      <a:tailEnd type="none" w="med" len="med"/>
-                    </a:lnT>
-                    <a:lnB w="9525" cap="flat" cmpd="sng" algn="ctr">
-                      <a:solidFill>
-                        <a:srgbClr val="D6E2DA"/>
-                      </a:solidFill>
-                      <a:prstDash val="solid"/>
-                      <a:round/>
-                      <a:headEnd type="none" w="med" len="med"/>
-                      <a:tailEnd type="none" w="med" len="med"/>
-                    </a:lnB>
-                  </a:tcPr>
-                </a:tc>
               </a:tr>
               <a:tr h="0">
                 <a:tc>
@@ -4648,64 +3892,6 @@
                           </a:solidFill>
                         </a:rPr>
                         <a:t>Admin internal tidak perlu SPA; satu grafik cukup Chart.js</a:t>
-                      </a:r>
-                      <a:endParaRPr lang="en-US" sz="1700" dirty="0"/>
-                    </a:p>
-                  </a:txBody>
-                  <a:tcPr marL="164592" marR="164592" marT="182880" marB="182880" anchor="t">
-                    <a:lnL w="9525" cap="flat" cmpd="sng" algn="ctr">
-                      <a:solidFill>
-                        <a:srgbClr val="D6E2DA"/>
-                      </a:solidFill>
-                      <a:prstDash val="solid"/>
-                      <a:round/>
-                      <a:headEnd type="none" w="med" len="med"/>
-                      <a:tailEnd type="none" w="med" len="med"/>
-                    </a:lnL>
-                    <a:lnR w="9525" cap="flat" cmpd="sng" algn="ctr">
-                      <a:solidFill>
-                        <a:srgbClr val="D6E2DA"/>
-                      </a:solidFill>
-                      <a:prstDash val="solid"/>
-                      <a:round/>
-                      <a:headEnd type="none" w="med" len="med"/>
-                      <a:tailEnd type="none" w="med" len="med"/>
-                    </a:lnR>
-                    <a:lnT w="9525" cap="flat" cmpd="sng" algn="ctr">
-                      <a:solidFill>
-                        <a:srgbClr val="D6E2DA"/>
-                      </a:solidFill>
-                      <a:prstDash val="solid"/>
-                      <a:round/>
-                      <a:headEnd type="none" w="med" len="med"/>
-                      <a:tailEnd type="none" w="med" len="med"/>
-                    </a:lnT>
-                    <a:lnB w="9525" cap="flat" cmpd="sng" algn="ctr">
-                      <a:solidFill>
-                        <a:srgbClr val="D6E2DA"/>
-                      </a:solidFill>
-                      <a:prstDash val="solid"/>
-                      <a:round/>
-                      <a:headEnd type="none" w="med" len="med"/>
-                      <a:tailEnd type="none" w="med" len="med"/>
-                    </a:lnB>
-                  </a:tcPr>
-                </a:tc>
-                <a:tc>
-                  <a:txBody>
-                    <a:bodyPr/>
-                    <a:lstStyle/>
-                    <a:p>
-                      <a:pPr indent="0" marL="0">
-                        <a:buNone/>
-                      </a:pPr>
-                      <a:r>
-                        <a:rPr lang="en-US" sz="1700" dirty="0">
-                          <a:solidFill>
-                            <a:srgbClr val="15211B"/>
-                          </a:solidFill>
-                        </a:rPr>
-                        <a:t>Vue seperti web penonton: build dan state terpisah untuk halaman form</a:t>
                       </a:r>
                       <a:endParaRPr lang="en-US" sz="1700" dirty="0"/>
                     </a:p>
@@ -10290,49 +9476,46 @@
                   <a:schemeClr val="tx1"/>
                 </a:solidFill>
               </a:rPr>
-              <a:t>Relasi: dari teks ke tabel pivot</a:t>
+              <a:t>Struktur database (ERD)</a:t>
             </a:r>
             <a:endParaRPr lang="en-US" sz="3200" dirty="0"/>
           </a:p>
         </p:txBody>
       </p:sp>
-      <p:sp>
-        <p:nvSpPr>
-          <p:cNvPr id="5" name="card"/>
-          <p:cNvSpPr/>
-          <p:nvPr/>
-        </p:nvSpPr>
-        <p:spPr>
-          <a:xfrm>
-            <a:off x="548640" y="1600200"/>
-            <a:ext cx="5120640" cy="3520440"/>
-          </a:xfrm>
-          <a:prstGeom prst="roundRect">
-            <a:avLst>
-              <a:gd name="adj" fmla="val 3117"/>
-            </a:avLst>
-          </a:prstGeom>
-          <a:solidFill>
-            <a:schemeClr val="bg2"/>
-          </a:solidFill>
-          <a:ln w="12700">
-            <a:solidFill>
-              <a:schemeClr val="bg2"/>
-            </a:solidFill>
-            <a:prstDash val="solid"/>
-          </a:ln>
-        </p:spPr>
-      </p:sp>
-      <p:sp>
-        <p:nvSpPr>
-          <p:cNvPr id="6" name="Text 3"/>
+      <p:pic>
+        <p:nvPicPr>
+          <p:cNvPr id="5" name="ERD" descr="/workspaces/.xc-work/erd/goflix-id.png">    </p:cNvPr>
+          <p:cNvPicPr>
+            <a:picLocks noChangeAspect="1"/>
+          </p:cNvPicPr>
+          <p:nvPr/>
+        </p:nvPicPr>
+        <p:blipFill>
+          <a:blip r:embed="rId1"/>
+          <a:stretch>
+            <a:fillRect/>
+          </a:stretch>
+        </p:blipFill>
+        <p:spPr>
+          <a:xfrm>
+            <a:off x="548640" y="1417320"/>
+            <a:ext cx="6026899" cy="4800600"/>
+          </a:xfrm>
+          <a:prstGeom prst="rect">
+            <a:avLst/>
+          </a:prstGeom>
+        </p:spPr>
+      </p:pic>
+      <p:sp>
+        <p:nvSpPr>
+          <p:cNvPr id="6" name="Text 2"/>
           <p:cNvSpPr txBox="1"/>
           <p:nvPr/>
         </p:nvSpPr>
         <p:spPr>
           <a:xfrm>
-            <a:off x="868680" y="1783080"/>
-            <a:ext cx="4480560" cy="411480"/>
+            <a:off x="6987019" y="1417320"/>
+            <a:ext cx="4625861" cy="365760"/>
           </a:xfrm>
           <a:prstGeom prst="rect">
             <a:avLst/>
@@ -10348,46 +9531,7 @@
               <a:buNone/>
             </a:pPr>
             <a:r>
-              <a:rPr lang="en-US" sz="1800" b="1" dirty="0">
-                <a:solidFill>
-                  <a:schemeClr val="accent3"/>
-                </a:solidFill>
-                <a:latin typeface="+mj-lt" pitchFamily="34" charset="0"/>
-                <a:ea typeface="+mj-lt" pitchFamily="34" charset="-122"/>
-                <a:cs typeface="+mj-lt" pitchFamily="34" charset="-120"/>
-              </a:rPr>
-              <a:t>Produksi</a:t>
-            </a:r>
-            <a:endParaRPr lang="en-US" sz="1800" dirty="0"/>
-          </a:p>
-        </p:txBody>
-      </p:sp>
-      <p:sp>
-        <p:nvSpPr>
-          <p:cNvPr id="7" name="Text 4"/>
-          <p:cNvSpPr txBox="1"/>
-          <p:nvPr/>
-        </p:nvSpPr>
-        <p:spPr>
-          <a:xfrm>
-            <a:off x="868680" y="2377440"/>
-            <a:ext cx="4480560" cy="1645920"/>
-          </a:xfrm>
-          <a:prstGeom prst="rect">
-            <a:avLst/>
-          </a:prstGeom>
-          <a:noFill/>
-          <a:ln/>
-        </p:spPr>
-        <p:txBody>
-          <a:bodyPr wrap="square" lIns="0" tIns="0" rIns="0" bIns="0" rtlCol="0" anchor="t"/>
-          <a:lstStyle/>
-          <a:p>
-            <a:pPr indent="0" marL="0">
-              <a:buNone/>
-            </a:pPr>
-            <a:r>
-              <a:rPr lang="en-US" sz="1400" dirty="0">
+              <a:rPr lang="en-US" sz="1400" b="1" dirty="0">
                 <a:solidFill>
                   <a:schemeClr val="tx1"/>
                 </a:solidFill>
@@ -10395,16 +9539,74 @@
                 <a:ea typeface="Courier New" pitchFamily="34" charset="-122"/>
                 <a:cs typeface="Courier New" pitchFamily="34" charset="-120"/>
               </a:rPr>
-              <a:t>video</a:t>
+              <a:t>Katalog</a:t>
             </a:r>
             <a:endParaRPr lang="en-US" sz="1400" dirty="0"/>
           </a:p>
+        </p:txBody>
+      </p:sp>
+      <p:sp>
+        <p:nvSpPr>
+          <p:cNvPr id="7" name="Text 3"/>
+          <p:cNvSpPr txBox="1"/>
+          <p:nvPr/>
+        </p:nvSpPr>
+        <p:spPr>
+          <a:xfrm>
+            <a:off x="6987019" y="1801368"/>
+            <a:ext cx="4625861" cy="731520"/>
+          </a:xfrm>
+          <a:prstGeom prst="rect">
+            <a:avLst/>
+          </a:prstGeom>
+          <a:noFill/>
+          <a:ln/>
+        </p:spPr>
+        <p:txBody>
+          <a:bodyPr wrap="square" lIns="0" tIns="0" rIns="0" bIns="0" rtlCol="0" anchor="t"/>
+          <a:lstStyle/>
           <a:p>
             <a:pPr indent="0" marL="0">
               <a:buNone/>
             </a:pPr>
             <a:r>
               <a:rPr lang="en-US" sz="1400" dirty="0">
+                <a:solidFill>
+                  <a:schemeClr val="accent4"/>
+                </a:solidFill>
+              </a:rPr>
+              <a:t>movies, shows, episodes, seasons, dengan pivot genre, bahasa, dan pemain.</a:t>
+            </a:r>
+            <a:endParaRPr lang="en-US" sz="1400" dirty="0"/>
+          </a:p>
+        </p:txBody>
+      </p:sp>
+      <p:sp>
+        <p:nvSpPr>
+          <p:cNvPr id="8" name="Text 4"/>
+          <p:cNvSpPr txBox="1"/>
+          <p:nvPr/>
+        </p:nvSpPr>
+        <p:spPr>
+          <a:xfrm>
+            <a:off x="6987019" y="2606040"/>
+            <a:ext cx="4625861" cy="365760"/>
+          </a:xfrm>
+          <a:prstGeom prst="rect">
+            <a:avLst/>
+          </a:prstGeom>
+          <a:noFill/>
+          <a:ln/>
+        </p:spPr>
+        <p:txBody>
+          <a:bodyPr wrap="square" lIns="0" tIns="0" rIns="0" bIns="0" rtlCol="0" anchor="ctr"/>
+          <a:lstStyle/>
+          <a:p>
+            <a:pPr indent="0" marL="0">
+              <a:buNone/>
+            </a:pPr>
+            <a:r>
+              <a:rPr lang="en-US" sz="1400" b="1" dirty="0">
                 <a:solidFill>
                   <a:schemeClr val="tx1"/>
                 </a:solidFill>
@@ -10412,16 +9614,74 @@
                 <a:ea typeface="Courier New" pitchFamily="34" charset="-122"/>
                 <a:cs typeface="Courier New" pitchFamily="34" charset="-120"/>
               </a:rPr>
-              <a:t>  id: 12</a:t>
+              <a:t>users.subscription_ends_on</a:t>
             </a:r>
             <a:endParaRPr lang="en-US" sz="1400" dirty="0"/>
           </a:p>
+        </p:txBody>
+      </p:sp>
+      <p:sp>
+        <p:nvSpPr>
+          <p:cNvPr id="9" name="Text 5"/>
+          <p:cNvSpPr txBox="1"/>
+          <p:nvPr/>
+        </p:nvSpPr>
+        <p:spPr>
+          <a:xfrm>
+            <a:off x="6987019" y="2990088"/>
+            <a:ext cx="4625861" cy="731520"/>
+          </a:xfrm>
+          <a:prstGeom prst="rect">
+            <a:avLst/>
+          </a:prstGeom>
+          <a:noFill/>
+          <a:ln/>
+        </p:spPr>
+        <p:txBody>
+          <a:bodyPr wrap="square" lIns="0" tIns="0" rIns="0" bIns="0" rtlCol="0" anchor="t"/>
+          <a:lstStyle/>
           <a:p>
             <a:pPr indent="0" marL="0">
               <a:buNone/>
             </a:pPr>
             <a:r>
               <a:rPr lang="en-US" sz="1400" dirty="0">
+                <a:solidFill>
+                  <a:schemeClr val="accent4"/>
+                </a:solidFill>
+              </a:rPr>
+              <a:t>Sumber kebenaran untuk cek akses yang cepat.</a:t>
+            </a:r>
+            <a:endParaRPr lang="en-US" sz="1400" dirty="0"/>
+          </a:p>
+        </p:txBody>
+      </p:sp>
+      <p:sp>
+        <p:nvSpPr>
+          <p:cNvPr id="10" name="Text 6"/>
+          <p:cNvSpPr txBox="1"/>
+          <p:nvPr/>
+        </p:nvSpPr>
+        <p:spPr>
+          <a:xfrm>
+            <a:off x="6987019" y="3794760"/>
+            <a:ext cx="4625861" cy="365760"/>
+          </a:xfrm>
+          <a:prstGeom prst="rect">
+            <a:avLst/>
+          </a:prstGeom>
+          <a:noFill/>
+          <a:ln/>
+        </p:spPr>
+        <p:txBody>
+          <a:bodyPr wrap="square" lIns="0" tIns="0" rIns="0" bIns="0" rtlCol="0" anchor="ctr"/>
+          <a:lstStyle/>
+          <a:p>
+            <a:pPr indent="0" marL="0">
+              <a:buNone/>
+            </a:pPr>
+            <a:r>
+              <a:rPr lang="en-US" sz="1400" b="1" dirty="0">
                 <a:solidFill>
                   <a:schemeClr val="tx1"/>
                 </a:solidFill>
@@ -10429,16 +9689,74 @@
                 <a:ea typeface="Courier New" pitchFamily="34" charset="-122"/>
                 <a:cs typeface="Courier New" pitchFamily="34" charset="-120"/>
               </a:rPr>
-              <a:t>  category_id: '6,12,19'</a:t>
+              <a:t>subscriptions, rentals</a:t>
             </a:r>
             <a:endParaRPr lang="en-US" sz="1400" dirty="0"/>
           </a:p>
+        </p:txBody>
+      </p:sp>
+      <p:sp>
+        <p:nvSpPr>
+          <p:cNvPr id="11" name="Text 7"/>
+          <p:cNvSpPr txBox="1"/>
+          <p:nvPr/>
+        </p:nvSpPr>
+        <p:spPr>
+          <a:xfrm>
+            <a:off x="6987019" y="4178808"/>
+            <a:ext cx="4625861" cy="731520"/>
+          </a:xfrm>
+          <a:prstGeom prst="rect">
+            <a:avLst/>
+          </a:prstGeom>
+          <a:noFill/>
+          <a:ln/>
+        </p:spPr>
+        <p:txBody>
+          <a:bodyPr wrap="square" lIns="0" tIns="0" rIns="0" bIns="0" rtlCol="0" anchor="t"/>
+          <a:lstStyle/>
           <a:p>
             <a:pPr indent="0" marL="0">
               <a:buNone/>
             </a:pPr>
             <a:r>
               <a:rPr lang="en-US" sz="1400" dirty="0">
+                <a:solidFill>
+                  <a:schemeClr val="accent4"/>
+                </a:solidFill>
+              </a:rPr>
+              <a:t>Catatan pembayaran; tidak pernah diedit atau dihapus.</a:t>
+            </a:r>
+            <a:endParaRPr lang="en-US" sz="1400" dirty="0"/>
+          </a:p>
+        </p:txBody>
+      </p:sp>
+      <p:sp>
+        <p:nvSpPr>
+          <p:cNvPr id="12" name="Text 8"/>
+          <p:cNvSpPr txBox="1"/>
+          <p:nvPr/>
+        </p:nvSpPr>
+        <p:spPr>
+          <a:xfrm>
+            <a:off x="6987019" y="4983480"/>
+            <a:ext cx="4625861" cy="365760"/>
+          </a:xfrm>
+          <a:prstGeom prst="rect">
+            <a:avLst/>
+          </a:prstGeom>
+          <a:noFill/>
+          <a:ln/>
+        </p:spPr>
+        <p:txBody>
+          <a:bodyPr wrap="square" lIns="0" tIns="0" rIns="0" bIns="0" rtlCol="0" anchor="ctr"/>
+          <a:lstStyle/>
+          <a:p>
+            <a:pPr indent="0" marL="0">
+              <a:buNone/>
+            </a:pPr>
+            <a:r>
+              <a:rPr lang="en-US" sz="1400" b="1" dirty="0">
                 <a:solidFill>
                   <a:schemeClr val="tx1"/>
                 </a:solidFill>
@@ -10446,7 +9764,7 @@
                 <a:ea typeface="Courier New" pitchFamily="34" charset="-122"/>
                 <a:cs typeface="Courier New" pitchFamily="34" charset="-120"/>
               </a:rPr>
-              <a:t>  cast_id: '1,108,109,110'</a:t>
+              <a:t>watch_history, bookmarks</a:t>
             </a:r>
             <a:endParaRPr lang="en-US" sz="1400" dirty="0"/>
           </a:p>
@@ -10454,14 +9772,14 @@
       </p:sp>
       <p:sp>
         <p:nvSpPr>
-          <p:cNvPr id="8" name="Text 5"/>
+          <p:cNvPr id="13" name="Text 9"/>
           <p:cNvSpPr txBox="1"/>
           <p:nvPr/>
         </p:nvSpPr>
         <p:spPr>
           <a:xfrm>
-            <a:off x="868680" y="4160520"/>
-            <a:ext cx="4480560" cy="822960"/>
+            <a:off x="6987019" y="5367528"/>
+            <a:ext cx="4625861" cy="731520"/>
           </a:xfrm>
           <a:prstGeom prst="rect">
             <a:avLst/>
@@ -10482,261 +9800,9 @@
                   <a:schemeClr val="accent4"/>
                 </a:solidFill>
               </a:rPr>
-              <a:t>Tidak bisa di-join atau di-index; ID yang dihapus tertinggal.</a:t>
+              <a:t>Ditulis aplikasi saat orang menonton; dashboard hanya membaca.</a:t>
             </a:r>
             <a:endParaRPr lang="en-US" sz="1400" dirty="0"/>
-          </a:p>
-        </p:txBody>
-      </p:sp>
-      <p:sp>
-        <p:nvSpPr>
-          <p:cNvPr id="9" name="card"/>
-          <p:cNvSpPr/>
-          <p:nvPr/>
-        </p:nvSpPr>
-        <p:spPr>
-          <a:xfrm>
-            <a:off x="6492240" y="1600200"/>
-            <a:ext cx="5120640" cy="3520440"/>
-          </a:xfrm>
-          <a:prstGeom prst="roundRect">
-            <a:avLst>
-              <a:gd name="adj" fmla="val 3117"/>
-            </a:avLst>
-          </a:prstGeom>
-          <a:solidFill>
-            <a:schemeClr val="bg2"/>
-          </a:solidFill>
-          <a:ln w="12700">
-            <a:solidFill>
-              <a:schemeClr val="bg2"/>
-            </a:solidFill>
-            <a:prstDash val="solid"/>
-          </a:ln>
-        </p:spPr>
-      </p:sp>
-      <p:sp>
-        <p:nvSpPr>
-          <p:cNvPr id="10" name="Text 7"/>
-          <p:cNvSpPr txBox="1"/>
-          <p:nvPr/>
-        </p:nvSpPr>
-        <p:spPr>
-          <a:xfrm>
-            <a:off x="6812280" y="1783080"/>
-            <a:ext cx="4480560" cy="411480"/>
-          </a:xfrm>
-          <a:prstGeom prst="rect">
-            <a:avLst/>
-          </a:prstGeom>
-          <a:noFill/>
-          <a:ln/>
-        </p:spPr>
-        <p:txBody>
-          <a:bodyPr wrap="square" lIns="0" tIns="0" rIns="0" bIns="0" rtlCol="0" anchor="ctr"/>
-          <a:lstStyle/>
-          <a:p>
-            <a:pPr indent="0" marL="0">
-              <a:buNone/>
-            </a:pPr>
-            <a:r>
-              <a:rPr lang="en-US" sz="1800" b="1" dirty="0">
-                <a:solidFill>
-                  <a:schemeClr val="accent1"/>
-                </a:solidFill>
-                <a:latin typeface="+mj-lt" pitchFamily="34" charset="0"/>
-                <a:ea typeface="+mj-lt" pitchFamily="34" charset="-122"/>
-                <a:cs typeface="+mj-lt" pitchFamily="34" charset="-120"/>
-              </a:rPr>
-              <a:t>Demo</a:t>
-            </a:r>
-            <a:endParaRPr lang="en-US" sz="1800" dirty="0"/>
-          </a:p>
-        </p:txBody>
-      </p:sp>
-      <p:sp>
-        <p:nvSpPr>
-          <p:cNvPr id="11" name="Text 8"/>
-          <p:cNvSpPr txBox="1"/>
-          <p:nvPr/>
-        </p:nvSpPr>
-        <p:spPr>
-          <a:xfrm>
-            <a:off x="6812280" y="2377440"/>
-            <a:ext cx="4480560" cy="1645920"/>
-          </a:xfrm>
-          <a:prstGeom prst="rect">
-            <a:avLst/>
-          </a:prstGeom>
-          <a:noFill/>
-          <a:ln/>
-        </p:spPr>
-        <p:txBody>
-          <a:bodyPr wrap="square" lIns="0" tIns="0" rIns="0" bIns="0" rtlCol="0" anchor="t"/>
-          <a:lstStyle/>
-          <a:p>
-            <a:pPr indent="0" marL="0">
-              <a:buNone/>
-            </a:pPr>
-            <a:r>
-              <a:rPr lang="en-US" sz="1400" dirty="0">
-                <a:solidFill>
-                  <a:schemeClr val="tx1"/>
-                </a:solidFill>
-                <a:latin typeface="Courier New" pitchFamily="34" charset="0"/>
-                <a:ea typeface="Courier New" pitchFamily="34" charset="-122"/>
-                <a:cs typeface="Courier New" pitchFamily="34" charset="-120"/>
-              </a:rPr>
-              <a:t>genre_movie</a:t>
-            </a:r>
-            <a:endParaRPr lang="en-US" sz="1400" dirty="0"/>
-          </a:p>
-          <a:p>
-            <a:pPr indent="0" marL="0">
-              <a:buNone/>
-            </a:pPr>
-            <a:r>
-              <a:rPr lang="en-US" sz="1400" dirty="0">
-                <a:solidFill>
-                  <a:schemeClr val="tx1"/>
-                </a:solidFill>
-                <a:latin typeface="Courier New" pitchFamily="34" charset="0"/>
-                <a:ea typeface="Courier New" pitchFamily="34" charset="-122"/>
-                <a:cs typeface="Courier New" pitchFamily="34" charset="-120"/>
-              </a:rPr>
-              <a:t>  (movie_id 12, genre_id 6)</a:t>
-            </a:r>
-            <a:endParaRPr lang="en-US" sz="1400" dirty="0"/>
-          </a:p>
-          <a:p>
-            <a:pPr indent="0" marL="0">
-              <a:buNone/>
-            </a:pPr>
-            <a:r>
-              <a:rPr lang="en-US" sz="1400" dirty="0">
-                <a:solidFill>
-                  <a:schemeClr val="tx1"/>
-                </a:solidFill>
-                <a:latin typeface="Courier New" pitchFamily="34" charset="0"/>
-                <a:ea typeface="Courier New" pitchFamily="34" charset="-122"/>
-                <a:cs typeface="Courier New" pitchFamily="34" charset="-120"/>
-              </a:rPr>
-              <a:t>  (movie_id 12, genre_id 12)</a:t>
-            </a:r>
-            <a:endParaRPr lang="en-US" sz="1400" dirty="0"/>
-          </a:p>
-          <a:p>
-            <a:pPr indent="0" marL="0">
-              <a:buNone/>
-            </a:pPr>
-            <a:r>
-              <a:rPr lang="en-US" sz="1400" dirty="0">
-                <a:solidFill>
-                  <a:schemeClr val="tx1"/>
-                </a:solidFill>
-                <a:latin typeface="Courier New" pitchFamily="34" charset="0"/>
-                <a:ea typeface="Courier New" pitchFamily="34" charset="-122"/>
-                <a:cs typeface="Courier New" pitchFamily="34" charset="-120"/>
-              </a:rPr>
-              <a:t>  (movie_id 12, genre_id 19)</a:t>
-            </a:r>
-            <a:endParaRPr lang="en-US" sz="1400" dirty="0"/>
-          </a:p>
-        </p:txBody>
-      </p:sp>
-      <p:sp>
-        <p:nvSpPr>
-          <p:cNvPr id="12" name="Text 9"/>
-          <p:cNvSpPr txBox="1"/>
-          <p:nvPr/>
-        </p:nvSpPr>
-        <p:spPr>
-          <a:xfrm>
-            <a:off x="6812280" y="4160520"/>
-            <a:ext cx="4480560" cy="822960"/>
-          </a:xfrm>
-          <a:prstGeom prst="rect">
-            <a:avLst/>
-          </a:prstGeom>
-          <a:noFill/>
-          <a:ln/>
-        </p:spPr>
-        <p:txBody>
-          <a:bodyPr wrap="square" lIns="0" tIns="0" rIns="0" bIns="0" rtlCol="0" anchor="t"/>
-          <a:lstStyle/>
-          <a:p>
-            <a:pPr indent="0" marL="0">
-              <a:buNone/>
-            </a:pPr>
-            <a:r>
-              <a:rPr lang="en-US" sz="1400" dirty="0">
-                <a:solidFill>
-                  <a:schemeClr val="accent4"/>
-                </a:solidFill>
-              </a:rPr>
-              <a:t>Foreign key, join biasa, dan laporan genre jadi satu query.</a:t>
-            </a:r>
-            <a:endParaRPr lang="en-US" sz="1400" dirty="0"/>
-          </a:p>
-        </p:txBody>
-      </p:sp>
-      <p:sp>
-        <p:nvSpPr>
-          <p:cNvPr id="13" name="Shape 10"/>
-          <p:cNvSpPr/>
-          <p:nvPr/>
-        </p:nvSpPr>
-        <p:spPr>
-          <a:xfrm>
-            <a:off x="5760720" y="3337560"/>
-            <a:ext cx="685800" cy="914"/>
-          </a:xfrm>
-          <a:prstGeom prst="line">
-            <a:avLst/>
-          </a:prstGeom>
-          <a:noFill/>
-          <a:ln w="19050">
-            <a:solidFill>
-              <a:schemeClr val="accent4"/>
-            </a:solidFill>
-            <a:prstDash val="solid"/>
-            <a:tailEnd type="triangle"/>
-          </a:ln>
-        </p:spPr>
-      </p:sp>
-      <p:sp>
-        <p:nvSpPr>
-          <p:cNvPr id="14" name="Text 11"/>
-          <p:cNvSpPr txBox="1"/>
-          <p:nvPr/>
-        </p:nvSpPr>
-        <p:spPr>
-          <a:xfrm>
-            <a:off x="548640" y="5394960"/>
-            <a:ext cx="11064240" cy="548640"/>
-          </a:xfrm>
-          <a:prstGeom prst="rect">
-            <a:avLst/>
-          </a:prstGeom>
-          <a:noFill/>
-          <a:ln/>
-        </p:spPr>
-        <p:txBody>
-          <a:bodyPr wrap="square" lIns="0" tIns="0" rIns="0" bIns="0" rtlCol="0" anchor="ctr"/>
-          <a:lstStyle/>
-          <a:p>
-            <a:pPr indent="0" marL="0">
-              <a:buNone/>
-            </a:pPr>
-            <a:r>
-              <a:rPr lang="en-US" sz="1600" dirty="0">
-                <a:solidFill>
-                  <a:schemeClr val="tx1"/>
-                </a:solidFill>
-              </a:rPr>
-              <a:t>Migrasi bertahap: buat pivot, isi dari kolom lama, pindahkan pembaca satu per satu, lalu hapus kolom lama.</a:t>
-            </a:r>
-            <a:endParaRPr lang="en-US" sz="1600" dirty="0"/>
           </a:p>
         </p:txBody>
       </p:sp>
@@ -10881,7 +9947,7 @@
                   <a:schemeClr val="tx1"/>
                 </a:solidFill>
               </a:rPr>
-              <a:t>Perpanjang tanpa membuang hari</a:t>
+              <a:t>Relasi: dari teks ke tabel pivot</a:t>
             </a:r>
             <a:endParaRPr lang="en-US" sz="3200" dirty="0"/>
           </a:p>
@@ -10889,216 +9955,18 @@
       </p:sp>
       <p:sp>
         <p:nvSpPr>
-          <p:cNvPr id="5" name="Text 2"/>
-          <p:cNvSpPr txBox="1"/>
+          <p:cNvPr id="5" name="card"/>
+          <p:cNvSpPr/>
           <p:nvPr/>
         </p:nvSpPr>
         <p:spPr>
           <a:xfrm>
             <a:off x="548640" y="1600200"/>
-            <a:ext cx="10972800" cy="365760"/>
-          </a:xfrm>
-          <a:prstGeom prst="rect">
-            <a:avLst/>
-          </a:prstGeom>
-          <a:noFill/>
-          <a:ln/>
-        </p:spPr>
-        <p:txBody>
-          <a:bodyPr wrap="square" lIns="0" tIns="0" rIns="0" bIns="0" rtlCol="0" anchor="ctr"/>
-          <a:lstStyle/>
-          <a:p>
-            <a:pPr indent="0" marL="0">
-              <a:buNone/>
-            </a:pPr>
-            <a:r>
-              <a:rPr lang="en-US" sz="1500" b="1" dirty="0">
-                <a:solidFill>
-                  <a:schemeClr val="tx1"/>
-                </a:solidFill>
-              </a:rPr>
-              <a:t>Masih aktif sampai 20 Mar, membeli 12 bulan pada 10 Mar</a:t>
-            </a:r>
-            <a:endParaRPr lang="en-US" sz="1500" dirty="0"/>
-          </a:p>
-        </p:txBody>
-      </p:sp>
-      <p:sp>
-        <p:nvSpPr>
-          <p:cNvPr id="6" name="Shape 3"/>
-          <p:cNvSpPr/>
-          <p:nvPr/>
-        </p:nvSpPr>
-        <p:spPr>
-          <a:xfrm>
-            <a:off x="548640" y="2057400"/>
-            <a:ext cx="2743200" cy="566928"/>
+            <a:ext cx="5120640" cy="3520440"/>
           </a:xfrm>
           <a:prstGeom prst="roundRect">
             <a:avLst>
-              <a:gd name="adj" fmla="val 16129"/>
-            </a:avLst>
-          </a:prstGeom>
-          <a:solidFill>
-            <a:schemeClr val="accent6"/>
-          </a:solidFill>
-          <a:ln w="12700">
-            <a:solidFill>
-              <a:schemeClr val="accent6"/>
-            </a:solidFill>
-            <a:prstDash val="solid"/>
-          </a:ln>
-        </p:spPr>
-      </p:sp>
-      <p:sp>
-        <p:nvSpPr>
-          <p:cNvPr id="7" name="Text 4"/>
-          <p:cNvSpPr txBox="1"/>
-          <p:nvPr/>
-        </p:nvSpPr>
-        <p:spPr>
-          <a:xfrm>
-            <a:off x="548640" y="2057400"/>
-            <a:ext cx="2743200" cy="566928"/>
-          </a:xfrm>
-          <a:prstGeom prst="rect">
-            <a:avLst/>
-          </a:prstGeom>
-          <a:noFill/>
-          <a:ln/>
-        </p:spPr>
-        <p:txBody>
-          <a:bodyPr wrap="square" lIns="0" tIns="0" rIns="0" bIns="0" rtlCol="0" anchor="ctr"/>
-          <a:lstStyle/>
-          <a:p>
-            <a:pPr algn="ctr" indent="0" marL="0">
-              <a:buNone/>
-            </a:pPr>
-            <a:r>
-              <a:rPr lang="en-US" sz="1400" b="1" dirty="0">
-                <a:solidFill>
-                  <a:schemeClr val="tx1"/>
-                </a:solidFill>
-              </a:rPr>
-              <a:t>lama: s/d 20 Mar</a:t>
-            </a:r>
-            <a:endParaRPr lang="en-US" sz="1400" dirty="0"/>
-          </a:p>
-        </p:txBody>
-      </p:sp>
-      <p:sp>
-        <p:nvSpPr>
-          <p:cNvPr id="8" name="Shape 5"/>
-          <p:cNvSpPr/>
-          <p:nvPr/>
-        </p:nvSpPr>
-        <p:spPr>
-          <a:xfrm>
-            <a:off x="3337560" y="2057400"/>
-            <a:ext cx="8275320" cy="566928"/>
-          </a:xfrm>
-          <a:prstGeom prst="roundRect">
-            <a:avLst>
-              <a:gd name="adj" fmla="val 16129"/>
-            </a:avLst>
-          </a:prstGeom>
-          <a:solidFill>
-            <a:schemeClr val="accent1"/>
-          </a:solidFill>
-          <a:ln w="12700">
-            <a:solidFill>
-              <a:schemeClr val="accent1"/>
-            </a:solidFill>
-            <a:prstDash val="solid"/>
-          </a:ln>
-        </p:spPr>
-      </p:sp>
-      <p:sp>
-        <p:nvSpPr>
-          <p:cNvPr id="9" name="Text 6"/>
-          <p:cNvSpPr txBox="1"/>
-          <p:nvPr/>
-        </p:nvSpPr>
-        <p:spPr>
-          <a:xfrm>
-            <a:off x="3337560" y="2057400"/>
-            <a:ext cx="8275320" cy="566928"/>
-          </a:xfrm>
-          <a:prstGeom prst="rect">
-            <a:avLst/>
-          </a:prstGeom>
-          <a:noFill/>
-          <a:ln/>
-        </p:spPr>
-        <p:txBody>
-          <a:bodyPr wrap="square" lIns="0" tIns="0" rIns="0" bIns="0" rtlCol="0" anchor="ctr"/>
-          <a:lstStyle/>
-          <a:p>
-            <a:pPr algn="ctr" indent="0" marL="0">
-              <a:buNone/>
-            </a:pPr>
-            <a:r>
-              <a:rPr lang="en-US" sz="1400" b="1" dirty="0">
-                <a:solidFill>
-                  <a:schemeClr val="bg1"/>
-                </a:solidFill>
-              </a:rPr>
-              <a:t>baru: 21 Mar s/d 20 Mar tahun depan</a:t>
-            </a:r>
-            <a:endParaRPr lang="en-US" sz="1400" dirty="0"/>
-          </a:p>
-        </p:txBody>
-      </p:sp>
-      <p:sp>
-        <p:nvSpPr>
-          <p:cNvPr id="10" name="Text 7"/>
-          <p:cNvSpPr txBox="1"/>
-          <p:nvPr/>
-        </p:nvSpPr>
-        <p:spPr>
-          <a:xfrm>
-            <a:off x="548640" y="2971800"/>
-            <a:ext cx="10972800" cy="365760"/>
-          </a:xfrm>
-          <a:prstGeom prst="rect">
-            <a:avLst/>
-          </a:prstGeom>
-          <a:noFill/>
-          <a:ln/>
-        </p:spPr>
-        <p:txBody>
-          <a:bodyPr wrap="square" lIns="0" tIns="0" rIns="0" bIns="0" rtlCol="0" anchor="ctr"/>
-          <a:lstStyle/>
-          <a:p>
-            <a:pPr indent="0" marL="0">
-              <a:buNone/>
-            </a:pPr>
-            <a:r>
-              <a:rPr lang="en-US" sz="1500" b="1" dirty="0">
-                <a:solidFill>
-                  <a:schemeClr val="tx1"/>
-                </a:solidFill>
-              </a:rPr>
-              <a:t>Sudah habis 31 Jan, membeli 1 bulan pada 10 Mar</a:t>
-            </a:r>
-            <a:endParaRPr lang="en-US" sz="1500" dirty="0"/>
-          </a:p>
-        </p:txBody>
-      </p:sp>
-      <p:sp>
-        <p:nvSpPr>
-          <p:cNvPr id="11" name="Shape 8"/>
-          <p:cNvSpPr/>
-          <p:nvPr/>
-        </p:nvSpPr>
-        <p:spPr>
-          <a:xfrm>
-            <a:off x="548640" y="3429000"/>
-            <a:ext cx="2743200" cy="566928"/>
-          </a:xfrm>
-          <a:prstGeom prst="roundRect">
-            <a:avLst>
-              <a:gd name="adj" fmla="val 16129"/>
+              <a:gd name="adj" fmla="val 3117"/>
             </a:avLst>
           </a:prstGeom>
           <a:solidFill>
@@ -11114,14 +9982,14 @@
       </p:sp>
       <p:sp>
         <p:nvSpPr>
-          <p:cNvPr id="12" name="Text 9"/>
+          <p:cNvPr id="6" name="Text 3"/>
           <p:cNvSpPr txBox="1"/>
           <p:nvPr/>
         </p:nvSpPr>
         <p:spPr>
           <a:xfrm>
-            <a:off x="548640" y="3429000"/>
-            <a:ext cx="2743200" cy="566928"/>
+            <a:off x="868680" y="1783080"/>
+            <a:ext cx="4480560" cy="411480"/>
           </a:xfrm>
           <a:prstGeom prst="rect">
             <a:avLst/>
@@ -11133,16 +10001,145 @@
           <a:bodyPr wrap="square" lIns="0" tIns="0" rIns="0" bIns="0" rtlCol="0" anchor="ctr"/>
           <a:lstStyle/>
           <a:p>
-            <a:pPr algn="ctr" indent="0" marL="0">
-              <a:buNone/>
-            </a:pPr>
-            <a:r>
-              <a:rPr lang="en-US" sz="1400" b="1" dirty="0">
+            <a:pPr indent="0" marL="0">
+              <a:buNone/>
+            </a:pPr>
+            <a:r>
+              <a:rPr lang="en-US" sz="1800" b="1" dirty="0">
+                <a:solidFill>
+                  <a:schemeClr val="accent3"/>
+                </a:solidFill>
+                <a:latin typeface="+mj-lt" pitchFamily="34" charset="0"/>
+                <a:ea typeface="+mj-lt" pitchFamily="34" charset="-122"/>
+                <a:cs typeface="+mj-lt" pitchFamily="34" charset="-120"/>
+              </a:rPr>
+              <a:t>Produksi</a:t>
+            </a:r>
+            <a:endParaRPr lang="en-US" sz="1800" dirty="0"/>
+          </a:p>
+        </p:txBody>
+      </p:sp>
+      <p:sp>
+        <p:nvSpPr>
+          <p:cNvPr id="7" name="Text 4"/>
+          <p:cNvSpPr txBox="1"/>
+          <p:nvPr/>
+        </p:nvSpPr>
+        <p:spPr>
+          <a:xfrm>
+            <a:off x="868680" y="2377440"/>
+            <a:ext cx="4480560" cy="1645920"/>
+          </a:xfrm>
+          <a:prstGeom prst="rect">
+            <a:avLst/>
+          </a:prstGeom>
+          <a:noFill/>
+          <a:ln/>
+        </p:spPr>
+        <p:txBody>
+          <a:bodyPr wrap="square" lIns="0" tIns="0" rIns="0" bIns="0" rtlCol="0" anchor="t"/>
+          <a:lstStyle/>
+          <a:p>
+            <a:pPr indent="0" marL="0">
+              <a:buNone/>
+            </a:pPr>
+            <a:r>
+              <a:rPr lang="en-US" sz="1400" dirty="0">
+                <a:solidFill>
+                  <a:schemeClr val="tx1"/>
+                </a:solidFill>
+                <a:latin typeface="Courier New" pitchFamily="34" charset="0"/>
+                <a:ea typeface="Courier New" pitchFamily="34" charset="-122"/>
+                <a:cs typeface="Courier New" pitchFamily="34" charset="-120"/>
+              </a:rPr>
+              <a:t>video</a:t>
+            </a:r>
+            <a:endParaRPr lang="en-US" sz="1400" dirty="0"/>
+          </a:p>
+          <a:p>
+            <a:pPr indent="0" marL="0">
+              <a:buNone/>
+            </a:pPr>
+            <a:r>
+              <a:rPr lang="en-US" sz="1400" dirty="0">
+                <a:solidFill>
+                  <a:schemeClr val="tx1"/>
+                </a:solidFill>
+                <a:latin typeface="Courier New" pitchFamily="34" charset="0"/>
+                <a:ea typeface="Courier New" pitchFamily="34" charset="-122"/>
+                <a:cs typeface="Courier New" pitchFamily="34" charset="-120"/>
+              </a:rPr>
+              <a:t>  id: 12</a:t>
+            </a:r>
+            <a:endParaRPr lang="en-US" sz="1400" dirty="0"/>
+          </a:p>
+          <a:p>
+            <a:pPr indent="0" marL="0">
+              <a:buNone/>
+            </a:pPr>
+            <a:r>
+              <a:rPr lang="en-US" sz="1400" dirty="0">
+                <a:solidFill>
+                  <a:schemeClr val="tx1"/>
+                </a:solidFill>
+                <a:latin typeface="Courier New" pitchFamily="34" charset="0"/>
+                <a:ea typeface="Courier New" pitchFamily="34" charset="-122"/>
+                <a:cs typeface="Courier New" pitchFamily="34" charset="-120"/>
+              </a:rPr>
+              <a:t>  category_id: '6,12,19'</a:t>
+            </a:r>
+            <a:endParaRPr lang="en-US" sz="1400" dirty="0"/>
+          </a:p>
+          <a:p>
+            <a:pPr indent="0" marL="0">
+              <a:buNone/>
+            </a:pPr>
+            <a:r>
+              <a:rPr lang="en-US" sz="1400" dirty="0">
+                <a:solidFill>
+                  <a:schemeClr val="tx1"/>
+                </a:solidFill>
+                <a:latin typeface="Courier New" pitchFamily="34" charset="0"/>
+                <a:ea typeface="Courier New" pitchFamily="34" charset="-122"/>
+                <a:cs typeface="Courier New" pitchFamily="34" charset="-120"/>
+              </a:rPr>
+              <a:t>  cast_id: '1,108,109,110'</a:t>
+            </a:r>
+            <a:endParaRPr lang="en-US" sz="1400" dirty="0"/>
+          </a:p>
+        </p:txBody>
+      </p:sp>
+      <p:sp>
+        <p:nvSpPr>
+          <p:cNvPr id="8" name="Text 5"/>
+          <p:cNvSpPr txBox="1"/>
+          <p:nvPr/>
+        </p:nvSpPr>
+        <p:spPr>
+          <a:xfrm>
+            <a:off x="868680" y="4160520"/>
+            <a:ext cx="4480560" cy="822960"/>
+          </a:xfrm>
+          <a:prstGeom prst="rect">
+            <a:avLst/>
+          </a:prstGeom>
+          <a:noFill/>
+          <a:ln/>
+        </p:spPr>
+        <p:txBody>
+          <a:bodyPr wrap="square" lIns="0" tIns="0" rIns="0" bIns="0" rtlCol="0" anchor="t"/>
+          <a:lstStyle/>
+          <a:p>
+            <a:pPr indent="0" marL="0">
+              <a:buNone/>
+            </a:pPr>
+            <a:r>
+              <a:rPr lang="en-US" sz="1400" dirty="0">
                 <a:solidFill>
                   <a:schemeClr val="accent4"/>
                 </a:solidFill>
               </a:rPr>
-              <a:t>tidak aktif</a:t>
+              <a:t>Tidak bisa di-join atau di-index; ID yang dihapus tertinggal.</a:t>
             </a:r>
             <a:endParaRPr lang="en-US" sz="1400" dirty="0"/>
           </a:p>
@@ -11150,81 +10147,18 @@
       </p:sp>
       <p:sp>
         <p:nvSpPr>
-          <p:cNvPr id="13" name="Shape 10"/>
+          <p:cNvPr id="9" name="card"/>
           <p:cNvSpPr/>
           <p:nvPr/>
         </p:nvSpPr>
         <p:spPr>
           <a:xfrm>
-            <a:off x="3337560" y="3429000"/>
-            <a:ext cx="2743200" cy="566928"/>
+            <a:off x="6492240" y="1600200"/>
+            <a:ext cx="5120640" cy="3520440"/>
           </a:xfrm>
           <a:prstGeom prst="roundRect">
             <a:avLst>
-              <a:gd name="adj" fmla="val 16129"/>
-            </a:avLst>
-          </a:prstGeom>
-          <a:solidFill>
-            <a:schemeClr val="accent1"/>
-          </a:solidFill>
-          <a:ln w="12700">
-            <a:solidFill>
-              <a:schemeClr val="accent1"/>
-            </a:solidFill>
-            <a:prstDash val="solid"/>
-          </a:ln>
-        </p:spPr>
-      </p:sp>
-      <p:sp>
-        <p:nvSpPr>
-          <p:cNvPr id="14" name="Text 11"/>
-          <p:cNvSpPr txBox="1"/>
-          <p:nvPr/>
-        </p:nvSpPr>
-        <p:spPr>
-          <a:xfrm>
-            <a:off x="3337560" y="3429000"/>
-            <a:ext cx="2743200" cy="566928"/>
-          </a:xfrm>
-          <a:prstGeom prst="rect">
-            <a:avLst/>
-          </a:prstGeom>
-          <a:noFill/>
-          <a:ln/>
-        </p:spPr>
-        <p:txBody>
-          <a:bodyPr wrap="square" lIns="0" tIns="0" rIns="0" bIns="0" rtlCol="0" anchor="ctr"/>
-          <a:lstStyle/>
-          <a:p>
-            <a:pPr algn="ctr" indent="0" marL="0">
-              <a:buNone/>
-            </a:pPr>
-            <a:r>
-              <a:rPr lang="en-US" sz="1400" b="1" dirty="0">
-                <a:solidFill>
-                  <a:schemeClr val="bg1"/>
-                </a:solidFill>
-              </a:rPr>
-              <a:t>10 Mar s/d 9 Apr</a:t>
-            </a:r>
-            <a:endParaRPr lang="en-US" sz="1400" dirty="0"/>
-          </a:p>
-        </p:txBody>
-      </p:sp>
-      <p:sp>
-        <p:nvSpPr>
-          <p:cNvPr id="15" name="card"/>
-          <p:cNvSpPr/>
-          <p:nvPr/>
-        </p:nvSpPr>
-        <p:spPr>
-          <a:xfrm>
-            <a:off x="548640" y="4343400"/>
-            <a:ext cx="3520440" cy="1783080"/>
-          </a:xfrm>
-          <a:prstGeom prst="roundRect">
-            <a:avLst>
-              <a:gd name="adj" fmla="val 6154"/>
+              <a:gd name="adj" fmla="val 3117"/>
             </a:avLst>
           </a:prstGeom>
           <a:solidFill>
@@ -11240,14 +10174,14 @@
       </p:sp>
       <p:sp>
         <p:nvSpPr>
-          <p:cNvPr id="16" name="Text 13"/>
+          <p:cNvPr id="10" name="Text 7"/>
           <p:cNvSpPr txBox="1"/>
           <p:nvPr/>
         </p:nvSpPr>
         <p:spPr>
           <a:xfrm>
-            <a:off x="822960" y="4526280"/>
-            <a:ext cx="3017520" cy="411480"/>
+            <a:off x="6812280" y="1783080"/>
+            <a:ext cx="4480560" cy="411480"/>
           </a:xfrm>
           <a:prstGeom prst="rect">
             <a:avLst/>
@@ -11263,7 +10197,7 @@
               <a:buNone/>
             </a:pPr>
             <a:r>
-              <a:rPr lang="en-US" sz="1700" b="1" dirty="0">
+              <a:rPr lang="en-US" sz="1800" b="1" dirty="0">
                 <a:solidFill>
                   <a:schemeClr val="accent1"/>
                 </a:solidFill>
@@ -11271,22 +10205,22 @@
                 <a:ea typeface="+mj-lt" pitchFamily="34" charset="-122"/>
                 <a:cs typeface="+mj-lt" pitchFamily="34" charset="-120"/>
               </a:rPr>
-              <a:t>Satu tempat</a:t>
-            </a:r>
-            <a:endParaRPr lang="en-US" sz="1700" dirty="0"/>
-          </a:p>
-        </p:txBody>
-      </p:sp>
-      <p:sp>
-        <p:nvSpPr>
-          <p:cNvPr id="17" name="Text 14"/>
+              <a:t>Demo</a:t>
+            </a:r>
+            <a:endParaRPr lang="en-US" sz="1800" dirty="0"/>
+          </a:p>
+        </p:txBody>
+      </p:sp>
+      <p:sp>
+        <p:nvSpPr>
+          <p:cNvPr id="11" name="Text 8"/>
           <p:cNvSpPr txBox="1"/>
           <p:nvPr/>
         </p:nvSpPr>
         <p:spPr>
           <a:xfrm>
-            <a:off x="822960" y="4983480"/>
-            <a:ext cx="3017520" cy="1051560"/>
+            <a:off x="6812280" y="2377440"/>
+            <a:ext cx="4480560" cy="1645920"/>
           </a:xfrm>
           <a:prstGeom prst="rect">
             <a:avLst/>
@@ -11306,50 +10240,137 @@
                 <a:solidFill>
                   <a:schemeClr val="tx1"/>
                 </a:solidFill>
-              </a:rPr>
-              <a:t>Hanya SubscriptionService yang mengubah users.subscription_ends_on.</a:t>
+                <a:latin typeface="Courier New" pitchFamily="34" charset="0"/>
+                <a:ea typeface="Courier New" pitchFamily="34" charset="-122"/>
+                <a:cs typeface="Courier New" pitchFamily="34" charset="-120"/>
+              </a:rPr>
+              <a:t>genre_movie</a:t>
             </a:r>
             <a:endParaRPr lang="en-US" sz="1400" dirty="0"/>
           </a:p>
-        </p:txBody>
-      </p:sp>
-      <p:sp>
-        <p:nvSpPr>
-          <p:cNvPr id="18" name="card"/>
+          <a:p>
+            <a:pPr indent="0" marL="0">
+              <a:buNone/>
+            </a:pPr>
+            <a:r>
+              <a:rPr lang="en-US" sz="1400" dirty="0">
+                <a:solidFill>
+                  <a:schemeClr val="tx1"/>
+                </a:solidFill>
+                <a:latin typeface="Courier New" pitchFamily="34" charset="0"/>
+                <a:ea typeface="Courier New" pitchFamily="34" charset="-122"/>
+                <a:cs typeface="Courier New" pitchFamily="34" charset="-120"/>
+              </a:rPr>
+              <a:t>  (movie_id 12, genre_id 6)</a:t>
+            </a:r>
+            <a:endParaRPr lang="en-US" sz="1400" dirty="0"/>
+          </a:p>
+          <a:p>
+            <a:pPr indent="0" marL="0">
+              <a:buNone/>
+            </a:pPr>
+            <a:r>
+              <a:rPr lang="en-US" sz="1400" dirty="0">
+                <a:solidFill>
+                  <a:schemeClr val="tx1"/>
+                </a:solidFill>
+                <a:latin typeface="Courier New" pitchFamily="34" charset="0"/>
+                <a:ea typeface="Courier New" pitchFamily="34" charset="-122"/>
+                <a:cs typeface="Courier New" pitchFamily="34" charset="-120"/>
+              </a:rPr>
+              <a:t>  (movie_id 12, genre_id 12)</a:t>
+            </a:r>
+            <a:endParaRPr lang="en-US" sz="1400" dirty="0"/>
+          </a:p>
+          <a:p>
+            <a:pPr indent="0" marL="0">
+              <a:buNone/>
+            </a:pPr>
+            <a:r>
+              <a:rPr lang="en-US" sz="1400" dirty="0">
+                <a:solidFill>
+                  <a:schemeClr val="tx1"/>
+                </a:solidFill>
+                <a:latin typeface="Courier New" pitchFamily="34" charset="0"/>
+                <a:ea typeface="Courier New" pitchFamily="34" charset="-122"/>
+                <a:cs typeface="Courier New" pitchFamily="34" charset="-120"/>
+              </a:rPr>
+              <a:t>  (movie_id 12, genre_id 19)</a:t>
+            </a:r>
+            <a:endParaRPr lang="en-US" sz="1400" dirty="0"/>
+          </a:p>
+        </p:txBody>
+      </p:sp>
+      <p:sp>
+        <p:nvSpPr>
+          <p:cNvPr id="12" name="Text 9"/>
+          <p:cNvSpPr txBox="1"/>
+          <p:nvPr/>
+        </p:nvSpPr>
+        <p:spPr>
+          <a:xfrm>
+            <a:off x="6812280" y="4160520"/>
+            <a:ext cx="4480560" cy="822960"/>
+          </a:xfrm>
+          <a:prstGeom prst="rect">
+            <a:avLst/>
+          </a:prstGeom>
+          <a:noFill/>
+          <a:ln/>
+        </p:spPr>
+        <p:txBody>
+          <a:bodyPr wrap="square" lIns="0" tIns="0" rIns="0" bIns="0" rtlCol="0" anchor="t"/>
+          <a:lstStyle/>
+          <a:p>
+            <a:pPr indent="0" marL="0">
+              <a:buNone/>
+            </a:pPr>
+            <a:r>
+              <a:rPr lang="en-US" sz="1400" dirty="0">
+                <a:solidFill>
+                  <a:schemeClr val="accent4"/>
+                </a:solidFill>
+              </a:rPr>
+              <a:t>Foreign key, join biasa, dan laporan genre jadi satu query.</a:t>
+            </a:r>
+            <a:endParaRPr lang="en-US" sz="1400" dirty="0"/>
+          </a:p>
+        </p:txBody>
+      </p:sp>
+      <p:sp>
+        <p:nvSpPr>
+          <p:cNvPr id="13" name="Shape 10"/>
           <p:cNvSpPr/>
           <p:nvPr/>
         </p:nvSpPr>
         <p:spPr>
           <a:xfrm>
-            <a:off x="4297680" y="4343400"/>
-            <a:ext cx="3520440" cy="1783080"/>
-          </a:xfrm>
-          <a:prstGeom prst="roundRect">
-            <a:avLst>
-              <a:gd name="adj" fmla="val 6154"/>
-            </a:avLst>
-          </a:prstGeom>
-          <a:solidFill>
-            <a:schemeClr val="bg2"/>
-          </a:solidFill>
-          <a:ln w="12700">
+            <a:off x="5760720" y="3337560"/>
+            <a:ext cx="685800" cy="914"/>
+          </a:xfrm>
+          <a:prstGeom prst="line">
+            <a:avLst/>
+          </a:prstGeom>
+          <a:noFill/>
+          <a:ln w="19050">
             <a:solidFill>
-              <a:schemeClr val="bg2"/>
+              <a:schemeClr val="accent4"/>
             </a:solidFill>
             <a:prstDash val="solid"/>
+            <a:tailEnd type="triangle"/>
           </a:ln>
         </p:spPr>
       </p:sp>
       <p:sp>
         <p:nvSpPr>
-          <p:cNvPr id="19" name="Text 16"/>
+          <p:cNvPr id="14" name="Text 11"/>
           <p:cNvSpPr txBox="1"/>
           <p:nvPr/>
         </p:nvSpPr>
         <p:spPr>
           <a:xfrm>
-            <a:off x="4572000" y="4526280"/>
-            <a:ext cx="3017520" cy="411480"/>
+            <a:off x="548640" y="5394960"/>
+            <a:ext cx="11064240" cy="548640"/>
           </a:xfrm>
           <a:prstGeom prst="rect">
             <a:avLst/>
@@ -11365,155 +10386,14 @@
               <a:buNone/>
             </a:pPr>
             <a:r>
-              <a:rPr lang="en-US" sz="1700" b="1" dirty="0">
-                <a:solidFill>
-                  <a:schemeClr val="accent1"/>
-                </a:solidFill>
-                <a:latin typeface="+mj-lt" pitchFamily="34" charset="0"/>
-                <a:ea typeface="+mj-lt" pitchFamily="34" charset="-122"/>
-                <a:cs typeface="+mj-lt" pitchFamily="34" charset="-120"/>
-              </a:rPr>
-              <a:t>Satu transaksi</a:t>
-            </a:r>
-            <a:endParaRPr lang="en-US" sz="1700" dirty="0"/>
-          </a:p>
-        </p:txBody>
-      </p:sp>
-      <p:sp>
-        <p:nvSpPr>
-          <p:cNvPr id="20" name="Text 17"/>
-          <p:cNvSpPr txBox="1"/>
-          <p:nvPr/>
-        </p:nvSpPr>
-        <p:spPr>
-          <a:xfrm>
-            <a:off x="4572000" y="4983480"/>
-            <a:ext cx="3017520" cy="1051560"/>
-          </a:xfrm>
-          <a:prstGeom prst="rect">
-            <a:avLst/>
-          </a:prstGeom>
-          <a:noFill/>
-          <a:ln/>
-        </p:spPr>
-        <p:txBody>
-          <a:bodyPr wrap="square" lIns="0" tIns="0" rIns="0" bIns="0" rtlCol="0" anchor="t"/>
-          <a:lstStyle/>
-          <a:p>
-            <a:pPr indent="0" marL="0">
-              <a:buNone/>
-            </a:pPr>
-            <a:r>
-              <a:rPr lang="en-US" sz="1400" dirty="0">
+              <a:rPr lang="en-US" sz="1600" dirty="0">
                 <a:solidFill>
                   <a:schemeClr val="tx1"/>
                 </a:solidFill>
               </a:rPr>
-              <a:t>Pembayaran dan tanggal berakhir tersimpan bersama, atau tidak sama sekali.</a:t>
-            </a:r>
-            <a:endParaRPr lang="en-US" sz="1400" dirty="0"/>
-          </a:p>
-        </p:txBody>
-      </p:sp>
-      <p:sp>
-        <p:nvSpPr>
-          <p:cNvPr id="21" name="card"/>
-          <p:cNvSpPr/>
-          <p:nvPr/>
-        </p:nvSpPr>
-        <p:spPr>
-          <a:xfrm>
-            <a:off x="8046720" y="4343400"/>
-            <a:ext cx="3520440" cy="1783080"/>
-          </a:xfrm>
-          <a:prstGeom prst="roundRect">
-            <a:avLst>
-              <a:gd name="adj" fmla="val 6154"/>
-            </a:avLst>
-          </a:prstGeom>
-          <a:solidFill>
-            <a:schemeClr val="bg2"/>
-          </a:solidFill>
-          <a:ln w="12700">
-            <a:solidFill>
-              <a:schemeClr val="bg2"/>
-            </a:solidFill>
-            <a:prstDash val="solid"/>
-          </a:ln>
-        </p:spPr>
-      </p:sp>
-      <p:sp>
-        <p:nvSpPr>
-          <p:cNvPr id="22" name="Text 19"/>
-          <p:cNvSpPr txBox="1"/>
-          <p:nvPr/>
-        </p:nvSpPr>
-        <p:spPr>
-          <a:xfrm>
-            <a:off x="8321040" y="4526280"/>
-            <a:ext cx="3017520" cy="411480"/>
-          </a:xfrm>
-          <a:prstGeom prst="rect">
-            <a:avLst/>
-          </a:prstGeom>
-          <a:noFill/>
-          <a:ln/>
-        </p:spPr>
-        <p:txBody>
-          <a:bodyPr wrap="square" lIns="0" tIns="0" rIns="0" bIns="0" rtlCol="0" anchor="ctr"/>
-          <a:lstStyle/>
-          <a:p>
-            <a:pPr indent="0" marL="0">
-              <a:buNone/>
-            </a:pPr>
-            <a:r>
-              <a:rPr lang="en-US" sz="1700" b="1" dirty="0">
-                <a:solidFill>
-                  <a:schemeClr val="accent1"/>
-                </a:solidFill>
-                <a:latin typeface="+mj-lt" pitchFamily="34" charset="0"/>
-                <a:ea typeface="+mj-lt" pitchFamily="34" charset="-122"/>
-                <a:cs typeface="+mj-lt" pitchFamily="34" charset="-120"/>
-              </a:rPr>
-              <a:t>Baris dikunci</a:t>
-            </a:r>
-            <a:endParaRPr lang="en-US" sz="1700" dirty="0"/>
-          </a:p>
-        </p:txBody>
-      </p:sp>
-      <p:sp>
-        <p:nvSpPr>
-          <p:cNvPr id="23" name="Text 20"/>
-          <p:cNvSpPr txBox="1"/>
-          <p:nvPr/>
-        </p:nvSpPr>
-        <p:spPr>
-          <a:xfrm>
-            <a:off x="8321040" y="4983480"/>
-            <a:ext cx="3017520" cy="1051560"/>
-          </a:xfrm>
-          <a:prstGeom prst="rect">
-            <a:avLst/>
-          </a:prstGeom>
-          <a:noFill/>
-          <a:ln/>
-        </p:spPr>
-        <p:txBody>
-          <a:bodyPr wrap="square" lIns="0" tIns="0" rIns="0" bIns="0" rtlCol="0" anchor="t"/>
-          <a:lstStyle/>
-          <a:p>
-            <a:pPr indent="0" marL="0">
-              <a:buNone/>
-            </a:pPr>
-            <a:r>
-              <a:rPr lang="en-US" sz="1400" dirty="0">
-                <a:solidFill>
-                  <a:schemeClr val="tx1"/>
-                </a:solidFill>
-              </a:rPr>
-              <a:t>lockForUpdate membuat pembayaran kedua menunggu dan menghitung dari tanggal baru.</a:t>
-            </a:r>
-            <a:endParaRPr lang="en-US" sz="1400" dirty="0"/>
+              <a:t>Migrasi bertahap: buat pivot, isi dari kolom lama, pindahkan pembaca satu per satu, lalu hapus kolom lama.</a:t>
+            </a:r>
+            <a:endParaRPr lang="en-US" sz="1600" dirty="0"/>
           </a:p>
         </p:txBody>
       </p:sp>
@@ -11658,7 +10538,7 @@
                   <a:schemeClr val="tx1"/>
                 </a:solidFill>
               </a:rPr>
-              <a:t>Siapa boleh menonton apa</a:t>
+              <a:t>Perpanjang tanpa membuang hari</a:t>
             </a:r>
             <a:endParaRPr lang="en-US" sz="3200" dirty="0"/>
           </a:p>
@@ -11666,18 +10546,216 @@
       </p:sp>
       <p:sp>
         <p:nvSpPr>
-          <p:cNvPr id="5" name="card"/>
+          <p:cNvPr id="5" name="Text 2"/>
+          <p:cNvSpPr txBox="1"/>
+          <p:nvPr/>
+        </p:nvSpPr>
+        <p:spPr>
+          <a:xfrm>
+            <a:off x="548640" y="1600200"/>
+            <a:ext cx="10972800" cy="365760"/>
+          </a:xfrm>
+          <a:prstGeom prst="rect">
+            <a:avLst/>
+          </a:prstGeom>
+          <a:noFill/>
+          <a:ln/>
+        </p:spPr>
+        <p:txBody>
+          <a:bodyPr wrap="square" lIns="0" tIns="0" rIns="0" bIns="0" rtlCol="0" anchor="ctr"/>
+          <a:lstStyle/>
+          <a:p>
+            <a:pPr indent="0" marL="0">
+              <a:buNone/>
+            </a:pPr>
+            <a:r>
+              <a:rPr lang="en-US" sz="1500" b="1" dirty="0">
+                <a:solidFill>
+                  <a:schemeClr val="tx1"/>
+                </a:solidFill>
+              </a:rPr>
+              <a:t>Masih aktif sampai 20 Mar, membeli 12 bulan pada 10 Mar</a:t>
+            </a:r>
+            <a:endParaRPr lang="en-US" sz="1500" dirty="0"/>
+          </a:p>
+        </p:txBody>
+      </p:sp>
+      <p:sp>
+        <p:nvSpPr>
+          <p:cNvPr id="6" name="Shape 3"/>
           <p:cNvSpPr/>
           <p:nvPr/>
         </p:nvSpPr>
         <p:spPr>
           <a:xfrm>
-            <a:off x="548640" y="1691640"/>
-            <a:ext cx="2514600" cy="1143000"/>
+            <a:off x="548640" y="2057400"/>
+            <a:ext cx="2743200" cy="566928"/>
           </a:xfrm>
           <a:prstGeom prst="roundRect">
             <a:avLst>
-              <a:gd name="adj" fmla="val 9600"/>
+              <a:gd name="adj" fmla="val 16129"/>
+            </a:avLst>
+          </a:prstGeom>
+          <a:solidFill>
+            <a:schemeClr val="accent6"/>
+          </a:solidFill>
+          <a:ln w="12700">
+            <a:solidFill>
+              <a:schemeClr val="accent6"/>
+            </a:solidFill>
+            <a:prstDash val="solid"/>
+          </a:ln>
+        </p:spPr>
+      </p:sp>
+      <p:sp>
+        <p:nvSpPr>
+          <p:cNvPr id="7" name="Text 4"/>
+          <p:cNvSpPr txBox="1"/>
+          <p:nvPr/>
+        </p:nvSpPr>
+        <p:spPr>
+          <a:xfrm>
+            <a:off x="548640" y="2057400"/>
+            <a:ext cx="2743200" cy="566928"/>
+          </a:xfrm>
+          <a:prstGeom prst="rect">
+            <a:avLst/>
+          </a:prstGeom>
+          <a:noFill/>
+          <a:ln/>
+        </p:spPr>
+        <p:txBody>
+          <a:bodyPr wrap="square" lIns="0" tIns="0" rIns="0" bIns="0" rtlCol="0" anchor="ctr"/>
+          <a:lstStyle/>
+          <a:p>
+            <a:pPr algn="ctr" indent="0" marL="0">
+              <a:buNone/>
+            </a:pPr>
+            <a:r>
+              <a:rPr lang="en-US" sz="1400" b="1" dirty="0">
+                <a:solidFill>
+                  <a:schemeClr val="tx1"/>
+                </a:solidFill>
+              </a:rPr>
+              <a:t>lama: s/d 20 Mar</a:t>
+            </a:r>
+            <a:endParaRPr lang="en-US" sz="1400" dirty="0"/>
+          </a:p>
+        </p:txBody>
+      </p:sp>
+      <p:sp>
+        <p:nvSpPr>
+          <p:cNvPr id="8" name="Shape 5"/>
+          <p:cNvSpPr/>
+          <p:nvPr/>
+        </p:nvSpPr>
+        <p:spPr>
+          <a:xfrm>
+            <a:off x="3337560" y="2057400"/>
+            <a:ext cx="8275320" cy="566928"/>
+          </a:xfrm>
+          <a:prstGeom prst="roundRect">
+            <a:avLst>
+              <a:gd name="adj" fmla="val 16129"/>
+            </a:avLst>
+          </a:prstGeom>
+          <a:solidFill>
+            <a:schemeClr val="accent1"/>
+          </a:solidFill>
+          <a:ln w="12700">
+            <a:solidFill>
+              <a:schemeClr val="accent1"/>
+            </a:solidFill>
+            <a:prstDash val="solid"/>
+          </a:ln>
+        </p:spPr>
+      </p:sp>
+      <p:sp>
+        <p:nvSpPr>
+          <p:cNvPr id="9" name="Text 6"/>
+          <p:cNvSpPr txBox="1"/>
+          <p:nvPr/>
+        </p:nvSpPr>
+        <p:spPr>
+          <a:xfrm>
+            <a:off x="3337560" y="2057400"/>
+            <a:ext cx="8275320" cy="566928"/>
+          </a:xfrm>
+          <a:prstGeom prst="rect">
+            <a:avLst/>
+          </a:prstGeom>
+          <a:noFill/>
+          <a:ln/>
+        </p:spPr>
+        <p:txBody>
+          <a:bodyPr wrap="square" lIns="0" tIns="0" rIns="0" bIns="0" rtlCol="0" anchor="ctr"/>
+          <a:lstStyle/>
+          <a:p>
+            <a:pPr algn="ctr" indent="0" marL="0">
+              <a:buNone/>
+            </a:pPr>
+            <a:r>
+              <a:rPr lang="en-US" sz="1400" b="1" dirty="0">
+                <a:solidFill>
+                  <a:schemeClr val="bg1"/>
+                </a:solidFill>
+              </a:rPr>
+              <a:t>baru: 21 Mar s/d 20 Mar tahun depan</a:t>
+            </a:r>
+            <a:endParaRPr lang="en-US" sz="1400" dirty="0"/>
+          </a:p>
+        </p:txBody>
+      </p:sp>
+      <p:sp>
+        <p:nvSpPr>
+          <p:cNvPr id="10" name="Text 7"/>
+          <p:cNvSpPr txBox="1"/>
+          <p:nvPr/>
+        </p:nvSpPr>
+        <p:spPr>
+          <a:xfrm>
+            <a:off x="548640" y="2971800"/>
+            <a:ext cx="10972800" cy="365760"/>
+          </a:xfrm>
+          <a:prstGeom prst="rect">
+            <a:avLst/>
+          </a:prstGeom>
+          <a:noFill/>
+          <a:ln/>
+        </p:spPr>
+        <p:txBody>
+          <a:bodyPr wrap="square" lIns="0" tIns="0" rIns="0" bIns="0" rtlCol="0" anchor="ctr"/>
+          <a:lstStyle/>
+          <a:p>
+            <a:pPr indent="0" marL="0">
+              <a:buNone/>
+            </a:pPr>
+            <a:r>
+              <a:rPr lang="en-US" sz="1500" b="1" dirty="0">
+                <a:solidFill>
+                  <a:schemeClr val="tx1"/>
+                </a:solidFill>
+              </a:rPr>
+              <a:t>Sudah habis 31 Jan, membeli 1 bulan pada 10 Mar</a:t>
+            </a:r>
+            <a:endParaRPr lang="en-US" sz="1500" dirty="0"/>
+          </a:p>
+        </p:txBody>
+      </p:sp>
+      <p:sp>
+        <p:nvSpPr>
+          <p:cNvPr id="11" name="Shape 8"/>
+          <p:cNvSpPr/>
+          <p:nvPr/>
+        </p:nvSpPr>
+        <p:spPr>
+          <a:xfrm>
+            <a:off x="548640" y="3429000"/>
+            <a:ext cx="2743200" cy="566928"/>
+          </a:xfrm>
+          <a:prstGeom prst="roundRect">
+            <a:avLst>
+              <a:gd name="adj" fmla="val 16129"/>
             </a:avLst>
           </a:prstGeom>
           <a:solidFill>
@@ -11693,14 +10771,14 @@
       </p:sp>
       <p:sp>
         <p:nvSpPr>
-          <p:cNvPr id="6" name="Text 3"/>
+          <p:cNvPr id="12" name="Text 9"/>
           <p:cNvSpPr txBox="1"/>
           <p:nvPr/>
         </p:nvSpPr>
         <p:spPr>
           <a:xfrm>
-            <a:off x="731520" y="1691640"/>
-            <a:ext cx="2148840" cy="1143000"/>
+            <a:off x="548640" y="3429000"/>
+            <a:ext cx="2743200" cy="566928"/>
           </a:xfrm>
           <a:prstGeom prst="rect">
             <a:avLst/>
@@ -11716,59 +10794,39 @@
               <a:buNone/>
             </a:pPr>
             <a:r>
-              <a:rPr lang="en-US" sz="1600" b="1" dirty="0">
-                <a:solidFill>
-                  <a:schemeClr val="tx1"/>
-                </a:solidFill>
-              </a:rPr>
-              <a:t>Akun dan judul aktif?</a:t>
-            </a:r>
-            <a:endParaRPr lang="en-US" sz="1600" dirty="0"/>
-          </a:p>
-        </p:txBody>
-      </p:sp>
-      <p:sp>
-        <p:nvSpPr>
-          <p:cNvPr id="7" name="Shape 4"/>
+              <a:rPr lang="en-US" sz="1400" b="1" dirty="0">
+                <a:solidFill>
+                  <a:schemeClr val="accent4"/>
+                </a:solidFill>
+              </a:rPr>
+              <a:t>tidak aktif</a:t>
+            </a:r>
+            <a:endParaRPr lang="en-US" sz="1400" dirty="0"/>
+          </a:p>
+        </p:txBody>
+      </p:sp>
+      <p:sp>
+        <p:nvSpPr>
+          <p:cNvPr id="13" name="Shape 10"/>
           <p:cNvSpPr/>
           <p:nvPr/>
         </p:nvSpPr>
         <p:spPr>
           <a:xfrm>
-            <a:off x="3063240" y="2258568"/>
-            <a:ext cx="320040" cy="914"/>
-          </a:xfrm>
-          <a:prstGeom prst="line">
-            <a:avLst/>
-          </a:prstGeom>
-          <a:noFill/>
-          <a:ln w="19050">
+            <a:off x="3337560" y="3429000"/>
+            <a:ext cx="2743200" cy="566928"/>
+          </a:xfrm>
+          <a:prstGeom prst="roundRect">
+            <a:avLst>
+              <a:gd name="adj" fmla="val 16129"/>
+            </a:avLst>
+          </a:prstGeom>
+          <a:solidFill>
+            <a:schemeClr val="accent1"/>
+          </a:solidFill>
+          <a:ln w="12700">
             <a:solidFill>
-              <a:schemeClr val="accent4"/>
-            </a:solidFill>
-            <a:prstDash val="solid"/>
-            <a:tailEnd type="triangle"/>
-          </a:ln>
-        </p:spPr>
-      </p:sp>
-      <p:sp>
-        <p:nvSpPr>
-          <p:cNvPr id="8" name="Shape 5"/>
-          <p:cNvSpPr/>
-          <p:nvPr/>
-        </p:nvSpPr>
-        <p:spPr>
-          <a:xfrm>
-            <a:off x="1805940" y="2834640"/>
-            <a:ext cx="914" cy="411480"/>
-          </a:xfrm>
-          <a:prstGeom prst="line">
-            <a:avLst/>
-          </a:prstGeom>
-          <a:noFill/>
-          <a:ln w="15875">
-            <a:solidFill>
-              <a:schemeClr val="accent5"/>
+              <a:schemeClr val="accent1"/>
             </a:solidFill>
             <a:prstDash val="solid"/>
           </a:ln>
@@ -11776,23 +10834,23 @@
       </p:sp>
       <p:sp>
         <p:nvSpPr>
-          <p:cNvPr id="9" name="Text 6"/>
+          <p:cNvPr id="14" name="Text 11"/>
           <p:cNvSpPr txBox="1"/>
           <p:nvPr/>
         </p:nvSpPr>
         <p:spPr>
           <a:xfrm>
-            <a:off x="548640" y="3291840"/>
-            <a:ext cx="2514600" cy="548640"/>
-          </a:xfrm>
-          <a:prstGeom prst="rect">
-            <a:avLst/>
-          </a:prstGeom>
-          <a:noFill/>
-          <a:ln/>
-        </p:spPr>
-        <p:txBody>
-          <a:bodyPr wrap="square" lIns="0" tIns="0" rIns="0" bIns="0" rtlCol="0" anchor="t"/>
+            <a:off x="3337560" y="3429000"/>
+            <a:ext cx="2743200" cy="566928"/>
+          </a:xfrm>
+          <a:prstGeom prst="rect">
+            <a:avLst/>
+          </a:prstGeom>
+          <a:noFill/>
+          <a:ln/>
+        </p:spPr>
+        <p:txBody>
+          <a:bodyPr wrap="square" lIns="0" tIns="0" rIns="0" bIns="0" rtlCol="0" anchor="ctr"/>
           <a:lstStyle/>
           <a:p>
             <a:pPr algn="ctr" indent="0" marL="0">
@@ -11801,10 +10859,10 @@
             <a:r>
               <a:rPr lang="en-US" sz="1400" b="1" dirty="0">
                 <a:solidFill>
-                  <a:schemeClr val="accent3"/>
-                </a:solidFill>
-              </a:rPr>
-              <a:t>tidak: ditolak</a:t>
+                  <a:schemeClr val="bg1"/>
+                </a:solidFill>
+              </a:rPr>
+              <a:t>10 Mar s/d 9 Apr</a:t>
             </a:r>
             <a:endParaRPr lang="en-US" sz="1400" dirty="0"/>
           </a:p>
@@ -11812,18 +10870,18 @@
       </p:sp>
       <p:sp>
         <p:nvSpPr>
-          <p:cNvPr id="10" name="card"/>
+          <p:cNvPr id="15" name="card"/>
           <p:cNvSpPr/>
           <p:nvPr/>
         </p:nvSpPr>
         <p:spPr>
           <a:xfrm>
-            <a:off x="3383280" y="1691640"/>
-            <a:ext cx="2514600" cy="1143000"/>
+            <a:off x="548640" y="4343400"/>
+            <a:ext cx="3520440" cy="1783080"/>
           </a:xfrm>
           <a:prstGeom prst="roundRect">
             <a:avLst>
-              <a:gd name="adj" fmla="val 9600"/>
+              <a:gd name="adj" fmla="val 6154"/>
             </a:avLst>
           </a:prstGeom>
           <a:solidFill>
@@ -11839,14 +10897,14 @@
       </p:sp>
       <p:sp>
         <p:nvSpPr>
-          <p:cNvPr id="11" name="Text 8"/>
+          <p:cNvPr id="16" name="Text 13"/>
           <p:cNvSpPr txBox="1"/>
           <p:nvPr/>
         </p:nvSpPr>
         <p:spPr>
           <a:xfrm>
-            <a:off x="3566160" y="1691640"/>
-            <a:ext cx="2148840" cy="1143000"/>
+            <a:off x="822960" y="4526280"/>
+            <a:ext cx="3017520" cy="411480"/>
           </a:xfrm>
           <a:prstGeom prst="rect">
             <a:avLst/>
@@ -11858,118 +10916,74 @@
           <a:bodyPr wrap="square" lIns="0" tIns="0" rIns="0" bIns="0" rtlCol="0" anchor="ctr"/>
           <a:lstStyle/>
           <a:p>
-            <a:pPr algn="ctr" indent="0" marL="0">
-              <a:buNone/>
-            </a:pPr>
-            <a:r>
-              <a:rPr lang="en-US" sz="1600" b="1" dirty="0">
+            <a:pPr indent="0" marL="0">
+              <a:buNone/>
+            </a:pPr>
+            <a:r>
+              <a:rPr lang="en-US" sz="1700" b="1" dirty="0">
+                <a:solidFill>
+                  <a:schemeClr val="accent1"/>
+                </a:solidFill>
+                <a:latin typeface="+mj-lt" pitchFamily="34" charset="0"/>
+                <a:ea typeface="+mj-lt" pitchFamily="34" charset="-122"/>
+                <a:cs typeface="+mj-lt" pitchFamily="34" charset="-120"/>
+              </a:rPr>
+              <a:t>Satu tempat</a:t>
+            </a:r>
+            <a:endParaRPr lang="en-US" sz="1700" dirty="0"/>
+          </a:p>
+        </p:txBody>
+      </p:sp>
+      <p:sp>
+        <p:nvSpPr>
+          <p:cNvPr id="17" name="Text 14"/>
+          <p:cNvSpPr txBox="1"/>
+          <p:nvPr/>
+        </p:nvSpPr>
+        <p:spPr>
+          <a:xfrm>
+            <a:off x="822960" y="4983480"/>
+            <a:ext cx="3017520" cy="1051560"/>
+          </a:xfrm>
+          <a:prstGeom prst="rect">
+            <a:avLst/>
+          </a:prstGeom>
+          <a:noFill/>
+          <a:ln/>
+        </p:spPr>
+        <p:txBody>
+          <a:bodyPr wrap="square" lIns="0" tIns="0" rIns="0" bIns="0" rtlCol="0" anchor="t"/>
+          <a:lstStyle/>
+          <a:p>
+            <a:pPr indent="0" marL="0">
+              <a:buNone/>
+            </a:pPr>
+            <a:r>
+              <a:rPr lang="en-US" sz="1400" dirty="0">
                 <a:solidFill>
                   <a:schemeClr val="tx1"/>
                 </a:solidFill>
               </a:rPr>
-              <a:t>Premium?</a:t>
-            </a:r>
-            <a:endParaRPr lang="en-US" sz="1600" dirty="0"/>
-          </a:p>
-        </p:txBody>
-      </p:sp>
-      <p:sp>
-        <p:nvSpPr>
-          <p:cNvPr id="12" name="Shape 9"/>
+              <a:t>Hanya SubscriptionService yang mengubah users.subscription_ends_on.</a:t>
+            </a:r>
+            <a:endParaRPr lang="en-US" sz="1400" dirty="0"/>
+          </a:p>
+        </p:txBody>
+      </p:sp>
+      <p:sp>
+        <p:nvSpPr>
+          <p:cNvPr id="18" name="card"/>
           <p:cNvSpPr/>
           <p:nvPr/>
         </p:nvSpPr>
         <p:spPr>
           <a:xfrm>
-            <a:off x="5897880" y="2258568"/>
-            <a:ext cx="320040" cy="914"/>
-          </a:xfrm>
-          <a:prstGeom prst="line">
-            <a:avLst/>
-          </a:prstGeom>
-          <a:noFill/>
-          <a:ln w="19050">
-            <a:solidFill>
-              <a:schemeClr val="accent4"/>
-            </a:solidFill>
-            <a:prstDash val="solid"/>
-            <a:tailEnd type="triangle"/>
-          </a:ln>
-        </p:spPr>
-      </p:sp>
-      <p:sp>
-        <p:nvSpPr>
-          <p:cNvPr id="13" name="Shape 10"/>
-          <p:cNvSpPr/>
-          <p:nvPr/>
-        </p:nvSpPr>
-        <p:spPr>
-          <a:xfrm>
-            <a:off x="4640580" y="2834640"/>
-            <a:ext cx="914" cy="411480"/>
-          </a:xfrm>
-          <a:prstGeom prst="line">
-            <a:avLst/>
-          </a:prstGeom>
-          <a:noFill/>
-          <a:ln w="15875">
-            <a:solidFill>
-              <a:schemeClr val="accent5"/>
-            </a:solidFill>
-            <a:prstDash val="solid"/>
-          </a:ln>
-        </p:spPr>
-      </p:sp>
-      <p:sp>
-        <p:nvSpPr>
-          <p:cNvPr id="14" name="Text 11"/>
-          <p:cNvSpPr txBox="1"/>
-          <p:nvPr/>
-        </p:nvSpPr>
-        <p:spPr>
-          <a:xfrm>
-            <a:off x="3383280" y="3291840"/>
-            <a:ext cx="2514600" cy="548640"/>
-          </a:xfrm>
-          <a:prstGeom prst="rect">
-            <a:avLst/>
-          </a:prstGeom>
-          <a:noFill/>
-          <a:ln/>
-        </p:spPr>
-        <p:txBody>
-          <a:bodyPr wrap="square" lIns="0" tIns="0" rIns="0" bIns="0" rtlCol="0" anchor="t"/>
-          <a:lstStyle/>
-          <a:p>
-            <a:pPr algn="ctr" indent="0" marL="0">
-              <a:buNone/>
-            </a:pPr>
-            <a:r>
-              <a:rPr lang="en-US" sz="1400" b="1" dirty="0">
-                <a:solidFill>
-                  <a:schemeClr val="accent1"/>
-                </a:solidFill>
-              </a:rPr>
-              <a:t>tidak: gratis</a:t>
-            </a:r>
-            <a:endParaRPr lang="en-US" sz="1400" dirty="0"/>
-          </a:p>
-        </p:txBody>
-      </p:sp>
-      <p:sp>
-        <p:nvSpPr>
-          <p:cNvPr id="15" name="card"/>
-          <p:cNvSpPr/>
-          <p:nvPr/>
-        </p:nvSpPr>
-        <p:spPr>
-          <a:xfrm>
-            <a:off x="6217920" y="1691640"/>
-            <a:ext cx="2514600" cy="1143000"/>
+            <a:off x="4297680" y="4343400"/>
+            <a:ext cx="3520440" cy="1783080"/>
           </a:xfrm>
           <a:prstGeom prst="roundRect">
             <a:avLst>
-              <a:gd name="adj" fmla="val 9600"/>
+              <a:gd name="adj" fmla="val 6154"/>
             </a:avLst>
           </a:prstGeom>
           <a:solidFill>
@@ -11985,97 +10999,53 @@
       </p:sp>
       <p:sp>
         <p:nvSpPr>
-          <p:cNvPr id="16" name="Text 13"/>
-          <p:cNvSpPr txBox="1"/>
-          <p:nvPr/>
-        </p:nvSpPr>
-        <p:spPr>
-          <a:xfrm>
-            <a:off x="6400800" y="1691640"/>
-            <a:ext cx="2148840" cy="1143000"/>
-          </a:xfrm>
-          <a:prstGeom prst="rect">
-            <a:avLst/>
-          </a:prstGeom>
-          <a:noFill/>
-          <a:ln/>
-        </p:spPr>
-        <p:txBody>
-          <a:bodyPr wrap="square" lIns="0" tIns="0" rIns="0" bIns="0" rtlCol="0" anchor="ctr"/>
-          <a:lstStyle/>
-          <a:p>
-            <a:pPr algn="ctr" indent="0" marL="0">
-              <a:buNone/>
-            </a:pPr>
-            <a:r>
-              <a:rPr lang="en-US" sz="1600" b="1" dirty="0">
-                <a:solidFill>
-                  <a:schemeClr val="tx1"/>
-                </a:solidFill>
-              </a:rPr>
-              <a:t>Langganan aktif?</a:t>
-            </a:r>
-            <a:endParaRPr lang="en-US" sz="1600" dirty="0"/>
-          </a:p>
-        </p:txBody>
-      </p:sp>
-      <p:sp>
-        <p:nvSpPr>
-          <p:cNvPr id="17" name="Shape 14"/>
-          <p:cNvSpPr/>
-          <p:nvPr/>
-        </p:nvSpPr>
-        <p:spPr>
-          <a:xfrm>
-            <a:off x="8732520" y="2258568"/>
-            <a:ext cx="320040" cy="914"/>
-          </a:xfrm>
-          <a:prstGeom prst="line">
-            <a:avLst/>
-          </a:prstGeom>
-          <a:noFill/>
-          <a:ln w="19050">
-            <a:solidFill>
-              <a:schemeClr val="accent4"/>
-            </a:solidFill>
-            <a:prstDash val="solid"/>
-            <a:tailEnd type="triangle"/>
-          </a:ln>
-        </p:spPr>
-      </p:sp>
-      <p:sp>
-        <p:nvSpPr>
-          <p:cNvPr id="18" name="Shape 15"/>
-          <p:cNvSpPr/>
-          <p:nvPr/>
-        </p:nvSpPr>
-        <p:spPr>
-          <a:xfrm>
-            <a:off x="7475220" y="2834640"/>
-            <a:ext cx="914" cy="411480"/>
-          </a:xfrm>
-          <a:prstGeom prst="line">
-            <a:avLst/>
-          </a:prstGeom>
-          <a:noFill/>
-          <a:ln w="15875">
-            <a:solidFill>
-              <a:schemeClr val="accent5"/>
-            </a:solidFill>
-            <a:prstDash val="solid"/>
-          </a:ln>
-        </p:spPr>
-      </p:sp>
-      <p:sp>
-        <p:nvSpPr>
           <p:cNvPr id="19" name="Text 16"/>
           <p:cNvSpPr txBox="1"/>
           <p:nvPr/>
         </p:nvSpPr>
         <p:spPr>
           <a:xfrm>
-            <a:off x="6217920" y="3291840"/>
-            <a:ext cx="2514600" cy="548640"/>
+            <a:off x="4572000" y="4526280"/>
+            <a:ext cx="3017520" cy="411480"/>
+          </a:xfrm>
+          <a:prstGeom prst="rect">
+            <a:avLst/>
+          </a:prstGeom>
+          <a:noFill/>
+          <a:ln/>
+        </p:spPr>
+        <p:txBody>
+          <a:bodyPr wrap="square" lIns="0" tIns="0" rIns="0" bIns="0" rtlCol="0" anchor="ctr"/>
+          <a:lstStyle/>
+          <a:p>
+            <a:pPr indent="0" marL="0">
+              <a:buNone/>
+            </a:pPr>
+            <a:r>
+              <a:rPr lang="en-US" sz="1700" b="1" dirty="0">
+                <a:solidFill>
+                  <a:schemeClr val="accent1"/>
+                </a:solidFill>
+                <a:latin typeface="+mj-lt" pitchFamily="34" charset="0"/>
+                <a:ea typeface="+mj-lt" pitchFamily="34" charset="-122"/>
+                <a:cs typeface="+mj-lt" pitchFamily="34" charset="-120"/>
+              </a:rPr>
+              <a:t>Satu transaksi</a:t>
+            </a:r>
+            <a:endParaRPr lang="en-US" sz="1700" dirty="0"/>
+          </a:p>
+        </p:txBody>
+      </p:sp>
+      <p:sp>
+        <p:nvSpPr>
+          <p:cNvPr id="20" name="Text 17"/>
+          <p:cNvSpPr txBox="1"/>
+          <p:nvPr/>
+        </p:nvSpPr>
+        <p:spPr>
+          <a:xfrm>
+            <a:off x="4572000" y="4983480"/>
+            <a:ext cx="3017520" cy="1051560"/>
           </a:xfrm>
           <a:prstGeom prst="rect">
             <a:avLst/>
@@ -12087,16 +11057,16 @@
           <a:bodyPr wrap="square" lIns="0" tIns="0" rIns="0" bIns="0" rtlCol="0" anchor="t"/>
           <a:lstStyle/>
           <a:p>
-            <a:pPr algn="ctr" indent="0" marL="0">
-              <a:buNone/>
-            </a:pPr>
-            <a:r>
-              <a:rPr lang="en-US" sz="1400" b="1" dirty="0">
-                <a:solidFill>
-                  <a:schemeClr val="accent1"/>
-                </a:solidFill>
-              </a:rPr>
-              <a:t>ya: boleh</a:t>
+            <a:pPr indent="0" marL="0">
+              <a:buNone/>
+            </a:pPr>
+            <a:r>
+              <a:rPr lang="en-US" sz="1400" dirty="0">
+                <a:solidFill>
+                  <a:schemeClr val="tx1"/>
+                </a:solidFill>
+              </a:rPr>
+              <a:t>Pembayaran dan tanggal berakhir tersimpan bersama, atau tidak sama sekali.</a:t>
             </a:r>
             <a:endParaRPr lang="en-US" sz="1400" dirty="0"/>
           </a:p>
@@ -12104,18 +11074,18 @@
       </p:sp>
       <p:sp>
         <p:nvSpPr>
-          <p:cNvPr id="20" name="card"/>
+          <p:cNvPr id="21" name="card"/>
           <p:cNvSpPr/>
           <p:nvPr/>
         </p:nvSpPr>
         <p:spPr>
           <a:xfrm>
-            <a:off x="9052560" y="1691640"/>
-            <a:ext cx="2514600" cy="1143000"/>
+            <a:off x="8046720" y="4343400"/>
+            <a:ext cx="3520440" cy="1783080"/>
           </a:xfrm>
           <a:prstGeom prst="roundRect">
             <a:avLst>
-              <a:gd name="adj" fmla="val 9600"/>
+              <a:gd name="adj" fmla="val 6154"/>
             </a:avLst>
           </a:prstGeom>
           <a:solidFill>
@@ -12131,14 +11101,14 @@
       </p:sp>
       <p:sp>
         <p:nvSpPr>
-          <p:cNvPr id="21" name="Text 18"/>
+          <p:cNvPr id="22" name="Text 19"/>
           <p:cNvSpPr txBox="1"/>
           <p:nvPr/>
         </p:nvSpPr>
         <p:spPr>
           <a:xfrm>
-            <a:off x="9235440" y="1691640"/>
-            <a:ext cx="2148840" cy="1143000"/>
+            <a:off x="8321040" y="4526280"/>
+            <a:ext cx="3017520" cy="411480"/>
           </a:xfrm>
           <a:prstGeom prst="rect">
             <a:avLst/>
@@ -12150,43 +11120,23 @@
           <a:bodyPr wrap="square" lIns="0" tIns="0" rIns="0" bIns="0" rtlCol="0" anchor="ctr"/>
           <a:lstStyle/>
           <a:p>
-            <a:pPr algn="ctr" indent="0" marL="0">
-              <a:buNone/>
-            </a:pPr>
-            <a:r>
-              <a:rPr lang="en-US" sz="1600" b="1" dirty="0">
-                <a:solidFill>
-                  <a:schemeClr val="tx1"/>
-                </a:solidFill>
-              </a:rPr>
-              <a:t>Film ini disewa?</a:t>
-            </a:r>
-            <a:endParaRPr lang="en-US" sz="1600" dirty="0"/>
-          </a:p>
-        </p:txBody>
-      </p:sp>
-      <p:sp>
-        <p:nvSpPr>
-          <p:cNvPr id="22" name="Shape 19"/>
-          <p:cNvSpPr/>
-          <p:nvPr/>
-        </p:nvSpPr>
-        <p:spPr>
-          <a:xfrm>
-            <a:off x="10309860" y="2834640"/>
-            <a:ext cx="914" cy="411480"/>
-          </a:xfrm>
-          <a:prstGeom prst="line">
-            <a:avLst/>
-          </a:prstGeom>
-          <a:noFill/>
-          <a:ln w="15875">
-            <a:solidFill>
-              <a:schemeClr val="accent5"/>
-            </a:solidFill>
-            <a:prstDash val="solid"/>
-          </a:ln>
-        </p:spPr>
+            <a:pPr indent="0" marL="0">
+              <a:buNone/>
+            </a:pPr>
+            <a:r>
+              <a:rPr lang="en-US" sz="1700" b="1" dirty="0">
+                <a:solidFill>
+                  <a:schemeClr val="accent1"/>
+                </a:solidFill>
+                <a:latin typeface="+mj-lt" pitchFamily="34" charset="0"/>
+                <a:ea typeface="+mj-lt" pitchFamily="34" charset="-122"/>
+                <a:cs typeface="+mj-lt" pitchFamily="34" charset="-120"/>
+              </a:rPr>
+              <a:t>Baris dikunci</a:t>
+            </a:r>
+            <a:endParaRPr lang="en-US" sz="1700" dirty="0"/>
+          </a:p>
+        </p:txBody>
       </p:sp>
       <p:sp>
         <p:nvSpPr>
@@ -12196,8 +11146,8 @@
         </p:nvSpPr>
         <p:spPr>
           <a:xfrm>
-            <a:off x="9052560" y="3291840"/>
-            <a:ext cx="2514600" cy="548640"/>
+            <a:off x="8321040" y="4983480"/>
+            <a:ext cx="3017520" cy="1051560"/>
           </a:xfrm>
           <a:prstGeom prst="rect">
             <a:avLst/>
@@ -12209,117 +11159,18 @@
           <a:bodyPr wrap="square" lIns="0" tIns="0" rIns="0" bIns="0" rtlCol="0" anchor="t"/>
           <a:lstStyle/>
           <a:p>
-            <a:pPr algn="ctr" indent="0" marL="0">
-              <a:buNone/>
-            </a:pPr>
-            <a:r>
-              <a:rPr lang="en-US" sz="1400" b="1" dirty="0">
-                <a:solidFill>
-                  <a:schemeClr val="accent1"/>
-                </a:solidFill>
-              </a:rPr>
-              <a:t>ya: boleh, sampai sewa habis</a:t>
+            <a:pPr indent="0" marL="0">
+              <a:buNone/>
+            </a:pPr>
+            <a:r>
+              <a:rPr lang="en-US" sz="1400" dirty="0">
+                <a:solidFill>
+                  <a:schemeClr val="tx1"/>
+                </a:solidFill>
+              </a:rPr>
+              <a:t>lockForUpdate membuat pembayaran kedua menunggu dan menghitung dari tanggal baru.</a:t>
             </a:r>
             <a:endParaRPr lang="en-US" sz="1400" dirty="0"/>
-          </a:p>
-        </p:txBody>
-      </p:sp>
-      <p:sp>
-        <p:nvSpPr>
-          <p:cNvPr id="24" name="card"/>
-          <p:cNvSpPr/>
-          <p:nvPr/>
-        </p:nvSpPr>
-        <p:spPr>
-          <a:xfrm>
-            <a:off x="548640" y="4160520"/>
-            <a:ext cx="11064240" cy="731520"/>
-          </a:xfrm>
-          <a:prstGeom prst="roundRect">
-            <a:avLst>
-              <a:gd name="adj" fmla="val 15000"/>
-            </a:avLst>
-          </a:prstGeom>
-          <a:solidFill>
-            <a:schemeClr val="accent3"/>
-          </a:solidFill>
-          <a:ln w="12700">
-            <a:solidFill>
-              <a:schemeClr val="accent3"/>
-            </a:solidFill>
-            <a:prstDash val="solid"/>
-          </a:ln>
-        </p:spPr>
-      </p:sp>
-      <p:sp>
-        <p:nvSpPr>
-          <p:cNvPr id="25" name="Text 22"/>
-          <p:cNvSpPr txBox="1"/>
-          <p:nvPr/>
-        </p:nvSpPr>
-        <p:spPr>
-          <a:xfrm>
-            <a:off x="548640" y="4160520"/>
-            <a:ext cx="11064240" cy="731520"/>
-          </a:xfrm>
-          <a:prstGeom prst="rect">
-            <a:avLst/>
-          </a:prstGeom>
-          <a:noFill/>
-          <a:ln/>
-        </p:spPr>
-        <p:txBody>
-          <a:bodyPr wrap="square" lIns="0" tIns="0" rIns="0" bIns="0" rtlCol="0" anchor="ctr"/>
-          <a:lstStyle/>
-          <a:p>
-            <a:pPr algn="ctr" indent="0" marL="0">
-              <a:buNone/>
-            </a:pPr>
-            <a:r>
-              <a:rPr lang="en-US" sz="1600" b="1" dirty="0">
-                <a:solidFill>
-                  <a:schemeClr val="bg1"/>
-                </a:solidFill>
-              </a:rPr>
-              <a:t>Ditolak: perlu langganan, atau sewa jika film punya harga sewa</a:t>
-            </a:r>
-            <a:endParaRPr lang="en-US" sz="1600" dirty="0"/>
-          </a:p>
-        </p:txBody>
-      </p:sp>
-      <p:sp>
-        <p:nvSpPr>
-          <p:cNvPr id="26" name="Text 23"/>
-          <p:cNvSpPr txBox="1"/>
-          <p:nvPr/>
-        </p:nvSpPr>
-        <p:spPr>
-          <a:xfrm>
-            <a:off x="548640" y="5166360"/>
-            <a:ext cx="11064240" cy="822960"/>
-          </a:xfrm>
-          <a:prstGeom prst="rect">
-            <a:avLst/>
-          </a:prstGeom>
-          <a:noFill/>
-          <a:ln/>
-        </p:spPr>
-        <p:txBody>
-          <a:bodyPr wrap="square" lIns="0" tIns="0" rIns="0" bIns="0" rtlCol="0" anchor="t"/>
-          <a:lstStyle/>
-          <a:p>
-            <a:pPr indent="0" marL="0">
-              <a:buNone/>
-            </a:pPr>
-            <a:r>
-              <a:rPr lang="en-US" sz="1500" dirty="0">
-                <a:solidFill>
-                  <a:schemeClr val="tx1"/>
-                </a:solidFill>
-              </a:rPr>
-              <a:t>Episode premium sendiri atau karena serialnya. Satu AccessService dipakai di semua tempat, dan dashboard menampilkannya per pengguna supaya support bisa menjawab keluhan.</a:t>
-            </a:r>
-            <a:endParaRPr lang="en-US" sz="1500" dirty="0"/>
           </a:p>
         </p:txBody>
       </p:sp>
@@ -12464,202 +11315,22 @@
                   <a:schemeClr val="tx1"/>
                 </a:solidFill>
               </a:rPr>
-              <a:t>Sewa dan kupon</a:t>
+              <a:t>Siapa boleh menonton apa</a:t>
             </a:r>
             <a:endParaRPr lang="en-US" sz="3200" dirty="0"/>
           </a:p>
         </p:txBody>
       </p:sp>
-      <p:pic>
-        <p:nvPicPr>
-          <p:cNvPr id="5" name="Image 0" descr="preencoded.png">    </p:cNvPr>
-          <p:cNvPicPr>
-            <a:picLocks noChangeAspect="1"/>
-          </p:cNvPicPr>
-          <p:nvPr/>
-        </p:nvPicPr>
-        <p:blipFill>
-          <a:blip r:embed="rId1"/>
-          <a:stretch>
-            <a:fillRect/>
-          </a:stretch>
-        </p:blipFill>
+      <p:sp>
+        <p:nvSpPr>
+          <p:cNvPr id="5" name="card"/>
+          <p:cNvSpPr/>
+          <p:nvPr/>
+        </p:nvSpPr>
         <p:spPr>
           <a:xfrm>
             <a:off x="548640" y="1691640"/>
-            <a:ext cx="457200" cy="457200"/>
-          </a:xfrm>
-          <a:prstGeom prst="rect">
-            <a:avLst/>
-          </a:prstGeom>
-        </p:spPr>
-      </p:pic>
-      <p:sp>
-        <p:nvSpPr>
-          <p:cNvPr id="6" name="Text 2"/>
-          <p:cNvSpPr txBox="1"/>
-          <p:nvPr/>
-        </p:nvSpPr>
-        <p:spPr>
-          <a:xfrm>
-            <a:off x="1188720" y="1691640"/>
-            <a:ext cx="4389120" cy="457200"/>
-          </a:xfrm>
-          <a:prstGeom prst="rect">
-            <a:avLst/>
-          </a:prstGeom>
-          <a:noFill/>
-          <a:ln/>
-        </p:spPr>
-        <p:txBody>
-          <a:bodyPr wrap="square" lIns="0" tIns="0" rIns="0" bIns="0" rtlCol="0" anchor="ctr"/>
-          <a:lstStyle/>
-          <a:p>
-            <a:pPr indent="0" marL="0">
-              <a:buNone/>
-            </a:pPr>
-            <a:r>
-              <a:rPr lang="en-US" sz="2000" b="1" dirty="0">
-                <a:solidFill>
-                  <a:schemeClr val="tx1"/>
-                </a:solidFill>
-                <a:latin typeface="+mj-lt" pitchFamily="34" charset="0"/>
-                <a:ea typeface="+mj-lt" pitchFamily="34" charset="-122"/>
-                <a:cs typeface="+mj-lt" pitchFamily="34" charset="-120"/>
-              </a:rPr>
-              <a:t>Sewa satu film</a:t>
-            </a:r>
-            <a:endParaRPr lang="en-US" sz="2000" dirty="0"/>
-          </a:p>
-        </p:txBody>
-      </p:sp>
-      <p:sp>
-        <p:nvSpPr>
-          <p:cNvPr id="7" name="Text 3"/>
-          <p:cNvSpPr txBox="1"/>
-          <p:nvPr/>
-        </p:nvSpPr>
-        <p:spPr>
-          <a:xfrm>
-            <a:off x="548640" y="2377440"/>
-            <a:ext cx="5120640" cy="2286000"/>
-          </a:xfrm>
-          <a:prstGeom prst="rect">
-            <a:avLst/>
-          </a:prstGeom>
-          <a:noFill/>
-          <a:ln/>
-        </p:spPr>
-        <p:txBody>
-          <a:bodyPr wrap="square" lIns="0" tIns="0" rIns="0" bIns="0" rtlCol="0" anchor="t"/>
-          <a:lstStyle/>
-          <a:p>
-            <a:pPr marL="342900" indent="-342900">
-              <a:spcAft>
-                <a:spcPts val="1000"/>
-              </a:spcAft>
-              <a:buSzPct val="100000"/>
-              <a:buChar char="•"/>
-            </a:pPr>
-            <a:r>
-              <a:rPr lang="en-US" sz="1700" dirty="0">
-                <a:solidFill>
-                  <a:schemeClr val="tx1"/>
-                </a:solidFill>
-              </a:rPr>
-              <a:t>Hanya film premium yang punya harga sewa</a:t>
-            </a:r>
-            <a:endParaRPr lang="en-US" sz="1700" dirty="0"/>
-          </a:p>
-          <a:p>
-            <a:pPr marL="342900" indent="-342900">
-              <a:spcAft>
-                <a:spcPts val="1000"/>
-              </a:spcAft>
-              <a:buSzPct val="100000"/>
-              <a:buChar char="•"/>
-            </a:pPr>
-            <a:r>
-              <a:rPr lang="en-US" sz="1700" dirty="0">
-                <a:solidFill>
-                  <a:schemeClr val="tx1"/>
-                </a:solidFill>
-              </a:rPr>
-              <a:t>Berlaku rent_days hari sejak dibayar</a:t>
-            </a:r>
-            <a:endParaRPr lang="en-US" sz="1700" dirty="0"/>
-          </a:p>
-          <a:p>
-            <a:pPr marL="342900" indent="-342900">
-              <a:spcAft>
-                <a:spcPts val="1000"/>
-              </a:spcAft>
-              <a:buSzPct val="100000"/>
-              <a:buChar char="•"/>
-            </a:pPr>
-            <a:r>
-              <a:rPr lang="en-US" sz="1700" dirty="0">
-                <a:solidFill>
-                  <a:schemeClr val="tx1"/>
-                </a:solidFill>
-              </a:rPr>
-              <a:t>Pelanggan aktif tidak bisa menyewa: filmnya sudah termasuk</a:t>
-            </a:r>
-            <a:endParaRPr lang="en-US" sz="1700" dirty="0"/>
-          </a:p>
-          <a:p>
-            <a:pPr marL="342900" indent="-342900">
-              <a:spcAft>
-                <a:spcPts val="1000"/>
-              </a:spcAft>
-              <a:buSzPct val="100000"/>
-              <a:buChar char="•"/>
-            </a:pPr>
-            <a:r>
-              <a:rPr lang="en-US" sz="1700" dirty="0">
-                <a:solidFill>
-                  <a:schemeClr val="tx1"/>
-                </a:solidFill>
-              </a:rPr>
-              <a:t>Film yang sama tidak bisa disewa dua kali bersamaan</a:t>
-            </a:r>
-            <a:endParaRPr lang="en-US" sz="1700" dirty="0"/>
-          </a:p>
-        </p:txBody>
-      </p:sp>
-      <p:sp>
-        <p:nvSpPr>
-          <p:cNvPr id="8" name="Shape 4"/>
-          <p:cNvSpPr/>
-          <p:nvPr/>
-        </p:nvSpPr>
-        <p:spPr>
-          <a:xfrm>
-            <a:off x="6080760" y="1737360"/>
-            <a:ext cx="914" cy="2834640"/>
-          </a:xfrm>
-          <a:prstGeom prst="line">
-            <a:avLst/>
-          </a:prstGeom>
-          <a:noFill/>
-          <a:ln w="12700">
-            <a:solidFill>
-              <a:schemeClr val="accent6"/>
-            </a:solidFill>
-            <a:prstDash val="solid"/>
-          </a:ln>
-        </p:spPr>
-      </p:sp>
-      <p:sp>
-        <p:nvSpPr>
-          <p:cNvPr id="9" name="card"/>
-          <p:cNvSpPr/>
-          <p:nvPr/>
-        </p:nvSpPr>
-        <p:spPr>
-          <a:xfrm>
-            <a:off x="548640" y="4892040"/>
-            <a:ext cx="11064240" cy="1143000"/>
+            <a:ext cx="2514600" cy="1143000"/>
           </a:xfrm>
           <a:prstGeom prst="roundRect">
             <a:avLst>
@@ -12679,14 +11350,14 @@
       </p:sp>
       <p:sp>
         <p:nvSpPr>
-          <p:cNvPr id="10" name="Text 6"/>
+          <p:cNvPr id="6" name="Text 3"/>
           <p:cNvSpPr txBox="1"/>
           <p:nvPr/>
         </p:nvSpPr>
         <p:spPr>
           <a:xfrm>
-            <a:off x="822960" y="4892040"/>
-            <a:ext cx="10515600" cy="1143000"/>
+            <a:off x="731520" y="1691640"/>
+            <a:ext cx="2148840" cy="1143000"/>
           </a:xfrm>
           <a:prstGeom prst="rect">
             <a:avLst/>
@@ -12698,6 +11369,602 @@
           <a:bodyPr wrap="square" lIns="0" tIns="0" rIns="0" bIns="0" rtlCol="0" anchor="ctr"/>
           <a:lstStyle/>
           <a:p>
+            <a:pPr algn="ctr" indent="0" marL="0">
+              <a:buNone/>
+            </a:pPr>
+            <a:r>
+              <a:rPr lang="en-US" sz="1600" b="1" dirty="0">
+                <a:solidFill>
+                  <a:schemeClr val="tx1"/>
+                </a:solidFill>
+              </a:rPr>
+              <a:t>Akun dan judul aktif?</a:t>
+            </a:r>
+            <a:endParaRPr lang="en-US" sz="1600" dirty="0"/>
+          </a:p>
+        </p:txBody>
+      </p:sp>
+      <p:sp>
+        <p:nvSpPr>
+          <p:cNvPr id="7" name="Shape 4"/>
+          <p:cNvSpPr/>
+          <p:nvPr/>
+        </p:nvSpPr>
+        <p:spPr>
+          <a:xfrm>
+            <a:off x="3063240" y="2258568"/>
+            <a:ext cx="320040" cy="914"/>
+          </a:xfrm>
+          <a:prstGeom prst="line">
+            <a:avLst/>
+          </a:prstGeom>
+          <a:noFill/>
+          <a:ln w="19050">
+            <a:solidFill>
+              <a:schemeClr val="accent4"/>
+            </a:solidFill>
+            <a:prstDash val="solid"/>
+            <a:tailEnd type="triangle"/>
+          </a:ln>
+        </p:spPr>
+      </p:sp>
+      <p:sp>
+        <p:nvSpPr>
+          <p:cNvPr id="8" name="Shape 5"/>
+          <p:cNvSpPr/>
+          <p:nvPr/>
+        </p:nvSpPr>
+        <p:spPr>
+          <a:xfrm>
+            <a:off x="1805940" y="2834640"/>
+            <a:ext cx="914" cy="411480"/>
+          </a:xfrm>
+          <a:prstGeom prst="line">
+            <a:avLst/>
+          </a:prstGeom>
+          <a:noFill/>
+          <a:ln w="15875">
+            <a:solidFill>
+              <a:schemeClr val="accent5"/>
+            </a:solidFill>
+            <a:prstDash val="solid"/>
+          </a:ln>
+        </p:spPr>
+      </p:sp>
+      <p:sp>
+        <p:nvSpPr>
+          <p:cNvPr id="9" name="Text 6"/>
+          <p:cNvSpPr txBox="1"/>
+          <p:nvPr/>
+        </p:nvSpPr>
+        <p:spPr>
+          <a:xfrm>
+            <a:off x="548640" y="3291840"/>
+            <a:ext cx="2514600" cy="548640"/>
+          </a:xfrm>
+          <a:prstGeom prst="rect">
+            <a:avLst/>
+          </a:prstGeom>
+          <a:noFill/>
+          <a:ln/>
+        </p:spPr>
+        <p:txBody>
+          <a:bodyPr wrap="square" lIns="0" tIns="0" rIns="0" bIns="0" rtlCol="0" anchor="t"/>
+          <a:lstStyle/>
+          <a:p>
+            <a:pPr algn="ctr" indent="0" marL="0">
+              <a:buNone/>
+            </a:pPr>
+            <a:r>
+              <a:rPr lang="en-US" sz="1400" b="1" dirty="0">
+                <a:solidFill>
+                  <a:schemeClr val="accent3"/>
+                </a:solidFill>
+              </a:rPr>
+              <a:t>tidak: ditolak</a:t>
+            </a:r>
+            <a:endParaRPr lang="en-US" sz="1400" dirty="0"/>
+          </a:p>
+        </p:txBody>
+      </p:sp>
+      <p:sp>
+        <p:nvSpPr>
+          <p:cNvPr id="10" name="card"/>
+          <p:cNvSpPr/>
+          <p:nvPr/>
+        </p:nvSpPr>
+        <p:spPr>
+          <a:xfrm>
+            <a:off x="3383280" y="1691640"/>
+            <a:ext cx="2514600" cy="1143000"/>
+          </a:xfrm>
+          <a:prstGeom prst="roundRect">
+            <a:avLst>
+              <a:gd name="adj" fmla="val 9600"/>
+            </a:avLst>
+          </a:prstGeom>
+          <a:solidFill>
+            <a:schemeClr val="bg2"/>
+          </a:solidFill>
+          <a:ln w="12700">
+            <a:solidFill>
+              <a:schemeClr val="bg2"/>
+            </a:solidFill>
+            <a:prstDash val="solid"/>
+          </a:ln>
+        </p:spPr>
+      </p:sp>
+      <p:sp>
+        <p:nvSpPr>
+          <p:cNvPr id="11" name="Text 8"/>
+          <p:cNvSpPr txBox="1"/>
+          <p:nvPr/>
+        </p:nvSpPr>
+        <p:spPr>
+          <a:xfrm>
+            <a:off x="3566160" y="1691640"/>
+            <a:ext cx="2148840" cy="1143000"/>
+          </a:xfrm>
+          <a:prstGeom prst="rect">
+            <a:avLst/>
+          </a:prstGeom>
+          <a:noFill/>
+          <a:ln/>
+        </p:spPr>
+        <p:txBody>
+          <a:bodyPr wrap="square" lIns="0" tIns="0" rIns="0" bIns="0" rtlCol="0" anchor="ctr"/>
+          <a:lstStyle/>
+          <a:p>
+            <a:pPr algn="ctr" indent="0" marL="0">
+              <a:buNone/>
+            </a:pPr>
+            <a:r>
+              <a:rPr lang="en-US" sz="1600" b="1" dirty="0">
+                <a:solidFill>
+                  <a:schemeClr val="tx1"/>
+                </a:solidFill>
+              </a:rPr>
+              <a:t>Premium?</a:t>
+            </a:r>
+            <a:endParaRPr lang="en-US" sz="1600" dirty="0"/>
+          </a:p>
+        </p:txBody>
+      </p:sp>
+      <p:sp>
+        <p:nvSpPr>
+          <p:cNvPr id="12" name="Shape 9"/>
+          <p:cNvSpPr/>
+          <p:nvPr/>
+        </p:nvSpPr>
+        <p:spPr>
+          <a:xfrm>
+            <a:off x="5897880" y="2258568"/>
+            <a:ext cx="320040" cy="914"/>
+          </a:xfrm>
+          <a:prstGeom prst="line">
+            <a:avLst/>
+          </a:prstGeom>
+          <a:noFill/>
+          <a:ln w="19050">
+            <a:solidFill>
+              <a:schemeClr val="accent4"/>
+            </a:solidFill>
+            <a:prstDash val="solid"/>
+            <a:tailEnd type="triangle"/>
+          </a:ln>
+        </p:spPr>
+      </p:sp>
+      <p:sp>
+        <p:nvSpPr>
+          <p:cNvPr id="13" name="Shape 10"/>
+          <p:cNvSpPr/>
+          <p:nvPr/>
+        </p:nvSpPr>
+        <p:spPr>
+          <a:xfrm>
+            <a:off x="4640580" y="2834640"/>
+            <a:ext cx="914" cy="411480"/>
+          </a:xfrm>
+          <a:prstGeom prst="line">
+            <a:avLst/>
+          </a:prstGeom>
+          <a:noFill/>
+          <a:ln w="15875">
+            <a:solidFill>
+              <a:schemeClr val="accent5"/>
+            </a:solidFill>
+            <a:prstDash val="solid"/>
+          </a:ln>
+        </p:spPr>
+      </p:sp>
+      <p:sp>
+        <p:nvSpPr>
+          <p:cNvPr id="14" name="Text 11"/>
+          <p:cNvSpPr txBox="1"/>
+          <p:nvPr/>
+        </p:nvSpPr>
+        <p:spPr>
+          <a:xfrm>
+            <a:off x="3383280" y="3291840"/>
+            <a:ext cx="2514600" cy="548640"/>
+          </a:xfrm>
+          <a:prstGeom prst="rect">
+            <a:avLst/>
+          </a:prstGeom>
+          <a:noFill/>
+          <a:ln/>
+        </p:spPr>
+        <p:txBody>
+          <a:bodyPr wrap="square" lIns="0" tIns="0" rIns="0" bIns="0" rtlCol="0" anchor="t"/>
+          <a:lstStyle/>
+          <a:p>
+            <a:pPr algn="ctr" indent="0" marL="0">
+              <a:buNone/>
+            </a:pPr>
+            <a:r>
+              <a:rPr lang="en-US" sz="1400" b="1" dirty="0">
+                <a:solidFill>
+                  <a:schemeClr val="accent1"/>
+                </a:solidFill>
+              </a:rPr>
+              <a:t>tidak: gratis</a:t>
+            </a:r>
+            <a:endParaRPr lang="en-US" sz="1400" dirty="0"/>
+          </a:p>
+        </p:txBody>
+      </p:sp>
+      <p:sp>
+        <p:nvSpPr>
+          <p:cNvPr id="15" name="card"/>
+          <p:cNvSpPr/>
+          <p:nvPr/>
+        </p:nvSpPr>
+        <p:spPr>
+          <a:xfrm>
+            <a:off x="6217920" y="1691640"/>
+            <a:ext cx="2514600" cy="1143000"/>
+          </a:xfrm>
+          <a:prstGeom prst="roundRect">
+            <a:avLst>
+              <a:gd name="adj" fmla="val 9600"/>
+            </a:avLst>
+          </a:prstGeom>
+          <a:solidFill>
+            <a:schemeClr val="bg2"/>
+          </a:solidFill>
+          <a:ln w="12700">
+            <a:solidFill>
+              <a:schemeClr val="bg2"/>
+            </a:solidFill>
+            <a:prstDash val="solid"/>
+          </a:ln>
+        </p:spPr>
+      </p:sp>
+      <p:sp>
+        <p:nvSpPr>
+          <p:cNvPr id="16" name="Text 13"/>
+          <p:cNvSpPr txBox="1"/>
+          <p:nvPr/>
+        </p:nvSpPr>
+        <p:spPr>
+          <a:xfrm>
+            <a:off x="6400800" y="1691640"/>
+            <a:ext cx="2148840" cy="1143000"/>
+          </a:xfrm>
+          <a:prstGeom prst="rect">
+            <a:avLst/>
+          </a:prstGeom>
+          <a:noFill/>
+          <a:ln/>
+        </p:spPr>
+        <p:txBody>
+          <a:bodyPr wrap="square" lIns="0" tIns="0" rIns="0" bIns="0" rtlCol="0" anchor="ctr"/>
+          <a:lstStyle/>
+          <a:p>
+            <a:pPr algn="ctr" indent="0" marL="0">
+              <a:buNone/>
+            </a:pPr>
+            <a:r>
+              <a:rPr lang="en-US" sz="1600" b="1" dirty="0">
+                <a:solidFill>
+                  <a:schemeClr val="tx1"/>
+                </a:solidFill>
+              </a:rPr>
+              <a:t>Langganan aktif?</a:t>
+            </a:r>
+            <a:endParaRPr lang="en-US" sz="1600" dirty="0"/>
+          </a:p>
+        </p:txBody>
+      </p:sp>
+      <p:sp>
+        <p:nvSpPr>
+          <p:cNvPr id="17" name="Shape 14"/>
+          <p:cNvSpPr/>
+          <p:nvPr/>
+        </p:nvSpPr>
+        <p:spPr>
+          <a:xfrm>
+            <a:off x="8732520" y="2258568"/>
+            <a:ext cx="320040" cy="914"/>
+          </a:xfrm>
+          <a:prstGeom prst="line">
+            <a:avLst/>
+          </a:prstGeom>
+          <a:noFill/>
+          <a:ln w="19050">
+            <a:solidFill>
+              <a:schemeClr val="accent4"/>
+            </a:solidFill>
+            <a:prstDash val="solid"/>
+            <a:tailEnd type="triangle"/>
+          </a:ln>
+        </p:spPr>
+      </p:sp>
+      <p:sp>
+        <p:nvSpPr>
+          <p:cNvPr id="18" name="Shape 15"/>
+          <p:cNvSpPr/>
+          <p:nvPr/>
+        </p:nvSpPr>
+        <p:spPr>
+          <a:xfrm>
+            <a:off x="7475220" y="2834640"/>
+            <a:ext cx="914" cy="411480"/>
+          </a:xfrm>
+          <a:prstGeom prst="line">
+            <a:avLst/>
+          </a:prstGeom>
+          <a:noFill/>
+          <a:ln w="15875">
+            <a:solidFill>
+              <a:schemeClr val="accent5"/>
+            </a:solidFill>
+            <a:prstDash val="solid"/>
+          </a:ln>
+        </p:spPr>
+      </p:sp>
+      <p:sp>
+        <p:nvSpPr>
+          <p:cNvPr id="19" name="Text 16"/>
+          <p:cNvSpPr txBox="1"/>
+          <p:nvPr/>
+        </p:nvSpPr>
+        <p:spPr>
+          <a:xfrm>
+            <a:off x="6217920" y="3291840"/>
+            <a:ext cx="2514600" cy="548640"/>
+          </a:xfrm>
+          <a:prstGeom prst="rect">
+            <a:avLst/>
+          </a:prstGeom>
+          <a:noFill/>
+          <a:ln/>
+        </p:spPr>
+        <p:txBody>
+          <a:bodyPr wrap="square" lIns="0" tIns="0" rIns="0" bIns="0" rtlCol="0" anchor="t"/>
+          <a:lstStyle/>
+          <a:p>
+            <a:pPr algn="ctr" indent="0" marL="0">
+              <a:buNone/>
+            </a:pPr>
+            <a:r>
+              <a:rPr lang="en-US" sz="1400" b="1" dirty="0">
+                <a:solidFill>
+                  <a:schemeClr val="accent1"/>
+                </a:solidFill>
+              </a:rPr>
+              <a:t>ya: boleh</a:t>
+            </a:r>
+            <a:endParaRPr lang="en-US" sz="1400" dirty="0"/>
+          </a:p>
+        </p:txBody>
+      </p:sp>
+      <p:sp>
+        <p:nvSpPr>
+          <p:cNvPr id="20" name="card"/>
+          <p:cNvSpPr/>
+          <p:nvPr/>
+        </p:nvSpPr>
+        <p:spPr>
+          <a:xfrm>
+            <a:off x="9052560" y="1691640"/>
+            <a:ext cx="2514600" cy="1143000"/>
+          </a:xfrm>
+          <a:prstGeom prst="roundRect">
+            <a:avLst>
+              <a:gd name="adj" fmla="val 9600"/>
+            </a:avLst>
+          </a:prstGeom>
+          <a:solidFill>
+            <a:schemeClr val="bg2"/>
+          </a:solidFill>
+          <a:ln w="12700">
+            <a:solidFill>
+              <a:schemeClr val="bg2"/>
+            </a:solidFill>
+            <a:prstDash val="solid"/>
+          </a:ln>
+        </p:spPr>
+      </p:sp>
+      <p:sp>
+        <p:nvSpPr>
+          <p:cNvPr id="21" name="Text 18"/>
+          <p:cNvSpPr txBox="1"/>
+          <p:nvPr/>
+        </p:nvSpPr>
+        <p:spPr>
+          <a:xfrm>
+            <a:off x="9235440" y="1691640"/>
+            <a:ext cx="2148840" cy="1143000"/>
+          </a:xfrm>
+          <a:prstGeom prst="rect">
+            <a:avLst/>
+          </a:prstGeom>
+          <a:noFill/>
+          <a:ln/>
+        </p:spPr>
+        <p:txBody>
+          <a:bodyPr wrap="square" lIns="0" tIns="0" rIns="0" bIns="0" rtlCol="0" anchor="ctr"/>
+          <a:lstStyle/>
+          <a:p>
+            <a:pPr algn="ctr" indent="0" marL="0">
+              <a:buNone/>
+            </a:pPr>
+            <a:r>
+              <a:rPr lang="en-US" sz="1600" b="1" dirty="0">
+                <a:solidFill>
+                  <a:schemeClr val="tx1"/>
+                </a:solidFill>
+              </a:rPr>
+              <a:t>Film ini disewa?</a:t>
+            </a:r>
+            <a:endParaRPr lang="en-US" sz="1600" dirty="0"/>
+          </a:p>
+        </p:txBody>
+      </p:sp>
+      <p:sp>
+        <p:nvSpPr>
+          <p:cNvPr id="22" name="Shape 19"/>
+          <p:cNvSpPr/>
+          <p:nvPr/>
+        </p:nvSpPr>
+        <p:spPr>
+          <a:xfrm>
+            <a:off x="10309860" y="2834640"/>
+            <a:ext cx="914" cy="411480"/>
+          </a:xfrm>
+          <a:prstGeom prst="line">
+            <a:avLst/>
+          </a:prstGeom>
+          <a:noFill/>
+          <a:ln w="15875">
+            <a:solidFill>
+              <a:schemeClr val="accent5"/>
+            </a:solidFill>
+            <a:prstDash val="solid"/>
+          </a:ln>
+        </p:spPr>
+      </p:sp>
+      <p:sp>
+        <p:nvSpPr>
+          <p:cNvPr id="23" name="Text 20"/>
+          <p:cNvSpPr txBox="1"/>
+          <p:nvPr/>
+        </p:nvSpPr>
+        <p:spPr>
+          <a:xfrm>
+            <a:off x="9052560" y="3291840"/>
+            <a:ext cx="2514600" cy="548640"/>
+          </a:xfrm>
+          <a:prstGeom prst="rect">
+            <a:avLst/>
+          </a:prstGeom>
+          <a:noFill/>
+          <a:ln/>
+        </p:spPr>
+        <p:txBody>
+          <a:bodyPr wrap="square" lIns="0" tIns="0" rIns="0" bIns="0" rtlCol="0" anchor="t"/>
+          <a:lstStyle/>
+          <a:p>
+            <a:pPr algn="ctr" indent="0" marL="0">
+              <a:buNone/>
+            </a:pPr>
+            <a:r>
+              <a:rPr lang="en-US" sz="1400" b="1" dirty="0">
+                <a:solidFill>
+                  <a:schemeClr val="accent1"/>
+                </a:solidFill>
+              </a:rPr>
+              <a:t>ya: boleh, sampai sewa habis</a:t>
+            </a:r>
+            <a:endParaRPr lang="en-US" sz="1400" dirty="0"/>
+          </a:p>
+        </p:txBody>
+      </p:sp>
+      <p:sp>
+        <p:nvSpPr>
+          <p:cNvPr id="24" name="card"/>
+          <p:cNvSpPr/>
+          <p:nvPr/>
+        </p:nvSpPr>
+        <p:spPr>
+          <a:xfrm>
+            <a:off x="548640" y="4160520"/>
+            <a:ext cx="11064240" cy="731520"/>
+          </a:xfrm>
+          <a:prstGeom prst="roundRect">
+            <a:avLst>
+              <a:gd name="adj" fmla="val 15000"/>
+            </a:avLst>
+          </a:prstGeom>
+          <a:solidFill>
+            <a:schemeClr val="accent3"/>
+          </a:solidFill>
+          <a:ln w="12700">
+            <a:solidFill>
+              <a:schemeClr val="accent3"/>
+            </a:solidFill>
+            <a:prstDash val="solid"/>
+          </a:ln>
+        </p:spPr>
+      </p:sp>
+      <p:sp>
+        <p:nvSpPr>
+          <p:cNvPr id="25" name="Text 22"/>
+          <p:cNvSpPr txBox="1"/>
+          <p:nvPr/>
+        </p:nvSpPr>
+        <p:spPr>
+          <a:xfrm>
+            <a:off x="548640" y="4160520"/>
+            <a:ext cx="11064240" cy="731520"/>
+          </a:xfrm>
+          <a:prstGeom prst="rect">
+            <a:avLst/>
+          </a:prstGeom>
+          <a:noFill/>
+          <a:ln/>
+        </p:spPr>
+        <p:txBody>
+          <a:bodyPr wrap="square" lIns="0" tIns="0" rIns="0" bIns="0" rtlCol="0" anchor="ctr"/>
+          <a:lstStyle/>
+          <a:p>
+            <a:pPr algn="ctr" indent="0" marL="0">
+              <a:buNone/>
+            </a:pPr>
+            <a:r>
+              <a:rPr lang="en-US" sz="1600" b="1" dirty="0">
+                <a:solidFill>
+                  <a:schemeClr val="bg1"/>
+                </a:solidFill>
+              </a:rPr>
+              <a:t>Ditolak: perlu langganan, atau sewa jika film punya harga sewa</a:t>
+            </a:r>
+            <a:endParaRPr lang="en-US" sz="1600" dirty="0"/>
+          </a:p>
+        </p:txBody>
+      </p:sp>
+      <p:sp>
+        <p:nvSpPr>
+          <p:cNvPr id="26" name="Text 23"/>
+          <p:cNvSpPr txBox="1"/>
+          <p:nvPr/>
+        </p:nvSpPr>
+        <p:spPr>
+          <a:xfrm>
+            <a:off x="548640" y="5166360"/>
+            <a:ext cx="11064240" cy="822960"/>
+          </a:xfrm>
+          <a:prstGeom prst="rect">
+            <a:avLst/>
+          </a:prstGeom>
+          <a:noFill/>
+          <a:ln/>
+        </p:spPr>
+        <p:txBody>
+          <a:bodyPr wrap="square" lIns="0" tIns="0" rIns="0" bIns="0" rtlCol="0" anchor="t"/>
+          <a:lstStyle/>
+          <a:p>
             <a:pPr indent="0" marL="0">
               <a:buNone/>
             </a:pPr>
@@ -12707,166 +11974,9 @@
                   <a:schemeClr val="tx1"/>
                 </a:solidFill>
               </a:rPr>
-              <a:t>Contoh: pelanggan aktif menyewa film premium → ditolak, karena filmnya sudah termasuk langganan. Pengguna tidak membayar dua kali, dan permintaan refund berkurang.</a:t>
+              <a:t>Episode premium sendiri atau karena serialnya. Satu AccessService dipakai di semua tempat, dan dashboard menampilkannya per pengguna supaya support bisa menjawab keluhan.</a:t>
             </a:r>
             <a:endParaRPr lang="en-US" sz="1500" dirty="0"/>
-          </a:p>
-        </p:txBody>
-      </p:sp>
-      <p:pic>
-        <p:nvPicPr>
-          <p:cNvPr id="11" name="Image 1" descr="preencoded.png">    </p:cNvPr>
-          <p:cNvPicPr>
-            <a:picLocks noChangeAspect="1"/>
-          </p:cNvPicPr>
-          <p:nvPr/>
-        </p:nvPicPr>
-        <p:blipFill>
-          <a:blip r:embed="rId2"/>
-          <a:stretch>
-            <a:fillRect/>
-          </a:stretch>
-        </p:blipFill>
-        <p:spPr>
-          <a:xfrm>
-            <a:off x="6492240" y="1691640"/>
-            <a:ext cx="457200" cy="457200"/>
-          </a:xfrm>
-          <a:prstGeom prst="rect">
-            <a:avLst/>
-          </a:prstGeom>
-        </p:spPr>
-      </p:pic>
-      <p:sp>
-        <p:nvSpPr>
-          <p:cNvPr id="12" name="Text 7"/>
-          <p:cNvSpPr txBox="1"/>
-          <p:nvPr/>
-        </p:nvSpPr>
-        <p:spPr>
-          <a:xfrm>
-            <a:off x="7132320" y="1691640"/>
-            <a:ext cx="4389120" cy="457200"/>
-          </a:xfrm>
-          <a:prstGeom prst="rect">
-            <a:avLst/>
-          </a:prstGeom>
-          <a:noFill/>
-          <a:ln/>
-        </p:spPr>
-        <p:txBody>
-          <a:bodyPr wrap="square" lIns="0" tIns="0" rIns="0" bIns="0" rtlCol="0" anchor="ctr"/>
-          <a:lstStyle/>
-          <a:p>
-            <a:pPr indent="0" marL="0">
-              <a:buNone/>
-            </a:pPr>
-            <a:r>
-              <a:rPr lang="en-US" sz="2000" b="1" dirty="0">
-                <a:solidFill>
-                  <a:schemeClr val="tx1"/>
-                </a:solidFill>
-                <a:latin typeface="+mj-lt" pitchFamily="34" charset="0"/>
-                <a:ea typeface="+mj-lt" pitchFamily="34" charset="-122"/>
-                <a:cs typeface="+mj-lt" pitchFamily="34" charset="-120"/>
-              </a:rPr>
-              <a:t>Kupon</a:t>
-            </a:r>
-            <a:endParaRPr lang="en-US" sz="2000" dirty="0"/>
-          </a:p>
-        </p:txBody>
-      </p:sp>
-      <p:sp>
-        <p:nvSpPr>
-          <p:cNvPr id="13" name="Text 8"/>
-          <p:cNvSpPr txBox="1"/>
-          <p:nvPr/>
-        </p:nvSpPr>
-        <p:spPr>
-          <a:xfrm>
-            <a:off x="6492240" y="2377440"/>
-            <a:ext cx="5120640" cy="2286000"/>
-          </a:xfrm>
-          <a:prstGeom prst="rect">
-            <a:avLst/>
-          </a:prstGeom>
-          <a:noFill/>
-          <a:ln/>
-        </p:spPr>
-        <p:txBody>
-          <a:bodyPr wrap="square" lIns="0" tIns="0" rIns="0" bIns="0" rtlCol="0" anchor="t"/>
-          <a:lstStyle/>
-          <a:p>
-            <a:pPr marL="342900" indent="-342900">
-              <a:spcAft>
-                <a:spcPts val="1000"/>
-              </a:spcAft>
-              <a:buSzPct val="100000"/>
-              <a:buChar char="•"/>
-            </a:pPr>
-            <a:r>
-              <a:rPr lang="en-US" sz="1700" dirty="0">
-                <a:solidFill>
-                  <a:schemeClr val="tx1"/>
-                </a:solidFill>
-              </a:rPr>
-              <a:t>Nominal tetap atau persentase</a:t>
-            </a:r>
-            <a:endParaRPr lang="en-US" sz="1700" dirty="0"/>
-          </a:p>
-          <a:p>
-            <a:pPr marL="342900" indent="-342900">
-              <a:spcAft>
-                <a:spcPts val="1000"/>
-              </a:spcAft>
-              <a:buSzPct val="100000"/>
-              <a:buChar char="•"/>
-            </a:pPr>
-            <a:r>
-              <a:rPr lang="en-US" sz="1700" dirty="0">
-                <a:solidFill>
-                  <a:schemeClr val="tx1"/>
-                </a:solidFill>
-              </a:rPr>
-              <a:t>Hanya berlaku di antara tanggal mulai dan berakhir</a:t>
-            </a:r>
-            <a:endParaRPr lang="en-US" sz="1700" dirty="0"/>
-          </a:p>
-          <a:p>
-            <a:pPr marL="342900" indent="-342900">
-              <a:spcAft>
-                <a:spcPts val="1000"/>
-              </a:spcAft>
-              <a:buSzPct val="100000"/>
-              <a:buChar char="•"/>
-            </a:pPr>
-            <a:r>
-              <a:rPr lang="en-US" sz="1700" dirty="0">
-                <a:solidFill>
-                  <a:schemeClr val="tx1"/>
-                </a:solidFill>
-              </a:rPr>
-              <a:t>Tidak pernah membuat harga di bawah nol</a:t>
-            </a:r>
-            <a:endParaRPr lang="en-US" sz="1700" dirty="0"/>
-          </a:p>
-          <a:p>
-            <a:pPr marL="342900" indent="-342900">
-              <a:spcAft>
-                <a:spcPts val="1000"/>
-              </a:spcAft>
-              <a:buSzPct val="100000"/>
-              <a:buChar char="•"/>
-            </a:pPr>
-            <a:r>
-              <a:rPr lang="en-US" sz="1700" dirty="0">
-                <a:solidFill>
-                  <a:schemeClr val="tx1"/>
-                </a:solidFill>
-              </a:rPr>
-              <a:t>Kupon sekali pakai berlaku sekali per pengguna</a:t>
-            </a:r>
-            <a:endParaRPr lang="en-US" sz="1700" dirty="0"/>
           </a:p>
         </p:txBody>
       </p:sp>

--- a/docs/Goflix-presentasi.pptx
+++ b/docs/Goflix-presentasi.pptx
@@ -121,42 +121,42 @@
   <p:extLst>
     <p:ext uri="{521415D9-36F7-43E2-AB2F-B90AF26B5E84}">
       <p14:sectionLst xmlns:p14="http://schemas.microsoft.com/office/powerpoint/2010/main">
-        <p14:section name="Pembuka" id="{c120b066-e2d0-d885-9566-9652f5fac1b6}">
+        <p14:section name="Pembuka" id="{98601312-3310-a3d7-27c4-5ea20b6ad1e8}">
           <p14:sldIdLst>
             <p14:sldId id="256"/>
           </p14:sldIdLst>
         </p14:section>
-        <p14:section name="Produk" id="{0c1b174c-8971-458f-26e1-153a299af93a}">
+        <p14:section name="Produk" id="{db6d4737-3011-9a90-8a18-600a68cb46a9}">
           <p14:sldIdLst>
             <p14:sldId id="257"/>
             <p14:sldId id="258"/>
           </p14:sldIdLst>
         </p14:section>
-        <p14:section name="Desain sistem" id="{77d2042c-5983-cf5d-30d5-ffb25a552e13}">
+        <p14:section name="Desain sistem" id="{2a9c69cf-2cf5-bab9-1f9a-a554c84ac799}">
           <p14:sldIdLst>
             <p14:sldId id="259"/>
             <p14:sldId id="260"/>
             <p14:sldId id="261"/>
             <p14:sldId id="262"/>
+            <p14:sldId id="263"/>
           </p14:sldIdLst>
         </p14:section>
-        <p14:section name="Aturan bisnis" id="{028d5efb-b486-ecea-1b76-c145611a6a08}">
+        <p14:section name="Aturan bisnis" id="{3926ed21-7eee-4b8b-8754-5b890d44dfd3}">
           <p14:sldIdLst>
-            <p14:sldId id="263"/>
             <p14:sldId id="264"/>
             <p14:sldId id="265"/>
+            <p14:sldId id="266"/>
           </p14:sldIdLst>
         </p14:section>
-        <p14:section name="Kode" id="{972b52da-e013-afc6-4c0f-1bcba4c2295b}">
+        <p14:section name="Kode" id="{09b99c6a-f1d8-3016-6d07-bb35c352a075}">
           <p14:sldIdLst>
-            <p14:sldId id="266"/>
             <p14:sldId id="267"/>
             <p14:sldId id="268"/>
+            <p14:sldId id="269"/>
           </p14:sldIdLst>
         </p14:section>
-        <p14:section name="Penutup" id="{85a796cf-53cd-3e13-30f7-29334eb86f25}">
+        <p14:section name="Penutup" id="{f2ccf662-665d-63a6-50a9-ef581917bd03}">
           <p14:sldIdLst>
-            <p14:sldId id="269"/>
             <p14:sldId id="270"/>
           </p14:sldIdLst>
         </p14:section>
@@ -652,7 +652,7 @@
           <a:p>
             <a:r>
               <a:rPr lang="en-US" dirty="0"/>
-              <a:t>Aturan pelanggan tidak bisa menyewa mencegah pengguna membayar dua kali dan mengurangi permintaan refund.</a:t>
+              <a:t>Ini aturan yang dijalankan API Go sebelum memutar video. Di dashboard ada tombol Cek di halaman pengguna.</a:t>
             </a:r>
             <a:endParaRPr lang="en-US" dirty="0"/>
           </a:p>
@@ -740,7 +740,7 @@
           <a:p>
             <a:r>
               <a:rPr lang="en-US" dirty="0"/>
-              <a:t>Untuk tiap baris, siapkan satu contoh dari proyek ini.</a:t>
+              <a:t>Aturan pelanggan tidak bisa menyewa mencegah pengguna membayar dua kali dan mengurangi permintaan refund.</a:t>
             </a:r>
             <a:endParaRPr lang="en-US" dirty="0"/>
           </a:p>
@@ -828,7 +828,7 @@
           <a:p>
             <a:r>
               <a:rPr lang="en-US" dirty="0"/>
-              <a:t>Ini app/Services/SubscriptionService.php di repo demo.</a:t>
+              <a:t>Untuk tiap baris, siapkan satu contoh dari proyek ini.</a:t>
             </a:r>
             <a:endParaRPr lang="en-US" dirty="0"/>
           </a:p>
@@ -916,7 +916,7 @@
           <a:p>
             <a:r>
               <a:rPr lang="en-US" dirty="0"/>
-              <a:t>Demo langsung: cek film premium untuk pengguna tanpa langganan, tambahkan sewa, lalu cek lagi.</a:t>
+              <a:t>Ini app/Services/SubscriptionService.php di repo demo.</a:t>
             </a:r>
             <a:endParaRPr lang="en-US" dirty="0"/>
           </a:p>
@@ -1004,7 +1004,7 @@
           <a:p>
             <a:r>
               <a:rPr lang="en-US" dirty="0"/>
-              <a:t>Menyebutkan yang belum selesai sendiri menunjukkan saya tahu di mana sistemnya tipis. Pilih satu untuk dibahas.</a:t>
+              <a:t>Demo langsung: cek film premium untuk pengguna tanpa langganan, tambahkan sewa, lalu cek lagi.</a:t>
             </a:r>
             <a:endParaRPr lang="en-US" dirty="0"/>
           </a:p>
@@ -1532,7 +1532,7 @@
           <a:p>
             <a:r>
               <a:rPr lang="en-US" dirty="0"/>
-              <a:t>Tunjukkan alur dari kiri ke kanan: master data, lalu dokumen, lalu catatan.</a:t>
+              <a:t>Film, serial, episode, dan season, dengan tabel pivot untuk genre, bahasa, dan pemain.</a:t>
             </a:r>
             <a:endParaRPr lang="en-US" dirty="0"/>
           </a:p>
@@ -1620,7 +1620,7 @@
           <a:p>
             <a:r>
               <a:rPr lang="en-US" dirty="0"/>
-              <a:t>Ini poin desain paling kuat untuk dibahas: kenapa pola lama bermasalah dan bagaimana memperbaikinya tanpa downtime.</a:t>
+              <a:t>Paket, langganan, sewa, dan kupon. users.subscription_ends_on dipakai untuk cek akses yang cepat.</a:t>
             </a:r>
             <a:endParaRPr lang="en-US" dirty="0"/>
           </a:p>
@@ -1708,7 +1708,7 @@
           <a:p>
             <a:r>
               <a:rPr lang="en-US" dirty="0"/>
-              <a:t>Tunjukkan di demo: tambah langganan untuk pengguna yang masih aktif dan lihat tanggal berakhirnya bertambah.</a:t>
+              <a:t>Ini poin desain paling kuat untuk dibahas: kenapa pola lama bermasalah dan bagaimana memperbaikinya tanpa downtime.</a:t>
             </a:r>
             <a:endParaRPr lang="en-US" dirty="0"/>
           </a:p>
@@ -1796,7 +1796,7 @@
           <a:p>
             <a:r>
               <a:rPr lang="en-US" dirty="0"/>
-              <a:t>Ini aturan yang dijalankan API Go sebelum memutar video. Di dashboard ada tombol Cek di halaman pengguna.</a:t>
+              <a:t>Tunjukkan di demo: tambah langganan untuk pengguna yang masih aktif dan lihat tanggal berakhirnya bertambah.</a:t>
             </a:r>
             <a:endParaRPr lang="en-US" dirty="0"/>
           </a:p>
@@ -2761,202 +2761,22 @@
                   <a:schemeClr val="tx1"/>
                 </a:solidFill>
               </a:rPr>
-              <a:t>Sewa dan kupon</a:t>
+              <a:t>Siapa boleh menonton apa</a:t>
             </a:r>
             <a:endParaRPr lang="en-US" sz="3200" dirty="0"/>
           </a:p>
         </p:txBody>
       </p:sp>
-      <p:pic>
-        <p:nvPicPr>
-          <p:cNvPr id="5" name="Image 0" descr="preencoded.png">    </p:cNvPr>
-          <p:cNvPicPr>
-            <a:picLocks noChangeAspect="1"/>
-          </p:cNvPicPr>
-          <p:nvPr/>
-        </p:nvPicPr>
-        <p:blipFill>
-          <a:blip r:embed="rId1"/>
-          <a:stretch>
-            <a:fillRect/>
-          </a:stretch>
-        </p:blipFill>
+      <p:sp>
+        <p:nvSpPr>
+          <p:cNvPr id="5" name="card"/>
+          <p:cNvSpPr/>
+          <p:nvPr/>
+        </p:nvSpPr>
         <p:spPr>
           <a:xfrm>
             <a:off x="548640" y="1691640"/>
-            <a:ext cx="457200" cy="457200"/>
-          </a:xfrm>
-          <a:prstGeom prst="rect">
-            <a:avLst/>
-          </a:prstGeom>
-        </p:spPr>
-      </p:pic>
-      <p:sp>
-        <p:nvSpPr>
-          <p:cNvPr id="6" name="Text 2"/>
-          <p:cNvSpPr txBox="1"/>
-          <p:nvPr/>
-        </p:nvSpPr>
-        <p:spPr>
-          <a:xfrm>
-            <a:off x="1188720" y="1691640"/>
-            <a:ext cx="4389120" cy="457200"/>
-          </a:xfrm>
-          <a:prstGeom prst="rect">
-            <a:avLst/>
-          </a:prstGeom>
-          <a:noFill/>
-          <a:ln/>
-        </p:spPr>
-        <p:txBody>
-          <a:bodyPr wrap="square" lIns="0" tIns="0" rIns="0" bIns="0" rtlCol="0" anchor="ctr"/>
-          <a:lstStyle/>
-          <a:p>
-            <a:pPr indent="0" marL="0">
-              <a:buNone/>
-            </a:pPr>
-            <a:r>
-              <a:rPr lang="en-US" sz="2000" b="1" dirty="0">
-                <a:solidFill>
-                  <a:schemeClr val="tx1"/>
-                </a:solidFill>
-                <a:latin typeface="+mj-lt" pitchFamily="34" charset="0"/>
-                <a:ea typeface="+mj-lt" pitchFamily="34" charset="-122"/>
-                <a:cs typeface="+mj-lt" pitchFamily="34" charset="-120"/>
-              </a:rPr>
-              <a:t>Sewa satu film</a:t>
-            </a:r>
-            <a:endParaRPr lang="en-US" sz="2000" dirty="0"/>
-          </a:p>
-        </p:txBody>
-      </p:sp>
-      <p:sp>
-        <p:nvSpPr>
-          <p:cNvPr id="7" name="Text 3"/>
-          <p:cNvSpPr txBox="1"/>
-          <p:nvPr/>
-        </p:nvSpPr>
-        <p:spPr>
-          <a:xfrm>
-            <a:off x="548640" y="2377440"/>
-            <a:ext cx="5120640" cy="2286000"/>
-          </a:xfrm>
-          <a:prstGeom prst="rect">
-            <a:avLst/>
-          </a:prstGeom>
-          <a:noFill/>
-          <a:ln/>
-        </p:spPr>
-        <p:txBody>
-          <a:bodyPr wrap="square" lIns="0" tIns="0" rIns="0" bIns="0" rtlCol="0" anchor="t"/>
-          <a:lstStyle/>
-          <a:p>
-            <a:pPr marL="342900" indent="-342900">
-              <a:spcAft>
-                <a:spcPts val="1000"/>
-              </a:spcAft>
-              <a:buSzPct val="100000"/>
-              <a:buChar char="•"/>
-            </a:pPr>
-            <a:r>
-              <a:rPr lang="en-US" sz="1700" dirty="0">
-                <a:solidFill>
-                  <a:schemeClr val="tx1"/>
-                </a:solidFill>
-              </a:rPr>
-              <a:t>Hanya film premium yang punya harga sewa</a:t>
-            </a:r>
-            <a:endParaRPr lang="en-US" sz="1700" dirty="0"/>
-          </a:p>
-          <a:p>
-            <a:pPr marL="342900" indent="-342900">
-              <a:spcAft>
-                <a:spcPts val="1000"/>
-              </a:spcAft>
-              <a:buSzPct val="100000"/>
-              <a:buChar char="•"/>
-            </a:pPr>
-            <a:r>
-              <a:rPr lang="en-US" sz="1700" dirty="0">
-                <a:solidFill>
-                  <a:schemeClr val="tx1"/>
-                </a:solidFill>
-              </a:rPr>
-              <a:t>Berlaku rent_days hari sejak dibayar</a:t>
-            </a:r>
-            <a:endParaRPr lang="en-US" sz="1700" dirty="0"/>
-          </a:p>
-          <a:p>
-            <a:pPr marL="342900" indent="-342900">
-              <a:spcAft>
-                <a:spcPts val="1000"/>
-              </a:spcAft>
-              <a:buSzPct val="100000"/>
-              <a:buChar char="•"/>
-            </a:pPr>
-            <a:r>
-              <a:rPr lang="en-US" sz="1700" dirty="0">
-                <a:solidFill>
-                  <a:schemeClr val="tx1"/>
-                </a:solidFill>
-              </a:rPr>
-              <a:t>Pelanggan aktif tidak bisa menyewa: filmnya sudah termasuk</a:t>
-            </a:r>
-            <a:endParaRPr lang="en-US" sz="1700" dirty="0"/>
-          </a:p>
-          <a:p>
-            <a:pPr marL="342900" indent="-342900">
-              <a:spcAft>
-                <a:spcPts val="1000"/>
-              </a:spcAft>
-              <a:buSzPct val="100000"/>
-              <a:buChar char="•"/>
-            </a:pPr>
-            <a:r>
-              <a:rPr lang="en-US" sz="1700" dirty="0">
-                <a:solidFill>
-                  <a:schemeClr val="tx1"/>
-                </a:solidFill>
-              </a:rPr>
-              <a:t>Film yang sama tidak bisa disewa dua kali bersamaan</a:t>
-            </a:r>
-            <a:endParaRPr lang="en-US" sz="1700" dirty="0"/>
-          </a:p>
-        </p:txBody>
-      </p:sp>
-      <p:sp>
-        <p:nvSpPr>
-          <p:cNvPr id="8" name="Shape 4"/>
-          <p:cNvSpPr/>
-          <p:nvPr/>
-        </p:nvSpPr>
-        <p:spPr>
-          <a:xfrm>
-            <a:off x="6080760" y="1737360"/>
-            <a:ext cx="914" cy="2834640"/>
-          </a:xfrm>
-          <a:prstGeom prst="line">
-            <a:avLst/>
-          </a:prstGeom>
-          <a:noFill/>
-          <a:ln w="12700">
-            <a:solidFill>
-              <a:schemeClr val="accent6"/>
-            </a:solidFill>
-            <a:prstDash val="solid"/>
-          </a:ln>
-        </p:spPr>
-      </p:sp>
-      <p:sp>
-        <p:nvSpPr>
-          <p:cNvPr id="9" name="card"/>
-          <p:cNvSpPr/>
-          <p:nvPr/>
-        </p:nvSpPr>
-        <p:spPr>
-          <a:xfrm>
-            <a:off x="548640" y="4892040"/>
-            <a:ext cx="11064240" cy="1143000"/>
+            <a:ext cx="2514600" cy="1143000"/>
           </a:xfrm>
           <a:prstGeom prst="roundRect">
             <a:avLst>
@@ -2976,14 +2796,14 @@
       </p:sp>
       <p:sp>
         <p:nvSpPr>
-          <p:cNvPr id="10" name="Text 6"/>
+          <p:cNvPr id="6" name="Text 3"/>
           <p:cNvSpPr txBox="1"/>
           <p:nvPr/>
         </p:nvSpPr>
         <p:spPr>
           <a:xfrm>
-            <a:off x="822960" y="4892040"/>
-            <a:ext cx="10515600" cy="1143000"/>
+            <a:off x="731520" y="1691640"/>
+            <a:ext cx="2148840" cy="1143000"/>
           </a:xfrm>
           <a:prstGeom prst="rect">
             <a:avLst/>
@@ -2995,6 +2815,602 @@
           <a:bodyPr wrap="square" lIns="0" tIns="0" rIns="0" bIns="0" rtlCol="0" anchor="ctr"/>
           <a:lstStyle/>
           <a:p>
+            <a:pPr algn="ctr" indent="0" marL="0">
+              <a:buNone/>
+            </a:pPr>
+            <a:r>
+              <a:rPr lang="en-US" sz="1600" b="1" dirty="0">
+                <a:solidFill>
+                  <a:schemeClr val="tx1"/>
+                </a:solidFill>
+              </a:rPr>
+              <a:t>Akun dan judul aktif?</a:t>
+            </a:r>
+            <a:endParaRPr lang="en-US" sz="1600" dirty="0"/>
+          </a:p>
+        </p:txBody>
+      </p:sp>
+      <p:sp>
+        <p:nvSpPr>
+          <p:cNvPr id="7" name="Shape 4"/>
+          <p:cNvSpPr/>
+          <p:nvPr/>
+        </p:nvSpPr>
+        <p:spPr>
+          <a:xfrm>
+            <a:off x="3063240" y="2258568"/>
+            <a:ext cx="320040" cy="914"/>
+          </a:xfrm>
+          <a:prstGeom prst="line">
+            <a:avLst/>
+          </a:prstGeom>
+          <a:noFill/>
+          <a:ln w="19050">
+            <a:solidFill>
+              <a:schemeClr val="accent4"/>
+            </a:solidFill>
+            <a:prstDash val="solid"/>
+            <a:tailEnd type="triangle"/>
+          </a:ln>
+        </p:spPr>
+      </p:sp>
+      <p:sp>
+        <p:nvSpPr>
+          <p:cNvPr id="8" name="Shape 5"/>
+          <p:cNvSpPr/>
+          <p:nvPr/>
+        </p:nvSpPr>
+        <p:spPr>
+          <a:xfrm>
+            <a:off x="1805940" y="2834640"/>
+            <a:ext cx="914" cy="411480"/>
+          </a:xfrm>
+          <a:prstGeom prst="line">
+            <a:avLst/>
+          </a:prstGeom>
+          <a:noFill/>
+          <a:ln w="15875">
+            <a:solidFill>
+              <a:schemeClr val="accent5"/>
+            </a:solidFill>
+            <a:prstDash val="solid"/>
+          </a:ln>
+        </p:spPr>
+      </p:sp>
+      <p:sp>
+        <p:nvSpPr>
+          <p:cNvPr id="9" name="Text 6"/>
+          <p:cNvSpPr txBox="1"/>
+          <p:nvPr/>
+        </p:nvSpPr>
+        <p:spPr>
+          <a:xfrm>
+            <a:off x="548640" y="3291840"/>
+            <a:ext cx="2514600" cy="548640"/>
+          </a:xfrm>
+          <a:prstGeom prst="rect">
+            <a:avLst/>
+          </a:prstGeom>
+          <a:noFill/>
+          <a:ln/>
+        </p:spPr>
+        <p:txBody>
+          <a:bodyPr wrap="square" lIns="0" tIns="0" rIns="0" bIns="0" rtlCol="0" anchor="t"/>
+          <a:lstStyle/>
+          <a:p>
+            <a:pPr algn="ctr" indent="0" marL="0">
+              <a:buNone/>
+            </a:pPr>
+            <a:r>
+              <a:rPr lang="en-US" sz="1400" b="1" dirty="0">
+                <a:solidFill>
+                  <a:schemeClr val="accent3"/>
+                </a:solidFill>
+              </a:rPr>
+              <a:t>tidak: ditolak</a:t>
+            </a:r>
+            <a:endParaRPr lang="en-US" sz="1400" dirty="0"/>
+          </a:p>
+        </p:txBody>
+      </p:sp>
+      <p:sp>
+        <p:nvSpPr>
+          <p:cNvPr id="10" name="card"/>
+          <p:cNvSpPr/>
+          <p:nvPr/>
+        </p:nvSpPr>
+        <p:spPr>
+          <a:xfrm>
+            <a:off x="3383280" y="1691640"/>
+            <a:ext cx="2514600" cy="1143000"/>
+          </a:xfrm>
+          <a:prstGeom prst="roundRect">
+            <a:avLst>
+              <a:gd name="adj" fmla="val 9600"/>
+            </a:avLst>
+          </a:prstGeom>
+          <a:solidFill>
+            <a:schemeClr val="bg2"/>
+          </a:solidFill>
+          <a:ln w="12700">
+            <a:solidFill>
+              <a:schemeClr val="bg2"/>
+            </a:solidFill>
+            <a:prstDash val="solid"/>
+          </a:ln>
+        </p:spPr>
+      </p:sp>
+      <p:sp>
+        <p:nvSpPr>
+          <p:cNvPr id="11" name="Text 8"/>
+          <p:cNvSpPr txBox="1"/>
+          <p:nvPr/>
+        </p:nvSpPr>
+        <p:spPr>
+          <a:xfrm>
+            <a:off x="3566160" y="1691640"/>
+            <a:ext cx="2148840" cy="1143000"/>
+          </a:xfrm>
+          <a:prstGeom prst="rect">
+            <a:avLst/>
+          </a:prstGeom>
+          <a:noFill/>
+          <a:ln/>
+        </p:spPr>
+        <p:txBody>
+          <a:bodyPr wrap="square" lIns="0" tIns="0" rIns="0" bIns="0" rtlCol="0" anchor="ctr"/>
+          <a:lstStyle/>
+          <a:p>
+            <a:pPr algn="ctr" indent="0" marL="0">
+              <a:buNone/>
+            </a:pPr>
+            <a:r>
+              <a:rPr lang="en-US" sz="1600" b="1" dirty="0">
+                <a:solidFill>
+                  <a:schemeClr val="tx1"/>
+                </a:solidFill>
+              </a:rPr>
+              <a:t>Premium?</a:t>
+            </a:r>
+            <a:endParaRPr lang="en-US" sz="1600" dirty="0"/>
+          </a:p>
+        </p:txBody>
+      </p:sp>
+      <p:sp>
+        <p:nvSpPr>
+          <p:cNvPr id="12" name="Shape 9"/>
+          <p:cNvSpPr/>
+          <p:nvPr/>
+        </p:nvSpPr>
+        <p:spPr>
+          <a:xfrm>
+            <a:off x="5897880" y="2258568"/>
+            <a:ext cx="320040" cy="914"/>
+          </a:xfrm>
+          <a:prstGeom prst="line">
+            <a:avLst/>
+          </a:prstGeom>
+          <a:noFill/>
+          <a:ln w="19050">
+            <a:solidFill>
+              <a:schemeClr val="accent4"/>
+            </a:solidFill>
+            <a:prstDash val="solid"/>
+            <a:tailEnd type="triangle"/>
+          </a:ln>
+        </p:spPr>
+      </p:sp>
+      <p:sp>
+        <p:nvSpPr>
+          <p:cNvPr id="13" name="Shape 10"/>
+          <p:cNvSpPr/>
+          <p:nvPr/>
+        </p:nvSpPr>
+        <p:spPr>
+          <a:xfrm>
+            <a:off x="4640580" y="2834640"/>
+            <a:ext cx="914" cy="411480"/>
+          </a:xfrm>
+          <a:prstGeom prst="line">
+            <a:avLst/>
+          </a:prstGeom>
+          <a:noFill/>
+          <a:ln w="15875">
+            <a:solidFill>
+              <a:schemeClr val="accent5"/>
+            </a:solidFill>
+            <a:prstDash val="solid"/>
+          </a:ln>
+        </p:spPr>
+      </p:sp>
+      <p:sp>
+        <p:nvSpPr>
+          <p:cNvPr id="14" name="Text 11"/>
+          <p:cNvSpPr txBox="1"/>
+          <p:nvPr/>
+        </p:nvSpPr>
+        <p:spPr>
+          <a:xfrm>
+            <a:off x="3383280" y="3291840"/>
+            <a:ext cx="2514600" cy="548640"/>
+          </a:xfrm>
+          <a:prstGeom prst="rect">
+            <a:avLst/>
+          </a:prstGeom>
+          <a:noFill/>
+          <a:ln/>
+        </p:spPr>
+        <p:txBody>
+          <a:bodyPr wrap="square" lIns="0" tIns="0" rIns="0" bIns="0" rtlCol="0" anchor="t"/>
+          <a:lstStyle/>
+          <a:p>
+            <a:pPr algn="ctr" indent="0" marL="0">
+              <a:buNone/>
+            </a:pPr>
+            <a:r>
+              <a:rPr lang="en-US" sz="1400" b="1" dirty="0">
+                <a:solidFill>
+                  <a:schemeClr val="accent1"/>
+                </a:solidFill>
+              </a:rPr>
+              <a:t>tidak: gratis</a:t>
+            </a:r>
+            <a:endParaRPr lang="en-US" sz="1400" dirty="0"/>
+          </a:p>
+        </p:txBody>
+      </p:sp>
+      <p:sp>
+        <p:nvSpPr>
+          <p:cNvPr id="15" name="card"/>
+          <p:cNvSpPr/>
+          <p:nvPr/>
+        </p:nvSpPr>
+        <p:spPr>
+          <a:xfrm>
+            <a:off x="6217920" y="1691640"/>
+            <a:ext cx="2514600" cy="1143000"/>
+          </a:xfrm>
+          <a:prstGeom prst="roundRect">
+            <a:avLst>
+              <a:gd name="adj" fmla="val 9600"/>
+            </a:avLst>
+          </a:prstGeom>
+          <a:solidFill>
+            <a:schemeClr val="bg2"/>
+          </a:solidFill>
+          <a:ln w="12700">
+            <a:solidFill>
+              <a:schemeClr val="bg2"/>
+            </a:solidFill>
+            <a:prstDash val="solid"/>
+          </a:ln>
+        </p:spPr>
+      </p:sp>
+      <p:sp>
+        <p:nvSpPr>
+          <p:cNvPr id="16" name="Text 13"/>
+          <p:cNvSpPr txBox="1"/>
+          <p:nvPr/>
+        </p:nvSpPr>
+        <p:spPr>
+          <a:xfrm>
+            <a:off x="6400800" y="1691640"/>
+            <a:ext cx="2148840" cy="1143000"/>
+          </a:xfrm>
+          <a:prstGeom prst="rect">
+            <a:avLst/>
+          </a:prstGeom>
+          <a:noFill/>
+          <a:ln/>
+        </p:spPr>
+        <p:txBody>
+          <a:bodyPr wrap="square" lIns="0" tIns="0" rIns="0" bIns="0" rtlCol="0" anchor="ctr"/>
+          <a:lstStyle/>
+          <a:p>
+            <a:pPr algn="ctr" indent="0" marL="0">
+              <a:buNone/>
+            </a:pPr>
+            <a:r>
+              <a:rPr lang="en-US" sz="1600" b="1" dirty="0">
+                <a:solidFill>
+                  <a:schemeClr val="tx1"/>
+                </a:solidFill>
+              </a:rPr>
+              <a:t>Langganan aktif?</a:t>
+            </a:r>
+            <a:endParaRPr lang="en-US" sz="1600" dirty="0"/>
+          </a:p>
+        </p:txBody>
+      </p:sp>
+      <p:sp>
+        <p:nvSpPr>
+          <p:cNvPr id="17" name="Shape 14"/>
+          <p:cNvSpPr/>
+          <p:nvPr/>
+        </p:nvSpPr>
+        <p:spPr>
+          <a:xfrm>
+            <a:off x="8732520" y="2258568"/>
+            <a:ext cx="320040" cy="914"/>
+          </a:xfrm>
+          <a:prstGeom prst="line">
+            <a:avLst/>
+          </a:prstGeom>
+          <a:noFill/>
+          <a:ln w="19050">
+            <a:solidFill>
+              <a:schemeClr val="accent4"/>
+            </a:solidFill>
+            <a:prstDash val="solid"/>
+            <a:tailEnd type="triangle"/>
+          </a:ln>
+        </p:spPr>
+      </p:sp>
+      <p:sp>
+        <p:nvSpPr>
+          <p:cNvPr id="18" name="Shape 15"/>
+          <p:cNvSpPr/>
+          <p:nvPr/>
+        </p:nvSpPr>
+        <p:spPr>
+          <a:xfrm>
+            <a:off x="7475220" y="2834640"/>
+            <a:ext cx="914" cy="411480"/>
+          </a:xfrm>
+          <a:prstGeom prst="line">
+            <a:avLst/>
+          </a:prstGeom>
+          <a:noFill/>
+          <a:ln w="15875">
+            <a:solidFill>
+              <a:schemeClr val="accent5"/>
+            </a:solidFill>
+            <a:prstDash val="solid"/>
+          </a:ln>
+        </p:spPr>
+      </p:sp>
+      <p:sp>
+        <p:nvSpPr>
+          <p:cNvPr id="19" name="Text 16"/>
+          <p:cNvSpPr txBox="1"/>
+          <p:nvPr/>
+        </p:nvSpPr>
+        <p:spPr>
+          <a:xfrm>
+            <a:off x="6217920" y="3291840"/>
+            <a:ext cx="2514600" cy="548640"/>
+          </a:xfrm>
+          <a:prstGeom prst="rect">
+            <a:avLst/>
+          </a:prstGeom>
+          <a:noFill/>
+          <a:ln/>
+        </p:spPr>
+        <p:txBody>
+          <a:bodyPr wrap="square" lIns="0" tIns="0" rIns="0" bIns="0" rtlCol="0" anchor="t"/>
+          <a:lstStyle/>
+          <a:p>
+            <a:pPr algn="ctr" indent="0" marL="0">
+              <a:buNone/>
+            </a:pPr>
+            <a:r>
+              <a:rPr lang="en-US" sz="1400" b="1" dirty="0">
+                <a:solidFill>
+                  <a:schemeClr val="accent1"/>
+                </a:solidFill>
+              </a:rPr>
+              <a:t>ya: boleh</a:t>
+            </a:r>
+            <a:endParaRPr lang="en-US" sz="1400" dirty="0"/>
+          </a:p>
+        </p:txBody>
+      </p:sp>
+      <p:sp>
+        <p:nvSpPr>
+          <p:cNvPr id="20" name="card"/>
+          <p:cNvSpPr/>
+          <p:nvPr/>
+        </p:nvSpPr>
+        <p:spPr>
+          <a:xfrm>
+            <a:off x="9052560" y="1691640"/>
+            <a:ext cx="2514600" cy="1143000"/>
+          </a:xfrm>
+          <a:prstGeom prst="roundRect">
+            <a:avLst>
+              <a:gd name="adj" fmla="val 9600"/>
+            </a:avLst>
+          </a:prstGeom>
+          <a:solidFill>
+            <a:schemeClr val="bg2"/>
+          </a:solidFill>
+          <a:ln w="12700">
+            <a:solidFill>
+              <a:schemeClr val="bg2"/>
+            </a:solidFill>
+            <a:prstDash val="solid"/>
+          </a:ln>
+        </p:spPr>
+      </p:sp>
+      <p:sp>
+        <p:nvSpPr>
+          <p:cNvPr id="21" name="Text 18"/>
+          <p:cNvSpPr txBox="1"/>
+          <p:nvPr/>
+        </p:nvSpPr>
+        <p:spPr>
+          <a:xfrm>
+            <a:off x="9235440" y="1691640"/>
+            <a:ext cx="2148840" cy="1143000"/>
+          </a:xfrm>
+          <a:prstGeom prst="rect">
+            <a:avLst/>
+          </a:prstGeom>
+          <a:noFill/>
+          <a:ln/>
+        </p:spPr>
+        <p:txBody>
+          <a:bodyPr wrap="square" lIns="0" tIns="0" rIns="0" bIns="0" rtlCol="0" anchor="ctr"/>
+          <a:lstStyle/>
+          <a:p>
+            <a:pPr algn="ctr" indent="0" marL="0">
+              <a:buNone/>
+            </a:pPr>
+            <a:r>
+              <a:rPr lang="en-US" sz="1600" b="1" dirty="0">
+                <a:solidFill>
+                  <a:schemeClr val="tx1"/>
+                </a:solidFill>
+              </a:rPr>
+              <a:t>Film ini disewa?</a:t>
+            </a:r>
+            <a:endParaRPr lang="en-US" sz="1600" dirty="0"/>
+          </a:p>
+        </p:txBody>
+      </p:sp>
+      <p:sp>
+        <p:nvSpPr>
+          <p:cNvPr id="22" name="Shape 19"/>
+          <p:cNvSpPr/>
+          <p:nvPr/>
+        </p:nvSpPr>
+        <p:spPr>
+          <a:xfrm>
+            <a:off x="10309860" y="2834640"/>
+            <a:ext cx="914" cy="411480"/>
+          </a:xfrm>
+          <a:prstGeom prst="line">
+            <a:avLst/>
+          </a:prstGeom>
+          <a:noFill/>
+          <a:ln w="15875">
+            <a:solidFill>
+              <a:schemeClr val="accent5"/>
+            </a:solidFill>
+            <a:prstDash val="solid"/>
+          </a:ln>
+        </p:spPr>
+      </p:sp>
+      <p:sp>
+        <p:nvSpPr>
+          <p:cNvPr id="23" name="Text 20"/>
+          <p:cNvSpPr txBox="1"/>
+          <p:nvPr/>
+        </p:nvSpPr>
+        <p:spPr>
+          <a:xfrm>
+            <a:off x="9052560" y="3291840"/>
+            <a:ext cx="2514600" cy="548640"/>
+          </a:xfrm>
+          <a:prstGeom prst="rect">
+            <a:avLst/>
+          </a:prstGeom>
+          <a:noFill/>
+          <a:ln/>
+        </p:spPr>
+        <p:txBody>
+          <a:bodyPr wrap="square" lIns="0" tIns="0" rIns="0" bIns="0" rtlCol="0" anchor="t"/>
+          <a:lstStyle/>
+          <a:p>
+            <a:pPr algn="ctr" indent="0" marL="0">
+              <a:buNone/>
+            </a:pPr>
+            <a:r>
+              <a:rPr lang="en-US" sz="1400" b="1" dirty="0">
+                <a:solidFill>
+                  <a:schemeClr val="accent1"/>
+                </a:solidFill>
+              </a:rPr>
+              <a:t>ya: boleh, sampai sewa habis</a:t>
+            </a:r>
+            <a:endParaRPr lang="en-US" sz="1400" dirty="0"/>
+          </a:p>
+        </p:txBody>
+      </p:sp>
+      <p:sp>
+        <p:nvSpPr>
+          <p:cNvPr id="24" name="card"/>
+          <p:cNvSpPr/>
+          <p:nvPr/>
+        </p:nvSpPr>
+        <p:spPr>
+          <a:xfrm>
+            <a:off x="548640" y="4160520"/>
+            <a:ext cx="11064240" cy="731520"/>
+          </a:xfrm>
+          <a:prstGeom prst="roundRect">
+            <a:avLst>
+              <a:gd name="adj" fmla="val 15000"/>
+            </a:avLst>
+          </a:prstGeom>
+          <a:solidFill>
+            <a:schemeClr val="accent3"/>
+          </a:solidFill>
+          <a:ln w="12700">
+            <a:solidFill>
+              <a:schemeClr val="accent3"/>
+            </a:solidFill>
+            <a:prstDash val="solid"/>
+          </a:ln>
+        </p:spPr>
+      </p:sp>
+      <p:sp>
+        <p:nvSpPr>
+          <p:cNvPr id="25" name="Text 22"/>
+          <p:cNvSpPr txBox="1"/>
+          <p:nvPr/>
+        </p:nvSpPr>
+        <p:spPr>
+          <a:xfrm>
+            <a:off x="548640" y="4160520"/>
+            <a:ext cx="11064240" cy="731520"/>
+          </a:xfrm>
+          <a:prstGeom prst="rect">
+            <a:avLst/>
+          </a:prstGeom>
+          <a:noFill/>
+          <a:ln/>
+        </p:spPr>
+        <p:txBody>
+          <a:bodyPr wrap="square" lIns="0" tIns="0" rIns="0" bIns="0" rtlCol="0" anchor="ctr"/>
+          <a:lstStyle/>
+          <a:p>
+            <a:pPr algn="ctr" indent="0" marL="0">
+              <a:buNone/>
+            </a:pPr>
+            <a:r>
+              <a:rPr lang="en-US" sz="1600" b="1" dirty="0">
+                <a:solidFill>
+                  <a:schemeClr val="bg1"/>
+                </a:solidFill>
+              </a:rPr>
+              <a:t>Ditolak: perlu langganan, atau sewa jika film punya harga sewa</a:t>
+            </a:r>
+            <a:endParaRPr lang="en-US" sz="1600" dirty="0"/>
+          </a:p>
+        </p:txBody>
+      </p:sp>
+      <p:sp>
+        <p:nvSpPr>
+          <p:cNvPr id="26" name="Text 23"/>
+          <p:cNvSpPr txBox="1"/>
+          <p:nvPr/>
+        </p:nvSpPr>
+        <p:spPr>
+          <a:xfrm>
+            <a:off x="548640" y="5166360"/>
+            <a:ext cx="11064240" cy="822960"/>
+          </a:xfrm>
+          <a:prstGeom prst="rect">
+            <a:avLst/>
+          </a:prstGeom>
+          <a:noFill/>
+          <a:ln/>
+        </p:spPr>
+        <p:txBody>
+          <a:bodyPr wrap="square" lIns="0" tIns="0" rIns="0" bIns="0" rtlCol="0" anchor="t"/>
+          <a:lstStyle/>
+          <a:p>
             <a:pPr indent="0" marL="0">
               <a:buNone/>
             </a:pPr>
@@ -3004,166 +3420,9 @@
                   <a:schemeClr val="tx1"/>
                 </a:solidFill>
               </a:rPr>
-              <a:t>Contoh: pelanggan aktif menyewa film premium → ditolak, karena filmnya sudah termasuk langganan. Pengguna tidak membayar dua kali, dan permintaan refund berkurang.</a:t>
+              <a:t>Episode premium sendiri atau karena serialnya. Satu AccessService dipakai di semua tempat, dan dashboard menampilkannya per pengguna supaya support bisa menjawab keluhan.</a:t>
             </a:r>
             <a:endParaRPr lang="en-US" sz="1500" dirty="0"/>
-          </a:p>
-        </p:txBody>
-      </p:sp>
-      <p:pic>
-        <p:nvPicPr>
-          <p:cNvPr id="11" name="Image 1" descr="preencoded.png">    </p:cNvPr>
-          <p:cNvPicPr>
-            <a:picLocks noChangeAspect="1"/>
-          </p:cNvPicPr>
-          <p:nvPr/>
-        </p:nvPicPr>
-        <p:blipFill>
-          <a:blip r:embed="rId2"/>
-          <a:stretch>
-            <a:fillRect/>
-          </a:stretch>
-        </p:blipFill>
-        <p:spPr>
-          <a:xfrm>
-            <a:off x="6492240" y="1691640"/>
-            <a:ext cx="457200" cy="457200"/>
-          </a:xfrm>
-          <a:prstGeom prst="rect">
-            <a:avLst/>
-          </a:prstGeom>
-        </p:spPr>
-      </p:pic>
-      <p:sp>
-        <p:nvSpPr>
-          <p:cNvPr id="12" name="Text 7"/>
-          <p:cNvSpPr txBox="1"/>
-          <p:nvPr/>
-        </p:nvSpPr>
-        <p:spPr>
-          <a:xfrm>
-            <a:off x="7132320" y="1691640"/>
-            <a:ext cx="4389120" cy="457200"/>
-          </a:xfrm>
-          <a:prstGeom prst="rect">
-            <a:avLst/>
-          </a:prstGeom>
-          <a:noFill/>
-          <a:ln/>
-        </p:spPr>
-        <p:txBody>
-          <a:bodyPr wrap="square" lIns="0" tIns="0" rIns="0" bIns="0" rtlCol="0" anchor="ctr"/>
-          <a:lstStyle/>
-          <a:p>
-            <a:pPr indent="0" marL="0">
-              <a:buNone/>
-            </a:pPr>
-            <a:r>
-              <a:rPr lang="en-US" sz="2000" b="1" dirty="0">
-                <a:solidFill>
-                  <a:schemeClr val="tx1"/>
-                </a:solidFill>
-                <a:latin typeface="+mj-lt" pitchFamily="34" charset="0"/>
-                <a:ea typeface="+mj-lt" pitchFamily="34" charset="-122"/>
-                <a:cs typeface="+mj-lt" pitchFamily="34" charset="-120"/>
-              </a:rPr>
-              <a:t>Kupon</a:t>
-            </a:r>
-            <a:endParaRPr lang="en-US" sz="2000" dirty="0"/>
-          </a:p>
-        </p:txBody>
-      </p:sp>
-      <p:sp>
-        <p:nvSpPr>
-          <p:cNvPr id="13" name="Text 8"/>
-          <p:cNvSpPr txBox="1"/>
-          <p:nvPr/>
-        </p:nvSpPr>
-        <p:spPr>
-          <a:xfrm>
-            <a:off x="6492240" y="2377440"/>
-            <a:ext cx="5120640" cy="2286000"/>
-          </a:xfrm>
-          <a:prstGeom prst="rect">
-            <a:avLst/>
-          </a:prstGeom>
-          <a:noFill/>
-          <a:ln/>
-        </p:spPr>
-        <p:txBody>
-          <a:bodyPr wrap="square" lIns="0" tIns="0" rIns="0" bIns="0" rtlCol="0" anchor="t"/>
-          <a:lstStyle/>
-          <a:p>
-            <a:pPr marL="342900" indent="-342900">
-              <a:spcAft>
-                <a:spcPts val="1000"/>
-              </a:spcAft>
-              <a:buSzPct val="100000"/>
-              <a:buChar char="•"/>
-            </a:pPr>
-            <a:r>
-              <a:rPr lang="en-US" sz="1700" dirty="0">
-                <a:solidFill>
-                  <a:schemeClr val="tx1"/>
-                </a:solidFill>
-              </a:rPr>
-              <a:t>Nominal tetap atau persentase</a:t>
-            </a:r>
-            <a:endParaRPr lang="en-US" sz="1700" dirty="0"/>
-          </a:p>
-          <a:p>
-            <a:pPr marL="342900" indent="-342900">
-              <a:spcAft>
-                <a:spcPts val="1000"/>
-              </a:spcAft>
-              <a:buSzPct val="100000"/>
-              <a:buChar char="•"/>
-            </a:pPr>
-            <a:r>
-              <a:rPr lang="en-US" sz="1700" dirty="0">
-                <a:solidFill>
-                  <a:schemeClr val="tx1"/>
-                </a:solidFill>
-              </a:rPr>
-              <a:t>Hanya berlaku di antara tanggal mulai dan berakhir</a:t>
-            </a:r>
-            <a:endParaRPr lang="en-US" sz="1700" dirty="0"/>
-          </a:p>
-          <a:p>
-            <a:pPr marL="342900" indent="-342900">
-              <a:spcAft>
-                <a:spcPts val="1000"/>
-              </a:spcAft>
-              <a:buSzPct val="100000"/>
-              <a:buChar char="•"/>
-            </a:pPr>
-            <a:r>
-              <a:rPr lang="en-US" sz="1700" dirty="0">
-                <a:solidFill>
-                  <a:schemeClr val="tx1"/>
-                </a:solidFill>
-              </a:rPr>
-              <a:t>Tidak pernah membuat harga di bawah nol</a:t>
-            </a:r>
-            <a:endParaRPr lang="en-US" sz="1700" dirty="0"/>
-          </a:p>
-          <a:p>
-            <a:pPr marL="342900" indent="-342900">
-              <a:spcAft>
-                <a:spcPts val="1000"/>
-              </a:spcAft>
-              <a:buSzPct val="100000"/>
-              <a:buChar char="•"/>
-            </a:pPr>
-            <a:r>
-              <a:rPr lang="en-US" sz="1700" dirty="0">
-                <a:solidFill>
-                  <a:schemeClr val="tx1"/>
-                </a:solidFill>
-              </a:rPr>
-              <a:t>Kupon sekali pakai berlaku sekali per pengguna</a:t>
-            </a:r>
-            <a:endParaRPr lang="en-US" sz="1700" dirty="0"/>
           </a:p>
         </p:txBody>
       </p:sp>
@@ -3308,6 +3567,553 @@
                   <a:schemeClr val="tx1"/>
                 </a:solidFill>
               </a:rPr>
+              <a:t>Sewa dan kupon</a:t>
+            </a:r>
+            <a:endParaRPr lang="en-US" sz="3200" dirty="0"/>
+          </a:p>
+        </p:txBody>
+      </p:sp>
+      <p:pic>
+        <p:nvPicPr>
+          <p:cNvPr id="5" name="Image 0" descr="preencoded.png">    </p:cNvPr>
+          <p:cNvPicPr>
+            <a:picLocks noChangeAspect="1"/>
+          </p:cNvPicPr>
+          <p:nvPr/>
+        </p:nvPicPr>
+        <p:blipFill>
+          <a:blip r:embed="rId1"/>
+          <a:stretch>
+            <a:fillRect/>
+          </a:stretch>
+        </p:blipFill>
+        <p:spPr>
+          <a:xfrm>
+            <a:off x="548640" y="1691640"/>
+            <a:ext cx="457200" cy="457200"/>
+          </a:xfrm>
+          <a:prstGeom prst="rect">
+            <a:avLst/>
+          </a:prstGeom>
+        </p:spPr>
+      </p:pic>
+      <p:sp>
+        <p:nvSpPr>
+          <p:cNvPr id="6" name="Text 2"/>
+          <p:cNvSpPr txBox="1"/>
+          <p:nvPr/>
+        </p:nvSpPr>
+        <p:spPr>
+          <a:xfrm>
+            <a:off x="1188720" y="1691640"/>
+            <a:ext cx="4389120" cy="457200"/>
+          </a:xfrm>
+          <a:prstGeom prst="rect">
+            <a:avLst/>
+          </a:prstGeom>
+          <a:noFill/>
+          <a:ln/>
+        </p:spPr>
+        <p:txBody>
+          <a:bodyPr wrap="square" lIns="0" tIns="0" rIns="0" bIns="0" rtlCol="0" anchor="ctr"/>
+          <a:lstStyle/>
+          <a:p>
+            <a:pPr indent="0" marL="0">
+              <a:buNone/>
+            </a:pPr>
+            <a:r>
+              <a:rPr lang="en-US" sz="2000" b="1" dirty="0">
+                <a:solidFill>
+                  <a:schemeClr val="tx1"/>
+                </a:solidFill>
+                <a:latin typeface="+mj-lt" pitchFamily="34" charset="0"/>
+                <a:ea typeface="+mj-lt" pitchFamily="34" charset="-122"/>
+                <a:cs typeface="+mj-lt" pitchFamily="34" charset="-120"/>
+              </a:rPr>
+              <a:t>Sewa satu film</a:t>
+            </a:r>
+            <a:endParaRPr lang="en-US" sz="2000" dirty="0"/>
+          </a:p>
+        </p:txBody>
+      </p:sp>
+      <p:sp>
+        <p:nvSpPr>
+          <p:cNvPr id="7" name="Text 3"/>
+          <p:cNvSpPr txBox="1"/>
+          <p:nvPr/>
+        </p:nvSpPr>
+        <p:spPr>
+          <a:xfrm>
+            <a:off x="548640" y="2377440"/>
+            <a:ext cx="5120640" cy="2286000"/>
+          </a:xfrm>
+          <a:prstGeom prst="rect">
+            <a:avLst/>
+          </a:prstGeom>
+          <a:noFill/>
+          <a:ln/>
+        </p:spPr>
+        <p:txBody>
+          <a:bodyPr wrap="square" lIns="0" tIns="0" rIns="0" bIns="0" rtlCol="0" anchor="t"/>
+          <a:lstStyle/>
+          <a:p>
+            <a:pPr marL="342900" indent="-342900">
+              <a:spcAft>
+                <a:spcPts val="1000"/>
+              </a:spcAft>
+              <a:buSzPct val="100000"/>
+              <a:buChar char="•"/>
+            </a:pPr>
+            <a:r>
+              <a:rPr lang="en-US" sz="1700" dirty="0">
+                <a:solidFill>
+                  <a:schemeClr val="tx1"/>
+                </a:solidFill>
+              </a:rPr>
+              <a:t>Hanya film premium yang punya harga sewa</a:t>
+            </a:r>
+            <a:endParaRPr lang="en-US" sz="1700" dirty="0"/>
+          </a:p>
+          <a:p>
+            <a:pPr marL="342900" indent="-342900">
+              <a:spcAft>
+                <a:spcPts val="1000"/>
+              </a:spcAft>
+              <a:buSzPct val="100000"/>
+              <a:buChar char="•"/>
+            </a:pPr>
+            <a:r>
+              <a:rPr lang="en-US" sz="1700" dirty="0">
+                <a:solidFill>
+                  <a:schemeClr val="tx1"/>
+                </a:solidFill>
+              </a:rPr>
+              <a:t>Berlaku rent_days hari sejak dibayar</a:t>
+            </a:r>
+            <a:endParaRPr lang="en-US" sz="1700" dirty="0"/>
+          </a:p>
+          <a:p>
+            <a:pPr marL="342900" indent="-342900">
+              <a:spcAft>
+                <a:spcPts val="1000"/>
+              </a:spcAft>
+              <a:buSzPct val="100000"/>
+              <a:buChar char="•"/>
+            </a:pPr>
+            <a:r>
+              <a:rPr lang="en-US" sz="1700" dirty="0">
+                <a:solidFill>
+                  <a:schemeClr val="tx1"/>
+                </a:solidFill>
+              </a:rPr>
+              <a:t>Pelanggan aktif tidak bisa menyewa: filmnya sudah termasuk</a:t>
+            </a:r>
+            <a:endParaRPr lang="en-US" sz="1700" dirty="0"/>
+          </a:p>
+          <a:p>
+            <a:pPr marL="342900" indent="-342900">
+              <a:spcAft>
+                <a:spcPts val="1000"/>
+              </a:spcAft>
+              <a:buSzPct val="100000"/>
+              <a:buChar char="•"/>
+            </a:pPr>
+            <a:r>
+              <a:rPr lang="en-US" sz="1700" dirty="0">
+                <a:solidFill>
+                  <a:schemeClr val="tx1"/>
+                </a:solidFill>
+              </a:rPr>
+              <a:t>Film yang sama tidak bisa disewa dua kali bersamaan</a:t>
+            </a:r>
+            <a:endParaRPr lang="en-US" sz="1700" dirty="0"/>
+          </a:p>
+        </p:txBody>
+      </p:sp>
+      <p:sp>
+        <p:nvSpPr>
+          <p:cNvPr id="8" name="Shape 4"/>
+          <p:cNvSpPr/>
+          <p:nvPr/>
+        </p:nvSpPr>
+        <p:spPr>
+          <a:xfrm>
+            <a:off x="6080760" y="1737360"/>
+            <a:ext cx="914" cy="2834640"/>
+          </a:xfrm>
+          <a:prstGeom prst="line">
+            <a:avLst/>
+          </a:prstGeom>
+          <a:noFill/>
+          <a:ln w="12700">
+            <a:solidFill>
+              <a:schemeClr val="accent6"/>
+            </a:solidFill>
+            <a:prstDash val="solid"/>
+          </a:ln>
+        </p:spPr>
+      </p:sp>
+      <p:sp>
+        <p:nvSpPr>
+          <p:cNvPr id="9" name="card"/>
+          <p:cNvSpPr/>
+          <p:nvPr/>
+        </p:nvSpPr>
+        <p:spPr>
+          <a:xfrm>
+            <a:off x="548640" y="4892040"/>
+            <a:ext cx="11064240" cy="1143000"/>
+          </a:xfrm>
+          <a:prstGeom prst="roundRect">
+            <a:avLst>
+              <a:gd name="adj" fmla="val 9600"/>
+            </a:avLst>
+          </a:prstGeom>
+          <a:solidFill>
+            <a:schemeClr val="bg2"/>
+          </a:solidFill>
+          <a:ln w="12700">
+            <a:solidFill>
+              <a:schemeClr val="bg2"/>
+            </a:solidFill>
+            <a:prstDash val="solid"/>
+          </a:ln>
+        </p:spPr>
+      </p:sp>
+      <p:sp>
+        <p:nvSpPr>
+          <p:cNvPr id="10" name="Text 6"/>
+          <p:cNvSpPr txBox="1"/>
+          <p:nvPr/>
+        </p:nvSpPr>
+        <p:spPr>
+          <a:xfrm>
+            <a:off x="822960" y="4892040"/>
+            <a:ext cx="10515600" cy="1143000"/>
+          </a:xfrm>
+          <a:prstGeom prst="rect">
+            <a:avLst/>
+          </a:prstGeom>
+          <a:noFill/>
+          <a:ln/>
+        </p:spPr>
+        <p:txBody>
+          <a:bodyPr wrap="square" lIns="0" tIns="0" rIns="0" bIns="0" rtlCol="0" anchor="ctr"/>
+          <a:lstStyle/>
+          <a:p>
+            <a:pPr indent="0" marL="0">
+              <a:buNone/>
+            </a:pPr>
+            <a:r>
+              <a:rPr lang="en-US" sz="1500" dirty="0">
+                <a:solidFill>
+                  <a:schemeClr val="tx1"/>
+                </a:solidFill>
+              </a:rPr>
+              <a:t>Contoh: pelanggan aktif menyewa film premium → ditolak, karena filmnya sudah termasuk langganan. Pengguna tidak membayar dua kali, dan permintaan refund berkurang.</a:t>
+            </a:r>
+            <a:endParaRPr lang="en-US" sz="1500" dirty="0"/>
+          </a:p>
+        </p:txBody>
+      </p:sp>
+      <p:pic>
+        <p:nvPicPr>
+          <p:cNvPr id="11" name="Image 1" descr="preencoded.png">    </p:cNvPr>
+          <p:cNvPicPr>
+            <a:picLocks noChangeAspect="1"/>
+          </p:cNvPicPr>
+          <p:nvPr/>
+        </p:nvPicPr>
+        <p:blipFill>
+          <a:blip r:embed="rId2"/>
+          <a:stretch>
+            <a:fillRect/>
+          </a:stretch>
+        </p:blipFill>
+        <p:spPr>
+          <a:xfrm>
+            <a:off x="6492240" y="1691640"/>
+            <a:ext cx="457200" cy="457200"/>
+          </a:xfrm>
+          <a:prstGeom prst="rect">
+            <a:avLst/>
+          </a:prstGeom>
+        </p:spPr>
+      </p:pic>
+      <p:sp>
+        <p:nvSpPr>
+          <p:cNvPr id="12" name="Text 7"/>
+          <p:cNvSpPr txBox="1"/>
+          <p:nvPr/>
+        </p:nvSpPr>
+        <p:spPr>
+          <a:xfrm>
+            <a:off x="7132320" y="1691640"/>
+            <a:ext cx="4389120" cy="457200"/>
+          </a:xfrm>
+          <a:prstGeom prst="rect">
+            <a:avLst/>
+          </a:prstGeom>
+          <a:noFill/>
+          <a:ln/>
+        </p:spPr>
+        <p:txBody>
+          <a:bodyPr wrap="square" lIns="0" tIns="0" rIns="0" bIns="0" rtlCol="0" anchor="ctr"/>
+          <a:lstStyle/>
+          <a:p>
+            <a:pPr indent="0" marL="0">
+              <a:buNone/>
+            </a:pPr>
+            <a:r>
+              <a:rPr lang="en-US" sz="2000" b="1" dirty="0">
+                <a:solidFill>
+                  <a:schemeClr val="tx1"/>
+                </a:solidFill>
+                <a:latin typeface="+mj-lt" pitchFamily="34" charset="0"/>
+                <a:ea typeface="+mj-lt" pitchFamily="34" charset="-122"/>
+                <a:cs typeface="+mj-lt" pitchFamily="34" charset="-120"/>
+              </a:rPr>
+              <a:t>Kupon</a:t>
+            </a:r>
+            <a:endParaRPr lang="en-US" sz="2000" dirty="0"/>
+          </a:p>
+        </p:txBody>
+      </p:sp>
+      <p:sp>
+        <p:nvSpPr>
+          <p:cNvPr id="13" name="Text 8"/>
+          <p:cNvSpPr txBox="1"/>
+          <p:nvPr/>
+        </p:nvSpPr>
+        <p:spPr>
+          <a:xfrm>
+            <a:off x="6492240" y="2377440"/>
+            <a:ext cx="5120640" cy="2286000"/>
+          </a:xfrm>
+          <a:prstGeom prst="rect">
+            <a:avLst/>
+          </a:prstGeom>
+          <a:noFill/>
+          <a:ln/>
+        </p:spPr>
+        <p:txBody>
+          <a:bodyPr wrap="square" lIns="0" tIns="0" rIns="0" bIns="0" rtlCol="0" anchor="t"/>
+          <a:lstStyle/>
+          <a:p>
+            <a:pPr marL="342900" indent="-342900">
+              <a:spcAft>
+                <a:spcPts val="1000"/>
+              </a:spcAft>
+              <a:buSzPct val="100000"/>
+              <a:buChar char="•"/>
+            </a:pPr>
+            <a:r>
+              <a:rPr lang="en-US" sz="1700" dirty="0">
+                <a:solidFill>
+                  <a:schemeClr val="tx1"/>
+                </a:solidFill>
+              </a:rPr>
+              <a:t>Nominal tetap atau persentase</a:t>
+            </a:r>
+            <a:endParaRPr lang="en-US" sz="1700" dirty="0"/>
+          </a:p>
+          <a:p>
+            <a:pPr marL="342900" indent="-342900">
+              <a:spcAft>
+                <a:spcPts val="1000"/>
+              </a:spcAft>
+              <a:buSzPct val="100000"/>
+              <a:buChar char="•"/>
+            </a:pPr>
+            <a:r>
+              <a:rPr lang="en-US" sz="1700" dirty="0">
+                <a:solidFill>
+                  <a:schemeClr val="tx1"/>
+                </a:solidFill>
+              </a:rPr>
+              <a:t>Hanya berlaku di antara tanggal mulai dan berakhir</a:t>
+            </a:r>
+            <a:endParaRPr lang="en-US" sz="1700" dirty="0"/>
+          </a:p>
+          <a:p>
+            <a:pPr marL="342900" indent="-342900">
+              <a:spcAft>
+                <a:spcPts val="1000"/>
+              </a:spcAft>
+              <a:buSzPct val="100000"/>
+              <a:buChar char="•"/>
+            </a:pPr>
+            <a:r>
+              <a:rPr lang="en-US" sz="1700" dirty="0">
+                <a:solidFill>
+                  <a:schemeClr val="tx1"/>
+                </a:solidFill>
+              </a:rPr>
+              <a:t>Tidak pernah membuat harga di bawah nol</a:t>
+            </a:r>
+            <a:endParaRPr lang="en-US" sz="1700" dirty="0"/>
+          </a:p>
+          <a:p>
+            <a:pPr marL="342900" indent="-342900">
+              <a:spcAft>
+                <a:spcPts val="1000"/>
+              </a:spcAft>
+              <a:buSzPct val="100000"/>
+              <a:buChar char="•"/>
+            </a:pPr>
+            <a:r>
+              <a:rPr lang="en-US" sz="1700" dirty="0">
+                <a:solidFill>
+                  <a:schemeClr val="tx1"/>
+                </a:solidFill>
+              </a:rPr>
+              <a:t>Kupon sekali pakai berlaku sekali per pengguna</a:t>
+            </a:r>
+            <a:endParaRPr lang="en-US" sz="1700" dirty="0"/>
+          </a:p>
+        </p:txBody>
+      </p:sp>
+      <p:sp>
+        <p:nvSpPr>
+          <p:cNvPr id="25" name="Slide Number Placeholder 0"/>
+          <p:cNvSpPr>
+            <a:spLocks noGrp="1"/>
+          </p:cNvSpPr>
+          <p:nvPr>
+            <p:ph type="sldNum" sz="quarter" idx="4294967295"/>
+          </p:nvPr>
+        </p:nvSpPr>
+        <p:spPr>
+          <a:xfrm>
+            <a:off x="11155680" y="6355080"/>
+            <a:ext cx="457200" cy="274320"/>
+          </a:xfrm>
+          <a:prstGeom prst="rect">
+            <a:avLst/>
+          </a:prstGeom>
+          <a:extLst>
+            <a:ext uri="{C572A759-6A51-4108-AA02-DFA0A04FC94B}">
+              <ma14:wrappingTextBoxFlag xmlns:ma14="http://schemas.microsoft.com/office/mac/drawingml/2011/main" val="0"/>
+            </a:ext>
+          </a:extLst>
+        </p:spPr>
+        <p:txBody>
+          <a:bodyPr/>
+          <a:lstStyle>
+            <a:lvl1pPr>
+              <a:defRPr sz="1000">
+                <a:solidFill>
+                  <a:schemeClr val="accent4"/>
+                </a:solidFill>
+              </a:defRPr>
+            </a:lvl1pPr>
+          </a:lstStyle>
+          <a:p>
+            <a:pPr algn="r"/>
+            <a:fld id="{F7021451-1387-4CA6-816F-3879F97B5CBC}" type="slidenum">
+              <a:rPr b="0" lang="en-US"/>
+              <a:t>11</a:t>
+            </a:fld>
+            <a:endParaRPr lang="en-US"/>
+          </a:p>
+        </p:txBody>
+      </p:sp>
+    </p:spTree>
+  </p:cSld>
+  <p:clrMapOvr>
+    <a:masterClrMapping/>
+  </p:clrMapOvr>
+</p:sld>
+</file>
+
+<file path=ppt/slides/slide12.xml><?xml version="1.0" encoding="utf-8"?>
+<p:sld xmlns:a="http://schemas.openxmlformats.org/drawingml/2006/main" xmlns:r="http://schemas.openxmlformats.org/officeDocument/2006/relationships" xmlns:p="http://schemas.openxmlformats.org/presentationml/2006/main">
+  <p:cSld name="Slide 12">
+    <p:spTree>
+      <p:nvGrpSpPr>
+        <p:cNvPr id="1" name=""/>
+        <p:cNvGrpSpPr/>
+        <p:nvPr/>
+      </p:nvGrpSpPr>
+      <p:grpSpPr>
+        <a:xfrm>
+          <a:off x="0" y="0"/>
+          <a:ext cx="0" cy="0"/>
+          <a:chOff x="0" y="0"/>
+          <a:chExt cx="0" cy="0"/>
+        </a:xfrm>
+      </p:grpSpPr>
+      <p:sp>
+        <p:nvSpPr>
+          <p:cNvPr id="2" name="Text 0"/>
+          <p:cNvSpPr txBox="1"/>
+          <p:nvPr/>
+        </p:nvSpPr>
+        <p:spPr>
+          <a:xfrm>
+            <a:off x="10058400" y="320040"/>
+            <a:ext cx="1554480" cy="1005840"/>
+          </a:xfrm>
+          <a:prstGeom prst="rect">
+            <a:avLst/>
+          </a:prstGeom>
+          <a:noFill/>
+          <a:ln/>
+        </p:spPr>
+        <p:txBody>
+          <a:bodyPr wrap="square" lIns="0" tIns="0" rIns="0" bIns="0" rtlCol="0" anchor="ctr"/>
+          <a:lstStyle/>
+          <a:p>
+            <a:pPr algn="r" indent="0" marL="0">
+              <a:buNone/>
+            </a:pPr>
+            <a:r>
+              <a:rPr lang="en-US" sz="5400" b="1" dirty="0">
+                <a:solidFill>
+                  <a:schemeClr val="accent6"/>
+                </a:solidFill>
+                <a:latin typeface="+mj-lt" pitchFamily="34" charset="0"/>
+                <a:ea typeface="+mj-lt" pitchFamily="34" charset="-122"/>
+                <a:cs typeface="+mj-lt" pitchFamily="34" charset="-120"/>
+              </a:rPr>
+              <a:t>11</a:t>
+            </a:r>
+            <a:endParaRPr lang="en-US" sz="5400" dirty="0"/>
+          </a:p>
+        </p:txBody>
+      </p:sp>
+      <p:sp>
+        <p:nvSpPr>
+          <p:cNvPr id="3" name="Text 0"/>
+          <p:cNvSpPr/>
+          <p:nvPr>
+            <p:ph idx="100" type="title" hasCustomPrompt="1"/>
+          </p:nvPr>
+        </p:nvSpPr>
+        <p:spPr>
+          <a:xfrm>
+            <a:off x="548640" y="457200"/>
+            <a:ext cx="9509760" cy="822960"/>
+          </a:xfrm>
+          <a:prstGeom prst="rect">
+            <a:avLst/>
+          </a:prstGeom>
+          <a:noFill/>
+          <a:ln/>
+        </p:spPr>
+        <p:txBody>
+          <a:bodyPr wrap="square" lIns="0" tIns="0" rIns="0" bIns="0" rtlCol="0" anchor="ctr"/>
+          <a:lstStyle/>
+          <a:p>
+            <a:pPr algn="l" indent="0" marL="0">
+              <a:buNone/>
+            </a:pPr>
+            <a:r>
+              <a:rPr lang="en-US" sz="3200" b="1" dirty="0">
+                <a:solidFill>
+                  <a:schemeClr val="tx1"/>
+                </a:solidFill>
+              </a:rPr>
               <a:t>Kenapa stack ini</a:t>
             </a:r>
             <a:endParaRPr lang="en-US" sz="3200" dirty="0"/>
@@ -3316,7 +4122,7 @@
       </p:sp>
       <p:graphicFrame>
         <p:nvGraphicFramePr>
-          <p:cNvPr id="12" name="Table 0"/>
+          <p:cNvPr id="13" name="Table 0"/>
           <p:cNvGraphicFramePr>
             <a:graphicFrameLocks noGrp="1"/>
           </p:cNvGraphicFramePr>
@@ -3979,631 +4785,6 @@
             <a:pPr algn="r"/>
             <a:fld id="{F7021451-1387-4CA6-816F-3879F97B5CBC}" type="slidenum">
               <a:rPr b="0" lang="en-US"/>
-              <a:t>11</a:t>
-            </a:fld>
-            <a:endParaRPr lang="en-US"/>
-          </a:p>
-        </p:txBody>
-      </p:sp>
-    </p:spTree>
-  </p:cSld>
-  <p:clrMapOvr>
-    <a:masterClrMapping/>
-  </p:clrMapOvr>
-</p:sld>
-</file>
-
-<file path=ppt/slides/slide12.xml><?xml version="1.0" encoding="utf-8"?>
-<p:sld xmlns:a="http://schemas.openxmlformats.org/drawingml/2006/main" xmlns:r="http://schemas.openxmlformats.org/officeDocument/2006/relationships" xmlns:p="http://schemas.openxmlformats.org/presentationml/2006/main">
-  <p:cSld name="Slide 12">
-    <p:spTree>
-      <p:nvGrpSpPr>
-        <p:cNvPr id="1" name=""/>
-        <p:cNvGrpSpPr/>
-        <p:nvPr/>
-      </p:nvGrpSpPr>
-      <p:grpSpPr>
-        <a:xfrm>
-          <a:off x="0" y="0"/>
-          <a:ext cx="0" cy="0"/>
-          <a:chOff x="0" y="0"/>
-          <a:chExt cx="0" cy="0"/>
-        </a:xfrm>
-      </p:grpSpPr>
-      <p:sp>
-        <p:nvSpPr>
-          <p:cNvPr id="2" name="Text 0"/>
-          <p:cNvSpPr txBox="1"/>
-          <p:nvPr/>
-        </p:nvSpPr>
-        <p:spPr>
-          <a:xfrm>
-            <a:off x="10058400" y="320040"/>
-            <a:ext cx="1554480" cy="1005840"/>
-          </a:xfrm>
-          <a:prstGeom prst="rect">
-            <a:avLst/>
-          </a:prstGeom>
-          <a:noFill/>
-          <a:ln/>
-        </p:spPr>
-        <p:txBody>
-          <a:bodyPr wrap="square" lIns="0" tIns="0" rIns="0" bIns="0" rtlCol="0" anchor="ctr"/>
-          <a:lstStyle/>
-          <a:p>
-            <a:pPr algn="r" indent="0" marL="0">
-              <a:buNone/>
-            </a:pPr>
-            <a:r>
-              <a:rPr lang="en-US" sz="5400" b="1" dirty="0">
-                <a:solidFill>
-                  <a:schemeClr val="accent6"/>
-                </a:solidFill>
-                <a:latin typeface="+mj-lt" pitchFamily="34" charset="0"/>
-                <a:ea typeface="+mj-lt" pitchFamily="34" charset="-122"/>
-                <a:cs typeface="+mj-lt" pitchFamily="34" charset="-120"/>
-              </a:rPr>
-              <a:t>11</a:t>
-            </a:r>
-            <a:endParaRPr lang="en-US" sz="5400" dirty="0"/>
-          </a:p>
-        </p:txBody>
-      </p:sp>
-      <p:sp>
-        <p:nvSpPr>
-          <p:cNvPr id="3" name="Text 0"/>
-          <p:cNvSpPr/>
-          <p:nvPr>
-            <p:ph idx="100" type="title" hasCustomPrompt="1"/>
-          </p:nvPr>
-        </p:nvSpPr>
-        <p:spPr>
-          <a:xfrm>
-            <a:off x="548640" y="457200"/>
-            <a:ext cx="9509760" cy="822960"/>
-          </a:xfrm>
-          <a:prstGeom prst="rect">
-            <a:avLst/>
-          </a:prstGeom>
-          <a:noFill/>
-          <a:ln/>
-        </p:spPr>
-        <p:txBody>
-          <a:bodyPr wrap="square" lIns="0" tIns="0" rIns="0" bIns="0" rtlCol="0" anchor="ctr"/>
-          <a:lstStyle/>
-          <a:p>
-            <a:pPr algn="l" indent="0" marL="0">
-              <a:buNone/>
-            </a:pPr>
-            <a:r>
-              <a:rPr lang="en-US" sz="3200" b="1" dirty="0">
-                <a:solidFill>
-                  <a:schemeClr val="tx1"/>
-                </a:solidFill>
-              </a:rPr>
-              <a:t>Perpanjangan dalam satu transaksi</a:t>
-            </a:r>
-            <a:endParaRPr lang="en-US" sz="3200" dirty="0"/>
-          </a:p>
-        </p:txBody>
-      </p:sp>
-      <p:sp>
-        <p:nvSpPr>
-          <p:cNvPr id="5" name="card"/>
-          <p:cNvSpPr/>
-          <p:nvPr/>
-        </p:nvSpPr>
-        <p:spPr>
-          <a:xfrm>
-            <a:off x="548640" y="1600200"/>
-            <a:ext cx="6949440" cy="3931920"/>
-          </a:xfrm>
-          <a:prstGeom prst="roundRect">
-            <a:avLst>
-              <a:gd name="adj" fmla="val 2791"/>
-            </a:avLst>
-          </a:prstGeom>
-          <a:solidFill>
-            <a:schemeClr val="tx2"/>
-          </a:solidFill>
-          <a:ln w="12700">
-            <a:solidFill>
-              <a:schemeClr val="tx2"/>
-            </a:solidFill>
-            <a:prstDash val="solid"/>
-          </a:ln>
-        </p:spPr>
-      </p:sp>
-      <p:sp>
-        <p:nvSpPr>
-          <p:cNvPr id="6" name="Text 3"/>
-          <p:cNvSpPr txBox="1"/>
-          <p:nvPr/>
-        </p:nvSpPr>
-        <p:spPr>
-          <a:xfrm>
-            <a:off x="822960" y="1920240"/>
-            <a:ext cx="6492240" cy="4023360"/>
-          </a:xfrm>
-          <a:prstGeom prst="rect">
-            <a:avLst/>
-          </a:prstGeom>
-          <a:noFill/>
-          <a:ln/>
-        </p:spPr>
-        <p:txBody>
-          <a:bodyPr wrap="square" lIns="0" tIns="0" rIns="0" bIns="0" rtlCol="0" anchor="t"/>
-          <a:lstStyle/>
-          <a:p>
-            <a:pPr indent="0" marL="0">
-              <a:buNone/>
-            </a:pPr>
-            <a:r>
-              <a:rPr lang="en-US" sz="1400" dirty="0">
-                <a:solidFill>
-                  <a:schemeClr val="accent6"/>
-                </a:solidFill>
-                <a:latin typeface="Courier New" pitchFamily="34" charset="0"/>
-                <a:ea typeface="Courier New" pitchFamily="34" charset="-122"/>
-                <a:cs typeface="Courier New" pitchFamily="34" charset="-120"/>
-              </a:rPr>
-              <a:t>return DB::transaction(function () use (...) {</a:t>
-            </a:r>
-            <a:endParaRPr lang="en-US" sz="1400" dirty="0"/>
-          </a:p>
-          <a:p>
-            <a:pPr indent="0" marL="0">
-              <a:buNone/>
-            </a:pPr>
-            <a:r>
-              <a:rPr lang="en-US" sz="1400" dirty="0">
-                <a:solidFill>
-                  <a:schemeClr val="accent6"/>
-                </a:solidFill>
-                <a:latin typeface="Courier New" pitchFamily="34" charset="0"/>
-                <a:ea typeface="Courier New" pitchFamily="34" charset="-122"/>
-                <a:cs typeface="Courier New" pitchFamily="34" charset="-120"/>
-              </a:rPr>
-              <a:t>    $user = User::lockForUpdate()</a:t>
-            </a:r>
-            <a:endParaRPr lang="en-US" sz="1400" dirty="0"/>
-          </a:p>
-          <a:p>
-            <a:pPr indent="0" marL="0">
-              <a:buNone/>
-            </a:pPr>
-            <a:r>
-              <a:rPr lang="en-US" sz="1400" dirty="0">
-                <a:solidFill>
-                  <a:schemeClr val="accent6"/>
-                </a:solidFill>
-                <a:latin typeface="Courier New" pitchFamily="34" charset="0"/>
-                <a:ea typeface="Courier New" pitchFamily="34" charset="-122"/>
-                <a:cs typeface="Courier New" pitchFamily="34" charset="-120"/>
-              </a:rPr>
-              <a:t>        -&gt;findOrFail($user-&gt;id);</a:t>
-            </a:r>
-            <a:endParaRPr lang="en-US" sz="1400" dirty="0"/>
-          </a:p>
-          <a:p>
-            <a:pPr indent="0" marL="0">
-              <a:buNone/>
-            </a:pPr>
-            <a:r>
-              <a:rPr lang="en-US" sz="1400" dirty="0">
-                <a:solidFill>
-                  <a:schemeClr val="accent6"/>
-                </a:solidFill>
-                <a:latin typeface="Courier New" pitchFamily="34" charset="0"/>
-                <a:ea typeface="Courier New" pitchFamily="34" charset="-122"/>
-                <a:cs typeface="Courier New" pitchFamily="34" charset="-120"/>
-              </a:rPr>
-              <a:t>    $startsOn = $user-&gt;subscription_ends_on</a:t>
-            </a:r>
-            <a:endParaRPr lang="en-US" sz="1400" dirty="0"/>
-          </a:p>
-          <a:p>
-            <a:pPr indent="0" marL="0">
-              <a:buNone/>
-            </a:pPr>
-            <a:r>
-              <a:rPr lang="en-US" sz="1400" dirty="0">
-                <a:solidFill>
-                  <a:schemeClr val="accent6"/>
-                </a:solidFill>
-                <a:latin typeface="Courier New" pitchFamily="34" charset="0"/>
-                <a:ea typeface="Courier New" pitchFamily="34" charset="-122"/>
-                <a:cs typeface="Courier New" pitchFamily="34" charset="-120"/>
-              </a:rPr>
-              <a:t>        ?-&gt;gte($today)</a:t>
-            </a:r>
-            <a:endParaRPr lang="en-US" sz="1400" dirty="0"/>
-          </a:p>
-          <a:p>
-            <a:pPr indent="0" marL="0">
-              <a:buNone/>
-            </a:pPr>
-            <a:r>
-              <a:rPr lang="en-US" sz="1400" dirty="0">
-                <a:solidFill>
-                  <a:schemeClr val="accent6"/>
-                </a:solidFill>
-                <a:latin typeface="Courier New" pitchFamily="34" charset="0"/>
-                <a:ea typeface="Courier New" pitchFamily="34" charset="-122"/>
-                <a:cs typeface="Courier New" pitchFamily="34" charset="-120"/>
-              </a:rPr>
-              <a:t>        ? $user-&gt;subscription_ends_on-&gt;addDay()</a:t>
-            </a:r>
-            <a:endParaRPr lang="en-US" sz="1400" dirty="0"/>
-          </a:p>
-          <a:p>
-            <a:pPr indent="0" marL="0">
-              <a:buNone/>
-            </a:pPr>
-            <a:r>
-              <a:rPr lang="en-US" sz="1400" dirty="0">
-                <a:solidFill>
-                  <a:schemeClr val="accent6"/>
-                </a:solidFill>
-                <a:latin typeface="Courier New" pitchFamily="34" charset="0"/>
-                <a:ea typeface="Courier New" pitchFamily="34" charset="-122"/>
-                <a:cs typeface="Courier New" pitchFamily="34" charset="-120"/>
-              </a:rPr>
-              <a:t>        : $today;</a:t>
-            </a:r>
-            <a:endParaRPr lang="en-US" sz="1400" dirty="0"/>
-          </a:p>
-          <a:p>
-            <a:pPr indent="0" marL="0">
-              <a:buNone/>
-            </a:pPr>
-            <a:r>
-              <a:rPr lang="en-US" sz="1400" dirty="0">
-                <a:solidFill>
-                  <a:schemeClr val="accent6"/>
-                </a:solidFill>
-                <a:latin typeface="Courier New" pitchFamily="34" charset="0"/>
-                <a:ea typeface="Courier New" pitchFamily="34" charset="-122"/>
-                <a:cs typeface="Courier New" pitchFamily="34" charset="-120"/>
-              </a:rPr>
-              <a:t>    $endsOn = $startsOn-&gt;copy()</a:t>
-            </a:r>
-            <a:endParaRPr lang="en-US" sz="1400" dirty="0"/>
-          </a:p>
-          <a:p>
-            <a:pPr indent="0" marL="0">
-              <a:buNone/>
-            </a:pPr>
-            <a:r>
-              <a:rPr lang="en-US" sz="1400" dirty="0">
-                <a:solidFill>
-                  <a:schemeClr val="accent6"/>
-                </a:solidFill>
-                <a:latin typeface="Courier New" pitchFamily="34" charset="0"/>
-                <a:ea typeface="Courier New" pitchFamily="34" charset="-122"/>
-                <a:cs typeface="Courier New" pitchFamily="34" charset="-120"/>
-              </a:rPr>
-              <a:t>        -&gt;addMonthsNoOverflow($months)-&gt;subDay();</a:t>
-            </a:r>
-            <a:endParaRPr lang="en-US" sz="1400" dirty="0"/>
-          </a:p>
-          <a:p>
-            <a:pPr indent="0" marL="0">
-              <a:buNone/>
-            </a:pPr>
-            <a:r>
-              <a:rPr lang="en-US" sz="1400" dirty="0">
-                <a:solidFill>
-                  <a:schemeClr val="accent6"/>
-                </a:solidFill>
-                <a:latin typeface="Courier New" pitchFamily="34" charset="0"/>
-                <a:ea typeface="Courier New" pitchFamily="34" charset="-122"/>
-                <a:cs typeface="Courier New" pitchFamily="34" charset="-120"/>
-              </a:rPr>
-              <a:t>    $user-&gt;subscriptions()-&gt;create([...]);</a:t>
-            </a:r>
-            <a:endParaRPr lang="en-US" sz="1400" dirty="0"/>
-          </a:p>
-          <a:p>
-            <a:pPr indent="0" marL="0">
-              <a:buNone/>
-            </a:pPr>
-            <a:r>
-              <a:rPr lang="en-US" sz="1400" dirty="0">
-                <a:solidFill>
-                  <a:schemeClr val="accent6"/>
-                </a:solidFill>
-                <a:latin typeface="Courier New" pitchFamily="34" charset="0"/>
-                <a:ea typeface="Courier New" pitchFamily="34" charset="-122"/>
-                <a:cs typeface="Courier New" pitchFamily="34" charset="-120"/>
-              </a:rPr>
-              <a:t>    $user-&gt;update(['subscription_ends_on' =&gt; $endsOn]);</a:t>
-            </a:r>
-            <a:endParaRPr lang="en-US" sz="1400" dirty="0"/>
-          </a:p>
-          <a:p>
-            <a:pPr indent="0" marL="0">
-              <a:buNone/>
-            </a:pPr>
-            <a:r>
-              <a:rPr lang="en-US" sz="1400" dirty="0">
-                <a:solidFill>
-                  <a:schemeClr val="accent6"/>
-                </a:solidFill>
-                <a:latin typeface="Courier New" pitchFamily="34" charset="0"/>
-                <a:ea typeface="Courier New" pitchFamily="34" charset="-122"/>
-                <a:cs typeface="Courier New" pitchFamily="34" charset="-120"/>
-              </a:rPr>
-              <a:t>});</a:t>
-            </a:r>
-            <a:endParaRPr lang="en-US" sz="1400" dirty="0"/>
-          </a:p>
-        </p:txBody>
-      </p:sp>
-      <p:sp>
-        <p:nvSpPr>
-          <p:cNvPr id="7" name="Text 4"/>
-          <p:cNvSpPr txBox="1"/>
-          <p:nvPr/>
-        </p:nvSpPr>
-        <p:spPr>
-          <a:xfrm>
-            <a:off x="7863840" y="1645920"/>
-            <a:ext cx="3749040" cy="411480"/>
-          </a:xfrm>
-          <a:prstGeom prst="rect">
-            <a:avLst/>
-          </a:prstGeom>
-          <a:noFill/>
-          <a:ln/>
-        </p:spPr>
-        <p:txBody>
-          <a:bodyPr wrap="square" lIns="0" tIns="0" rIns="0" bIns="0" rtlCol="0" anchor="ctr"/>
-          <a:lstStyle/>
-          <a:p>
-            <a:pPr indent="0" marL="0">
-              <a:buNone/>
-            </a:pPr>
-            <a:r>
-              <a:rPr lang="en-US" sz="1700" b="1" dirty="0">
-                <a:solidFill>
-                  <a:schemeClr val="accent1"/>
-                </a:solidFill>
-                <a:latin typeface="+mj-lt" pitchFamily="34" charset="0"/>
-                <a:ea typeface="+mj-lt" pitchFamily="34" charset="-122"/>
-                <a:cs typeface="+mj-lt" pitchFamily="34" charset="-120"/>
-              </a:rPr>
-              <a:t>Aturan di service</a:t>
-            </a:r>
-            <a:endParaRPr lang="en-US" sz="1700" dirty="0"/>
-          </a:p>
-        </p:txBody>
-      </p:sp>
-      <p:sp>
-        <p:nvSpPr>
-          <p:cNvPr id="8" name="Text 5"/>
-          <p:cNvSpPr txBox="1"/>
-          <p:nvPr/>
-        </p:nvSpPr>
-        <p:spPr>
-          <a:xfrm>
-            <a:off x="7863840" y="2103120"/>
-            <a:ext cx="3749040" cy="822960"/>
-          </a:xfrm>
-          <a:prstGeom prst="rect">
-            <a:avLst/>
-          </a:prstGeom>
-          <a:noFill/>
-          <a:ln/>
-        </p:spPr>
-        <p:txBody>
-          <a:bodyPr wrap="square" lIns="0" tIns="0" rIns="0" bIns="0" rtlCol="0" anchor="t"/>
-          <a:lstStyle/>
-          <a:p>
-            <a:pPr indent="0" marL="0">
-              <a:buNone/>
-            </a:pPr>
-            <a:r>
-              <a:rPr lang="en-US" sz="1500" dirty="0">
-                <a:solidFill>
-                  <a:schemeClr val="tx1"/>
-                </a:solidFill>
-              </a:rPr>
-              <a:t>Controller tipis; langganan, sewa, kupon, akses adalah class biasa.</a:t>
-            </a:r>
-            <a:endParaRPr lang="en-US" sz="1500" dirty="0"/>
-          </a:p>
-        </p:txBody>
-      </p:sp>
-      <p:sp>
-        <p:nvSpPr>
-          <p:cNvPr id="9" name="Text 6"/>
-          <p:cNvSpPr txBox="1"/>
-          <p:nvPr/>
-        </p:nvSpPr>
-        <p:spPr>
-          <a:xfrm>
-            <a:off x="7863840" y="3108960"/>
-            <a:ext cx="3749040" cy="411480"/>
-          </a:xfrm>
-          <a:prstGeom prst="rect">
-            <a:avLst/>
-          </a:prstGeom>
-          <a:noFill/>
-          <a:ln/>
-        </p:spPr>
-        <p:txBody>
-          <a:bodyPr wrap="square" lIns="0" tIns="0" rIns="0" bIns="0" rtlCol="0" anchor="ctr"/>
-          <a:lstStyle/>
-          <a:p>
-            <a:pPr indent="0" marL="0">
-              <a:buNone/>
-            </a:pPr>
-            <a:r>
-              <a:rPr lang="en-US" sz="1700" b="1" dirty="0">
-                <a:solidFill>
-                  <a:schemeClr val="accent1"/>
-                </a:solidFill>
-                <a:latin typeface="+mj-lt" pitchFamily="34" charset="0"/>
-                <a:ea typeface="+mj-lt" pitchFamily="34" charset="-122"/>
-                <a:cs typeface="+mj-lt" pitchFamily="34" charset="-120"/>
-              </a:rPr>
-              <a:t>Enum, bukan angka</a:t>
-            </a:r>
-            <a:endParaRPr lang="en-US" sz="1700" dirty="0"/>
-          </a:p>
-        </p:txBody>
-      </p:sp>
-      <p:sp>
-        <p:nvSpPr>
-          <p:cNvPr id="10" name="Text 7"/>
-          <p:cNvSpPr txBox="1"/>
-          <p:nvPr/>
-        </p:nvSpPr>
-        <p:spPr>
-          <a:xfrm>
-            <a:off x="7863840" y="3566160"/>
-            <a:ext cx="3749040" cy="822960"/>
-          </a:xfrm>
-          <a:prstGeom prst="rect">
-            <a:avLst/>
-          </a:prstGeom>
-          <a:noFill/>
-          <a:ln/>
-        </p:spPr>
-        <p:txBody>
-          <a:bodyPr wrap="square" lIns="0" tIns="0" rIns="0" bIns="0" rtlCol="0" anchor="t"/>
-          <a:lstStyle/>
-          <a:p>
-            <a:pPr indent="0" marL="0">
-              <a:buNone/>
-            </a:pPr>
-            <a:r>
-              <a:rPr lang="en-US" sz="1500" dirty="0">
-                <a:solidFill>
-                  <a:schemeClr val="tx1"/>
-                </a:solidFill>
-              </a:rPr>
-              <a:t>Cara masuk, peran, dan jenis kupon bertipe.</a:t>
-            </a:r>
-            <a:endParaRPr lang="en-US" sz="1500" dirty="0"/>
-          </a:p>
-        </p:txBody>
-      </p:sp>
-      <p:sp>
-        <p:nvSpPr>
-          <p:cNvPr id="11" name="Text 8"/>
-          <p:cNvSpPr txBox="1"/>
-          <p:nvPr/>
-        </p:nvSpPr>
-        <p:spPr>
-          <a:xfrm>
-            <a:off x="7863840" y="4572000"/>
-            <a:ext cx="3749040" cy="411480"/>
-          </a:xfrm>
-          <a:prstGeom prst="rect">
-            <a:avLst/>
-          </a:prstGeom>
-          <a:noFill/>
-          <a:ln/>
-        </p:spPr>
-        <p:txBody>
-          <a:bodyPr wrap="square" lIns="0" tIns="0" rIns="0" bIns="0" rtlCol="0" anchor="ctr"/>
-          <a:lstStyle/>
-          <a:p>
-            <a:pPr indent="0" marL="0">
-              <a:buNone/>
-            </a:pPr>
-            <a:r>
-              <a:rPr lang="en-US" sz="1700" b="1" dirty="0">
-                <a:solidFill>
-                  <a:schemeClr val="accent1"/>
-                </a:solidFill>
-                <a:latin typeface="+mj-lt" pitchFamily="34" charset="0"/>
-                <a:ea typeface="+mj-lt" pitchFamily="34" charset="-122"/>
-                <a:cs typeface="+mj-lt" pitchFamily="34" charset="-120"/>
-              </a:rPr>
-              <a:t>Tes pada aturan</a:t>
-            </a:r>
-            <a:endParaRPr lang="en-US" sz="1700" dirty="0"/>
-          </a:p>
-        </p:txBody>
-      </p:sp>
-      <p:sp>
-        <p:nvSpPr>
-          <p:cNvPr id="12" name="Text 9"/>
-          <p:cNvSpPr txBox="1"/>
-          <p:nvPr/>
-        </p:nvSpPr>
-        <p:spPr>
-          <a:xfrm>
-            <a:off x="7863840" y="5029200"/>
-            <a:ext cx="3749040" cy="822960"/>
-          </a:xfrm>
-          <a:prstGeom prst="rect">
-            <a:avLst/>
-          </a:prstGeom>
-          <a:noFill/>
-          <a:ln/>
-        </p:spPr>
-        <p:txBody>
-          <a:bodyPr wrap="square" lIns="0" tIns="0" rIns="0" bIns="0" rtlCol="0" anchor="t"/>
-          <a:lstStyle/>
-          <a:p>
-            <a:pPr indent="0" marL="0">
-              <a:buNone/>
-            </a:pPr>
-            <a:r>
-              <a:rPr lang="en-US" sz="1500" dirty="0">
-                <a:solidFill>
-                  <a:schemeClr val="tx1"/>
-                </a:solidFill>
-              </a:rPr>
-              <a:t>33 feature test.</a:t>
-            </a:r>
-            <a:endParaRPr lang="en-US" sz="1500" dirty="0"/>
-          </a:p>
-        </p:txBody>
-      </p:sp>
-      <p:sp>
-        <p:nvSpPr>
-          <p:cNvPr id="25" name="Slide Number Placeholder 0"/>
-          <p:cNvSpPr>
-            <a:spLocks noGrp="1"/>
-          </p:cNvSpPr>
-          <p:nvPr>
-            <p:ph type="sldNum" sz="quarter" idx="4294967295"/>
-          </p:nvPr>
-        </p:nvSpPr>
-        <p:spPr>
-          <a:xfrm>
-            <a:off x="11155680" y="6355080"/>
-            <a:ext cx="457200" cy="274320"/>
-          </a:xfrm>
-          <a:prstGeom prst="rect">
-            <a:avLst/>
-          </a:prstGeom>
-          <a:extLst>
-            <a:ext uri="{C572A759-6A51-4108-AA02-DFA0A04FC94B}">
-              <ma14:wrappingTextBoxFlag xmlns:ma14="http://schemas.microsoft.com/office/mac/drawingml/2011/main" val="0"/>
-            </a:ext>
-          </a:extLst>
-        </p:spPr>
-        <p:txBody>
-          <a:bodyPr/>
-          <a:lstStyle>
-            <a:lvl1pPr>
-              <a:defRPr sz="1000">
-                <a:solidFill>
-                  <a:schemeClr val="accent4"/>
-                </a:solidFill>
-              </a:defRPr>
-            </a:lvl1pPr>
-          </a:lstStyle>
-          <a:p>
-            <a:pPr algn="r"/>
-            <a:fld id="{F7021451-1387-4CA6-816F-3879F97B5CBC}" type="slidenum">
-              <a:rPr b="0" lang="en-US"/>
               <a:t>12</a:t>
             </a:fld>
             <a:endParaRPr lang="en-US"/>
@@ -4706,84 +4887,275 @@
                   <a:schemeClr val="tx1"/>
                 </a:solidFill>
               </a:rPr>
-              <a:t>Demo: pendapatan, lalu cek akses pengguna</a:t>
+              <a:t>Perpanjangan dalam satu transaksi</a:t>
             </a:r>
             <a:endParaRPr lang="en-US" sz="3200" dirty="0"/>
           </a:p>
         </p:txBody>
       </p:sp>
-      <p:pic>
-        <p:nvPicPr>
-          <p:cNvPr id="5" name="dashboard" descr="/workspaces/.xc-work/assets/goflix/id-dashboard.png">    </p:cNvPr>
-          <p:cNvPicPr>
-            <a:picLocks noChangeAspect="1"/>
-          </p:cNvPicPr>
-          <p:nvPr/>
-        </p:nvPicPr>
-        <p:blipFill>
-          <a:blip r:embed="rId1"/>
-          <a:stretch>
-            <a:fillRect/>
-          </a:stretch>
-        </p:blipFill>
+      <p:sp>
+        <p:nvSpPr>
+          <p:cNvPr id="5" name="card"/>
+          <p:cNvSpPr/>
+          <p:nvPr/>
+        </p:nvSpPr>
         <p:spPr>
           <a:xfrm>
             <a:off x="548640" y="1600200"/>
-            <a:ext cx="5349240" cy="3343275"/>
-          </a:xfrm>
-          <a:prstGeom prst="rect">
-            <a:avLst/>
-          </a:prstGeom>
-          <a:effectLst>
-            <a:outerShdw sx="100000" sy="100000" kx="0" ky="0" algn="bl" rotWithShape="0" blurRad="152400" dist="50800" dir="5400000">
-              <a:srgbClr val="0D1D15">
-                <a:alpha val="22000"/>
-              </a:srgbClr>
-            </a:outerShdw>
-          </a:effectLst>
-        </p:spPr>
-      </p:pic>
-      <p:pic>
-        <p:nvPicPr>
-          <p:cNvPr id="6" name="user page" descr="/workspaces/.xc-work/assets/goflix/id-user.png">    </p:cNvPr>
-          <p:cNvPicPr>
-            <a:picLocks noChangeAspect="1"/>
-          </p:cNvPicPr>
-          <p:nvPr/>
-        </p:nvPicPr>
-        <p:blipFill>
-          <a:blip r:embed="rId2"/>
-          <a:stretch>
-            <a:fillRect/>
-          </a:stretch>
-        </p:blipFill>
-        <p:spPr>
-          <a:xfrm>
-            <a:off x="6263640" y="1600200"/>
-            <a:ext cx="5349240" cy="3343275"/>
-          </a:xfrm>
-          <a:prstGeom prst="rect">
-            <a:avLst/>
-          </a:prstGeom>
-          <a:effectLst>
-            <a:outerShdw sx="100000" sy="100000" kx="0" ky="0" algn="bl" rotWithShape="0" blurRad="152400" dist="50800" dir="5400000">
-              <a:srgbClr val="0D1D15">
-                <a:alpha val="22000"/>
-              </a:srgbClr>
-            </a:outerShdw>
-          </a:effectLst>
-        </p:spPr>
-      </p:pic>
-      <p:sp>
-        <p:nvSpPr>
-          <p:cNvPr id="7" name="Text 2"/>
+            <a:ext cx="6949440" cy="3931920"/>
+          </a:xfrm>
+          <a:prstGeom prst="roundRect">
+            <a:avLst>
+              <a:gd name="adj" fmla="val 2791"/>
+            </a:avLst>
+          </a:prstGeom>
+          <a:solidFill>
+            <a:schemeClr val="tx2"/>
+          </a:solidFill>
+          <a:ln w="12700">
+            <a:solidFill>
+              <a:schemeClr val="tx2"/>
+            </a:solidFill>
+            <a:prstDash val="solid"/>
+          </a:ln>
+        </p:spPr>
+      </p:sp>
+      <p:sp>
+        <p:nvSpPr>
+          <p:cNvPr id="6" name="Text 3"/>
           <p:cNvSpPr txBox="1"/>
           <p:nvPr/>
         </p:nvSpPr>
         <p:spPr>
           <a:xfrm>
-            <a:off x="548640" y="5126355"/>
-            <a:ext cx="5349240" cy="320040"/>
+            <a:off x="822960" y="1920240"/>
+            <a:ext cx="6492240" cy="4023360"/>
+          </a:xfrm>
+          <a:prstGeom prst="rect">
+            <a:avLst/>
+          </a:prstGeom>
+          <a:noFill/>
+          <a:ln/>
+        </p:spPr>
+        <p:txBody>
+          <a:bodyPr wrap="square" lIns="0" tIns="0" rIns="0" bIns="0" rtlCol="0" anchor="t"/>
+          <a:lstStyle/>
+          <a:p>
+            <a:pPr indent="0" marL="0">
+              <a:buNone/>
+            </a:pPr>
+            <a:r>
+              <a:rPr lang="en-US" sz="1400" dirty="0">
+                <a:solidFill>
+                  <a:schemeClr val="accent6"/>
+                </a:solidFill>
+                <a:latin typeface="Courier New" pitchFamily="34" charset="0"/>
+                <a:ea typeface="Courier New" pitchFamily="34" charset="-122"/>
+                <a:cs typeface="Courier New" pitchFamily="34" charset="-120"/>
+              </a:rPr>
+              <a:t>return DB::transaction(function () use (...) {</a:t>
+            </a:r>
+            <a:endParaRPr lang="en-US" sz="1400" dirty="0"/>
+          </a:p>
+          <a:p>
+            <a:pPr indent="0" marL="0">
+              <a:buNone/>
+            </a:pPr>
+            <a:r>
+              <a:rPr lang="en-US" sz="1400" dirty="0">
+                <a:solidFill>
+                  <a:schemeClr val="accent6"/>
+                </a:solidFill>
+                <a:latin typeface="Courier New" pitchFamily="34" charset="0"/>
+                <a:ea typeface="Courier New" pitchFamily="34" charset="-122"/>
+                <a:cs typeface="Courier New" pitchFamily="34" charset="-120"/>
+              </a:rPr>
+              <a:t>    $user = User::lockForUpdate()</a:t>
+            </a:r>
+            <a:endParaRPr lang="en-US" sz="1400" dirty="0"/>
+          </a:p>
+          <a:p>
+            <a:pPr indent="0" marL="0">
+              <a:buNone/>
+            </a:pPr>
+            <a:r>
+              <a:rPr lang="en-US" sz="1400" dirty="0">
+                <a:solidFill>
+                  <a:schemeClr val="accent6"/>
+                </a:solidFill>
+                <a:latin typeface="Courier New" pitchFamily="34" charset="0"/>
+                <a:ea typeface="Courier New" pitchFamily="34" charset="-122"/>
+                <a:cs typeface="Courier New" pitchFamily="34" charset="-120"/>
+              </a:rPr>
+              <a:t>        -&gt;findOrFail($user-&gt;id);</a:t>
+            </a:r>
+            <a:endParaRPr lang="en-US" sz="1400" dirty="0"/>
+          </a:p>
+          <a:p>
+            <a:pPr indent="0" marL="0">
+              <a:buNone/>
+            </a:pPr>
+            <a:r>
+              <a:rPr lang="en-US" sz="1400" dirty="0">
+                <a:solidFill>
+                  <a:schemeClr val="accent6"/>
+                </a:solidFill>
+                <a:latin typeface="Courier New" pitchFamily="34" charset="0"/>
+                <a:ea typeface="Courier New" pitchFamily="34" charset="-122"/>
+                <a:cs typeface="Courier New" pitchFamily="34" charset="-120"/>
+              </a:rPr>
+              <a:t>    $startsOn = $user-&gt;subscription_ends_on</a:t>
+            </a:r>
+            <a:endParaRPr lang="en-US" sz="1400" dirty="0"/>
+          </a:p>
+          <a:p>
+            <a:pPr indent="0" marL="0">
+              <a:buNone/>
+            </a:pPr>
+            <a:r>
+              <a:rPr lang="en-US" sz="1400" dirty="0">
+                <a:solidFill>
+                  <a:schemeClr val="accent6"/>
+                </a:solidFill>
+                <a:latin typeface="Courier New" pitchFamily="34" charset="0"/>
+                <a:ea typeface="Courier New" pitchFamily="34" charset="-122"/>
+                <a:cs typeface="Courier New" pitchFamily="34" charset="-120"/>
+              </a:rPr>
+              <a:t>        ?-&gt;gte($today)</a:t>
+            </a:r>
+            <a:endParaRPr lang="en-US" sz="1400" dirty="0"/>
+          </a:p>
+          <a:p>
+            <a:pPr indent="0" marL="0">
+              <a:buNone/>
+            </a:pPr>
+            <a:r>
+              <a:rPr lang="en-US" sz="1400" dirty="0">
+                <a:solidFill>
+                  <a:schemeClr val="accent6"/>
+                </a:solidFill>
+                <a:latin typeface="Courier New" pitchFamily="34" charset="0"/>
+                <a:ea typeface="Courier New" pitchFamily="34" charset="-122"/>
+                <a:cs typeface="Courier New" pitchFamily="34" charset="-120"/>
+              </a:rPr>
+              <a:t>        ? $user-&gt;subscription_ends_on-&gt;addDay()</a:t>
+            </a:r>
+            <a:endParaRPr lang="en-US" sz="1400" dirty="0"/>
+          </a:p>
+          <a:p>
+            <a:pPr indent="0" marL="0">
+              <a:buNone/>
+            </a:pPr>
+            <a:r>
+              <a:rPr lang="en-US" sz="1400" dirty="0">
+                <a:solidFill>
+                  <a:schemeClr val="accent6"/>
+                </a:solidFill>
+                <a:latin typeface="Courier New" pitchFamily="34" charset="0"/>
+                <a:ea typeface="Courier New" pitchFamily="34" charset="-122"/>
+                <a:cs typeface="Courier New" pitchFamily="34" charset="-120"/>
+              </a:rPr>
+              <a:t>        : $today;</a:t>
+            </a:r>
+            <a:endParaRPr lang="en-US" sz="1400" dirty="0"/>
+          </a:p>
+          <a:p>
+            <a:pPr indent="0" marL="0">
+              <a:buNone/>
+            </a:pPr>
+            <a:r>
+              <a:rPr lang="en-US" sz="1400" dirty="0">
+                <a:solidFill>
+                  <a:schemeClr val="accent6"/>
+                </a:solidFill>
+                <a:latin typeface="Courier New" pitchFamily="34" charset="0"/>
+                <a:ea typeface="Courier New" pitchFamily="34" charset="-122"/>
+                <a:cs typeface="Courier New" pitchFamily="34" charset="-120"/>
+              </a:rPr>
+              <a:t>    $endsOn = $startsOn-&gt;copy()</a:t>
+            </a:r>
+            <a:endParaRPr lang="en-US" sz="1400" dirty="0"/>
+          </a:p>
+          <a:p>
+            <a:pPr indent="0" marL="0">
+              <a:buNone/>
+            </a:pPr>
+            <a:r>
+              <a:rPr lang="en-US" sz="1400" dirty="0">
+                <a:solidFill>
+                  <a:schemeClr val="accent6"/>
+                </a:solidFill>
+                <a:latin typeface="Courier New" pitchFamily="34" charset="0"/>
+                <a:ea typeface="Courier New" pitchFamily="34" charset="-122"/>
+                <a:cs typeface="Courier New" pitchFamily="34" charset="-120"/>
+              </a:rPr>
+              <a:t>        -&gt;addMonthsNoOverflow($months)-&gt;subDay();</a:t>
+            </a:r>
+            <a:endParaRPr lang="en-US" sz="1400" dirty="0"/>
+          </a:p>
+          <a:p>
+            <a:pPr indent="0" marL="0">
+              <a:buNone/>
+            </a:pPr>
+            <a:r>
+              <a:rPr lang="en-US" sz="1400" dirty="0">
+                <a:solidFill>
+                  <a:schemeClr val="accent6"/>
+                </a:solidFill>
+                <a:latin typeface="Courier New" pitchFamily="34" charset="0"/>
+                <a:ea typeface="Courier New" pitchFamily="34" charset="-122"/>
+                <a:cs typeface="Courier New" pitchFamily="34" charset="-120"/>
+              </a:rPr>
+              <a:t>    $user-&gt;subscriptions()-&gt;create([...]);</a:t>
+            </a:r>
+            <a:endParaRPr lang="en-US" sz="1400" dirty="0"/>
+          </a:p>
+          <a:p>
+            <a:pPr indent="0" marL="0">
+              <a:buNone/>
+            </a:pPr>
+            <a:r>
+              <a:rPr lang="en-US" sz="1400" dirty="0">
+                <a:solidFill>
+                  <a:schemeClr val="accent6"/>
+                </a:solidFill>
+                <a:latin typeface="Courier New" pitchFamily="34" charset="0"/>
+                <a:ea typeface="Courier New" pitchFamily="34" charset="-122"/>
+                <a:cs typeface="Courier New" pitchFamily="34" charset="-120"/>
+              </a:rPr>
+              <a:t>    $user-&gt;update(['subscription_ends_on' =&gt; $endsOn]);</a:t>
+            </a:r>
+            <a:endParaRPr lang="en-US" sz="1400" dirty="0"/>
+          </a:p>
+          <a:p>
+            <a:pPr indent="0" marL="0">
+              <a:buNone/>
+            </a:pPr>
+            <a:r>
+              <a:rPr lang="en-US" sz="1400" dirty="0">
+                <a:solidFill>
+                  <a:schemeClr val="accent6"/>
+                </a:solidFill>
+                <a:latin typeface="Courier New" pitchFamily="34" charset="0"/>
+                <a:ea typeface="Courier New" pitchFamily="34" charset="-122"/>
+                <a:cs typeface="Courier New" pitchFamily="34" charset="-120"/>
+              </a:rPr>
+              <a:t>});</a:t>
+            </a:r>
+            <a:endParaRPr lang="en-US" sz="1400" dirty="0"/>
+          </a:p>
+        </p:txBody>
+      </p:sp>
+      <p:sp>
+        <p:nvSpPr>
+          <p:cNvPr id="7" name="Text 4"/>
+          <p:cNvSpPr txBox="1"/>
+          <p:nvPr/>
+        </p:nvSpPr>
+        <p:spPr>
+          <a:xfrm>
+            <a:off x="7863840" y="1645920"/>
+            <a:ext cx="3749040" cy="411480"/>
           </a:xfrm>
           <a:prstGeom prst="rect">
             <a:avLst/>
@@ -4799,27 +5171,66 @@
               <a:buNone/>
             </a:pPr>
             <a:r>
-              <a:rPr lang="en-US" sz="1300" dirty="0">
-                <a:solidFill>
-                  <a:schemeClr val="accent4"/>
-                </a:solidFill>
-              </a:rPr>
-              <a:t>Dashboard: pendapatan langganan dan sewa per bulan</a:t>
-            </a:r>
-            <a:endParaRPr lang="en-US" sz="1300" dirty="0"/>
-          </a:p>
-        </p:txBody>
-      </p:sp>
-      <p:sp>
-        <p:nvSpPr>
-          <p:cNvPr id="8" name="Text 3"/>
+              <a:rPr lang="en-US" sz="1700" b="1" dirty="0">
+                <a:solidFill>
+                  <a:schemeClr val="accent1"/>
+                </a:solidFill>
+                <a:latin typeface="+mj-lt" pitchFamily="34" charset="0"/>
+                <a:ea typeface="+mj-lt" pitchFamily="34" charset="-122"/>
+                <a:cs typeface="+mj-lt" pitchFamily="34" charset="-120"/>
+              </a:rPr>
+              <a:t>Aturan di service</a:t>
+            </a:r>
+            <a:endParaRPr lang="en-US" sz="1700" dirty="0"/>
+          </a:p>
+        </p:txBody>
+      </p:sp>
+      <p:sp>
+        <p:nvSpPr>
+          <p:cNvPr id="8" name="Text 5"/>
           <p:cNvSpPr txBox="1"/>
           <p:nvPr/>
         </p:nvSpPr>
         <p:spPr>
           <a:xfrm>
-            <a:off x="6263640" y="5126355"/>
-            <a:ext cx="5349240" cy="320040"/>
+            <a:off x="7863840" y="2103120"/>
+            <a:ext cx="3749040" cy="822960"/>
+          </a:xfrm>
+          <a:prstGeom prst="rect">
+            <a:avLst/>
+          </a:prstGeom>
+          <a:noFill/>
+          <a:ln/>
+        </p:spPr>
+        <p:txBody>
+          <a:bodyPr wrap="square" lIns="0" tIns="0" rIns="0" bIns="0" rtlCol="0" anchor="t"/>
+          <a:lstStyle/>
+          <a:p>
+            <a:pPr indent="0" marL="0">
+              <a:buNone/>
+            </a:pPr>
+            <a:r>
+              <a:rPr lang="en-US" sz="1500" dirty="0">
+                <a:solidFill>
+                  <a:schemeClr val="tx1"/>
+                </a:solidFill>
+              </a:rPr>
+              <a:t>Controller tipis; langganan, sewa, kupon, akses adalah class biasa.</a:t>
+            </a:r>
+            <a:endParaRPr lang="en-US" sz="1500" dirty="0"/>
+          </a:p>
+        </p:txBody>
+      </p:sp>
+      <p:sp>
+        <p:nvSpPr>
+          <p:cNvPr id="9" name="Text 6"/>
+          <p:cNvSpPr txBox="1"/>
+          <p:nvPr/>
+        </p:nvSpPr>
+        <p:spPr>
+          <a:xfrm>
+            <a:off x="7863840" y="3108960"/>
+            <a:ext cx="3749040" cy="411480"/>
           </a:xfrm>
           <a:prstGeom prst="rect">
             <a:avLst/>
@@ -4835,14 +5246,128 @@
               <a:buNone/>
             </a:pPr>
             <a:r>
-              <a:rPr lang="en-US" sz="1300" dirty="0">
-                <a:solidFill>
-                  <a:schemeClr val="accent4"/>
-                </a:solidFill>
-              </a:rPr>
-              <a:t>Pengguna: status, pembayaran, dan cek akses</a:t>
-            </a:r>
-            <a:endParaRPr lang="en-US" sz="1300" dirty="0"/>
+              <a:rPr lang="en-US" sz="1700" b="1" dirty="0">
+                <a:solidFill>
+                  <a:schemeClr val="accent1"/>
+                </a:solidFill>
+                <a:latin typeface="+mj-lt" pitchFamily="34" charset="0"/>
+                <a:ea typeface="+mj-lt" pitchFamily="34" charset="-122"/>
+                <a:cs typeface="+mj-lt" pitchFamily="34" charset="-120"/>
+              </a:rPr>
+              <a:t>Enum, bukan angka</a:t>
+            </a:r>
+            <a:endParaRPr lang="en-US" sz="1700" dirty="0"/>
+          </a:p>
+        </p:txBody>
+      </p:sp>
+      <p:sp>
+        <p:nvSpPr>
+          <p:cNvPr id="10" name="Text 7"/>
+          <p:cNvSpPr txBox="1"/>
+          <p:nvPr/>
+        </p:nvSpPr>
+        <p:spPr>
+          <a:xfrm>
+            <a:off x="7863840" y="3566160"/>
+            <a:ext cx="3749040" cy="822960"/>
+          </a:xfrm>
+          <a:prstGeom prst="rect">
+            <a:avLst/>
+          </a:prstGeom>
+          <a:noFill/>
+          <a:ln/>
+        </p:spPr>
+        <p:txBody>
+          <a:bodyPr wrap="square" lIns="0" tIns="0" rIns="0" bIns="0" rtlCol="0" anchor="t"/>
+          <a:lstStyle/>
+          <a:p>
+            <a:pPr indent="0" marL="0">
+              <a:buNone/>
+            </a:pPr>
+            <a:r>
+              <a:rPr lang="en-US" sz="1500" dirty="0">
+                <a:solidFill>
+                  <a:schemeClr val="tx1"/>
+                </a:solidFill>
+              </a:rPr>
+              <a:t>Cara masuk, peran, dan jenis kupon bertipe.</a:t>
+            </a:r>
+            <a:endParaRPr lang="en-US" sz="1500" dirty="0"/>
+          </a:p>
+        </p:txBody>
+      </p:sp>
+      <p:sp>
+        <p:nvSpPr>
+          <p:cNvPr id="11" name="Text 8"/>
+          <p:cNvSpPr txBox="1"/>
+          <p:nvPr/>
+        </p:nvSpPr>
+        <p:spPr>
+          <a:xfrm>
+            <a:off x="7863840" y="4572000"/>
+            <a:ext cx="3749040" cy="411480"/>
+          </a:xfrm>
+          <a:prstGeom prst="rect">
+            <a:avLst/>
+          </a:prstGeom>
+          <a:noFill/>
+          <a:ln/>
+        </p:spPr>
+        <p:txBody>
+          <a:bodyPr wrap="square" lIns="0" tIns="0" rIns="0" bIns="0" rtlCol="0" anchor="ctr"/>
+          <a:lstStyle/>
+          <a:p>
+            <a:pPr indent="0" marL="0">
+              <a:buNone/>
+            </a:pPr>
+            <a:r>
+              <a:rPr lang="en-US" sz="1700" b="1" dirty="0">
+                <a:solidFill>
+                  <a:schemeClr val="accent1"/>
+                </a:solidFill>
+                <a:latin typeface="+mj-lt" pitchFamily="34" charset="0"/>
+                <a:ea typeface="+mj-lt" pitchFamily="34" charset="-122"/>
+                <a:cs typeface="+mj-lt" pitchFamily="34" charset="-120"/>
+              </a:rPr>
+              <a:t>Tes pada aturan</a:t>
+            </a:r>
+            <a:endParaRPr lang="en-US" sz="1700" dirty="0"/>
+          </a:p>
+        </p:txBody>
+      </p:sp>
+      <p:sp>
+        <p:nvSpPr>
+          <p:cNvPr id="12" name="Text 9"/>
+          <p:cNvSpPr txBox="1"/>
+          <p:nvPr/>
+        </p:nvSpPr>
+        <p:spPr>
+          <a:xfrm>
+            <a:off x="7863840" y="5029200"/>
+            <a:ext cx="3749040" cy="822960"/>
+          </a:xfrm>
+          <a:prstGeom prst="rect">
+            <a:avLst/>
+          </a:prstGeom>
+          <a:noFill/>
+          <a:ln/>
+        </p:spPr>
+        <p:txBody>
+          <a:bodyPr wrap="square" lIns="0" tIns="0" rIns="0" bIns="0" rtlCol="0" anchor="t"/>
+          <a:lstStyle/>
+          <a:p>
+            <a:pPr indent="0" marL="0">
+              <a:buNone/>
+            </a:pPr>
+            <a:r>
+              <a:rPr lang="en-US" sz="1500" dirty="0">
+                <a:solidFill>
+                  <a:schemeClr val="tx1"/>
+                </a:solidFill>
+              </a:rPr>
+              <a:t>33 feature test.</a:t>
+            </a:r>
+            <a:endParaRPr lang="en-US" sz="1500" dirty="0"/>
           </a:p>
         </p:txBody>
       </p:sp>
@@ -4987,638 +5512,146 @@
                   <a:schemeClr val="tx1"/>
                 </a:solidFill>
               </a:rPr>
-              <a:t>Yang belum selesai</a:t>
+              <a:t>Demo: pendapatan, lalu cek akses pengguna</a:t>
             </a:r>
             <a:endParaRPr lang="en-US" sz="3200" dirty="0"/>
           </a:p>
         </p:txBody>
       </p:sp>
-      <p:graphicFrame>
-        <p:nvGraphicFramePr>
-          <p:cNvPr id="15" name="Table 0"/>
-          <p:cNvGraphicFramePr>
-            <a:graphicFrameLocks noGrp="1"/>
-          </p:cNvGraphicFramePr>
-          <p:nvPr>
-            <p:extLst>
-              <p:ext uri="{D42A27DB-BD31-4B8C-83A1-F6EECF244321}">
-                <p14:modId xmlns:p14="http://schemas.microsoft.com/office/powerpoint/2010/main" val="1579011935"/>
-              </p:ext>
-            </p:extLst>
-          </p:nvPr>
-        </p:nvGraphicFramePr>
-        <p:xfrm>
-          <a:off x="548640" y="1508760"/>
-          <a:ext cx="11064240" cy="914400"/>
-        </p:xfrm>
-        <a:graphic>
-          <a:graphicData uri="http://schemas.openxmlformats.org/drawingml/2006/table">
-            <a:tbl>
-              <a:tblPr/>
-              <a:tblGrid>
-                <a:gridCol w="4023360"/>
-                <a:gridCol w="7040880"/>
-              </a:tblGrid>
-              <a:tr h="0">
-                <a:tc>
-                  <a:txBody>
-                    <a:bodyPr/>
-                    <a:lstStyle/>
-                    <a:p>
-                      <a:pPr indent="0" marL="0">
-                        <a:buNone/>
-                      </a:pPr>
-                      <a:r>
-                        <a:rPr lang="en-US" sz="1500" b="1" dirty="0">
-                          <a:solidFill>
-                            <a:srgbClr val="1E9E57"/>
-                          </a:solidFill>
-                        </a:rPr>
-                        <a:t>Yang belum</a:t>
-                      </a:r>
-                      <a:endParaRPr lang="en-US" sz="1500" dirty="0"/>
-                    </a:p>
-                  </a:txBody>
-                  <a:tcPr marL="164592" marR="164592" marT="182880" marB="182880" anchor="t">
-                    <a:lnL w="9525" cap="flat" cmpd="sng" algn="ctr">
-                      <a:solidFill>
-                        <a:srgbClr val="D6E2DA"/>
-                      </a:solidFill>
-                      <a:prstDash val="solid"/>
-                      <a:round/>
-                      <a:headEnd type="none" w="med" len="med"/>
-                      <a:tailEnd type="none" w="med" len="med"/>
-                    </a:lnL>
-                    <a:lnR w="9525" cap="flat" cmpd="sng" algn="ctr">
-                      <a:solidFill>
-                        <a:srgbClr val="D6E2DA"/>
-                      </a:solidFill>
-                      <a:prstDash val="solid"/>
-                      <a:round/>
-                      <a:headEnd type="none" w="med" len="med"/>
-                      <a:tailEnd type="none" w="med" len="med"/>
-                    </a:lnR>
-                    <a:lnT w="9525" cap="flat" cmpd="sng" algn="ctr">
-                      <a:solidFill>
-                        <a:srgbClr val="D6E2DA"/>
-                      </a:solidFill>
-                      <a:prstDash val="solid"/>
-                      <a:round/>
-                      <a:headEnd type="none" w="med" len="med"/>
-                      <a:tailEnd type="none" w="med" len="med"/>
-                    </a:lnT>
-                    <a:lnB w="9525" cap="flat" cmpd="sng" algn="ctr">
-                      <a:solidFill>
-                        <a:srgbClr val="D6E2DA"/>
-                      </a:solidFill>
-                      <a:prstDash val="solid"/>
-                      <a:round/>
-                      <a:headEnd type="none" w="med" len="med"/>
-                      <a:tailEnd type="none" w="med" len="med"/>
-                    </a:lnB>
-                    <a:solidFill>
-                      <a:srgbClr val="EEF3EF"/>
-                    </a:solidFill>
-                  </a:tcPr>
-                </a:tc>
-                <a:tc>
-                  <a:txBody>
-                    <a:bodyPr/>
-                    <a:lstStyle/>
-                    <a:p>
-                      <a:pPr indent="0" marL="0">
-                        <a:buNone/>
-                      </a:pPr>
-                      <a:r>
-                        <a:rPr lang="en-US" sz="1500" b="1" dirty="0">
-                          <a:solidFill>
-                            <a:srgbClr val="1E9E57"/>
-                          </a:solidFill>
-                        </a:rPr>
-                        <a:t>Langkah pertama</a:t>
-                      </a:r>
-                      <a:endParaRPr lang="en-US" sz="1500" dirty="0"/>
-                    </a:p>
-                  </a:txBody>
-                  <a:tcPr marL="164592" marR="164592" marT="182880" marB="182880" anchor="t">
-                    <a:lnL w="9525" cap="flat" cmpd="sng" algn="ctr">
-                      <a:solidFill>
-                        <a:srgbClr val="D6E2DA"/>
-                      </a:solidFill>
-                      <a:prstDash val="solid"/>
-                      <a:round/>
-                      <a:headEnd type="none" w="med" len="med"/>
-                      <a:tailEnd type="none" w="med" len="med"/>
-                    </a:lnL>
-                    <a:lnR w="9525" cap="flat" cmpd="sng" algn="ctr">
-                      <a:solidFill>
-                        <a:srgbClr val="D6E2DA"/>
-                      </a:solidFill>
-                      <a:prstDash val="solid"/>
-                      <a:round/>
-                      <a:headEnd type="none" w="med" len="med"/>
-                      <a:tailEnd type="none" w="med" len="med"/>
-                    </a:lnR>
-                    <a:lnT w="9525" cap="flat" cmpd="sng" algn="ctr">
-                      <a:solidFill>
-                        <a:srgbClr val="D6E2DA"/>
-                      </a:solidFill>
-                      <a:prstDash val="solid"/>
-                      <a:round/>
-                      <a:headEnd type="none" w="med" len="med"/>
-                      <a:tailEnd type="none" w="med" len="med"/>
-                    </a:lnT>
-                    <a:lnB w="9525" cap="flat" cmpd="sng" algn="ctr">
-                      <a:solidFill>
-                        <a:srgbClr val="D6E2DA"/>
-                      </a:solidFill>
-                      <a:prstDash val="solid"/>
-                      <a:round/>
-                      <a:headEnd type="none" w="med" len="med"/>
-                      <a:tailEnd type="none" w="med" len="med"/>
-                    </a:lnB>
-                    <a:solidFill>
-                      <a:srgbClr val="EEF3EF"/>
-                    </a:solidFill>
-                  </a:tcPr>
-                </a:tc>
-              </a:tr>
-              <a:tr h="0">
-                <a:tc>
-                  <a:txBody>
-                    <a:bodyPr/>
-                    <a:lstStyle/>
-                    <a:p>
-                      <a:pPr indent="0" marL="0">
-                        <a:buNone/>
-                      </a:pPr>
-                      <a:r>
-                        <a:rPr lang="en-US" sz="1700" b="1" dirty="0">
-                          <a:solidFill>
-                            <a:srgbClr val="15211B"/>
-                          </a:solidFill>
-                        </a:rPr>
-                        <a:t>Produksi masih menyimpan ID dipisah koma</a:t>
-                      </a:r>
-                      <a:endParaRPr lang="en-US" sz="1700" dirty="0"/>
-                    </a:p>
-                  </a:txBody>
-                  <a:tcPr marL="164592" marR="164592" marT="182880" marB="182880" anchor="t">
-                    <a:lnL w="9525" cap="flat" cmpd="sng" algn="ctr">
-                      <a:solidFill>
-                        <a:srgbClr val="D6E2DA"/>
-                      </a:solidFill>
-                      <a:prstDash val="solid"/>
-                      <a:round/>
-                      <a:headEnd type="none" w="med" len="med"/>
-                      <a:tailEnd type="none" w="med" len="med"/>
-                    </a:lnL>
-                    <a:lnR w="9525" cap="flat" cmpd="sng" algn="ctr">
-                      <a:solidFill>
-                        <a:srgbClr val="D6E2DA"/>
-                      </a:solidFill>
-                      <a:prstDash val="solid"/>
-                      <a:round/>
-                      <a:headEnd type="none" w="med" len="med"/>
-                      <a:tailEnd type="none" w="med" len="med"/>
-                    </a:lnR>
-                    <a:lnT w="9525" cap="flat" cmpd="sng" algn="ctr">
-                      <a:solidFill>
-                        <a:srgbClr val="D6E2DA"/>
-                      </a:solidFill>
-                      <a:prstDash val="solid"/>
-                      <a:round/>
-                      <a:headEnd type="none" w="med" len="med"/>
-                      <a:tailEnd type="none" w="med" len="med"/>
-                    </a:lnT>
-                    <a:lnB w="9525" cap="flat" cmpd="sng" algn="ctr">
-                      <a:solidFill>
-                        <a:srgbClr val="D6E2DA"/>
-                      </a:solidFill>
-                      <a:prstDash val="solid"/>
-                      <a:round/>
-                      <a:headEnd type="none" w="med" len="med"/>
-                      <a:tailEnd type="none" w="med" len="med"/>
-                    </a:lnB>
-                  </a:tcPr>
-                </a:tc>
-                <a:tc>
-                  <a:txBody>
-                    <a:bodyPr/>
-                    <a:lstStyle/>
-                    <a:p>
-                      <a:pPr indent="0" marL="0">
-                        <a:buNone/>
-                      </a:pPr>
-                      <a:r>
-                        <a:rPr lang="en-US" sz="1700" dirty="0">
-                          <a:solidFill>
-                            <a:srgbClr val="15211B"/>
-                          </a:solidFill>
-                        </a:rPr>
-                        <a:t>Buat tabel pivot, isi dari kolom lama, pindahkan pembaca satu per satu</a:t>
-                      </a:r>
-                      <a:endParaRPr lang="en-US" sz="1700" dirty="0"/>
-                    </a:p>
-                  </a:txBody>
-                  <a:tcPr marL="164592" marR="164592" marT="182880" marB="182880" anchor="t">
-                    <a:lnL w="9525" cap="flat" cmpd="sng" algn="ctr">
-                      <a:solidFill>
-                        <a:srgbClr val="D6E2DA"/>
-                      </a:solidFill>
-                      <a:prstDash val="solid"/>
-                      <a:round/>
-                      <a:headEnd type="none" w="med" len="med"/>
-                      <a:tailEnd type="none" w="med" len="med"/>
-                    </a:lnL>
-                    <a:lnR w="9525" cap="flat" cmpd="sng" algn="ctr">
-                      <a:solidFill>
-                        <a:srgbClr val="D6E2DA"/>
-                      </a:solidFill>
-                      <a:prstDash val="solid"/>
-                      <a:round/>
-                      <a:headEnd type="none" w="med" len="med"/>
-                      <a:tailEnd type="none" w="med" len="med"/>
-                    </a:lnR>
-                    <a:lnT w="9525" cap="flat" cmpd="sng" algn="ctr">
-                      <a:solidFill>
-                        <a:srgbClr val="D6E2DA"/>
-                      </a:solidFill>
-                      <a:prstDash val="solid"/>
-                      <a:round/>
-                      <a:headEnd type="none" w="med" len="med"/>
-                      <a:tailEnd type="none" w="med" len="med"/>
-                    </a:lnT>
-                    <a:lnB w="9525" cap="flat" cmpd="sng" algn="ctr">
-                      <a:solidFill>
-                        <a:srgbClr val="D6E2DA"/>
-                      </a:solidFill>
-                      <a:prstDash val="solid"/>
-                      <a:round/>
-                      <a:headEnd type="none" w="med" len="med"/>
-                      <a:tailEnd type="none" w="med" len="med"/>
-                    </a:lnB>
-                  </a:tcPr>
-                </a:tc>
-              </a:tr>
-              <a:tr h="0">
-                <a:tc>
-                  <a:txBody>
-                    <a:bodyPr/>
-                    <a:lstStyle/>
-                    <a:p>
-                      <a:pPr indent="0" marL="0">
-                        <a:buNone/>
-                      </a:pPr>
-                      <a:r>
-                        <a:rPr lang="en-US" sz="1700" b="1" dirty="0">
-                          <a:solidFill>
-                            <a:srgbClr val="15211B"/>
-                          </a:solidFill>
-                        </a:rPr>
-                        <a:t>Aturan akses ada di Go dan Laravel</a:t>
-                      </a:r>
-                      <a:endParaRPr lang="en-US" sz="1700" dirty="0"/>
-                    </a:p>
-                  </a:txBody>
-                  <a:tcPr marL="164592" marR="164592" marT="182880" marB="182880" anchor="t">
-                    <a:lnL w="9525" cap="flat" cmpd="sng" algn="ctr">
-                      <a:solidFill>
-                        <a:srgbClr val="D6E2DA"/>
-                      </a:solidFill>
-                      <a:prstDash val="solid"/>
-                      <a:round/>
-                      <a:headEnd type="none" w="med" len="med"/>
-                      <a:tailEnd type="none" w="med" len="med"/>
-                    </a:lnL>
-                    <a:lnR w="9525" cap="flat" cmpd="sng" algn="ctr">
-                      <a:solidFill>
-                        <a:srgbClr val="D6E2DA"/>
-                      </a:solidFill>
-                      <a:prstDash val="solid"/>
-                      <a:round/>
-                      <a:headEnd type="none" w="med" len="med"/>
-                      <a:tailEnd type="none" w="med" len="med"/>
-                    </a:lnR>
-                    <a:lnT w="9525" cap="flat" cmpd="sng" algn="ctr">
-                      <a:solidFill>
-                        <a:srgbClr val="D6E2DA"/>
-                      </a:solidFill>
-                      <a:prstDash val="solid"/>
-                      <a:round/>
-                      <a:headEnd type="none" w="med" len="med"/>
-                      <a:tailEnd type="none" w="med" len="med"/>
-                    </a:lnT>
-                    <a:lnB w="9525" cap="flat" cmpd="sng" algn="ctr">
-                      <a:solidFill>
-                        <a:srgbClr val="D6E2DA"/>
-                      </a:solidFill>
-                      <a:prstDash val="solid"/>
-                      <a:round/>
-                      <a:headEnd type="none" w="med" len="med"/>
-                      <a:tailEnd type="none" w="med" len="med"/>
-                    </a:lnB>
-                  </a:tcPr>
-                </a:tc>
-                <a:tc>
-                  <a:txBody>
-                    <a:bodyPr/>
-                    <a:lstStyle/>
-                    <a:p>
-                      <a:pPr indent="0" marL="0">
-                        <a:buNone/>
-                      </a:pPr>
-                      <a:r>
-                        <a:rPr lang="en-US" sz="1700" dirty="0">
-                          <a:solidFill>
-                            <a:srgbClr val="15211B"/>
-                          </a:solidFill>
-                        </a:rPr>
-                        <a:t>Satu set kasus uji bersama yang dijalankan kedua sisi</a:t>
-                      </a:r>
-                      <a:endParaRPr lang="en-US" sz="1700" dirty="0"/>
-                    </a:p>
-                  </a:txBody>
-                  <a:tcPr marL="164592" marR="164592" marT="182880" marB="182880" anchor="t">
-                    <a:lnL w="9525" cap="flat" cmpd="sng" algn="ctr">
-                      <a:solidFill>
-                        <a:srgbClr val="D6E2DA"/>
-                      </a:solidFill>
-                      <a:prstDash val="solid"/>
-                      <a:round/>
-                      <a:headEnd type="none" w="med" len="med"/>
-                      <a:tailEnd type="none" w="med" len="med"/>
-                    </a:lnL>
-                    <a:lnR w="9525" cap="flat" cmpd="sng" algn="ctr">
-                      <a:solidFill>
-                        <a:srgbClr val="D6E2DA"/>
-                      </a:solidFill>
-                      <a:prstDash val="solid"/>
-                      <a:round/>
-                      <a:headEnd type="none" w="med" len="med"/>
-                      <a:tailEnd type="none" w="med" len="med"/>
-                    </a:lnR>
-                    <a:lnT w="9525" cap="flat" cmpd="sng" algn="ctr">
-                      <a:solidFill>
-                        <a:srgbClr val="D6E2DA"/>
-                      </a:solidFill>
-                      <a:prstDash val="solid"/>
-                      <a:round/>
-                      <a:headEnd type="none" w="med" len="med"/>
-                      <a:tailEnd type="none" w="med" len="med"/>
-                    </a:lnT>
-                    <a:lnB w="9525" cap="flat" cmpd="sng" algn="ctr">
-                      <a:solidFill>
-                        <a:srgbClr val="D6E2DA"/>
-                      </a:solidFill>
-                      <a:prstDash val="solid"/>
-                      <a:round/>
-                      <a:headEnd type="none" w="med" len="med"/>
-                      <a:tailEnd type="none" w="med" len="med"/>
-                    </a:lnB>
-                  </a:tcPr>
-                </a:tc>
-              </a:tr>
-              <a:tr h="0">
-                <a:tc>
-                  <a:txBody>
-                    <a:bodyPr/>
-                    <a:lstStyle/>
-                    <a:p>
-                      <a:pPr indent="0" marL="0">
-                        <a:buNone/>
-                      </a:pPr>
-                      <a:r>
-                        <a:rPr lang="en-US" sz="1700" b="1" dirty="0">
-                          <a:solidFill>
-                            <a:srgbClr val="15211B"/>
-                          </a:solidFill>
-                        </a:rPr>
-                        <a:t>watch_history terus membesar</a:t>
-                      </a:r>
-                      <a:endParaRPr lang="en-US" sz="1700" dirty="0"/>
-                    </a:p>
-                  </a:txBody>
-                  <a:tcPr marL="164592" marR="164592" marT="182880" marB="182880" anchor="t">
-                    <a:lnL w="9525" cap="flat" cmpd="sng" algn="ctr">
-                      <a:solidFill>
-                        <a:srgbClr val="D6E2DA"/>
-                      </a:solidFill>
-                      <a:prstDash val="solid"/>
-                      <a:round/>
-                      <a:headEnd type="none" w="med" len="med"/>
-                      <a:tailEnd type="none" w="med" len="med"/>
-                    </a:lnL>
-                    <a:lnR w="9525" cap="flat" cmpd="sng" algn="ctr">
-                      <a:solidFill>
-                        <a:srgbClr val="D6E2DA"/>
-                      </a:solidFill>
-                      <a:prstDash val="solid"/>
-                      <a:round/>
-                      <a:headEnd type="none" w="med" len="med"/>
-                      <a:tailEnd type="none" w="med" len="med"/>
-                    </a:lnR>
-                    <a:lnT w="9525" cap="flat" cmpd="sng" algn="ctr">
-                      <a:solidFill>
-                        <a:srgbClr val="D6E2DA"/>
-                      </a:solidFill>
-                      <a:prstDash val="solid"/>
-                      <a:round/>
-                      <a:headEnd type="none" w="med" len="med"/>
-                      <a:tailEnd type="none" w="med" len="med"/>
-                    </a:lnT>
-                    <a:lnB w="9525" cap="flat" cmpd="sng" algn="ctr">
-                      <a:solidFill>
-                        <a:srgbClr val="D6E2DA"/>
-                      </a:solidFill>
-                      <a:prstDash val="solid"/>
-                      <a:round/>
-                      <a:headEnd type="none" w="med" len="med"/>
-                      <a:tailEnd type="none" w="med" len="med"/>
-                    </a:lnB>
-                  </a:tcPr>
-                </a:tc>
-                <a:tc>
-                  <a:txBody>
-                    <a:bodyPr/>
-                    <a:lstStyle/>
-                    <a:p>
-                      <a:pPr indent="0" marL="0">
-                        <a:buNone/>
-                      </a:pPr>
-                      <a:r>
-                        <a:rPr lang="en-US" sz="1700" dirty="0">
-                          <a:solidFill>
-                            <a:srgbClr val="15211B"/>
-                          </a:solidFill>
-                        </a:rPr>
-                        <a:t>Partisi per bulan; laporan dari tabel ringkasan harian</a:t>
-                      </a:r>
-                      <a:endParaRPr lang="en-US" sz="1700" dirty="0"/>
-                    </a:p>
-                  </a:txBody>
-                  <a:tcPr marL="164592" marR="164592" marT="182880" marB="182880" anchor="t">
-                    <a:lnL w="9525" cap="flat" cmpd="sng" algn="ctr">
-                      <a:solidFill>
-                        <a:srgbClr val="D6E2DA"/>
-                      </a:solidFill>
-                      <a:prstDash val="solid"/>
-                      <a:round/>
-                      <a:headEnd type="none" w="med" len="med"/>
-                      <a:tailEnd type="none" w="med" len="med"/>
-                    </a:lnL>
-                    <a:lnR w="9525" cap="flat" cmpd="sng" algn="ctr">
-                      <a:solidFill>
-                        <a:srgbClr val="D6E2DA"/>
-                      </a:solidFill>
-                      <a:prstDash val="solid"/>
-                      <a:round/>
-                      <a:headEnd type="none" w="med" len="med"/>
-                      <a:tailEnd type="none" w="med" len="med"/>
-                    </a:lnR>
-                    <a:lnT w="9525" cap="flat" cmpd="sng" algn="ctr">
-                      <a:solidFill>
-                        <a:srgbClr val="D6E2DA"/>
-                      </a:solidFill>
-                      <a:prstDash val="solid"/>
-                      <a:round/>
-                      <a:headEnd type="none" w="med" len="med"/>
-                      <a:tailEnd type="none" w="med" len="med"/>
-                    </a:lnT>
-                    <a:lnB w="9525" cap="flat" cmpd="sng" algn="ctr">
-                      <a:solidFill>
-                        <a:srgbClr val="D6E2DA"/>
-                      </a:solidFill>
-                      <a:prstDash val="solid"/>
-                      <a:round/>
-                      <a:headEnd type="none" w="med" len="med"/>
-                      <a:tailEnd type="none" w="med" len="med"/>
-                    </a:lnB>
-                  </a:tcPr>
-                </a:tc>
-              </a:tr>
-              <a:tr h="0">
-                <a:tc>
-                  <a:txBody>
-                    <a:bodyPr/>
-                    <a:lstStyle/>
-                    <a:p>
-                      <a:pPr indent="0" marL="0">
-                        <a:buNone/>
-                      </a:pPr>
-                      <a:r>
-                        <a:rPr lang="en-US" sz="1700" b="1" dirty="0">
-                          <a:solidFill>
-                            <a:srgbClr val="15211B"/>
-                          </a:solidFill>
-                        </a:rPr>
-                        <a:t>Produksi tanpa foreign key</a:t>
-                      </a:r>
-                      <a:endParaRPr lang="en-US" sz="1700" dirty="0"/>
-                    </a:p>
-                  </a:txBody>
-                  <a:tcPr marL="164592" marR="164592" marT="182880" marB="182880" anchor="t">
-                    <a:lnL w="9525" cap="flat" cmpd="sng" algn="ctr">
-                      <a:solidFill>
-                        <a:srgbClr val="D6E2DA"/>
-                      </a:solidFill>
-                      <a:prstDash val="solid"/>
-                      <a:round/>
-                      <a:headEnd type="none" w="med" len="med"/>
-                      <a:tailEnd type="none" w="med" len="med"/>
-                    </a:lnL>
-                    <a:lnR w="9525" cap="flat" cmpd="sng" algn="ctr">
-                      <a:solidFill>
-                        <a:srgbClr val="D6E2DA"/>
-                      </a:solidFill>
-                      <a:prstDash val="solid"/>
-                      <a:round/>
-                      <a:headEnd type="none" w="med" len="med"/>
-                      <a:tailEnd type="none" w="med" len="med"/>
-                    </a:lnR>
-                    <a:lnT w="9525" cap="flat" cmpd="sng" algn="ctr">
-                      <a:solidFill>
-                        <a:srgbClr val="D6E2DA"/>
-                      </a:solidFill>
-                      <a:prstDash val="solid"/>
-                      <a:round/>
-                      <a:headEnd type="none" w="med" len="med"/>
-                      <a:tailEnd type="none" w="med" len="med"/>
-                    </a:lnT>
-                    <a:lnB w="9525" cap="flat" cmpd="sng" algn="ctr">
-                      <a:solidFill>
-                        <a:srgbClr val="D6E2DA"/>
-                      </a:solidFill>
-                      <a:prstDash val="solid"/>
-                      <a:round/>
-                      <a:headEnd type="none" w="med" len="med"/>
-                      <a:tailEnd type="none" w="med" len="med"/>
-                    </a:lnB>
-                  </a:tcPr>
-                </a:tc>
-                <a:tc>
-                  <a:txBody>
-                    <a:bodyPr/>
-                    <a:lstStyle/>
-                    <a:p>
-                      <a:pPr indent="0" marL="0">
-                        <a:buNone/>
-                      </a:pPr>
-                      <a:r>
-                        <a:rPr lang="en-US" sz="1700" dirty="0">
-                          <a:solidFill>
-                            <a:srgbClr val="15211B"/>
-                          </a:solidFill>
-                        </a:rPr>
-                        <a:t>Foreign key dan index di kolom cek akses dan laporan</a:t>
-                      </a:r>
-                      <a:endParaRPr lang="en-US" sz="1700" dirty="0"/>
-                    </a:p>
-                  </a:txBody>
-                  <a:tcPr marL="164592" marR="164592" marT="182880" marB="182880" anchor="t">
-                    <a:lnL w="9525" cap="flat" cmpd="sng" algn="ctr">
-                      <a:solidFill>
-                        <a:srgbClr val="D6E2DA"/>
-                      </a:solidFill>
-                      <a:prstDash val="solid"/>
-                      <a:round/>
-                      <a:headEnd type="none" w="med" len="med"/>
-                      <a:tailEnd type="none" w="med" len="med"/>
-                    </a:lnL>
-                    <a:lnR w="9525" cap="flat" cmpd="sng" algn="ctr">
-                      <a:solidFill>
-                        <a:srgbClr val="D6E2DA"/>
-                      </a:solidFill>
-                      <a:prstDash val="solid"/>
-                      <a:round/>
-                      <a:headEnd type="none" w="med" len="med"/>
-                      <a:tailEnd type="none" w="med" len="med"/>
-                    </a:lnR>
-                    <a:lnT w="9525" cap="flat" cmpd="sng" algn="ctr">
-                      <a:solidFill>
-                        <a:srgbClr val="D6E2DA"/>
-                      </a:solidFill>
-                      <a:prstDash val="solid"/>
-                      <a:round/>
-                      <a:headEnd type="none" w="med" len="med"/>
-                      <a:tailEnd type="none" w="med" len="med"/>
-                    </a:lnT>
-                    <a:lnB w="9525" cap="flat" cmpd="sng" algn="ctr">
-                      <a:solidFill>
-                        <a:srgbClr val="D6E2DA"/>
-                      </a:solidFill>
-                      <a:prstDash val="solid"/>
-                      <a:round/>
-                      <a:headEnd type="none" w="med" len="med"/>
-                      <a:tailEnd type="none" w="med" len="med"/>
-                    </a:lnB>
-                  </a:tcPr>
-                </a:tc>
-              </a:tr>
-            </a:tbl>
-          </a:graphicData>
-        </a:graphic>
-      </p:graphicFrame>
+      <p:pic>
+        <p:nvPicPr>
+          <p:cNvPr id="5" name="dashboard" descr="/workspaces/.xc-work/assets/goflix/id-dashboard.png">    </p:cNvPr>
+          <p:cNvPicPr>
+            <a:picLocks noChangeAspect="1"/>
+          </p:cNvPicPr>
+          <p:nvPr/>
+        </p:nvPicPr>
+        <p:blipFill>
+          <a:blip r:embed="rId1"/>
+          <a:stretch>
+            <a:fillRect/>
+          </a:stretch>
+        </p:blipFill>
+        <p:spPr>
+          <a:xfrm>
+            <a:off x="548640" y="1600200"/>
+            <a:ext cx="5349240" cy="3343275"/>
+          </a:xfrm>
+          <a:prstGeom prst="rect">
+            <a:avLst/>
+          </a:prstGeom>
+          <a:effectLst>
+            <a:outerShdw sx="100000" sy="100000" kx="0" ky="0" algn="bl" rotWithShape="0" blurRad="152400" dist="50800" dir="5400000">
+              <a:srgbClr val="0D1D15">
+                <a:alpha val="22000"/>
+              </a:srgbClr>
+            </a:outerShdw>
+          </a:effectLst>
+        </p:spPr>
+      </p:pic>
+      <p:pic>
+        <p:nvPicPr>
+          <p:cNvPr id="6" name="user page" descr="/workspaces/.xc-work/assets/goflix/id-user.png">    </p:cNvPr>
+          <p:cNvPicPr>
+            <a:picLocks noChangeAspect="1"/>
+          </p:cNvPicPr>
+          <p:nvPr/>
+        </p:nvPicPr>
+        <p:blipFill>
+          <a:blip r:embed="rId2"/>
+          <a:stretch>
+            <a:fillRect/>
+          </a:stretch>
+        </p:blipFill>
+        <p:spPr>
+          <a:xfrm>
+            <a:off x="6263640" y="1600200"/>
+            <a:ext cx="5349240" cy="3343275"/>
+          </a:xfrm>
+          <a:prstGeom prst="rect">
+            <a:avLst/>
+          </a:prstGeom>
+          <a:effectLst>
+            <a:outerShdw sx="100000" sy="100000" kx="0" ky="0" algn="bl" rotWithShape="0" blurRad="152400" dist="50800" dir="5400000">
+              <a:srgbClr val="0D1D15">
+                <a:alpha val="22000"/>
+              </a:srgbClr>
+            </a:outerShdw>
+          </a:effectLst>
+        </p:spPr>
+      </p:pic>
+      <p:sp>
+        <p:nvSpPr>
+          <p:cNvPr id="7" name="Text 2"/>
+          <p:cNvSpPr txBox="1"/>
+          <p:nvPr/>
+        </p:nvSpPr>
+        <p:spPr>
+          <a:xfrm>
+            <a:off x="548640" y="5126355"/>
+            <a:ext cx="5349240" cy="320040"/>
+          </a:xfrm>
+          <a:prstGeom prst="rect">
+            <a:avLst/>
+          </a:prstGeom>
+          <a:noFill/>
+          <a:ln/>
+        </p:spPr>
+        <p:txBody>
+          <a:bodyPr wrap="square" lIns="0" tIns="0" rIns="0" bIns="0" rtlCol="0" anchor="ctr"/>
+          <a:lstStyle/>
+          <a:p>
+            <a:pPr indent="0" marL="0">
+              <a:buNone/>
+            </a:pPr>
+            <a:r>
+              <a:rPr lang="en-US" sz="1300" dirty="0">
+                <a:solidFill>
+                  <a:schemeClr val="accent4"/>
+                </a:solidFill>
+              </a:rPr>
+              <a:t>Dashboard: pendapatan langganan dan sewa per bulan</a:t>
+            </a:r>
+            <a:endParaRPr lang="en-US" sz="1300" dirty="0"/>
+          </a:p>
+        </p:txBody>
+      </p:sp>
+      <p:sp>
+        <p:nvSpPr>
+          <p:cNvPr id="8" name="Text 3"/>
+          <p:cNvSpPr txBox="1"/>
+          <p:nvPr/>
+        </p:nvSpPr>
+        <p:spPr>
+          <a:xfrm>
+            <a:off x="6263640" y="5126355"/>
+            <a:ext cx="5349240" cy="320040"/>
+          </a:xfrm>
+          <a:prstGeom prst="rect">
+            <a:avLst/>
+          </a:prstGeom>
+          <a:noFill/>
+          <a:ln/>
+        </p:spPr>
+        <p:txBody>
+          <a:bodyPr wrap="square" lIns="0" tIns="0" rIns="0" bIns="0" rtlCol="0" anchor="ctr"/>
+          <a:lstStyle/>
+          <a:p>
+            <a:pPr indent="0" marL="0">
+              <a:buNone/>
+            </a:pPr>
+            <a:r>
+              <a:rPr lang="en-US" sz="1300" dirty="0">
+                <a:solidFill>
+                  <a:schemeClr val="accent4"/>
+                </a:solidFill>
+              </a:rPr>
+              <a:t>Pengguna: status, pembayaran, dan cek akses</a:t>
+            </a:r>
+            <a:endParaRPr lang="en-US" sz="1300" dirty="0"/>
+          </a:p>
+        </p:txBody>
+      </p:sp>
       <p:sp>
         <p:nvSpPr>
           <p:cNvPr id="25" name="Slide Number Placeholder 0"/>
@@ -9476,7 +9509,7 @@
                   <a:schemeClr val="tx1"/>
                 </a:solidFill>
               </a:rPr>
-              <a:t>Struktur database (ERD)</a:t>
+              <a:t>Database 1/2: katalog</a:t>
             </a:r>
             <a:endParaRPr lang="en-US" sz="3200" dirty="0"/>
           </a:p>
@@ -9484,7 +9517,7 @@
       </p:sp>
       <p:pic>
         <p:nvPicPr>
-          <p:cNvPr id="5" name="ERD" descr="/workspaces/.xc-work/erd/goflix-id.png">    </p:cNvPr>
+          <p:cNvPr id="5" name="ERD catalog" descr="/workspaces/.xc-work/erd/goflix-catalog-id.png">    </p:cNvPr>
           <p:cNvPicPr>
             <a:picLocks noChangeAspect="1"/>
           </p:cNvPicPr>
@@ -9498,8 +9531,8 @@
         </p:blipFill>
         <p:spPr>
           <a:xfrm>
-            <a:off x="548640" y="1417320"/>
-            <a:ext cx="6026899" cy="4800600"/>
+            <a:off x="3168039" y="1325880"/>
+            <a:ext cx="5825442" cy="4526280"/>
           </a:xfrm>
           <a:prstGeom prst="rect">
             <a:avLst/>
@@ -9514,8 +9547,8 @@
         </p:nvSpPr>
         <p:spPr>
           <a:xfrm>
-            <a:off x="6987019" y="1417320"/>
-            <a:ext cx="4625861" cy="365760"/>
+            <a:off x="548640" y="5943600"/>
+            <a:ext cx="11064240" cy="320040"/>
           </a:xfrm>
           <a:prstGeom prst="rect">
             <a:avLst/>
@@ -9531,278 +9564,14 @@
               <a:buNone/>
             </a:pPr>
             <a:r>
-              <a:rPr lang="en-US" sz="1400" b="1" dirty="0">
-                <a:solidFill>
-                  <a:schemeClr val="tx1"/>
-                </a:solidFill>
-                <a:latin typeface="Courier New" pitchFamily="34" charset="0"/>
-                <a:ea typeface="Courier New" pitchFamily="34" charset="-122"/>
-                <a:cs typeface="Courier New" pitchFamily="34" charset="-120"/>
-              </a:rPr>
-              <a:t>Katalog</a:t>
-            </a:r>
-            <a:endParaRPr lang="en-US" sz="1400" dirty="0"/>
-          </a:p>
-        </p:txBody>
-      </p:sp>
-      <p:sp>
-        <p:nvSpPr>
-          <p:cNvPr id="7" name="Text 3"/>
-          <p:cNvSpPr txBox="1"/>
-          <p:nvPr/>
-        </p:nvSpPr>
-        <p:spPr>
-          <a:xfrm>
-            <a:off x="6987019" y="1801368"/>
-            <a:ext cx="4625861" cy="731520"/>
-          </a:xfrm>
-          <a:prstGeom prst="rect">
-            <a:avLst/>
-          </a:prstGeom>
-          <a:noFill/>
-          <a:ln/>
-        </p:spPr>
-        <p:txBody>
-          <a:bodyPr wrap="square" lIns="0" tIns="0" rIns="0" bIns="0" rtlCol="0" anchor="t"/>
-          <a:lstStyle/>
-          <a:p>
-            <a:pPr indent="0" marL="0">
-              <a:buNone/>
-            </a:pPr>
-            <a:r>
-              <a:rPr lang="en-US" sz="1400" dirty="0">
+              <a:rPr lang="en-US" sz="1200" dirty="0">
                 <a:solidFill>
                   <a:schemeClr val="accent4"/>
                 </a:solidFill>
               </a:rPr>
-              <a:t>movies, shows, episodes, seasons, dengan pivot genre, bahasa, dan pemain.</a:t>
-            </a:r>
-            <a:endParaRPr lang="en-US" sz="1400" dirty="0"/>
-          </a:p>
-        </p:txBody>
-      </p:sp>
-      <p:sp>
-        <p:nvSpPr>
-          <p:cNvPr id="8" name="Text 4"/>
-          <p:cNvSpPr txBox="1"/>
-          <p:nvPr/>
-        </p:nvSpPr>
-        <p:spPr>
-          <a:xfrm>
-            <a:off x="6987019" y="2606040"/>
-            <a:ext cx="4625861" cy="365760"/>
-          </a:xfrm>
-          <a:prstGeom prst="rect">
-            <a:avLst/>
-          </a:prstGeom>
-          <a:noFill/>
-          <a:ln/>
-        </p:spPr>
-        <p:txBody>
-          <a:bodyPr wrap="square" lIns="0" tIns="0" rIns="0" bIns="0" rtlCol="0" anchor="ctr"/>
-          <a:lstStyle/>
-          <a:p>
-            <a:pPr indent="0" marL="0">
-              <a:buNone/>
-            </a:pPr>
-            <a:r>
-              <a:rPr lang="en-US" sz="1400" b="1" dirty="0">
-                <a:solidFill>
-                  <a:schemeClr val="tx1"/>
-                </a:solidFill>
-                <a:latin typeface="Courier New" pitchFamily="34" charset="0"/>
-                <a:ea typeface="Courier New" pitchFamily="34" charset="-122"/>
-                <a:cs typeface="Courier New" pitchFamily="34" charset="-120"/>
-              </a:rPr>
-              <a:t>users.subscription_ends_on</a:t>
-            </a:r>
-            <a:endParaRPr lang="en-US" sz="1400" dirty="0"/>
-          </a:p>
-        </p:txBody>
-      </p:sp>
-      <p:sp>
-        <p:nvSpPr>
-          <p:cNvPr id="9" name="Text 5"/>
-          <p:cNvSpPr txBox="1"/>
-          <p:nvPr/>
-        </p:nvSpPr>
-        <p:spPr>
-          <a:xfrm>
-            <a:off x="6987019" y="2990088"/>
-            <a:ext cx="4625861" cy="731520"/>
-          </a:xfrm>
-          <a:prstGeom prst="rect">
-            <a:avLst/>
-          </a:prstGeom>
-          <a:noFill/>
-          <a:ln/>
-        </p:spPr>
-        <p:txBody>
-          <a:bodyPr wrap="square" lIns="0" tIns="0" rIns="0" bIns="0" rtlCol="0" anchor="t"/>
-          <a:lstStyle/>
-          <a:p>
-            <a:pPr indent="0" marL="0">
-              <a:buNone/>
-            </a:pPr>
-            <a:r>
-              <a:rPr lang="en-US" sz="1400" dirty="0">
-                <a:solidFill>
-                  <a:schemeClr val="accent4"/>
-                </a:solidFill>
-              </a:rPr>
-              <a:t>Sumber kebenaran untuk cek akses yang cepat.</a:t>
-            </a:r>
-            <a:endParaRPr lang="en-US" sz="1400" dirty="0"/>
-          </a:p>
-        </p:txBody>
-      </p:sp>
-      <p:sp>
-        <p:nvSpPr>
-          <p:cNvPr id="10" name="Text 6"/>
-          <p:cNvSpPr txBox="1"/>
-          <p:nvPr/>
-        </p:nvSpPr>
-        <p:spPr>
-          <a:xfrm>
-            <a:off x="6987019" y="3794760"/>
-            <a:ext cx="4625861" cy="365760"/>
-          </a:xfrm>
-          <a:prstGeom prst="rect">
-            <a:avLst/>
-          </a:prstGeom>
-          <a:noFill/>
-          <a:ln/>
-        </p:spPr>
-        <p:txBody>
-          <a:bodyPr wrap="square" lIns="0" tIns="0" rIns="0" bIns="0" rtlCol="0" anchor="ctr"/>
-          <a:lstStyle/>
-          <a:p>
-            <a:pPr indent="0" marL="0">
-              <a:buNone/>
-            </a:pPr>
-            <a:r>
-              <a:rPr lang="en-US" sz="1400" b="1" dirty="0">
-                <a:solidFill>
-                  <a:schemeClr val="tx1"/>
-                </a:solidFill>
-                <a:latin typeface="Courier New" pitchFamily="34" charset="0"/>
-                <a:ea typeface="Courier New" pitchFamily="34" charset="-122"/>
-                <a:cs typeface="Courier New" pitchFamily="34" charset="-120"/>
-              </a:rPr>
-              <a:t>subscriptions, rentals</a:t>
-            </a:r>
-            <a:endParaRPr lang="en-US" sz="1400" dirty="0"/>
-          </a:p>
-        </p:txBody>
-      </p:sp>
-      <p:sp>
-        <p:nvSpPr>
-          <p:cNvPr id="11" name="Text 7"/>
-          <p:cNvSpPr txBox="1"/>
-          <p:nvPr/>
-        </p:nvSpPr>
-        <p:spPr>
-          <a:xfrm>
-            <a:off x="6987019" y="4178808"/>
-            <a:ext cx="4625861" cy="731520"/>
-          </a:xfrm>
-          <a:prstGeom prst="rect">
-            <a:avLst/>
-          </a:prstGeom>
-          <a:noFill/>
-          <a:ln/>
-        </p:spPr>
-        <p:txBody>
-          <a:bodyPr wrap="square" lIns="0" tIns="0" rIns="0" bIns="0" rtlCol="0" anchor="t"/>
-          <a:lstStyle/>
-          <a:p>
-            <a:pPr indent="0" marL="0">
-              <a:buNone/>
-            </a:pPr>
-            <a:r>
-              <a:rPr lang="en-US" sz="1400" dirty="0">
-                <a:solidFill>
-                  <a:schemeClr val="accent4"/>
-                </a:solidFill>
-              </a:rPr>
-              <a:t>Catatan pembayaran; tidak pernah diedit atau dihapus.</a:t>
-            </a:r>
-            <a:endParaRPr lang="en-US" sz="1400" dirty="0"/>
-          </a:p>
-        </p:txBody>
-      </p:sp>
-      <p:sp>
-        <p:nvSpPr>
-          <p:cNvPr id="12" name="Text 8"/>
-          <p:cNvSpPr txBox="1"/>
-          <p:nvPr/>
-        </p:nvSpPr>
-        <p:spPr>
-          <a:xfrm>
-            <a:off x="6987019" y="4983480"/>
-            <a:ext cx="4625861" cy="365760"/>
-          </a:xfrm>
-          <a:prstGeom prst="rect">
-            <a:avLst/>
-          </a:prstGeom>
-          <a:noFill/>
-          <a:ln/>
-        </p:spPr>
-        <p:txBody>
-          <a:bodyPr wrap="square" lIns="0" tIns="0" rIns="0" bIns="0" rtlCol="0" anchor="ctr"/>
-          <a:lstStyle/>
-          <a:p>
-            <a:pPr indent="0" marL="0">
-              <a:buNone/>
-            </a:pPr>
-            <a:r>
-              <a:rPr lang="en-US" sz="1400" b="1" dirty="0">
-                <a:solidFill>
-                  <a:schemeClr val="tx1"/>
-                </a:solidFill>
-                <a:latin typeface="Courier New" pitchFamily="34" charset="0"/>
-                <a:ea typeface="Courier New" pitchFamily="34" charset="-122"/>
-                <a:cs typeface="Courier New" pitchFamily="34" charset="-120"/>
-              </a:rPr>
-              <a:t>watch_history, bookmarks</a:t>
-            </a:r>
-            <a:endParaRPr lang="en-US" sz="1400" dirty="0"/>
-          </a:p>
-        </p:txBody>
-      </p:sp>
-      <p:sp>
-        <p:nvSpPr>
-          <p:cNvPr id="13" name="Text 9"/>
-          <p:cNvSpPr txBox="1"/>
-          <p:nvPr/>
-        </p:nvSpPr>
-        <p:spPr>
-          <a:xfrm>
-            <a:off x="6987019" y="5367528"/>
-            <a:ext cx="4625861" cy="731520"/>
-          </a:xfrm>
-          <a:prstGeom prst="rect">
-            <a:avLst/>
-          </a:prstGeom>
-          <a:noFill/>
-          <a:ln/>
-        </p:spPr>
-        <p:txBody>
-          <a:bodyPr wrap="square" lIns="0" tIns="0" rIns="0" bIns="0" rtlCol="0" anchor="t"/>
-          <a:lstStyle/>
-          <a:p>
-            <a:pPr indent="0" marL="0">
-              <a:buNone/>
-            </a:pPr>
-            <a:r>
-              <a:rPr lang="en-US" sz="1400" dirty="0">
-                <a:solidFill>
-                  <a:schemeClr val="accent4"/>
-                </a:solidFill>
-              </a:rPr>
-              <a:t>Ditulis aplikasi saat orang menonton; dashboard hanya membaca.</a:t>
-            </a:r>
-            <a:endParaRPr lang="en-US" sz="1400" dirty="0"/>
+              <a:t>Film, serial, episode, dan season, dengan tabel pivot untuk genre, bahasa, dan pemain. Kotak tanpa kolom adalah tabel dari bagian lain.</a:t>
+            </a:r>
+            <a:endParaRPr lang="en-US" sz="1200" dirty="0"/>
           </a:p>
         </p:txBody>
       </p:sp>
@@ -9947,49 +9716,46 @@
                   <a:schemeClr val="tx1"/>
                 </a:solidFill>
               </a:rPr>
-              <a:t>Relasi: dari teks ke tabel pivot</a:t>
+              <a:t>Database 2/2: pengguna dan pembayaran</a:t>
             </a:r>
             <a:endParaRPr lang="en-US" sz="3200" dirty="0"/>
           </a:p>
         </p:txBody>
       </p:sp>
-      <p:sp>
-        <p:nvSpPr>
-          <p:cNvPr id="5" name="card"/>
-          <p:cNvSpPr/>
-          <p:nvPr/>
-        </p:nvSpPr>
-        <p:spPr>
-          <a:xfrm>
-            <a:off x="548640" y="1600200"/>
-            <a:ext cx="5120640" cy="3520440"/>
-          </a:xfrm>
-          <a:prstGeom prst="roundRect">
-            <a:avLst>
-              <a:gd name="adj" fmla="val 3117"/>
-            </a:avLst>
-          </a:prstGeom>
-          <a:solidFill>
-            <a:schemeClr val="bg2"/>
-          </a:solidFill>
-          <a:ln w="12700">
-            <a:solidFill>
-              <a:schemeClr val="bg2"/>
-            </a:solidFill>
-            <a:prstDash val="solid"/>
-          </a:ln>
-        </p:spPr>
-      </p:sp>
-      <p:sp>
-        <p:nvSpPr>
-          <p:cNvPr id="6" name="Text 3"/>
+      <p:pic>
+        <p:nvPicPr>
+          <p:cNvPr id="5" name="ERD users" descr="/workspaces/.xc-work/erd/goflix-users-id.png">    </p:cNvPr>
+          <p:cNvPicPr>
+            <a:picLocks noChangeAspect="1"/>
+          </p:cNvPicPr>
+          <p:nvPr/>
+        </p:nvPicPr>
+        <p:blipFill>
+          <a:blip r:embed="rId1"/>
+          <a:stretch>
+            <a:fillRect/>
+          </a:stretch>
+        </p:blipFill>
+        <p:spPr>
+          <a:xfrm>
+            <a:off x="2989583" y="1325880"/>
+            <a:ext cx="6182355" cy="4526280"/>
+          </a:xfrm>
+          <a:prstGeom prst="rect">
+            <a:avLst/>
+          </a:prstGeom>
+        </p:spPr>
+      </p:pic>
+      <p:sp>
+        <p:nvSpPr>
+          <p:cNvPr id="6" name="Text 2"/>
           <p:cNvSpPr txBox="1"/>
           <p:nvPr/>
         </p:nvSpPr>
         <p:spPr>
           <a:xfrm>
-            <a:off x="868680" y="1783080"/>
-            <a:ext cx="4480560" cy="411480"/>
+            <a:off x="548640" y="5943600"/>
+            <a:ext cx="11064240" cy="320040"/>
           </a:xfrm>
           <a:prstGeom prst="rect">
             <a:avLst/>
@@ -10005,395 +9771,14 @@
               <a:buNone/>
             </a:pPr>
             <a:r>
-              <a:rPr lang="en-US" sz="1800" b="1" dirty="0">
-                <a:solidFill>
-                  <a:schemeClr val="accent3"/>
-                </a:solidFill>
-                <a:latin typeface="+mj-lt" pitchFamily="34" charset="0"/>
-                <a:ea typeface="+mj-lt" pitchFamily="34" charset="-122"/>
-                <a:cs typeface="+mj-lt" pitchFamily="34" charset="-120"/>
-              </a:rPr>
-              <a:t>Produksi</a:t>
-            </a:r>
-            <a:endParaRPr lang="en-US" sz="1800" dirty="0"/>
-          </a:p>
-        </p:txBody>
-      </p:sp>
-      <p:sp>
-        <p:nvSpPr>
-          <p:cNvPr id="7" name="Text 4"/>
-          <p:cNvSpPr txBox="1"/>
-          <p:nvPr/>
-        </p:nvSpPr>
-        <p:spPr>
-          <a:xfrm>
-            <a:off x="868680" y="2377440"/>
-            <a:ext cx="4480560" cy="1645920"/>
-          </a:xfrm>
-          <a:prstGeom prst="rect">
-            <a:avLst/>
-          </a:prstGeom>
-          <a:noFill/>
-          <a:ln/>
-        </p:spPr>
-        <p:txBody>
-          <a:bodyPr wrap="square" lIns="0" tIns="0" rIns="0" bIns="0" rtlCol="0" anchor="t"/>
-          <a:lstStyle/>
-          <a:p>
-            <a:pPr indent="0" marL="0">
-              <a:buNone/>
-            </a:pPr>
-            <a:r>
-              <a:rPr lang="en-US" sz="1400" dirty="0">
-                <a:solidFill>
-                  <a:schemeClr val="tx1"/>
-                </a:solidFill>
-                <a:latin typeface="Courier New" pitchFamily="34" charset="0"/>
-                <a:ea typeface="Courier New" pitchFamily="34" charset="-122"/>
-                <a:cs typeface="Courier New" pitchFamily="34" charset="-120"/>
-              </a:rPr>
-              <a:t>video</a:t>
-            </a:r>
-            <a:endParaRPr lang="en-US" sz="1400" dirty="0"/>
-          </a:p>
-          <a:p>
-            <a:pPr indent="0" marL="0">
-              <a:buNone/>
-            </a:pPr>
-            <a:r>
-              <a:rPr lang="en-US" sz="1400" dirty="0">
-                <a:solidFill>
-                  <a:schemeClr val="tx1"/>
-                </a:solidFill>
-                <a:latin typeface="Courier New" pitchFamily="34" charset="0"/>
-                <a:ea typeface="Courier New" pitchFamily="34" charset="-122"/>
-                <a:cs typeface="Courier New" pitchFamily="34" charset="-120"/>
-              </a:rPr>
-              <a:t>  id: 12</a:t>
-            </a:r>
-            <a:endParaRPr lang="en-US" sz="1400" dirty="0"/>
-          </a:p>
-          <a:p>
-            <a:pPr indent="0" marL="0">
-              <a:buNone/>
-            </a:pPr>
-            <a:r>
-              <a:rPr lang="en-US" sz="1400" dirty="0">
-                <a:solidFill>
-                  <a:schemeClr val="tx1"/>
-                </a:solidFill>
-                <a:latin typeface="Courier New" pitchFamily="34" charset="0"/>
-                <a:ea typeface="Courier New" pitchFamily="34" charset="-122"/>
-                <a:cs typeface="Courier New" pitchFamily="34" charset="-120"/>
-              </a:rPr>
-              <a:t>  category_id: '6,12,19'</a:t>
-            </a:r>
-            <a:endParaRPr lang="en-US" sz="1400" dirty="0"/>
-          </a:p>
-          <a:p>
-            <a:pPr indent="0" marL="0">
-              <a:buNone/>
-            </a:pPr>
-            <a:r>
-              <a:rPr lang="en-US" sz="1400" dirty="0">
-                <a:solidFill>
-                  <a:schemeClr val="tx1"/>
-                </a:solidFill>
-                <a:latin typeface="Courier New" pitchFamily="34" charset="0"/>
-                <a:ea typeface="Courier New" pitchFamily="34" charset="-122"/>
-                <a:cs typeface="Courier New" pitchFamily="34" charset="-120"/>
-              </a:rPr>
-              <a:t>  cast_id: '1,108,109,110'</a:t>
-            </a:r>
-            <a:endParaRPr lang="en-US" sz="1400" dirty="0"/>
-          </a:p>
-        </p:txBody>
-      </p:sp>
-      <p:sp>
-        <p:nvSpPr>
-          <p:cNvPr id="8" name="Text 5"/>
-          <p:cNvSpPr txBox="1"/>
-          <p:nvPr/>
-        </p:nvSpPr>
-        <p:spPr>
-          <a:xfrm>
-            <a:off x="868680" y="4160520"/>
-            <a:ext cx="4480560" cy="822960"/>
-          </a:xfrm>
-          <a:prstGeom prst="rect">
-            <a:avLst/>
-          </a:prstGeom>
-          <a:noFill/>
-          <a:ln/>
-        </p:spPr>
-        <p:txBody>
-          <a:bodyPr wrap="square" lIns="0" tIns="0" rIns="0" bIns="0" rtlCol="0" anchor="t"/>
-          <a:lstStyle/>
-          <a:p>
-            <a:pPr indent="0" marL="0">
-              <a:buNone/>
-            </a:pPr>
-            <a:r>
-              <a:rPr lang="en-US" sz="1400" dirty="0">
+              <a:rPr lang="en-US" sz="1200" dirty="0">
                 <a:solidFill>
                   <a:schemeClr val="accent4"/>
                 </a:solidFill>
               </a:rPr>
-              <a:t>Tidak bisa di-join atau di-index; ID yang dihapus tertinggal.</a:t>
-            </a:r>
-            <a:endParaRPr lang="en-US" sz="1400" dirty="0"/>
-          </a:p>
-        </p:txBody>
-      </p:sp>
-      <p:sp>
-        <p:nvSpPr>
-          <p:cNvPr id="9" name="card"/>
-          <p:cNvSpPr/>
-          <p:nvPr/>
-        </p:nvSpPr>
-        <p:spPr>
-          <a:xfrm>
-            <a:off x="6492240" y="1600200"/>
-            <a:ext cx="5120640" cy="3520440"/>
-          </a:xfrm>
-          <a:prstGeom prst="roundRect">
-            <a:avLst>
-              <a:gd name="adj" fmla="val 3117"/>
-            </a:avLst>
-          </a:prstGeom>
-          <a:solidFill>
-            <a:schemeClr val="bg2"/>
-          </a:solidFill>
-          <a:ln w="12700">
-            <a:solidFill>
-              <a:schemeClr val="bg2"/>
-            </a:solidFill>
-            <a:prstDash val="solid"/>
-          </a:ln>
-        </p:spPr>
-      </p:sp>
-      <p:sp>
-        <p:nvSpPr>
-          <p:cNvPr id="10" name="Text 7"/>
-          <p:cNvSpPr txBox="1"/>
-          <p:nvPr/>
-        </p:nvSpPr>
-        <p:spPr>
-          <a:xfrm>
-            <a:off x="6812280" y="1783080"/>
-            <a:ext cx="4480560" cy="411480"/>
-          </a:xfrm>
-          <a:prstGeom prst="rect">
-            <a:avLst/>
-          </a:prstGeom>
-          <a:noFill/>
-          <a:ln/>
-        </p:spPr>
-        <p:txBody>
-          <a:bodyPr wrap="square" lIns="0" tIns="0" rIns="0" bIns="0" rtlCol="0" anchor="ctr"/>
-          <a:lstStyle/>
-          <a:p>
-            <a:pPr indent="0" marL="0">
-              <a:buNone/>
-            </a:pPr>
-            <a:r>
-              <a:rPr lang="en-US" sz="1800" b="1" dirty="0">
-                <a:solidFill>
-                  <a:schemeClr val="accent1"/>
-                </a:solidFill>
-                <a:latin typeface="+mj-lt" pitchFamily="34" charset="0"/>
-                <a:ea typeface="+mj-lt" pitchFamily="34" charset="-122"/>
-                <a:cs typeface="+mj-lt" pitchFamily="34" charset="-120"/>
-              </a:rPr>
-              <a:t>Demo</a:t>
-            </a:r>
-            <a:endParaRPr lang="en-US" sz="1800" dirty="0"/>
-          </a:p>
-        </p:txBody>
-      </p:sp>
-      <p:sp>
-        <p:nvSpPr>
-          <p:cNvPr id="11" name="Text 8"/>
-          <p:cNvSpPr txBox="1"/>
-          <p:nvPr/>
-        </p:nvSpPr>
-        <p:spPr>
-          <a:xfrm>
-            <a:off x="6812280" y="2377440"/>
-            <a:ext cx="4480560" cy="1645920"/>
-          </a:xfrm>
-          <a:prstGeom prst="rect">
-            <a:avLst/>
-          </a:prstGeom>
-          <a:noFill/>
-          <a:ln/>
-        </p:spPr>
-        <p:txBody>
-          <a:bodyPr wrap="square" lIns="0" tIns="0" rIns="0" bIns="0" rtlCol="0" anchor="t"/>
-          <a:lstStyle/>
-          <a:p>
-            <a:pPr indent="0" marL="0">
-              <a:buNone/>
-            </a:pPr>
-            <a:r>
-              <a:rPr lang="en-US" sz="1400" dirty="0">
-                <a:solidFill>
-                  <a:schemeClr val="tx1"/>
-                </a:solidFill>
-                <a:latin typeface="Courier New" pitchFamily="34" charset="0"/>
-                <a:ea typeface="Courier New" pitchFamily="34" charset="-122"/>
-                <a:cs typeface="Courier New" pitchFamily="34" charset="-120"/>
-              </a:rPr>
-              <a:t>genre_movie</a:t>
-            </a:r>
-            <a:endParaRPr lang="en-US" sz="1400" dirty="0"/>
-          </a:p>
-          <a:p>
-            <a:pPr indent="0" marL="0">
-              <a:buNone/>
-            </a:pPr>
-            <a:r>
-              <a:rPr lang="en-US" sz="1400" dirty="0">
-                <a:solidFill>
-                  <a:schemeClr val="tx1"/>
-                </a:solidFill>
-                <a:latin typeface="Courier New" pitchFamily="34" charset="0"/>
-                <a:ea typeface="Courier New" pitchFamily="34" charset="-122"/>
-                <a:cs typeface="Courier New" pitchFamily="34" charset="-120"/>
-              </a:rPr>
-              <a:t>  (movie_id 12, genre_id 6)</a:t>
-            </a:r>
-            <a:endParaRPr lang="en-US" sz="1400" dirty="0"/>
-          </a:p>
-          <a:p>
-            <a:pPr indent="0" marL="0">
-              <a:buNone/>
-            </a:pPr>
-            <a:r>
-              <a:rPr lang="en-US" sz="1400" dirty="0">
-                <a:solidFill>
-                  <a:schemeClr val="tx1"/>
-                </a:solidFill>
-                <a:latin typeface="Courier New" pitchFamily="34" charset="0"/>
-                <a:ea typeface="Courier New" pitchFamily="34" charset="-122"/>
-                <a:cs typeface="Courier New" pitchFamily="34" charset="-120"/>
-              </a:rPr>
-              <a:t>  (movie_id 12, genre_id 12)</a:t>
-            </a:r>
-            <a:endParaRPr lang="en-US" sz="1400" dirty="0"/>
-          </a:p>
-          <a:p>
-            <a:pPr indent="0" marL="0">
-              <a:buNone/>
-            </a:pPr>
-            <a:r>
-              <a:rPr lang="en-US" sz="1400" dirty="0">
-                <a:solidFill>
-                  <a:schemeClr val="tx1"/>
-                </a:solidFill>
-                <a:latin typeface="Courier New" pitchFamily="34" charset="0"/>
-                <a:ea typeface="Courier New" pitchFamily="34" charset="-122"/>
-                <a:cs typeface="Courier New" pitchFamily="34" charset="-120"/>
-              </a:rPr>
-              <a:t>  (movie_id 12, genre_id 19)</a:t>
-            </a:r>
-            <a:endParaRPr lang="en-US" sz="1400" dirty="0"/>
-          </a:p>
-        </p:txBody>
-      </p:sp>
-      <p:sp>
-        <p:nvSpPr>
-          <p:cNvPr id="12" name="Text 9"/>
-          <p:cNvSpPr txBox="1"/>
-          <p:nvPr/>
-        </p:nvSpPr>
-        <p:spPr>
-          <a:xfrm>
-            <a:off x="6812280" y="4160520"/>
-            <a:ext cx="4480560" cy="822960"/>
-          </a:xfrm>
-          <a:prstGeom prst="rect">
-            <a:avLst/>
-          </a:prstGeom>
-          <a:noFill/>
-          <a:ln/>
-        </p:spPr>
-        <p:txBody>
-          <a:bodyPr wrap="square" lIns="0" tIns="0" rIns="0" bIns="0" rtlCol="0" anchor="t"/>
-          <a:lstStyle/>
-          <a:p>
-            <a:pPr indent="0" marL="0">
-              <a:buNone/>
-            </a:pPr>
-            <a:r>
-              <a:rPr lang="en-US" sz="1400" dirty="0">
-                <a:solidFill>
-                  <a:schemeClr val="accent4"/>
-                </a:solidFill>
-              </a:rPr>
-              <a:t>Foreign key, join biasa, dan laporan genre jadi satu query.</a:t>
-            </a:r>
-            <a:endParaRPr lang="en-US" sz="1400" dirty="0"/>
-          </a:p>
-        </p:txBody>
-      </p:sp>
-      <p:sp>
-        <p:nvSpPr>
-          <p:cNvPr id="13" name="Shape 10"/>
-          <p:cNvSpPr/>
-          <p:nvPr/>
-        </p:nvSpPr>
-        <p:spPr>
-          <a:xfrm>
-            <a:off x="5760720" y="3337560"/>
-            <a:ext cx="685800" cy="914"/>
-          </a:xfrm>
-          <a:prstGeom prst="line">
-            <a:avLst/>
-          </a:prstGeom>
-          <a:noFill/>
-          <a:ln w="19050">
-            <a:solidFill>
-              <a:schemeClr val="accent4"/>
-            </a:solidFill>
-            <a:prstDash val="solid"/>
-            <a:tailEnd type="triangle"/>
-          </a:ln>
-        </p:spPr>
-      </p:sp>
-      <p:sp>
-        <p:nvSpPr>
-          <p:cNvPr id="14" name="Text 11"/>
-          <p:cNvSpPr txBox="1"/>
-          <p:nvPr/>
-        </p:nvSpPr>
-        <p:spPr>
-          <a:xfrm>
-            <a:off x="548640" y="5394960"/>
-            <a:ext cx="11064240" cy="548640"/>
-          </a:xfrm>
-          <a:prstGeom prst="rect">
-            <a:avLst/>
-          </a:prstGeom>
-          <a:noFill/>
-          <a:ln/>
-        </p:spPr>
-        <p:txBody>
-          <a:bodyPr wrap="square" lIns="0" tIns="0" rIns="0" bIns="0" rtlCol="0" anchor="ctr"/>
-          <a:lstStyle/>
-          <a:p>
-            <a:pPr indent="0" marL="0">
-              <a:buNone/>
-            </a:pPr>
-            <a:r>
-              <a:rPr lang="en-US" sz="1600" dirty="0">
-                <a:solidFill>
-                  <a:schemeClr val="tx1"/>
-                </a:solidFill>
-              </a:rPr>
-              <a:t>Migrasi bertahap: buat pivot, isi dari kolom lama, pindahkan pembaca satu per satu, lalu hapus kolom lama.</a:t>
-            </a:r>
-            <a:endParaRPr lang="en-US" sz="1600" dirty="0"/>
+              <a:t>Paket, langganan, sewa, dan kupon. users.subscription_ends_on dipakai untuk cek akses yang cepat. Kotak tanpa kolom adalah tabel dari bagian lain.</a:t>
+            </a:r>
+            <a:endParaRPr lang="en-US" sz="1200" dirty="0"/>
           </a:p>
         </p:txBody>
       </p:sp>
@@ -10538,7 +9923,7 @@
                   <a:schemeClr val="tx1"/>
                 </a:solidFill>
               </a:rPr>
-              <a:t>Perpanjang tanpa membuang hari</a:t>
+              <a:t>Relasi: dari teks ke tabel pivot</a:t>
             </a:r>
             <a:endParaRPr lang="en-US" sz="3200" dirty="0"/>
           </a:p>
@@ -10546,216 +9931,18 @@
       </p:sp>
       <p:sp>
         <p:nvSpPr>
-          <p:cNvPr id="5" name="Text 2"/>
-          <p:cNvSpPr txBox="1"/>
+          <p:cNvPr id="5" name="card"/>
+          <p:cNvSpPr/>
           <p:nvPr/>
         </p:nvSpPr>
         <p:spPr>
           <a:xfrm>
             <a:off x="548640" y="1600200"/>
-            <a:ext cx="10972800" cy="365760"/>
-          </a:xfrm>
-          <a:prstGeom prst="rect">
-            <a:avLst/>
-          </a:prstGeom>
-          <a:noFill/>
-          <a:ln/>
-        </p:spPr>
-        <p:txBody>
-          <a:bodyPr wrap="square" lIns="0" tIns="0" rIns="0" bIns="0" rtlCol="0" anchor="ctr"/>
-          <a:lstStyle/>
-          <a:p>
-            <a:pPr indent="0" marL="0">
-              <a:buNone/>
-            </a:pPr>
-            <a:r>
-              <a:rPr lang="en-US" sz="1500" b="1" dirty="0">
-                <a:solidFill>
-                  <a:schemeClr val="tx1"/>
-                </a:solidFill>
-              </a:rPr>
-              <a:t>Masih aktif sampai 20 Mar, membeli 12 bulan pada 10 Mar</a:t>
-            </a:r>
-            <a:endParaRPr lang="en-US" sz="1500" dirty="0"/>
-          </a:p>
-        </p:txBody>
-      </p:sp>
-      <p:sp>
-        <p:nvSpPr>
-          <p:cNvPr id="6" name="Shape 3"/>
-          <p:cNvSpPr/>
-          <p:nvPr/>
-        </p:nvSpPr>
-        <p:spPr>
-          <a:xfrm>
-            <a:off x="548640" y="2057400"/>
-            <a:ext cx="2743200" cy="566928"/>
+            <a:ext cx="5120640" cy="3520440"/>
           </a:xfrm>
           <a:prstGeom prst="roundRect">
             <a:avLst>
-              <a:gd name="adj" fmla="val 16129"/>
-            </a:avLst>
-          </a:prstGeom>
-          <a:solidFill>
-            <a:schemeClr val="accent6"/>
-          </a:solidFill>
-          <a:ln w="12700">
-            <a:solidFill>
-              <a:schemeClr val="accent6"/>
-            </a:solidFill>
-            <a:prstDash val="solid"/>
-          </a:ln>
-        </p:spPr>
-      </p:sp>
-      <p:sp>
-        <p:nvSpPr>
-          <p:cNvPr id="7" name="Text 4"/>
-          <p:cNvSpPr txBox="1"/>
-          <p:nvPr/>
-        </p:nvSpPr>
-        <p:spPr>
-          <a:xfrm>
-            <a:off x="548640" y="2057400"/>
-            <a:ext cx="2743200" cy="566928"/>
-          </a:xfrm>
-          <a:prstGeom prst="rect">
-            <a:avLst/>
-          </a:prstGeom>
-          <a:noFill/>
-          <a:ln/>
-        </p:spPr>
-        <p:txBody>
-          <a:bodyPr wrap="square" lIns="0" tIns="0" rIns="0" bIns="0" rtlCol="0" anchor="ctr"/>
-          <a:lstStyle/>
-          <a:p>
-            <a:pPr algn="ctr" indent="0" marL="0">
-              <a:buNone/>
-            </a:pPr>
-            <a:r>
-              <a:rPr lang="en-US" sz="1400" b="1" dirty="0">
-                <a:solidFill>
-                  <a:schemeClr val="tx1"/>
-                </a:solidFill>
-              </a:rPr>
-              <a:t>lama: s/d 20 Mar</a:t>
-            </a:r>
-            <a:endParaRPr lang="en-US" sz="1400" dirty="0"/>
-          </a:p>
-        </p:txBody>
-      </p:sp>
-      <p:sp>
-        <p:nvSpPr>
-          <p:cNvPr id="8" name="Shape 5"/>
-          <p:cNvSpPr/>
-          <p:nvPr/>
-        </p:nvSpPr>
-        <p:spPr>
-          <a:xfrm>
-            <a:off x="3337560" y="2057400"/>
-            <a:ext cx="8275320" cy="566928"/>
-          </a:xfrm>
-          <a:prstGeom prst="roundRect">
-            <a:avLst>
-              <a:gd name="adj" fmla="val 16129"/>
-            </a:avLst>
-          </a:prstGeom>
-          <a:solidFill>
-            <a:schemeClr val="accent1"/>
-          </a:solidFill>
-          <a:ln w="12700">
-            <a:solidFill>
-              <a:schemeClr val="accent1"/>
-            </a:solidFill>
-            <a:prstDash val="solid"/>
-          </a:ln>
-        </p:spPr>
-      </p:sp>
-      <p:sp>
-        <p:nvSpPr>
-          <p:cNvPr id="9" name="Text 6"/>
-          <p:cNvSpPr txBox="1"/>
-          <p:nvPr/>
-        </p:nvSpPr>
-        <p:spPr>
-          <a:xfrm>
-            <a:off x="3337560" y="2057400"/>
-            <a:ext cx="8275320" cy="566928"/>
-          </a:xfrm>
-          <a:prstGeom prst="rect">
-            <a:avLst/>
-          </a:prstGeom>
-          <a:noFill/>
-          <a:ln/>
-        </p:spPr>
-        <p:txBody>
-          <a:bodyPr wrap="square" lIns="0" tIns="0" rIns="0" bIns="0" rtlCol="0" anchor="ctr"/>
-          <a:lstStyle/>
-          <a:p>
-            <a:pPr algn="ctr" indent="0" marL="0">
-              <a:buNone/>
-            </a:pPr>
-            <a:r>
-              <a:rPr lang="en-US" sz="1400" b="1" dirty="0">
-                <a:solidFill>
-                  <a:schemeClr val="bg1"/>
-                </a:solidFill>
-              </a:rPr>
-              <a:t>baru: 21 Mar s/d 20 Mar tahun depan</a:t>
-            </a:r>
-            <a:endParaRPr lang="en-US" sz="1400" dirty="0"/>
-          </a:p>
-        </p:txBody>
-      </p:sp>
-      <p:sp>
-        <p:nvSpPr>
-          <p:cNvPr id="10" name="Text 7"/>
-          <p:cNvSpPr txBox="1"/>
-          <p:nvPr/>
-        </p:nvSpPr>
-        <p:spPr>
-          <a:xfrm>
-            <a:off x="548640" y="2971800"/>
-            <a:ext cx="10972800" cy="365760"/>
-          </a:xfrm>
-          <a:prstGeom prst="rect">
-            <a:avLst/>
-          </a:prstGeom>
-          <a:noFill/>
-          <a:ln/>
-        </p:spPr>
-        <p:txBody>
-          <a:bodyPr wrap="square" lIns="0" tIns="0" rIns="0" bIns="0" rtlCol="0" anchor="ctr"/>
-          <a:lstStyle/>
-          <a:p>
-            <a:pPr indent="0" marL="0">
-              <a:buNone/>
-            </a:pPr>
-            <a:r>
-              <a:rPr lang="en-US" sz="1500" b="1" dirty="0">
-                <a:solidFill>
-                  <a:schemeClr val="tx1"/>
-                </a:solidFill>
-              </a:rPr>
-              <a:t>Sudah habis 31 Jan, membeli 1 bulan pada 10 Mar</a:t>
-            </a:r>
-            <a:endParaRPr lang="en-US" sz="1500" dirty="0"/>
-          </a:p>
-        </p:txBody>
-      </p:sp>
-      <p:sp>
-        <p:nvSpPr>
-          <p:cNvPr id="11" name="Shape 8"/>
-          <p:cNvSpPr/>
-          <p:nvPr/>
-        </p:nvSpPr>
-        <p:spPr>
-          <a:xfrm>
-            <a:off x="548640" y="3429000"/>
-            <a:ext cx="2743200" cy="566928"/>
-          </a:xfrm>
-          <a:prstGeom prst="roundRect">
-            <a:avLst>
-              <a:gd name="adj" fmla="val 16129"/>
+              <a:gd name="adj" fmla="val 3117"/>
             </a:avLst>
           </a:prstGeom>
           <a:solidFill>
@@ -10771,14 +9958,14 @@
       </p:sp>
       <p:sp>
         <p:nvSpPr>
-          <p:cNvPr id="12" name="Text 9"/>
+          <p:cNvPr id="6" name="Text 3"/>
           <p:cNvSpPr txBox="1"/>
           <p:nvPr/>
         </p:nvSpPr>
         <p:spPr>
           <a:xfrm>
-            <a:off x="548640" y="3429000"/>
-            <a:ext cx="2743200" cy="566928"/>
+            <a:off x="868680" y="1783080"/>
+            <a:ext cx="4480560" cy="411480"/>
           </a:xfrm>
           <a:prstGeom prst="rect">
             <a:avLst/>
@@ -10790,16 +9977,145 @@
           <a:bodyPr wrap="square" lIns="0" tIns="0" rIns="0" bIns="0" rtlCol="0" anchor="ctr"/>
           <a:lstStyle/>
           <a:p>
-            <a:pPr algn="ctr" indent="0" marL="0">
-              <a:buNone/>
-            </a:pPr>
-            <a:r>
-              <a:rPr lang="en-US" sz="1400" b="1" dirty="0">
+            <a:pPr indent="0" marL="0">
+              <a:buNone/>
+            </a:pPr>
+            <a:r>
+              <a:rPr lang="en-US" sz="1800" b="1" dirty="0">
+                <a:solidFill>
+                  <a:schemeClr val="accent3"/>
+                </a:solidFill>
+                <a:latin typeface="+mj-lt" pitchFamily="34" charset="0"/>
+                <a:ea typeface="+mj-lt" pitchFamily="34" charset="-122"/>
+                <a:cs typeface="+mj-lt" pitchFamily="34" charset="-120"/>
+              </a:rPr>
+              <a:t>Produksi</a:t>
+            </a:r>
+            <a:endParaRPr lang="en-US" sz="1800" dirty="0"/>
+          </a:p>
+        </p:txBody>
+      </p:sp>
+      <p:sp>
+        <p:nvSpPr>
+          <p:cNvPr id="7" name="Text 4"/>
+          <p:cNvSpPr txBox="1"/>
+          <p:nvPr/>
+        </p:nvSpPr>
+        <p:spPr>
+          <a:xfrm>
+            <a:off x="868680" y="2377440"/>
+            <a:ext cx="4480560" cy="1645920"/>
+          </a:xfrm>
+          <a:prstGeom prst="rect">
+            <a:avLst/>
+          </a:prstGeom>
+          <a:noFill/>
+          <a:ln/>
+        </p:spPr>
+        <p:txBody>
+          <a:bodyPr wrap="square" lIns="0" tIns="0" rIns="0" bIns="0" rtlCol="0" anchor="t"/>
+          <a:lstStyle/>
+          <a:p>
+            <a:pPr indent="0" marL="0">
+              <a:buNone/>
+            </a:pPr>
+            <a:r>
+              <a:rPr lang="en-US" sz="1400" dirty="0">
+                <a:solidFill>
+                  <a:schemeClr val="tx1"/>
+                </a:solidFill>
+                <a:latin typeface="Courier New" pitchFamily="34" charset="0"/>
+                <a:ea typeface="Courier New" pitchFamily="34" charset="-122"/>
+                <a:cs typeface="Courier New" pitchFamily="34" charset="-120"/>
+              </a:rPr>
+              <a:t>video</a:t>
+            </a:r>
+            <a:endParaRPr lang="en-US" sz="1400" dirty="0"/>
+          </a:p>
+          <a:p>
+            <a:pPr indent="0" marL="0">
+              <a:buNone/>
+            </a:pPr>
+            <a:r>
+              <a:rPr lang="en-US" sz="1400" dirty="0">
+                <a:solidFill>
+                  <a:schemeClr val="tx1"/>
+                </a:solidFill>
+                <a:latin typeface="Courier New" pitchFamily="34" charset="0"/>
+                <a:ea typeface="Courier New" pitchFamily="34" charset="-122"/>
+                <a:cs typeface="Courier New" pitchFamily="34" charset="-120"/>
+              </a:rPr>
+              <a:t>  id: 12</a:t>
+            </a:r>
+            <a:endParaRPr lang="en-US" sz="1400" dirty="0"/>
+          </a:p>
+          <a:p>
+            <a:pPr indent="0" marL="0">
+              <a:buNone/>
+            </a:pPr>
+            <a:r>
+              <a:rPr lang="en-US" sz="1400" dirty="0">
+                <a:solidFill>
+                  <a:schemeClr val="tx1"/>
+                </a:solidFill>
+                <a:latin typeface="Courier New" pitchFamily="34" charset="0"/>
+                <a:ea typeface="Courier New" pitchFamily="34" charset="-122"/>
+                <a:cs typeface="Courier New" pitchFamily="34" charset="-120"/>
+              </a:rPr>
+              <a:t>  category_id: '6,12,19'</a:t>
+            </a:r>
+            <a:endParaRPr lang="en-US" sz="1400" dirty="0"/>
+          </a:p>
+          <a:p>
+            <a:pPr indent="0" marL="0">
+              <a:buNone/>
+            </a:pPr>
+            <a:r>
+              <a:rPr lang="en-US" sz="1400" dirty="0">
+                <a:solidFill>
+                  <a:schemeClr val="tx1"/>
+                </a:solidFill>
+                <a:latin typeface="Courier New" pitchFamily="34" charset="0"/>
+                <a:ea typeface="Courier New" pitchFamily="34" charset="-122"/>
+                <a:cs typeface="Courier New" pitchFamily="34" charset="-120"/>
+              </a:rPr>
+              <a:t>  cast_id: '1,108,109,110'</a:t>
+            </a:r>
+            <a:endParaRPr lang="en-US" sz="1400" dirty="0"/>
+          </a:p>
+        </p:txBody>
+      </p:sp>
+      <p:sp>
+        <p:nvSpPr>
+          <p:cNvPr id="8" name="Text 5"/>
+          <p:cNvSpPr txBox="1"/>
+          <p:nvPr/>
+        </p:nvSpPr>
+        <p:spPr>
+          <a:xfrm>
+            <a:off x="868680" y="4160520"/>
+            <a:ext cx="4480560" cy="822960"/>
+          </a:xfrm>
+          <a:prstGeom prst="rect">
+            <a:avLst/>
+          </a:prstGeom>
+          <a:noFill/>
+          <a:ln/>
+        </p:spPr>
+        <p:txBody>
+          <a:bodyPr wrap="square" lIns="0" tIns="0" rIns="0" bIns="0" rtlCol="0" anchor="t"/>
+          <a:lstStyle/>
+          <a:p>
+            <a:pPr indent="0" marL="0">
+              <a:buNone/>
+            </a:pPr>
+            <a:r>
+              <a:rPr lang="en-US" sz="1400" dirty="0">
                 <a:solidFill>
                   <a:schemeClr val="accent4"/>
                 </a:solidFill>
               </a:rPr>
-              <a:t>tidak aktif</a:t>
+              <a:t>Tidak bisa di-join atau di-index; ID yang dihapus tertinggal.</a:t>
             </a:r>
             <a:endParaRPr lang="en-US" sz="1400" dirty="0"/>
           </a:p>
@@ -10807,81 +10123,18 @@
       </p:sp>
       <p:sp>
         <p:nvSpPr>
-          <p:cNvPr id="13" name="Shape 10"/>
+          <p:cNvPr id="9" name="card"/>
           <p:cNvSpPr/>
           <p:nvPr/>
         </p:nvSpPr>
         <p:spPr>
           <a:xfrm>
-            <a:off x="3337560" y="3429000"/>
-            <a:ext cx="2743200" cy="566928"/>
+            <a:off x="6492240" y="1600200"/>
+            <a:ext cx="5120640" cy="3520440"/>
           </a:xfrm>
           <a:prstGeom prst="roundRect">
             <a:avLst>
-              <a:gd name="adj" fmla="val 16129"/>
-            </a:avLst>
-          </a:prstGeom>
-          <a:solidFill>
-            <a:schemeClr val="accent1"/>
-          </a:solidFill>
-          <a:ln w="12700">
-            <a:solidFill>
-              <a:schemeClr val="accent1"/>
-            </a:solidFill>
-            <a:prstDash val="solid"/>
-          </a:ln>
-        </p:spPr>
-      </p:sp>
-      <p:sp>
-        <p:nvSpPr>
-          <p:cNvPr id="14" name="Text 11"/>
-          <p:cNvSpPr txBox="1"/>
-          <p:nvPr/>
-        </p:nvSpPr>
-        <p:spPr>
-          <a:xfrm>
-            <a:off x="3337560" y="3429000"/>
-            <a:ext cx="2743200" cy="566928"/>
-          </a:xfrm>
-          <a:prstGeom prst="rect">
-            <a:avLst/>
-          </a:prstGeom>
-          <a:noFill/>
-          <a:ln/>
-        </p:spPr>
-        <p:txBody>
-          <a:bodyPr wrap="square" lIns="0" tIns="0" rIns="0" bIns="0" rtlCol="0" anchor="ctr"/>
-          <a:lstStyle/>
-          <a:p>
-            <a:pPr algn="ctr" indent="0" marL="0">
-              <a:buNone/>
-            </a:pPr>
-            <a:r>
-              <a:rPr lang="en-US" sz="1400" b="1" dirty="0">
-                <a:solidFill>
-                  <a:schemeClr val="bg1"/>
-                </a:solidFill>
-              </a:rPr>
-              <a:t>10 Mar s/d 9 Apr</a:t>
-            </a:r>
-            <a:endParaRPr lang="en-US" sz="1400" dirty="0"/>
-          </a:p>
-        </p:txBody>
-      </p:sp>
-      <p:sp>
-        <p:nvSpPr>
-          <p:cNvPr id="15" name="card"/>
-          <p:cNvSpPr/>
-          <p:nvPr/>
-        </p:nvSpPr>
-        <p:spPr>
-          <a:xfrm>
-            <a:off x="548640" y="4343400"/>
-            <a:ext cx="3520440" cy="1783080"/>
-          </a:xfrm>
-          <a:prstGeom prst="roundRect">
-            <a:avLst>
-              <a:gd name="adj" fmla="val 6154"/>
+              <a:gd name="adj" fmla="val 3117"/>
             </a:avLst>
           </a:prstGeom>
           <a:solidFill>
@@ -10897,14 +10150,14 @@
       </p:sp>
       <p:sp>
         <p:nvSpPr>
-          <p:cNvPr id="16" name="Text 13"/>
+          <p:cNvPr id="10" name="Text 7"/>
           <p:cNvSpPr txBox="1"/>
           <p:nvPr/>
         </p:nvSpPr>
         <p:spPr>
           <a:xfrm>
-            <a:off x="822960" y="4526280"/>
-            <a:ext cx="3017520" cy="411480"/>
+            <a:off x="6812280" y="1783080"/>
+            <a:ext cx="4480560" cy="411480"/>
           </a:xfrm>
           <a:prstGeom prst="rect">
             <a:avLst/>
@@ -10920,7 +10173,7 @@
               <a:buNone/>
             </a:pPr>
             <a:r>
-              <a:rPr lang="en-US" sz="1700" b="1" dirty="0">
+              <a:rPr lang="en-US" sz="1800" b="1" dirty="0">
                 <a:solidFill>
                   <a:schemeClr val="accent1"/>
                 </a:solidFill>
@@ -10928,22 +10181,22 @@
                 <a:ea typeface="+mj-lt" pitchFamily="34" charset="-122"/>
                 <a:cs typeface="+mj-lt" pitchFamily="34" charset="-120"/>
               </a:rPr>
-              <a:t>Satu tempat</a:t>
-            </a:r>
-            <a:endParaRPr lang="en-US" sz="1700" dirty="0"/>
-          </a:p>
-        </p:txBody>
-      </p:sp>
-      <p:sp>
-        <p:nvSpPr>
-          <p:cNvPr id="17" name="Text 14"/>
+              <a:t>Demo</a:t>
+            </a:r>
+            <a:endParaRPr lang="en-US" sz="1800" dirty="0"/>
+          </a:p>
+        </p:txBody>
+      </p:sp>
+      <p:sp>
+        <p:nvSpPr>
+          <p:cNvPr id="11" name="Text 8"/>
           <p:cNvSpPr txBox="1"/>
           <p:nvPr/>
         </p:nvSpPr>
         <p:spPr>
           <a:xfrm>
-            <a:off x="822960" y="4983480"/>
-            <a:ext cx="3017520" cy="1051560"/>
+            <a:off x="6812280" y="2377440"/>
+            <a:ext cx="4480560" cy="1645920"/>
           </a:xfrm>
           <a:prstGeom prst="rect">
             <a:avLst/>
@@ -10963,50 +10216,137 @@
                 <a:solidFill>
                   <a:schemeClr val="tx1"/>
                 </a:solidFill>
-              </a:rPr>
-              <a:t>Hanya SubscriptionService yang mengubah users.subscription_ends_on.</a:t>
+                <a:latin typeface="Courier New" pitchFamily="34" charset="0"/>
+                <a:ea typeface="Courier New" pitchFamily="34" charset="-122"/>
+                <a:cs typeface="Courier New" pitchFamily="34" charset="-120"/>
+              </a:rPr>
+              <a:t>genre_movie</a:t>
             </a:r>
             <a:endParaRPr lang="en-US" sz="1400" dirty="0"/>
           </a:p>
-        </p:txBody>
-      </p:sp>
-      <p:sp>
-        <p:nvSpPr>
-          <p:cNvPr id="18" name="card"/>
+          <a:p>
+            <a:pPr indent="0" marL="0">
+              <a:buNone/>
+            </a:pPr>
+            <a:r>
+              <a:rPr lang="en-US" sz="1400" dirty="0">
+                <a:solidFill>
+                  <a:schemeClr val="tx1"/>
+                </a:solidFill>
+                <a:latin typeface="Courier New" pitchFamily="34" charset="0"/>
+                <a:ea typeface="Courier New" pitchFamily="34" charset="-122"/>
+                <a:cs typeface="Courier New" pitchFamily="34" charset="-120"/>
+              </a:rPr>
+              <a:t>  (movie_id 12, genre_id 6)</a:t>
+            </a:r>
+            <a:endParaRPr lang="en-US" sz="1400" dirty="0"/>
+          </a:p>
+          <a:p>
+            <a:pPr indent="0" marL="0">
+              <a:buNone/>
+            </a:pPr>
+            <a:r>
+              <a:rPr lang="en-US" sz="1400" dirty="0">
+                <a:solidFill>
+                  <a:schemeClr val="tx1"/>
+                </a:solidFill>
+                <a:latin typeface="Courier New" pitchFamily="34" charset="0"/>
+                <a:ea typeface="Courier New" pitchFamily="34" charset="-122"/>
+                <a:cs typeface="Courier New" pitchFamily="34" charset="-120"/>
+              </a:rPr>
+              <a:t>  (movie_id 12, genre_id 12)</a:t>
+            </a:r>
+            <a:endParaRPr lang="en-US" sz="1400" dirty="0"/>
+          </a:p>
+          <a:p>
+            <a:pPr indent="0" marL="0">
+              <a:buNone/>
+            </a:pPr>
+            <a:r>
+              <a:rPr lang="en-US" sz="1400" dirty="0">
+                <a:solidFill>
+                  <a:schemeClr val="tx1"/>
+                </a:solidFill>
+                <a:latin typeface="Courier New" pitchFamily="34" charset="0"/>
+                <a:ea typeface="Courier New" pitchFamily="34" charset="-122"/>
+                <a:cs typeface="Courier New" pitchFamily="34" charset="-120"/>
+              </a:rPr>
+              <a:t>  (movie_id 12, genre_id 19)</a:t>
+            </a:r>
+            <a:endParaRPr lang="en-US" sz="1400" dirty="0"/>
+          </a:p>
+        </p:txBody>
+      </p:sp>
+      <p:sp>
+        <p:nvSpPr>
+          <p:cNvPr id="12" name="Text 9"/>
+          <p:cNvSpPr txBox="1"/>
+          <p:nvPr/>
+        </p:nvSpPr>
+        <p:spPr>
+          <a:xfrm>
+            <a:off x="6812280" y="4160520"/>
+            <a:ext cx="4480560" cy="822960"/>
+          </a:xfrm>
+          <a:prstGeom prst="rect">
+            <a:avLst/>
+          </a:prstGeom>
+          <a:noFill/>
+          <a:ln/>
+        </p:spPr>
+        <p:txBody>
+          <a:bodyPr wrap="square" lIns="0" tIns="0" rIns="0" bIns="0" rtlCol="0" anchor="t"/>
+          <a:lstStyle/>
+          <a:p>
+            <a:pPr indent="0" marL="0">
+              <a:buNone/>
+            </a:pPr>
+            <a:r>
+              <a:rPr lang="en-US" sz="1400" dirty="0">
+                <a:solidFill>
+                  <a:schemeClr val="accent4"/>
+                </a:solidFill>
+              </a:rPr>
+              <a:t>Foreign key, join biasa, dan laporan genre jadi satu query.</a:t>
+            </a:r>
+            <a:endParaRPr lang="en-US" sz="1400" dirty="0"/>
+          </a:p>
+        </p:txBody>
+      </p:sp>
+      <p:sp>
+        <p:nvSpPr>
+          <p:cNvPr id="13" name="Shape 10"/>
           <p:cNvSpPr/>
           <p:nvPr/>
         </p:nvSpPr>
         <p:spPr>
           <a:xfrm>
-            <a:off x="4297680" y="4343400"/>
-            <a:ext cx="3520440" cy="1783080"/>
-          </a:xfrm>
-          <a:prstGeom prst="roundRect">
-            <a:avLst>
-              <a:gd name="adj" fmla="val 6154"/>
-            </a:avLst>
-          </a:prstGeom>
-          <a:solidFill>
-            <a:schemeClr val="bg2"/>
-          </a:solidFill>
-          <a:ln w="12700">
+            <a:off x="5760720" y="3337560"/>
+            <a:ext cx="685800" cy="914"/>
+          </a:xfrm>
+          <a:prstGeom prst="line">
+            <a:avLst/>
+          </a:prstGeom>
+          <a:noFill/>
+          <a:ln w="19050">
             <a:solidFill>
-              <a:schemeClr val="bg2"/>
+              <a:schemeClr val="accent4"/>
             </a:solidFill>
             <a:prstDash val="solid"/>
+            <a:tailEnd type="triangle"/>
           </a:ln>
         </p:spPr>
       </p:sp>
       <p:sp>
         <p:nvSpPr>
-          <p:cNvPr id="19" name="Text 16"/>
+          <p:cNvPr id="14" name="Text 11"/>
           <p:cNvSpPr txBox="1"/>
           <p:nvPr/>
         </p:nvSpPr>
         <p:spPr>
           <a:xfrm>
-            <a:off x="4572000" y="4526280"/>
-            <a:ext cx="3017520" cy="411480"/>
+            <a:off x="548640" y="5394960"/>
+            <a:ext cx="11064240" cy="548640"/>
           </a:xfrm>
           <a:prstGeom prst="rect">
             <a:avLst/>
@@ -11022,155 +10362,14 @@
               <a:buNone/>
             </a:pPr>
             <a:r>
-              <a:rPr lang="en-US" sz="1700" b="1" dirty="0">
-                <a:solidFill>
-                  <a:schemeClr val="accent1"/>
-                </a:solidFill>
-                <a:latin typeface="+mj-lt" pitchFamily="34" charset="0"/>
-                <a:ea typeface="+mj-lt" pitchFamily="34" charset="-122"/>
-                <a:cs typeface="+mj-lt" pitchFamily="34" charset="-120"/>
-              </a:rPr>
-              <a:t>Satu transaksi</a:t>
-            </a:r>
-            <a:endParaRPr lang="en-US" sz="1700" dirty="0"/>
-          </a:p>
-        </p:txBody>
-      </p:sp>
-      <p:sp>
-        <p:nvSpPr>
-          <p:cNvPr id="20" name="Text 17"/>
-          <p:cNvSpPr txBox="1"/>
-          <p:nvPr/>
-        </p:nvSpPr>
-        <p:spPr>
-          <a:xfrm>
-            <a:off x="4572000" y="4983480"/>
-            <a:ext cx="3017520" cy="1051560"/>
-          </a:xfrm>
-          <a:prstGeom prst="rect">
-            <a:avLst/>
-          </a:prstGeom>
-          <a:noFill/>
-          <a:ln/>
-        </p:spPr>
-        <p:txBody>
-          <a:bodyPr wrap="square" lIns="0" tIns="0" rIns="0" bIns="0" rtlCol="0" anchor="t"/>
-          <a:lstStyle/>
-          <a:p>
-            <a:pPr indent="0" marL="0">
-              <a:buNone/>
-            </a:pPr>
-            <a:r>
-              <a:rPr lang="en-US" sz="1400" dirty="0">
+              <a:rPr lang="en-US" sz="1600" dirty="0">
                 <a:solidFill>
                   <a:schemeClr val="tx1"/>
                 </a:solidFill>
               </a:rPr>
-              <a:t>Pembayaran dan tanggal berakhir tersimpan bersama, atau tidak sama sekali.</a:t>
-            </a:r>
-            <a:endParaRPr lang="en-US" sz="1400" dirty="0"/>
-          </a:p>
-        </p:txBody>
-      </p:sp>
-      <p:sp>
-        <p:nvSpPr>
-          <p:cNvPr id="21" name="card"/>
-          <p:cNvSpPr/>
-          <p:nvPr/>
-        </p:nvSpPr>
-        <p:spPr>
-          <a:xfrm>
-            <a:off x="8046720" y="4343400"/>
-            <a:ext cx="3520440" cy="1783080"/>
-          </a:xfrm>
-          <a:prstGeom prst="roundRect">
-            <a:avLst>
-              <a:gd name="adj" fmla="val 6154"/>
-            </a:avLst>
-          </a:prstGeom>
-          <a:solidFill>
-            <a:schemeClr val="bg2"/>
-          </a:solidFill>
-          <a:ln w="12700">
-            <a:solidFill>
-              <a:schemeClr val="bg2"/>
-            </a:solidFill>
-            <a:prstDash val="solid"/>
-          </a:ln>
-        </p:spPr>
-      </p:sp>
-      <p:sp>
-        <p:nvSpPr>
-          <p:cNvPr id="22" name="Text 19"/>
-          <p:cNvSpPr txBox="1"/>
-          <p:nvPr/>
-        </p:nvSpPr>
-        <p:spPr>
-          <a:xfrm>
-            <a:off x="8321040" y="4526280"/>
-            <a:ext cx="3017520" cy="411480"/>
-          </a:xfrm>
-          <a:prstGeom prst="rect">
-            <a:avLst/>
-          </a:prstGeom>
-          <a:noFill/>
-          <a:ln/>
-        </p:spPr>
-        <p:txBody>
-          <a:bodyPr wrap="square" lIns="0" tIns="0" rIns="0" bIns="0" rtlCol="0" anchor="ctr"/>
-          <a:lstStyle/>
-          <a:p>
-            <a:pPr indent="0" marL="0">
-              <a:buNone/>
-            </a:pPr>
-            <a:r>
-              <a:rPr lang="en-US" sz="1700" b="1" dirty="0">
-                <a:solidFill>
-                  <a:schemeClr val="accent1"/>
-                </a:solidFill>
-                <a:latin typeface="+mj-lt" pitchFamily="34" charset="0"/>
-                <a:ea typeface="+mj-lt" pitchFamily="34" charset="-122"/>
-                <a:cs typeface="+mj-lt" pitchFamily="34" charset="-120"/>
-              </a:rPr>
-              <a:t>Baris dikunci</a:t>
-            </a:r>
-            <a:endParaRPr lang="en-US" sz="1700" dirty="0"/>
-          </a:p>
-        </p:txBody>
-      </p:sp>
-      <p:sp>
-        <p:nvSpPr>
-          <p:cNvPr id="23" name="Text 20"/>
-          <p:cNvSpPr txBox="1"/>
-          <p:nvPr/>
-        </p:nvSpPr>
-        <p:spPr>
-          <a:xfrm>
-            <a:off x="8321040" y="4983480"/>
-            <a:ext cx="3017520" cy="1051560"/>
-          </a:xfrm>
-          <a:prstGeom prst="rect">
-            <a:avLst/>
-          </a:prstGeom>
-          <a:noFill/>
-          <a:ln/>
-        </p:spPr>
-        <p:txBody>
-          <a:bodyPr wrap="square" lIns="0" tIns="0" rIns="0" bIns="0" rtlCol="0" anchor="t"/>
-          <a:lstStyle/>
-          <a:p>
-            <a:pPr indent="0" marL="0">
-              <a:buNone/>
-            </a:pPr>
-            <a:r>
-              <a:rPr lang="en-US" sz="1400" dirty="0">
-                <a:solidFill>
-                  <a:schemeClr val="tx1"/>
-                </a:solidFill>
-              </a:rPr>
-              <a:t>lockForUpdate membuat pembayaran kedua menunggu dan menghitung dari tanggal baru.</a:t>
-            </a:r>
-            <a:endParaRPr lang="en-US" sz="1400" dirty="0"/>
+              <a:t>Migrasi bertahap: buat pivot, isi dari kolom lama, pindahkan pembaca satu per satu, lalu hapus kolom lama.</a:t>
+            </a:r>
+            <a:endParaRPr lang="en-US" sz="1600" dirty="0"/>
           </a:p>
         </p:txBody>
       </p:sp>
@@ -11315,7 +10514,7 @@
                   <a:schemeClr val="tx1"/>
                 </a:solidFill>
               </a:rPr>
-              <a:t>Siapa boleh menonton apa</a:t>
+              <a:t>Perpanjang tanpa membuang hari</a:t>
             </a:r>
             <a:endParaRPr lang="en-US" sz="3200" dirty="0"/>
           </a:p>
@@ -11323,18 +10522,216 @@
       </p:sp>
       <p:sp>
         <p:nvSpPr>
-          <p:cNvPr id="5" name="card"/>
+          <p:cNvPr id="5" name="Text 2"/>
+          <p:cNvSpPr txBox="1"/>
+          <p:nvPr/>
+        </p:nvSpPr>
+        <p:spPr>
+          <a:xfrm>
+            <a:off x="548640" y="1600200"/>
+            <a:ext cx="10972800" cy="365760"/>
+          </a:xfrm>
+          <a:prstGeom prst="rect">
+            <a:avLst/>
+          </a:prstGeom>
+          <a:noFill/>
+          <a:ln/>
+        </p:spPr>
+        <p:txBody>
+          <a:bodyPr wrap="square" lIns="0" tIns="0" rIns="0" bIns="0" rtlCol="0" anchor="ctr"/>
+          <a:lstStyle/>
+          <a:p>
+            <a:pPr indent="0" marL="0">
+              <a:buNone/>
+            </a:pPr>
+            <a:r>
+              <a:rPr lang="en-US" sz="1500" b="1" dirty="0">
+                <a:solidFill>
+                  <a:schemeClr val="tx1"/>
+                </a:solidFill>
+              </a:rPr>
+              <a:t>Masih aktif sampai 20 Mar, membeli 12 bulan pada 10 Mar</a:t>
+            </a:r>
+            <a:endParaRPr lang="en-US" sz="1500" dirty="0"/>
+          </a:p>
+        </p:txBody>
+      </p:sp>
+      <p:sp>
+        <p:nvSpPr>
+          <p:cNvPr id="6" name="Shape 3"/>
           <p:cNvSpPr/>
           <p:nvPr/>
         </p:nvSpPr>
         <p:spPr>
           <a:xfrm>
-            <a:off x="548640" y="1691640"/>
-            <a:ext cx="2514600" cy="1143000"/>
+            <a:off x="548640" y="2057400"/>
+            <a:ext cx="2743200" cy="566928"/>
           </a:xfrm>
           <a:prstGeom prst="roundRect">
             <a:avLst>
-              <a:gd name="adj" fmla="val 9600"/>
+              <a:gd name="adj" fmla="val 16129"/>
+            </a:avLst>
+          </a:prstGeom>
+          <a:solidFill>
+            <a:schemeClr val="accent6"/>
+          </a:solidFill>
+          <a:ln w="12700">
+            <a:solidFill>
+              <a:schemeClr val="accent6"/>
+            </a:solidFill>
+            <a:prstDash val="solid"/>
+          </a:ln>
+        </p:spPr>
+      </p:sp>
+      <p:sp>
+        <p:nvSpPr>
+          <p:cNvPr id="7" name="Text 4"/>
+          <p:cNvSpPr txBox="1"/>
+          <p:nvPr/>
+        </p:nvSpPr>
+        <p:spPr>
+          <a:xfrm>
+            <a:off x="548640" y="2057400"/>
+            <a:ext cx="2743200" cy="566928"/>
+          </a:xfrm>
+          <a:prstGeom prst="rect">
+            <a:avLst/>
+          </a:prstGeom>
+          <a:noFill/>
+          <a:ln/>
+        </p:spPr>
+        <p:txBody>
+          <a:bodyPr wrap="square" lIns="0" tIns="0" rIns="0" bIns="0" rtlCol="0" anchor="ctr"/>
+          <a:lstStyle/>
+          <a:p>
+            <a:pPr algn="ctr" indent="0" marL="0">
+              <a:buNone/>
+            </a:pPr>
+            <a:r>
+              <a:rPr lang="en-US" sz="1400" b="1" dirty="0">
+                <a:solidFill>
+                  <a:schemeClr val="tx1"/>
+                </a:solidFill>
+              </a:rPr>
+              <a:t>lama: s/d 20 Mar</a:t>
+            </a:r>
+            <a:endParaRPr lang="en-US" sz="1400" dirty="0"/>
+          </a:p>
+        </p:txBody>
+      </p:sp>
+      <p:sp>
+        <p:nvSpPr>
+          <p:cNvPr id="8" name="Shape 5"/>
+          <p:cNvSpPr/>
+          <p:nvPr/>
+        </p:nvSpPr>
+        <p:spPr>
+          <a:xfrm>
+            <a:off x="3337560" y="2057400"/>
+            <a:ext cx="8275320" cy="566928"/>
+          </a:xfrm>
+          <a:prstGeom prst="roundRect">
+            <a:avLst>
+              <a:gd name="adj" fmla="val 16129"/>
+            </a:avLst>
+          </a:prstGeom>
+          <a:solidFill>
+            <a:schemeClr val="accent1"/>
+          </a:solidFill>
+          <a:ln w="12700">
+            <a:solidFill>
+              <a:schemeClr val="accent1"/>
+            </a:solidFill>
+            <a:prstDash val="solid"/>
+          </a:ln>
+        </p:spPr>
+      </p:sp>
+      <p:sp>
+        <p:nvSpPr>
+          <p:cNvPr id="9" name="Text 6"/>
+          <p:cNvSpPr txBox="1"/>
+          <p:nvPr/>
+        </p:nvSpPr>
+        <p:spPr>
+          <a:xfrm>
+            <a:off x="3337560" y="2057400"/>
+            <a:ext cx="8275320" cy="566928"/>
+          </a:xfrm>
+          <a:prstGeom prst="rect">
+            <a:avLst/>
+          </a:prstGeom>
+          <a:noFill/>
+          <a:ln/>
+        </p:spPr>
+        <p:txBody>
+          <a:bodyPr wrap="square" lIns="0" tIns="0" rIns="0" bIns="0" rtlCol="0" anchor="ctr"/>
+          <a:lstStyle/>
+          <a:p>
+            <a:pPr algn="ctr" indent="0" marL="0">
+              <a:buNone/>
+            </a:pPr>
+            <a:r>
+              <a:rPr lang="en-US" sz="1400" b="1" dirty="0">
+                <a:solidFill>
+                  <a:schemeClr val="bg1"/>
+                </a:solidFill>
+              </a:rPr>
+              <a:t>baru: 21 Mar s/d 20 Mar tahun depan</a:t>
+            </a:r>
+            <a:endParaRPr lang="en-US" sz="1400" dirty="0"/>
+          </a:p>
+        </p:txBody>
+      </p:sp>
+      <p:sp>
+        <p:nvSpPr>
+          <p:cNvPr id="10" name="Text 7"/>
+          <p:cNvSpPr txBox="1"/>
+          <p:nvPr/>
+        </p:nvSpPr>
+        <p:spPr>
+          <a:xfrm>
+            <a:off x="548640" y="2971800"/>
+            <a:ext cx="10972800" cy="365760"/>
+          </a:xfrm>
+          <a:prstGeom prst="rect">
+            <a:avLst/>
+          </a:prstGeom>
+          <a:noFill/>
+          <a:ln/>
+        </p:spPr>
+        <p:txBody>
+          <a:bodyPr wrap="square" lIns="0" tIns="0" rIns="0" bIns="0" rtlCol="0" anchor="ctr"/>
+          <a:lstStyle/>
+          <a:p>
+            <a:pPr indent="0" marL="0">
+              <a:buNone/>
+            </a:pPr>
+            <a:r>
+              <a:rPr lang="en-US" sz="1500" b="1" dirty="0">
+                <a:solidFill>
+                  <a:schemeClr val="tx1"/>
+                </a:solidFill>
+              </a:rPr>
+              <a:t>Sudah habis 31 Jan, membeli 1 bulan pada 10 Mar</a:t>
+            </a:r>
+            <a:endParaRPr lang="en-US" sz="1500" dirty="0"/>
+          </a:p>
+        </p:txBody>
+      </p:sp>
+      <p:sp>
+        <p:nvSpPr>
+          <p:cNvPr id="11" name="Shape 8"/>
+          <p:cNvSpPr/>
+          <p:nvPr/>
+        </p:nvSpPr>
+        <p:spPr>
+          <a:xfrm>
+            <a:off x="548640" y="3429000"/>
+            <a:ext cx="2743200" cy="566928"/>
+          </a:xfrm>
+          <a:prstGeom prst="roundRect">
+            <a:avLst>
+              <a:gd name="adj" fmla="val 16129"/>
             </a:avLst>
           </a:prstGeom>
           <a:solidFill>
@@ -11350,14 +10747,14 @@
       </p:sp>
       <p:sp>
         <p:nvSpPr>
-          <p:cNvPr id="6" name="Text 3"/>
+          <p:cNvPr id="12" name="Text 9"/>
           <p:cNvSpPr txBox="1"/>
           <p:nvPr/>
         </p:nvSpPr>
         <p:spPr>
           <a:xfrm>
-            <a:off x="731520" y="1691640"/>
-            <a:ext cx="2148840" cy="1143000"/>
+            <a:off x="548640" y="3429000"/>
+            <a:ext cx="2743200" cy="566928"/>
           </a:xfrm>
           <a:prstGeom prst="rect">
             <a:avLst/>
@@ -11373,59 +10770,39 @@
               <a:buNone/>
             </a:pPr>
             <a:r>
-              <a:rPr lang="en-US" sz="1600" b="1" dirty="0">
-                <a:solidFill>
-                  <a:schemeClr val="tx1"/>
-                </a:solidFill>
-              </a:rPr>
-              <a:t>Akun dan judul aktif?</a:t>
-            </a:r>
-            <a:endParaRPr lang="en-US" sz="1600" dirty="0"/>
-          </a:p>
-        </p:txBody>
-      </p:sp>
-      <p:sp>
-        <p:nvSpPr>
-          <p:cNvPr id="7" name="Shape 4"/>
+              <a:rPr lang="en-US" sz="1400" b="1" dirty="0">
+                <a:solidFill>
+                  <a:schemeClr val="accent4"/>
+                </a:solidFill>
+              </a:rPr>
+              <a:t>tidak aktif</a:t>
+            </a:r>
+            <a:endParaRPr lang="en-US" sz="1400" dirty="0"/>
+          </a:p>
+        </p:txBody>
+      </p:sp>
+      <p:sp>
+        <p:nvSpPr>
+          <p:cNvPr id="13" name="Shape 10"/>
           <p:cNvSpPr/>
           <p:nvPr/>
         </p:nvSpPr>
         <p:spPr>
           <a:xfrm>
-            <a:off x="3063240" y="2258568"/>
-            <a:ext cx="320040" cy="914"/>
-          </a:xfrm>
-          <a:prstGeom prst="line">
-            <a:avLst/>
-          </a:prstGeom>
-          <a:noFill/>
-          <a:ln w="19050">
+            <a:off x="3337560" y="3429000"/>
+            <a:ext cx="2743200" cy="566928"/>
+          </a:xfrm>
+          <a:prstGeom prst="roundRect">
+            <a:avLst>
+              <a:gd name="adj" fmla="val 16129"/>
+            </a:avLst>
+          </a:prstGeom>
+          <a:solidFill>
+            <a:schemeClr val="accent1"/>
+          </a:solidFill>
+          <a:ln w="12700">
             <a:solidFill>
-              <a:schemeClr val="accent4"/>
-            </a:solidFill>
-            <a:prstDash val="solid"/>
-            <a:tailEnd type="triangle"/>
-          </a:ln>
-        </p:spPr>
-      </p:sp>
-      <p:sp>
-        <p:nvSpPr>
-          <p:cNvPr id="8" name="Shape 5"/>
-          <p:cNvSpPr/>
-          <p:nvPr/>
-        </p:nvSpPr>
-        <p:spPr>
-          <a:xfrm>
-            <a:off x="1805940" y="2834640"/>
-            <a:ext cx="914" cy="411480"/>
-          </a:xfrm>
-          <a:prstGeom prst="line">
-            <a:avLst/>
-          </a:prstGeom>
-          <a:noFill/>
-          <a:ln w="15875">
-            <a:solidFill>
-              <a:schemeClr val="accent5"/>
+              <a:schemeClr val="accent1"/>
             </a:solidFill>
             <a:prstDash val="solid"/>
           </a:ln>
@@ -11433,23 +10810,23 @@
       </p:sp>
       <p:sp>
         <p:nvSpPr>
-          <p:cNvPr id="9" name="Text 6"/>
+          <p:cNvPr id="14" name="Text 11"/>
           <p:cNvSpPr txBox="1"/>
           <p:nvPr/>
         </p:nvSpPr>
         <p:spPr>
           <a:xfrm>
-            <a:off x="548640" y="3291840"/>
-            <a:ext cx="2514600" cy="548640"/>
-          </a:xfrm>
-          <a:prstGeom prst="rect">
-            <a:avLst/>
-          </a:prstGeom>
-          <a:noFill/>
-          <a:ln/>
-        </p:spPr>
-        <p:txBody>
-          <a:bodyPr wrap="square" lIns="0" tIns="0" rIns="0" bIns="0" rtlCol="0" anchor="t"/>
+            <a:off x="3337560" y="3429000"/>
+            <a:ext cx="2743200" cy="566928"/>
+          </a:xfrm>
+          <a:prstGeom prst="rect">
+            <a:avLst/>
+          </a:prstGeom>
+          <a:noFill/>
+          <a:ln/>
+        </p:spPr>
+        <p:txBody>
+          <a:bodyPr wrap="square" lIns="0" tIns="0" rIns="0" bIns="0" rtlCol="0" anchor="ctr"/>
           <a:lstStyle/>
           <a:p>
             <a:pPr algn="ctr" indent="0" marL="0">
@@ -11458,10 +10835,10 @@
             <a:r>
               <a:rPr lang="en-US" sz="1400" b="1" dirty="0">
                 <a:solidFill>
-                  <a:schemeClr val="accent3"/>
-                </a:solidFill>
-              </a:rPr>
-              <a:t>tidak: ditolak</a:t>
+                  <a:schemeClr val="bg1"/>
+                </a:solidFill>
+              </a:rPr>
+              <a:t>10 Mar s/d 9 Apr</a:t>
             </a:r>
             <a:endParaRPr lang="en-US" sz="1400" dirty="0"/>
           </a:p>
@@ -11469,18 +10846,18 @@
       </p:sp>
       <p:sp>
         <p:nvSpPr>
-          <p:cNvPr id="10" name="card"/>
+          <p:cNvPr id="15" name="card"/>
           <p:cNvSpPr/>
           <p:nvPr/>
         </p:nvSpPr>
         <p:spPr>
           <a:xfrm>
-            <a:off x="3383280" y="1691640"/>
-            <a:ext cx="2514600" cy="1143000"/>
+            <a:off x="548640" y="4343400"/>
+            <a:ext cx="3520440" cy="1783080"/>
           </a:xfrm>
           <a:prstGeom prst="roundRect">
             <a:avLst>
-              <a:gd name="adj" fmla="val 9600"/>
+              <a:gd name="adj" fmla="val 6154"/>
             </a:avLst>
           </a:prstGeom>
           <a:solidFill>
@@ -11496,14 +10873,14 @@
       </p:sp>
       <p:sp>
         <p:nvSpPr>
-          <p:cNvPr id="11" name="Text 8"/>
+          <p:cNvPr id="16" name="Text 13"/>
           <p:cNvSpPr txBox="1"/>
           <p:nvPr/>
         </p:nvSpPr>
         <p:spPr>
           <a:xfrm>
-            <a:off x="3566160" y="1691640"/>
-            <a:ext cx="2148840" cy="1143000"/>
+            <a:off x="822960" y="4526280"/>
+            <a:ext cx="3017520" cy="411480"/>
           </a:xfrm>
           <a:prstGeom prst="rect">
             <a:avLst/>
@@ -11515,118 +10892,74 @@
           <a:bodyPr wrap="square" lIns="0" tIns="0" rIns="0" bIns="0" rtlCol="0" anchor="ctr"/>
           <a:lstStyle/>
           <a:p>
-            <a:pPr algn="ctr" indent="0" marL="0">
-              <a:buNone/>
-            </a:pPr>
-            <a:r>
-              <a:rPr lang="en-US" sz="1600" b="1" dirty="0">
+            <a:pPr indent="0" marL="0">
+              <a:buNone/>
+            </a:pPr>
+            <a:r>
+              <a:rPr lang="en-US" sz="1700" b="1" dirty="0">
+                <a:solidFill>
+                  <a:schemeClr val="accent1"/>
+                </a:solidFill>
+                <a:latin typeface="+mj-lt" pitchFamily="34" charset="0"/>
+                <a:ea typeface="+mj-lt" pitchFamily="34" charset="-122"/>
+                <a:cs typeface="+mj-lt" pitchFamily="34" charset="-120"/>
+              </a:rPr>
+              <a:t>Satu tempat</a:t>
+            </a:r>
+            <a:endParaRPr lang="en-US" sz="1700" dirty="0"/>
+          </a:p>
+        </p:txBody>
+      </p:sp>
+      <p:sp>
+        <p:nvSpPr>
+          <p:cNvPr id="17" name="Text 14"/>
+          <p:cNvSpPr txBox="1"/>
+          <p:nvPr/>
+        </p:nvSpPr>
+        <p:spPr>
+          <a:xfrm>
+            <a:off x="822960" y="4983480"/>
+            <a:ext cx="3017520" cy="1051560"/>
+          </a:xfrm>
+          <a:prstGeom prst="rect">
+            <a:avLst/>
+          </a:prstGeom>
+          <a:noFill/>
+          <a:ln/>
+        </p:spPr>
+        <p:txBody>
+          <a:bodyPr wrap="square" lIns="0" tIns="0" rIns="0" bIns="0" rtlCol="0" anchor="t"/>
+          <a:lstStyle/>
+          <a:p>
+            <a:pPr indent="0" marL="0">
+              <a:buNone/>
+            </a:pPr>
+            <a:r>
+              <a:rPr lang="en-US" sz="1400" dirty="0">
                 <a:solidFill>
                   <a:schemeClr val="tx1"/>
                 </a:solidFill>
               </a:rPr>
-              <a:t>Premium?</a:t>
-            </a:r>
-            <a:endParaRPr lang="en-US" sz="1600" dirty="0"/>
-          </a:p>
-        </p:txBody>
-      </p:sp>
-      <p:sp>
-        <p:nvSpPr>
-          <p:cNvPr id="12" name="Shape 9"/>
+              <a:t>Hanya SubscriptionService yang mengubah users.subscription_ends_on.</a:t>
+            </a:r>
+            <a:endParaRPr lang="en-US" sz="1400" dirty="0"/>
+          </a:p>
+        </p:txBody>
+      </p:sp>
+      <p:sp>
+        <p:nvSpPr>
+          <p:cNvPr id="18" name="card"/>
           <p:cNvSpPr/>
           <p:nvPr/>
         </p:nvSpPr>
         <p:spPr>
           <a:xfrm>
-            <a:off x="5897880" y="2258568"/>
-            <a:ext cx="320040" cy="914"/>
-          </a:xfrm>
-          <a:prstGeom prst="line">
-            <a:avLst/>
-          </a:prstGeom>
-          <a:noFill/>
-          <a:ln w="19050">
-            <a:solidFill>
-              <a:schemeClr val="accent4"/>
-            </a:solidFill>
-            <a:prstDash val="solid"/>
-            <a:tailEnd type="triangle"/>
-          </a:ln>
-        </p:spPr>
-      </p:sp>
-      <p:sp>
-        <p:nvSpPr>
-          <p:cNvPr id="13" name="Shape 10"/>
-          <p:cNvSpPr/>
-          <p:nvPr/>
-        </p:nvSpPr>
-        <p:spPr>
-          <a:xfrm>
-            <a:off x="4640580" y="2834640"/>
-            <a:ext cx="914" cy="411480"/>
-          </a:xfrm>
-          <a:prstGeom prst="line">
-            <a:avLst/>
-          </a:prstGeom>
-          <a:noFill/>
-          <a:ln w="15875">
-            <a:solidFill>
-              <a:schemeClr val="accent5"/>
-            </a:solidFill>
-            <a:prstDash val="solid"/>
-          </a:ln>
-        </p:spPr>
-      </p:sp>
-      <p:sp>
-        <p:nvSpPr>
-          <p:cNvPr id="14" name="Text 11"/>
-          <p:cNvSpPr txBox="1"/>
-          <p:nvPr/>
-        </p:nvSpPr>
-        <p:spPr>
-          <a:xfrm>
-            <a:off x="3383280" y="3291840"/>
-            <a:ext cx="2514600" cy="548640"/>
-          </a:xfrm>
-          <a:prstGeom prst="rect">
-            <a:avLst/>
-          </a:prstGeom>
-          <a:noFill/>
-          <a:ln/>
-        </p:spPr>
-        <p:txBody>
-          <a:bodyPr wrap="square" lIns="0" tIns="0" rIns="0" bIns="0" rtlCol="0" anchor="t"/>
-          <a:lstStyle/>
-          <a:p>
-            <a:pPr algn="ctr" indent="0" marL="0">
-              <a:buNone/>
-            </a:pPr>
-            <a:r>
-              <a:rPr lang="en-US" sz="1400" b="1" dirty="0">
-                <a:solidFill>
-                  <a:schemeClr val="accent1"/>
-                </a:solidFill>
-              </a:rPr>
-              <a:t>tidak: gratis</a:t>
-            </a:r>
-            <a:endParaRPr lang="en-US" sz="1400" dirty="0"/>
-          </a:p>
-        </p:txBody>
-      </p:sp>
-      <p:sp>
-        <p:nvSpPr>
-          <p:cNvPr id="15" name="card"/>
-          <p:cNvSpPr/>
-          <p:nvPr/>
-        </p:nvSpPr>
-        <p:spPr>
-          <a:xfrm>
-            <a:off x="6217920" y="1691640"/>
-            <a:ext cx="2514600" cy="1143000"/>
+            <a:off x="4297680" y="4343400"/>
+            <a:ext cx="3520440" cy="1783080"/>
           </a:xfrm>
           <a:prstGeom prst="roundRect">
             <a:avLst>
-              <a:gd name="adj" fmla="val 9600"/>
+              <a:gd name="adj" fmla="val 6154"/>
             </a:avLst>
           </a:prstGeom>
           <a:solidFill>
@@ -11642,97 +10975,53 @@
       </p:sp>
       <p:sp>
         <p:nvSpPr>
-          <p:cNvPr id="16" name="Text 13"/>
-          <p:cNvSpPr txBox="1"/>
-          <p:nvPr/>
-        </p:nvSpPr>
-        <p:spPr>
-          <a:xfrm>
-            <a:off x="6400800" y="1691640"/>
-            <a:ext cx="2148840" cy="1143000"/>
-          </a:xfrm>
-          <a:prstGeom prst="rect">
-            <a:avLst/>
-          </a:prstGeom>
-          <a:noFill/>
-          <a:ln/>
-        </p:spPr>
-        <p:txBody>
-          <a:bodyPr wrap="square" lIns="0" tIns="0" rIns="0" bIns="0" rtlCol="0" anchor="ctr"/>
-          <a:lstStyle/>
-          <a:p>
-            <a:pPr algn="ctr" indent="0" marL="0">
-              <a:buNone/>
-            </a:pPr>
-            <a:r>
-              <a:rPr lang="en-US" sz="1600" b="1" dirty="0">
-                <a:solidFill>
-                  <a:schemeClr val="tx1"/>
-                </a:solidFill>
-              </a:rPr>
-              <a:t>Langganan aktif?</a:t>
-            </a:r>
-            <a:endParaRPr lang="en-US" sz="1600" dirty="0"/>
-          </a:p>
-        </p:txBody>
-      </p:sp>
-      <p:sp>
-        <p:nvSpPr>
-          <p:cNvPr id="17" name="Shape 14"/>
-          <p:cNvSpPr/>
-          <p:nvPr/>
-        </p:nvSpPr>
-        <p:spPr>
-          <a:xfrm>
-            <a:off x="8732520" y="2258568"/>
-            <a:ext cx="320040" cy="914"/>
-          </a:xfrm>
-          <a:prstGeom prst="line">
-            <a:avLst/>
-          </a:prstGeom>
-          <a:noFill/>
-          <a:ln w="19050">
-            <a:solidFill>
-              <a:schemeClr val="accent4"/>
-            </a:solidFill>
-            <a:prstDash val="solid"/>
-            <a:tailEnd type="triangle"/>
-          </a:ln>
-        </p:spPr>
-      </p:sp>
-      <p:sp>
-        <p:nvSpPr>
-          <p:cNvPr id="18" name="Shape 15"/>
-          <p:cNvSpPr/>
-          <p:nvPr/>
-        </p:nvSpPr>
-        <p:spPr>
-          <a:xfrm>
-            <a:off x="7475220" y="2834640"/>
-            <a:ext cx="914" cy="411480"/>
-          </a:xfrm>
-          <a:prstGeom prst="line">
-            <a:avLst/>
-          </a:prstGeom>
-          <a:noFill/>
-          <a:ln w="15875">
-            <a:solidFill>
-              <a:schemeClr val="accent5"/>
-            </a:solidFill>
-            <a:prstDash val="solid"/>
-          </a:ln>
-        </p:spPr>
-      </p:sp>
-      <p:sp>
-        <p:nvSpPr>
           <p:cNvPr id="19" name="Text 16"/>
           <p:cNvSpPr txBox="1"/>
           <p:nvPr/>
         </p:nvSpPr>
         <p:spPr>
           <a:xfrm>
-            <a:off x="6217920" y="3291840"/>
-            <a:ext cx="2514600" cy="548640"/>
+            <a:off x="4572000" y="4526280"/>
+            <a:ext cx="3017520" cy="411480"/>
+          </a:xfrm>
+          <a:prstGeom prst="rect">
+            <a:avLst/>
+          </a:prstGeom>
+          <a:noFill/>
+          <a:ln/>
+        </p:spPr>
+        <p:txBody>
+          <a:bodyPr wrap="square" lIns="0" tIns="0" rIns="0" bIns="0" rtlCol="0" anchor="ctr"/>
+          <a:lstStyle/>
+          <a:p>
+            <a:pPr indent="0" marL="0">
+              <a:buNone/>
+            </a:pPr>
+            <a:r>
+              <a:rPr lang="en-US" sz="1700" b="1" dirty="0">
+                <a:solidFill>
+                  <a:schemeClr val="accent1"/>
+                </a:solidFill>
+                <a:latin typeface="+mj-lt" pitchFamily="34" charset="0"/>
+                <a:ea typeface="+mj-lt" pitchFamily="34" charset="-122"/>
+                <a:cs typeface="+mj-lt" pitchFamily="34" charset="-120"/>
+              </a:rPr>
+              <a:t>Satu transaksi</a:t>
+            </a:r>
+            <a:endParaRPr lang="en-US" sz="1700" dirty="0"/>
+          </a:p>
+        </p:txBody>
+      </p:sp>
+      <p:sp>
+        <p:nvSpPr>
+          <p:cNvPr id="20" name="Text 17"/>
+          <p:cNvSpPr txBox="1"/>
+          <p:nvPr/>
+        </p:nvSpPr>
+        <p:spPr>
+          <a:xfrm>
+            <a:off x="4572000" y="4983480"/>
+            <a:ext cx="3017520" cy="1051560"/>
           </a:xfrm>
           <a:prstGeom prst="rect">
             <a:avLst/>
@@ -11744,16 +11033,16 @@
           <a:bodyPr wrap="square" lIns="0" tIns="0" rIns="0" bIns="0" rtlCol="0" anchor="t"/>
           <a:lstStyle/>
           <a:p>
-            <a:pPr algn="ctr" indent="0" marL="0">
-              <a:buNone/>
-            </a:pPr>
-            <a:r>
-              <a:rPr lang="en-US" sz="1400" b="1" dirty="0">
-                <a:solidFill>
-                  <a:schemeClr val="accent1"/>
-                </a:solidFill>
-              </a:rPr>
-              <a:t>ya: boleh</a:t>
+            <a:pPr indent="0" marL="0">
+              <a:buNone/>
+            </a:pPr>
+            <a:r>
+              <a:rPr lang="en-US" sz="1400" dirty="0">
+                <a:solidFill>
+                  <a:schemeClr val="tx1"/>
+                </a:solidFill>
+              </a:rPr>
+              <a:t>Pembayaran dan tanggal berakhir tersimpan bersama, atau tidak sama sekali.</a:t>
             </a:r>
             <a:endParaRPr lang="en-US" sz="1400" dirty="0"/>
           </a:p>
@@ -11761,18 +11050,18 @@
       </p:sp>
       <p:sp>
         <p:nvSpPr>
-          <p:cNvPr id="20" name="card"/>
+          <p:cNvPr id="21" name="card"/>
           <p:cNvSpPr/>
           <p:nvPr/>
         </p:nvSpPr>
         <p:spPr>
           <a:xfrm>
-            <a:off x="9052560" y="1691640"/>
-            <a:ext cx="2514600" cy="1143000"/>
+            <a:off x="8046720" y="4343400"/>
+            <a:ext cx="3520440" cy="1783080"/>
           </a:xfrm>
           <a:prstGeom prst="roundRect">
             <a:avLst>
-              <a:gd name="adj" fmla="val 9600"/>
+              <a:gd name="adj" fmla="val 6154"/>
             </a:avLst>
           </a:prstGeom>
           <a:solidFill>
@@ -11788,14 +11077,14 @@
       </p:sp>
       <p:sp>
         <p:nvSpPr>
-          <p:cNvPr id="21" name="Text 18"/>
+          <p:cNvPr id="22" name="Text 19"/>
           <p:cNvSpPr txBox="1"/>
           <p:nvPr/>
         </p:nvSpPr>
         <p:spPr>
           <a:xfrm>
-            <a:off x="9235440" y="1691640"/>
-            <a:ext cx="2148840" cy="1143000"/>
+            <a:off x="8321040" y="4526280"/>
+            <a:ext cx="3017520" cy="411480"/>
           </a:xfrm>
           <a:prstGeom prst="rect">
             <a:avLst/>
@@ -11807,43 +11096,23 @@
           <a:bodyPr wrap="square" lIns="0" tIns="0" rIns="0" bIns="0" rtlCol="0" anchor="ctr"/>
           <a:lstStyle/>
           <a:p>
-            <a:pPr algn="ctr" indent="0" marL="0">
-              <a:buNone/>
-            </a:pPr>
-            <a:r>
-              <a:rPr lang="en-US" sz="1600" b="1" dirty="0">
-                <a:solidFill>
-                  <a:schemeClr val="tx1"/>
-                </a:solidFill>
-              </a:rPr>
-              <a:t>Film ini disewa?</a:t>
-            </a:r>
-            <a:endParaRPr lang="en-US" sz="1600" dirty="0"/>
-          </a:p>
-        </p:txBody>
-      </p:sp>
-      <p:sp>
-        <p:nvSpPr>
-          <p:cNvPr id="22" name="Shape 19"/>
-          <p:cNvSpPr/>
-          <p:nvPr/>
-        </p:nvSpPr>
-        <p:spPr>
-          <a:xfrm>
-            <a:off x="10309860" y="2834640"/>
-            <a:ext cx="914" cy="411480"/>
-          </a:xfrm>
-          <a:prstGeom prst="line">
-            <a:avLst/>
-          </a:prstGeom>
-          <a:noFill/>
-          <a:ln w="15875">
-            <a:solidFill>
-              <a:schemeClr val="accent5"/>
-            </a:solidFill>
-            <a:prstDash val="solid"/>
-          </a:ln>
-        </p:spPr>
+            <a:pPr indent="0" marL="0">
+              <a:buNone/>
+            </a:pPr>
+            <a:r>
+              <a:rPr lang="en-US" sz="1700" b="1" dirty="0">
+                <a:solidFill>
+                  <a:schemeClr val="accent1"/>
+                </a:solidFill>
+                <a:latin typeface="+mj-lt" pitchFamily="34" charset="0"/>
+                <a:ea typeface="+mj-lt" pitchFamily="34" charset="-122"/>
+                <a:cs typeface="+mj-lt" pitchFamily="34" charset="-120"/>
+              </a:rPr>
+              <a:t>Baris dikunci</a:t>
+            </a:r>
+            <a:endParaRPr lang="en-US" sz="1700" dirty="0"/>
+          </a:p>
+        </p:txBody>
       </p:sp>
       <p:sp>
         <p:nvSpPr>
@@ -11853,8 +11122,8 @@
         </p:nvSpPr>
         <p:spPr>
           <a:xfrm>
-            <a:off x="9052560" y="3291840"/>
-            <a:ext cx="2514600" cy="548640"/>
+            <a:off x="8321040" y="4983480"/>
+            <a:ext cx="3017520" cy="1051560"/>
           </a:xfrm>
           <a:prstGeom prst="rect">
             <a:avLst/>
@@ -11866,117 +11135,18 @@
           <a:bodyPr wrap="square" lIns="0" tIns="0" rIns="0" bIns="0" rtlCol="0" anchor="t"/>
           <a:lstStyle/>
           <a:p>
-            <a:pPr algn="ctr" indent="0" marL="0">
-              <a:buNone/>
-            </a:pPr>
-            <a:r>
-              <a:rPr lang="en-US" sz="1400" b="1" dirty="0">
-                <a:solidFill>
-                  <a:schemeClr val="accent1"/>
-                </a:solidFill>
-              </a:rPr>
-              <a:t>ya: boleh, sampai sewa habis</a:t>
+            <a:pPr indent="0" marL="0">
+              <a:buNone/>
+            </a:pPr>
+            <a:r>
+              <a:rPr lang="en-US" sz="1400" dirty="0">
+                <a:solidFill>
+                  <a:schemeClr val="tx1"/>
+                </a:solidFill>
+              </a:rPr>
+              <a:t>lockForUpdate membuat pembayaran kedua menunggu dan menghitung dari tanggal baru.</a:t>
             </a:r>
             <a:endParaRPr lang="en-US" sz="1400" dirty="0"/>
-          </a:p>
-        </p:txBody>
-      </p:sp>
-      <p:sp>
-        <p:nvSpPr>
-          <p:cNvPr id="24" name="card"/>
-          <p:cNvSpPr/>
-          <p:nvPr/>
-        </p:nvSpPr>
-        <p:spPr>
-          <a:xfrm>
-            <a:off x="548640" y="4160520"/>
-            <a:ext cx="11064240" cy="731520"/>
-          </a:xfrm>
-          <a:prstGeom prst="roundRect">
-            <a:avLst>
-              <a:gd name="adj" fmla="val 15000"/>
-            </a:avLst>
-          </a:prstGeom>
-          <a:solidFill>
-            <a:schemeClr val="accent3"/>
-          </a:solidFill>
-          <a:ln w="12700">
-            <a:solidFill>
-              <a:schemeClr val="accent3"/>
-            </a:solidFill>
-            <a:prstDash val="solid"/>
-          </a:ln>
-        </p:spPr>
-      </p:sp>
-      <p:sp>
-        <p:nvSpPr>
-          <p:cNvPr id="25" name="Text 22"/>
-          <p:cNvSpPr txBox="1"/>
-          <p:nvPr/>
-        </p:nvSpPr>
-        <p:spPr>
-          <a:xfrm>
-            <a:off x="548640" y="4160520"/>
-            <a:ext cx="11064240" cy="731520"/>
-          </a:xfrm>
-          <a:prstGeom prst="rect">
-            <a:avLst/>
-          </a:prstGeom>
-          <a:noFill/>
-          <a:ln/>
-        </p:spPr>
-        <p:txBody>
-          <a:bodyPr wrap="square" lIns="0" tIns="0" rIns="0" bIns="0" rtlCol="0" anchor="ctr"/>
-          <a:lstStyle/>
-          <a:p>
-            <a:pPr algn="ctr" indent="0" marL="0">
-              <a:buNone/>
-            </a:pPr>
-            <a:r>
-              <a:rPr lang="en-US" sz="1600" b="1" dirty="0">
-                <a:solidFill>
-                  <a:schemeClr val="bg1"/>
-                </a:solidFill>
-              </a:rPr>
-              <a:t>Ditolak: perlu langganan, atau sewa jika film punya harga sewa</a:t>
-            </a:r>
-            <a:endParaRPr lang="en-US" sz="1600" dirty="0"/>
-          </a:p>
-        </p:txBody>
-      </p:sp>
-      <p:sp>
-        <p:nvSpPr>
-          <p:cNvPr id="26" name="Text 23"/>
-          <p:cNvSpPr txBox="1"/>
-          <p:nvPr/>
-        </p:nvSpPr>
-        <p:spPr>
-          <a:xfrm>
-            <a:off x="548640" y="5166360"/>
-            <a:ext cx="11064240" cy="822960"/>
-          </a:xfrm>
-          <a:prstGeom prst="rect">
-            <a:avLst/>
-          </a:prstGeom>
-          <a:noFill/>
-          <a:ln/>
-        </p:spPr>
-        <p:txBody>
-          <a:bodyPr wrap="square" lIns="0" tIns="0" rIns="0" bIns="0" rtlCol="0" anchor="t"/>
-          <a:lstStyle/>
-          <a:p>
-            <a:pPr indent="0" marL="0">
-              <a:buNone/>
-            </a:pPr>
-            <a:r>
-              <a:rPr lang="en-US" sz="1500" dirty="0">
-                <a:solidFill>
-                  <a:schemeClr val="tx1"/>
-                </a:solidFill>
-              </a:rPr>
-              <a:t>Episode premium sendiri atau karena serialnya. Satu AccessService dipakai di semua tempat, dan dashboard menampilkannya per pengguna supaya support bisa menjawab keluhan.</a:t>
-            </a:r>
-            <a:endParaRPr lang="en-US" sz="1500" dirty="0"/>
           </a:p>
         </p:txBody>
       </p:sp>

--- a/docs/Goflix-presentasi.pptx
+++ b/docs/Goflix-presentasi.pptx
@@ -123,12 +123,12 @@
   <p:extLst>
     <p:ext uri="{521415D9-36F7-43E2-AB2F-B90AF26B5E84}">
       <p14:sectionLst xmlns:p14="http://schemas.microsoft.com/office/powerpoint/2010/main">
-        <p14:section name="Pembuka" id="{e23f335f-0ca7-945a-6294-c218d6148139}">
+        <p14:section name="Pembuka" id="{1bfaa92b-65ab-608d-99c9-44e93316f31f}">
           <p14:sldIdLst>
             <p14:sldId id="256"/>
           </p14:sldIdLst>
         </p14:section>
-        <p14:section name="Produk" id="{64311dd8-5d45-14bb-c9c5-fac4ca8beeca}">
+        <p14:section name="Produk" id="{79060a01-8f69-a020-f10f-adc82eb3b214}">
           <p14:sldIdLst>
             <p14:sldId id="257"/>
             <p14:sldId id="258"/>
@@ -136,7 +136,7 @@
             <p14:sldId id="260"/>
           </p14:sldIdLst>
         </p14:section>
-        <p14:section name="Desain sistem" id="{edecd7bd-13f1-c9d2-2328-18f7d37f2350}">
+        <p14:section name="Desain sistem" id="{0db0d567-e009-37e7-8cda-cb55bdc81153}">
           <p14:sldIdLst>
             <p14:sldId id="261"/>
             <p14:sldId id="262"/>
@@ -145,21 +145,21 @@
             <p14:sldId id="265"/>
           </p14:sldIdLst>
         </p14:section>
-        <p14:section name="Aturan bisnis" id="{7a988e9c-5a0f-11d3-b6d9-ef076f6fc885}">
+        <p14:section name="Aturan bisnis" id="{c29f938d-3a42-0c32-c83b-a5f7bcd3bb0f}">
           <p14:sldIdLst>
             <p14:sldId id="266"/>
             <p14:sldId id="267"/>
             <p14:sldId id="268"/>
           </p14:sldIdLst>
         </p14:section>
-        <p14:section name="Kode" id="{53ce958a-7675-1071-5bb0-c5a750007f92}">
+        <p14:section name="Kode" id="{ee79b8a7-558d-fca2-3caa-916c79e9cb82}">
           <p14:sldIdLst>
             <p14:sldId id="269"/>
             <p14:sldId id="270"/>
             <p14:sldId id="271"/>
           </p14:sldIdLst>
         </p14:section>
-        <p14:section name="Penutup" id="{9a838467-ce7b-3e86-994e-61f934a398b1}">
+        <p14:section name="Penutup" id="{18b51f55-a4bc-748e-0c5a-ee15e1ca0ff5}">
           <p14:sldIdLst>
             <p14:sldId id="272"/>
           </p14:sldIdLst>
